--- a/manuscript_figures.pptx
+++ b/manuscript_figures.pptx
@@ -6,17 +6,20 @@
   </p:sldMasterIdLst>
   <p:sldIdLst>
     <p:sldId id="256" r:id="rId2"/>
-    <p:sldId id="257" r:id="rId3"/>
-    <p:sldId id="268" r:id="rId4"/>
-    <p:sldId id="266" r:id="rId5"/>
-    <p:sldId id="258" r:id="rId6"/>
-    <p:sldId id="259" r:id="rId7"/>
-    <p:sldId id="261" r:id="rId8"/>
-    <p:sldId id="262" r:id="rId9"/>
-    <p:sldId id="263" r:id="rId10"/>
-    <p:sldId id="264" r:id="rId11"/>
-    <p:sldId id="265" r:id="rId12"/>
-    <p:sldId id="267" r:id="rId13"/>
+    <p:sldId id="269" r:id="rId3"/>
+    <p:sldId id="270" r:id="rId4"/>
+    <p:sldId id="257" r:id="rId5"/>
+    <p:sldId id="268" r:id="rId6"/>
+    <p:sldId id="271" r:id="rId7"/>
+    <p:sldId id="266" r:id="rId8"/>
+    <p:sldId id="258" r:id="rId9"/>
+    <p:sldId id="259" r:id="rId10"/>
+    <p:sldId id="261" r:id="rId11"/>
+    <p:sldId id="262" r:id="rId12"/>
+    <p:sldId id="263" r:id="rId13"/>
+    <p:sldId id="264" r:id="rId14"/>
+    <p:sldId id="265" r:id="rId15"/>
+    <p:sldId id="267" r:id="rId16"/>
   </p:sldIdLst>
   <p:sldSz cx="12192000" cy="6858000"/>
   <p:notesSz cx="6858000" cy="9144000"/>
@@ -270,7 +273,7 @@
           <a:p>
             <a:fld id="{FF24CA68-1E24-4B4A-B799-9C3DECDBF403}" type="datetimeFigureOut">
               <a:rPr lang="en-US" smtClean="0"/>
-              <a:t>4/29/2026</a:t>
+              <a:t>5/29/2026</a:t>
             </a:fld>
             <a:endParaRPr lang="en-US"/>
           </a:p>
@@ -468,7 +471,7 @@
           <a:p>
             <a:fld id="{FF24CA68-1E24-4B4A-B799-9C3DECDBF403}" type="datetimeFigureOut">
               <a:rPr lang="en-US" smtClean="0"/>
-              <a:t>4/29/2026</a:t>
+              <a:t>5/29/2026</a:t>
             </a:fld>
             <a:endParaRPr lang="en-US"/>
           </a:p>
@@ -676,7 +679,7 @@
           <a:p>
             <a:fld id="{FF24CA68-1E24-4B4A-B799-9C3DECDBF403}" type="datetimeFigureOut">
               <a:rPr lang="en-US" smtClean="0"/>
-              <a:t>4/29/2026</a:t>
+              <a:t>5/29/2026</a:t>
             </a:fld>
             <a:endParaRPr lang="en-US"/>
           </a:p>
@@ -874,7 +877,7 @@
           <a:p>
             <a:fld id="{FF24CA68-1E24-4B4A-B799-9C3DECDBF403}" type="datetimeFigureOut">
               <a:rPr lang="en-US" smtClean="0"/>
-              <a:t>4/29/2026</a:t>
+              <a:t>5/29/2026</a:t>
             </a:fld>
             <a:endParaRPr lang="en-US"/>
           </a:p>
@@ -1149,7 +1152,7 @@
           <a:p>
             <a:fld id="{FF24CA68-1E24-4B4A-B799-9C3DECDBF403}" type="datetimeFigureOut">
               <a:rPr lang="en-US" smtClean="0"/>
-              <a:t>4/29/2026</a:t>
+              <a:t>5/29/2026</a:t>
             </a:fld>
             <a:endParaRPr lang="en-US"/>
           </a:p>
@@ -1414,7 +1417,7 @@
           <a:p>
             <a:fld id="{FF24CA68-1E24-4B4A-B799-9C3DECDBF403}" type="datetimeFigureOut">
               <a:rPr lang="en-US" smtClean="0"/>
-              <a:t>4/29/2026</a:t>
+              <a:t>5/29/2026</a:t>
             </a:fld>
             <a:endParaRPr lang="en-US"/>
           </a:p>
@@ -1826,7 +1829,7 @@
           <a:p>
             <a:fld id="{FF24CA68-1E24-4B4A-B799-9C3DECDBF403}" type="datetimeFigureOut">
               <a:rPr lang="en-US" smtClean="0"/>
-              <a:t>4/29/2026</a:t>
+              <a:t>5/29/2026</a:t>
             </a:fld>
             <a:endParaRPr lang="en-US"/>
           </a:p>
@@ -1967,7 +1970,7 @@
           <a:p>
             <a:fld id="{FF24CA68-1E24-4B4A-B799-9C3DECDBF403}" type="datetimeFigureOut">
               <a:rPr lang="en-US" smtClean="0"/>
-              <a:t>4/29/2026</a:t>
+              <a:t>5/29/2026</a:t>
             </a:fld>
             <a:endParaRPr lang="en-US"/>
           </a:p>
@@ -2080,7 +2083,7 @@
           <a:p>
             <a:fld id="{FF24CA68-1E24-4B4A-B799-9C3DECDBF403}" type="datetimeFigureOut">
               <a:rPr lang="en-US" smtClean="0"/>
-              <a:t>4/29/2026</a:t>
+              <a:t>5/29/2026</a:t>
             </a:fld>
             <a:endParaRPr lang="en-US"/>
           </a:p>
@@ -2391,7 +2394,7 @@
           <a:p>
             <a:fld id="{FF24CA68-1E24-4B4A-B799-9C3DECDBF403}" type="datetimeFigureOut">
               <a:rPr lang="en-US" smtClean="0"/>
-              <a:t>4/29/2026</a:t>
+              <a:t>5/29/2026</a:t>
             </a:fld>
             <a:endParaRPr lang="en-US"/>
           </a:p>
@@ -2679,7 +2682,7 @@
           <a:p>
             <a:fld id="{FF24CA68-1E24-4B4A-B799-9C3DECDBF403}" type="datetimeFigureOut">
               <a:rPr lang="en-US" smtClean="0"/>
-              <a:t>4/29/2026</a:t>
+              <a:t>5/29/2026</a:t>
             </a:fld>
             <a:endParaRPr lang="en-US"/>
           </a:p>
@@ -2920,7 +2923,7 @@
           <a:p>
             <a:fld id="{FF24CA68-1E24-4B4A-B799-9C3DECDBF403}" type="datetimeFigureOut">
               <a:rPr lang="en-US" smtClean="0"/>
-              <a:t>4/29/2026</a:t>
+              <a:t>5/29/2026</a:t>
             </a:fld>
             <a:endParaRPr lang="en-US"/>
           </a:p>
@@ -5640,6 +5643,2302 @@
       </p:grpSpPr>
       <p:grpSp>
         <p:nvGrpSpPr>
+          <p:cNvPr id="9" name="Group 8">
+            <a:extLst>
+              <a:ext uri="{FF2B5EF4-FFF2-40B4-BE49-F238E27FC236}">
+                <a16:creationId xmlns:a16="http://schemas.microsoft.com/office/drawing/2014/main" id="{08580654-EAA5-25C1-B307-FB5518EC68CC}"/>
+              </a:ext>
+            </a:extLst>
+          </p:cNvPr>
+          <p:cNvGrpSpPr/>
+          <p:nvPr/>
+        </p:nvGrpSpPr>
+        <p:grpSpPr>
+          <a:xfrm>
+            <a:off x="2243579" y="26988"/>
+            <a:ext cx="8505701" cy="6470332"/>
+            <a:chOff x="2243579" y="26988"/>
+            <a:chExt cx="8505701" cy="6470332"/>
+          </a:xfrm>
+        </p:grpSpPr>
+        <p:grpSp>
+          <p:nvGrpSpPr>
+            <p:cNvPr id="2" name="Group 1">
+              <a:extLst>
+                <a:ext uri="{FF2B5EF4-FFF2-40B4-BE49-F238E27FC236}">
+                  <a16:creationId xmlns:a16="http://schemas.microsoft.com/office/drawing/2014/main" id="{ED1CE477-4C0B-C51B-0E1A-1D013E63D9E8}"/>
+                </a:ext>
+              </a:extLst>
+            </p:cNvPr>
+            <p:cNvGrpSpPr/>
+            <p:nvPr/>
+          </p:nvGrpSpPr>
+          <p:grpSpPr>
+            <a:xfrm>
+              <a:off x="2243579" y="26988"/>
+              <a:ext cx="8505701" cy="6470332"/>
+              <a:chOff x="2243579" y="26988"/>
+              <a:chExt cx="8505701" cy="6470332"/>
+            </a:xfrm>
+          </p:grpSpPr>
+          <p:pic>
+            <p:nvPicPr>
+              <p:cNvPr id="5" name="Picture 4">
+                <a:extLst>
+                  <a:ext uri="{FF2B5EF4-FFF2-40B4-BE49-F238E27FC236}">
+                    <a16:creationId xmlns:a16="http://schemas.microsoft.com/office/drawing/2014/main" id="{1ADBE73F-251C-FAEE-1CF1-9EAFABCE1DF0}"/>
+                  </a:ext>
+                </a:extLst>
+              </p:cNvPr>
+              <p:cNvPicPr>
+                <a:picLocks noChangeAspect="1"/>
+              </p:cNvPicPr>
+              <p:nvPr/>
+            </p:nvPicPr>
+            <p:blipFill>
+              <a:blip r:embed="rId2"/>
+              <a:srcRect l="835" t="1764" r="33000" b="1376"/>
+              <a:stretch/>
+            </p:blipFill>
+            <p:spPr>
+              <a:xfrm>
+                <a:off x="2243579" y="26988"/>
+                <a:ext cx="8505701" cy="6470332"/>
+              </a:xfrm>
+              <a:prstGeom prst="rect">
+                <a:avLst/>
+              </a:prstGeom>
+            </p:spPr>
+          </p:pic>
+          <p:pic>
+            <p:nvPicPr>
+              <p:cNvPr id="11" name="Picture 10">
+                <a:extLst>
+                  <a:ext uri="{FF2B5EF4-FFF2-40B4-BE49-F238E27FC236}">
+                    <a16:creationId xmlns:a16="http://schemas.microsoft.com/office/drawing/2014/main" id="{81030C97-8FB3-F4CE-2BEA-8DC9611B571F}"/>
+                  </a:ext>
+                </a:extLst>
+              </p:cNvPr>
+              <p:cNvPicPr>
+                <a:picLocks noChangeAspect="1"/>
+              </p:cNvPicPr>
+              <p:nvPr/>
+            </p:nvPicPr>
+            <p:blipFill>
+              <a:blip r:embed="rId3"/>
+              <a:srcRect l="33000" t="15443" r="25250" b="8545"/>
+              <a:stretch/>
+            </p:blipFill>
+            <p:spPr>
+              <a:xfrm>
+                <a:off x="2243579" y="3315494"/>
+                <a:ext cx="3283357" cy="3106410"/>
+              </a:xfrm>
+              <a:prstGeom prst="rect">
+                <a:avLst/>
+              </a:prstGeom>
+            </p:spPr>
+          </p:pic>
+        </p:grpSp>
+        <p:sp>
+          <p:nvSpPr>
+            <p:cNvPr id="3" name="Rectangle 2">
+              <a:extLst>
+                <a:ext uri="{FF2B5EF4-FFF2-40B4-BE49-F238E27FC236}">
+                  <a16:creationId xmlns:a16="http://schemas.microsoft.com/office/drawing/2014/main" id="{5BD9EDA2-AC29-625D-CD46-136C5FF770ED}"/>
+                </a:ext>
+              </a:extLst>
+            </p:cNvPr>
+            <p:cNvSpPr/>
+            <p:nvPr/>
+          </p:nvSpPr>
+          <p:spPr>
+            <a:xfrm>
+              <a:off x="2880957" y="2358362"/>
+              <a:ext cx="2008599" cy="297950"/>
+            </a:xfrm>
+            <a:prstGeom prst="rect">
+              <a:avLst/>
+            </a:prstGeom>
+            <a:solidFill>
+              <a:schemeClr val="bg1"/>
+            </a:solidFill>
+            <a:ln>
+              <a:noFill/>
+            </a:ln>
+          </p:spPr>
+          <p:style>
+            <a:lnRef idx="2">
+              <a:schemeClr val="accent1">
+                <a:shade val="15000"/>
+              </a:schemeClr>
+            </a:lnRef>
+            <a:fillRef idx="1">
+              <a:schemeClr val="accent1"/>
+            </a:fillRef>
+            <a:effectRef idx="0">
+              <a:schemeClr val="accent1"/>
+            </a:effectRef>
+            <a:fontRef idx="minor">
+              <a:schemeClr val="lt1"/>
+            </a:fontRef>
+          </p:style>
+          <p:txBody>
+            <a:bodyPr rtlCol="0" anchor="ctr"/>
+            <a:lstStyle/>
+            <a:p>
+              <a:pPr algn="ctr"/>
+              <a:r>
+                <a:rPr lang="en-US" sz="1400" b="1" dirty="0">
+                  <a:solidFill>
+                    <a:schemeClr val="tx1"/>
+                  </a:solidFill>
+                </a:rPr>
+                <a:t>Relative Energy (cm</a:t>
+              </a:r>
+              <a:r>
+                <a:rPr lang="en-US" sz="1400" b="1" baseline="30000" dirty="0">
+                  <a:solidFill>
+                    <a:schemeClr val="tx1"/>
+                  </a:solidFill>
+                </a:rPr>
+                <a:t>-1</a:t>
+              </a:r>
+              <a:r>
+                <a:rPr lang="en-US" sz="1400" b="1" dirty="0">
+                  <a:solidFill>
+                    <a:schemeClr val="tx1"/>
+                  </a:solidFill>
+                </a:rPr>
+                <a:t>)</a:t>
+              </a:r>
+            </a:p>
+          </p:txBody>
+        </p:sp>
+        <mc:AlternateContent xmlns:mc="http://schemas.openxmlformats.org/markup-compatibility/2006" xmlns:a14="http://schemas.microsoft.com/office/drawing/2010/main">
+          <mc:Choice Requires="a14">
+            <p:sp>
+              <p:nvSpPr>
+                <p:cNvPr id="4" name="Rectangle 3">
+                  <a:extLst>
+                    <a:ext uri="{FF2B5EF4-FFF2-40B4-BE49-F238E27FC236}">
+                      <a16:creationId xmlns:a16="http://schemas.microsoft.com/office/drawing/2014/main" id="{9D7CDBA7-CE65-E920-913C-4B7BD915D5FF}"/>
+                    </a:ext>
+                  </a:extLst>
+                </p:cNvPr>
+                <p:cNvSpPr/>
+                <p:nvPr/>
+              </p:nvSpPr>
+              <p:spPr>
+                <a:xfrm>
+                  <a:off x="2880957" y="6161662"/>
+                  <a:ext cx="2008599" cy="297950"/>
+                </a:xfrm>
+                <a:prstGeom prst="rect">
+                  <a:avLst/>
+                </a:prstGeom>
+                <a:solidFill>
+                  <a:schemeClr val="bg1"/>
+                </a:solidFill>
+                <a:ln>
+                  <a:noFill/>
+                </a:ln>
+              </p:spPr>
+              <p:style>
+                <a:lnRef idx="2">
+                  <a:schemeClr val="accent1">
+                    <a:shade val="15000"/>
+                  </a:schemeClr>
+                </a:lnRef>
+                <a:fillRef idx="1">
+                  <a:schemeClr val="accent1"/>
+                </a:fillRef>
+                <a:effectRef idx="0">
+                  <a:schemeClr val="accent1"/>
+                </a:effectRef>
+                <a:fontRef idx="minor">
+                  <a:schemeClr val="lt1"/>
+                </a:fontRef>
+              </p:style>
+              <p:txBody>
+                <a:bodyPr rtlCol="0" anchor="ctr"/>
+                <a:lstStyle/>
+                <a:p>
+                  <a:pPr algn="ctr"/>
+                  <a14:m>
+                    <m:oMath xmlns:m="http://schemas.openxmlformats.org/officeDocument/2006/math">
+                      <m:r>
+                        <a:rPr lang="en-US" sz="1600" b="1" i="1" dirty="0" smtClean="0">
+                          <a:solidFill>
+                            <a:schemeClr val="tx1"/>
+                          </a:solidFill>
+                          <a:latin typeface="Cambria Math" panose="02040503050406030204" pitchFamily="18" charset="0"/>
+                        </a:rPr>
+                        <m:t>𝜷</m:t>
+                      </m:r>
+                    </m:oMath>
+                  </a14:m>
+                  <a:r>
+                    <a:rPr lang="en-US" sz="1600" b="1" dirty="0">
+                      <a:solidFill>
+                        <a:schemeClr val="tx1"/>
+                      </a:solidFill>
+                    </a:rPr>
+                    <a:t> (</a:t>
+                  </a:r>
+                  <a:r>
+                    <a:rPr lang="en-US" sz="1600" b="1" baseline="30000" dirty="0">
+                      <a:solidFill>
+                        <a:schemeClr val="tx1"/>
+                      </a:solidFill>
+                    </a:rPr>
+                    <a:t>o</a:t>
+                  </a:r>
+                  <a:r>
+                    <a:rPr lang="en-US" sz="1600" b="1" dirty="0">
+                      <a:solidFill>
+                        <a:schemeClr val="tx1"/>
+                      </a:solidFill>
+                    </a:rPr>
+                    <a:t>)</a:t>
+                  </a:r>
+                </a:p>
+              </p:txBody>
+            </p:sp>
+          </mc:Choice>
+          <mc:Fallback xmlns="">
+            <p:sp>
+              <p:nvSpPr>
+                <p:cNvPr id="4" name="Rectangle 3">
+                  <a:extLst>
+                    <a:ext uri="{FF2B5EF4-FFF2-40B4-BE49-F238E27FC236}">
+                      <a16:creationId xmlns:a16="http://schemas.microsoft.com/office/drawing/2014/main" id="{9D7CDBA7-CE65-E920-913C-4B7BD915D5FF}"/>
+                    </a:ext>
+                  </a:extLst>
+                </p:cNvPr>
+                <p:cNvSpPr>
+                  <a:spLocks noRot="1" noChangeAspect="1" noMove="1" noResize="1" noEditPoints="1" noAdjustHandles="1" noChangeArrowheads="1" noChangeShapeType="1" noTextEdit="1"/>
+                </p:cNvSpPr>
+                <p:nvPr/>
+              </p:nvSpPr>
+              <p:spPr>
+                <a:xfrm>
+                  <a:off x="2880957" y="6161662"/>
+                  <a:ext cx="2008599" cy="297950"/>
+                </a:xfrm>
+                <a:prstGeom prst="rect">
+                  <a:avLst/>
+                </a:prstGeom>
+                <a:blipFill>
+                  <a:blip r:embed="rId4"/>
+                  <a:stretch>
+                    <a:fillRect t="-12245" b="-32653"/>
+                  </a:stretch>
+                </a:blipFill>
+                <a:ln>
+                  <a:noFill/>
+                </a:ln>
+              </p:spPr>
+              <p:txBody>
+                <a:bodyPr/>
+                <a:lstStyle/>
+                <a:p>
+                  <a:r>
+                    <a:rPr lang="en-US">
+                      <a:noFill/>
+                    </a:rPr>
+                    <a:t> </a:t>
+                  </a:r>
+                </a:p>
+              </p:txBody>
+            </p:sp>
+          </mc:Fallback>
+        </mc:AlternateContent>
+        <mc:AlternateContent xmlns:mc="http://schemas.openxmlformats.org/markup-compatibility/2006" xmlns:a14="http://schemas.microsoft.com/office/drawing/2010/main">
+          <mc:Choice Requires="a14">
+            <p:sp>
+              <p:nvSpPr>
+                <p:cNvPr id="6" name="Rectangle 5">
+                  <a:extLst>
+                    <a:ext uri="{FF2B5EF4-FFF2-40B4-BE49-F238E27FC236}">
+                      <a16:creationId xmlns:a16="http://schemas.microsoft.com/office/drawing/2014/main" id="{48E82CB9-E83D-30FE-A358-47456CF5A9CE}"/>
+                    </a:ext>
+                  </a:extLst>
+                </p:cNvPr>
+                <p:cNvSpPr/>
+                <p:nvPr/>
+              </p:nvSpPr>
+              <p:spPr>
+                <a:xfrm rot="5400000">
+                  <a:off x="5113087" y="4585572"/>
+                  <a:ext cx="545403" cy="282294"/>
+                </a:xfrm>
+                <a:prstGeom prst="rect">
+                  <a:avLst/>
+                </a:prstGeom>
+                <a:solidFill>
+                  <a:schemeClr val="bg1"/>
+                </a:solidFill>
+                <a:ln>
+                  <a:noFill/>
+                </a:ln>
+              </p:spPr>
+              <p:style>
+                <a:lnRef idx="2">
+                  <a:schemeClr val="accent1">
+                    <a:shade val="15000"/>
+                  </a:schemeClr>
+                </a:lnRef>
+                <a:fillRef idx="1">
+                  <a:schemeClr val="accent1"/>
+                </a:fillRef>
+                <a:effectRef idx="0">
+                  <a:schemeClr val="accent1"/>
+                </a:effectRef>
+                <a:fontRef idx="minor">
+                  <a:schemeClr val="lt1"/>
+                </a:fontRef>
+              </p:style>
+              <p:txBody>
+                <a:bodyPr rtlCol="0" anchor="ctr"/>
+                <a:lstStyle/>
+                <a:p>
+                  <a:pPr algn="ctr"/>
+                  <a14:m>
+                    <m:oMath xmlns:m="http://schemas.openxmlformats.org/officeDocument/2006/math">
+                      <m:r>
+                        <a:rPr lang="en-US" sz="1600" b="1" i="1" smtClean="0">
+                          <a:solidFill>
+                            <a:schemeClr val="tx1"/>
+                          </a:solidFill>
+                          <a:latin typeface="Cambria Math" panose="02040503050406030204" pitchFamily="18" charset="0"/>
+                        </a:rPr>
+                        <m:t>𝝉</m:t>
+                      </m:r>
+                    </m:oMath>
+                  </a14:m>
+                  <a:r>
+                    <a:rPr lang="en-US" sz="1600" b="1" dirty="0">
+                      <a:solidFill>
+                        <a:schemeClr val="tx1"/>
+                      </a:solidFill>
+                    </a:rPr>
+                    <a:t> (</a:t>
+                  </a:r>
+                  <a:r>
+                    <a:rPr lang="en-US" sz="1600" b="1" baseline="30000" dirty="0">
+                      <a:solidFill>
+                        <a:schemeClr val="tx1"/>
+                      </a:solidFill>
+                    </a:rPr>
+                    <a:t>o</a:t>
+                  </a:r>
+                  <a:r>
+                    <a:rPr lang="en-US" sz="1600" b="1" dirty="0">
+                      <a:solidFill>
+                        <a:schemeClr val="tx1"/>
+                      </a:solidFill>
+                    </a:rPr>
+                    <a:t>)</a:t>
+                  </a:r>
+                </a:p>
+              </p:txBody>
+            </p:sp>
+          </mc:Choice>
+          <mc:Fallback xmlns="">
+            <p:sp>
+              <p:nvSpPr>
+                <p:cNvPr id="6" name="Rectangle 5">
+                  <a:extLst>
+                    <a:ext uri="{FF2B5EF4-FFF2-40B4-BE49-F238E27FC236}">
+                      <a16:creationId xmlns:a16="http://schemas.microsoft.com/office/drawing/2014/main" id="{48E82CB9-E83D-30FE-A358-47456CF5A9CE}"/>
+                    </a:ext>
+                  </a:extLst>
+                </p:cNvPr>
+                <p:cNvSpPr>
+                  <a:spLocks noRot="1" noChangeAspect="1" noMove="1" noResize="1" noEditPoints="1" noAdjustHandles="1" noChangeArrowheads="1" noChangeShapeType="1" noTextEdit="1"/>
+                </p:cNvSpPr>
+                <p:nvPr/>
+              </p:nvSpPr>
+              <p:spPr>
+                <a:xfrm rot="5400000">
+                  <a:off x="5113087" y="4585572"/>
+                  <a:ext cx="545403" cy="282294"/>
+                </a:xfrm>
+                <a:prstGeom prst="rect">
+                  <a:avLst/>
+                </a:prstGeom>
+                <a:blipFill>
+                  <a:blip r:embed="rId5"/>
+                  <a:stretch>
+                    <a:fillRect l="-36170" r="-14894" b="-4494"/>
+                  </a:stretch>
+                </a:blipFill>
+                <a:ln>
+                  <a:noFill/>
+                </a:ln>
+              </p:spPr>
+              <p:txBody>
+                <a:bodyPr/>
+                <a:lstStyle/>
+                <a:p>
+                  <a:r>
+                    <a:rPr lang="en-US">
+                      <a:noFill/>
+                    </a:rPr>
+                    <a:t> </a:t>
+                  </a:r>
+                </a:p>
+              </p:txBody>
+            </p:sp>
+          </mc:Fallback>
+        </mc:AlternateContent>
+        <mc:AlternateContent xmlns:mc="http://schemas.openxmlformats.org/markup-compatibility/2006" xmlns:a14="http://schemas.microsoft.com/office/drawing/2010/main">
+          <mc:Choice Requires="a14">
+            <p:sp>
+              <p:nvSpPr>
+                <p:cNvPr id="7" name="Rectangle 6">
+                  <a:extLst>
+                    <a:ext uri="{FF2B5EF4-FFF2-40B4-BE49-F238E27FC236}">
+                      <a16:creationId xmlns:a16="http://schemas.microsoft.com/office/drawing/2014/main" id="{F5CDCF7D-1C9A-7BDC-CB04-8E7DABAEC115}"/>
+                    </a:ext>
+                  </a:extLst>
+                </p:cNvPr>
+                <p:cNvSpPr/>
+                <p:nvPr/>
+              </p:nvSpPr>
+              <p:spPr>
+                <a:xfrm>
+                  <a:off x="5845382" y="5104693"/>
+                  <a:ext cx="988037" cy="371873"/>
+                </a:xfrm>
+                <a:prstGeom prst="rect">
+                  <a:avLst/>
+                </a:prstGeom>
+                <a:solidFill>
+                  <a:schemeClr val="bg1"/>
+                </a:solidFill>
+                <a:ln>
+                  <a:noFill/>
+                </a:ln>
+              </p:spPr>
+              <p:style>
+                <a:lnRef idx="2">
+                  <a:schemeClr val="accent1">
+                    <a:shade val="15000"/>
+                  </a:schemeClr>
+                </a:lnRef>
+                <a:fillRef idx="1">
+                  <a:schemeClr val="accent1"/>
+                </a:fillRef>
+                <a:effectRef idx="0">
+                  <a:schemeClr val="accent1"/>
+                </a:effectRef>
+                <a:fontRef idx="minor">
+                  <a:schemeClr val="lt1"/>
+                </a:fontRef>
+              </p:style>
+              <p:txBody>
+                <a:bodyPr rtlCol="0" anchor="ctr"/>
+                <a:lstStyle/>
+                <a:p>
+                  <a:pPr algn="ctr"/>
+                  <a14:m>
+                    <m:oMath xmlns:m="http://schemas.openxmlformats.org/officeDocument/2006/math">
+                      <m:r>
+                        <a:rPr lang="en-US" sz="1600" b="1" i="1" dirty="0" smtClean="0">
+                          <a:solidFill>
+                            <a:schemeClr val="tx1"/>
+                          </a:solidFill>
+                          <a:latin typeface="Cambria Math" panose="02040503050406030204" pitchFamily="18" charset="0"/>
+                        </a:rPr>
+                        <m:t>𝜷</m:t>
+                      </m:r>
+                    </m:oMath>
+                  </a14:m>
+                  <a:r>
+                    <a:rPr lang="en-US" sz="1600" b="1" dirty="0">
+                      <a:solidFill>
+                        <a:schemeClr val="tx1"/>
+                      </a:solidFill>
+                    </a:rPr>
+                    <a:t> (</a:t>
+                  </a:r>
+                  <a:r>
+                    <a:rPr lang="en-US" sz="1600" b="1" baseline="30000" dirty="0">
+                      <a:solidFill>
+                        <a:schemeClr val="tx1"/>
+                      </a:solidFill>
+                    </a:rPr>
+                    <a:t>o</a:t>
+                  </a:r>
+                  <a:r>
+                    <a:rPr lang="en-US" sz="1600" b="1" dirty="0">
+                      <a:solidFill>
+                        <a:schemeClr val="tx1"/>
+                      </a:solidFill>
+                    </a:rPr>
+                    <a:t>)</a:t>
+                  </a:r>
+                </a:p>
+              </p:txBody>
+            </p:sp>
+          </mc:Choice>
+          <mc:Fallback xmlns="">
+            <p:sp>
+              <p:nvSpPr>
+                <p:cNvPr id="7" name="Rectangle 6">
+                  <a:extLst>
+                    <a:ext uri="{FF2B5EF4-FFF2-40B4-BE49-F238E27FC236}">
+                      <a16:creationId xmlns:a16="http://schemas.microsoft.com/office/drawing/2014/main" id="{F5CDCF7D-1C9A-7BDC-CB04-8E7DABAEC115}"/>
+                    </a:ext>
+                  </a:extLst>
+                </p:cNvPr>
+                <p:cNvSpPr>
+                  <a:spLocks noRot="1" noChangeAspect="1" noMove="1" noResize="1" noEditPoints="1" noAdjustHandles="1" noChangeArrowheads="1" noChangeShapeType="1" noTextEdit="1"/>
+                </p:cNvSpPr>
+                <p:nvPr/>
+              </p:nvSpPr>
+              <p:spPr>
+                <a:xfrm>
+                  <a:off x="5845382" y="5104693"/>
+                  <a:ext cx="988037" cy="371873"/>
+                </a:xfrm>
+                <a:prstGeom prst="rect">
+                  <a:avLst/>
+                </a:prstGeom>
+                <a:blipFill>
+                  <a:blip r:embed="rId6"/>
+                  <a:stretch>
+                    <a:fillRect b="-16393"/>
+                  </a:stretch>
+                </a:blipFill>
+                <a:ln>
+                  <a:noFill/>
+                </a:ln>
+              </p:spPr>
+              <p:txBody>
+                <a:bodyPr/>
+                <a:lstStyle/>
+                <a:p>
+                  <a:r>
+                    <a:rPr lang="en-US">
+                      <a:noFill/>
+                    </a:rPr>
+                    <a:t> </a:t>
+                  </a:r>
+                </a:p>
+              </p:txBody>
+            </p:sp>
+          </mc:Fallback>
+        </mc:AlternateContent>
+        <mc:AlternateContent xmlns:mc="http://schemas.openxmlformats.org/markup-compatibility/2006" xmlns:a14="http://schemas.microsoft.com/office/drawing/2010/main">
+          <mc:Choice Requires="a14">
+            <p:sp>
+              <p:nvSpPr>
+                <p:cNvPr id="8" name="Rectangle 7">
+                  <a:extLst>
+                    <a:ext uri="{FF2B5EF4-FFF2-40B4-BE49-F238E27FC236}">
+                      <a16:creationId xmlns:a16="http://schemas.microsoft.com/office/drawing/2014/main" id="{08D4A9D1-969D-AFB4-1FA6-502FF50CC11E}"/>
+                    </a:ext>
+                  </a:extLst>
+                </p:cNvPr>
+                <p:cNvSpPr/>
+                <p:nvPr/>
+              </p:nvSpPr>
+              <p:spPr>
+                <a:xfrm>
+                  <a:off x="9948421" y="4999421"/>
+                  <a:ext cx="545403" cy="282294"/>
+                </a:xfrm>
+                <a:prstGeom prst="rect">
+                  <a:avLst/>
+                </a:prstGeom>
+                <a:solidFill>
+                  <a:schemeClr val="bg1"/>
+                </a:solidFill>
+                <a:ln>
+                  <a:noFill/>
+                </a:ln>
+              </p:spPr>
+              <p:style>
+                <a:lnRef idx="2">
+                  <a:schemeClr val="accent1">
+                    <a:shade val="15000"/>
+                  </a:schemeClr>
+                </a:lnRef>
+                <a:fillRef idx="1">
+                  <a:schemeClr val="accent1"/>
+                </a:fillRef>
+                <a:effectRef idx="0">
+                  <a:schemeClr val="accent1"/>
+                </a:effectRef>
+                <a:fontRef idx="minor">
+                  <a:schemeClr val="lt1"/>
+                </a:fontRef>
+              </p:style>
+              <p:txBody>
+                <a:bodyPr rtlCol="0" anchor="ctr"/>
+                <a:lstStyle/>
+                <a:p>
+                  <a:pPr algn="ctr"/>
+                  <a14:m>
+                    <m:oMath xmlns:m="http://schemas.openxmlformats.org/officeDocument/2006/math">
+                      <m:r>
+                        <a:rPr lang="en-US" sz="1600" b="1" i="1" smtClean="0">
+                          <a:solidFill>
+                            <a:schemeClr val="tx1"/>
+                          </a:solidFill>
+                          <a:latin typeface="Cambria Math" panose="02040503050406030204" pitchFamily="18" charset="0"/>
+                        </a:rPr>
+                        <m:t>𝝉</m:t>
+                      </m:r>
+                    </m:oMath>
+                  </a14:m>
+                  <a:r>
+                    <a:rPr lang="en-US" sz="1600" b="1" dirty="0">
+                      <a:solidFill>
+                        <a:schemeClr val="tx1"/>
+                      </a:solidFill>
+                    </a:rPr>
+                    <a:t> (</a:t>
+                  </a:r>
+                  <a:r>
+                    <a:rPr lang="en-US" sz="1600" b="1" baseline="30000" dirty="0">
+                      <a:solidFill>
+                        <a:schemeClr val="tx1"/>
+                      </a:solidFill>
+                    </a:rPr>
+                    <a:t>o</a:t>
+                  </a:r>
+                  <a:r>
+                    <a:rPr lang="en-US" sz="1600" b="1" dirty="0">
+                      <a:solidFill>
+                        <a:schemeClr val="tx1"/>
+                      </a:solidFill>
+                    </a:rPr>
+                    <a:t>)</a:t>
+                  </a:r>
+                </a:p>
+              </p:txBody>
+            </p:sp>
+          </mc:Choice>
+          <mc:Fallback xmlns="">
+            <p:sp>
+              <p:nvSpPr>
+                <p:cNvPr id="8" name="Rectangle 7">
+                  <a:extLst>
+                    <a:ext uri="{FF2B5EF4-FFF2-40B4-BE49-F238E27FC236}">
+                      <a16:creationId xmlns:a16="http://schemas.microsoft.com/office/drawing/2014/main" id="{08D4A9D1-969D-AFB4-1FA6-502FF50CC11E}"/>
+                    </a:ext>
+                  </a:extLst>
+                </p:cNvPr>
+                <p:cNvSpPr>
+                  <a:spLocks noRot="1" noChangeAspect="1" noMove="1" noResize="1" noEditPoints="1" noAdjustHandles="1" noChangeArrowheads="1" noChangeShapeType="1" noTextEdit="1"/>
+                </p:cNvSpPr>
+                <p:nvPr/>
+              </p:nvSpPr>
+              <p:spPr>
+                <a:xfrm>
+                  <a:off x="9948421" y="4999421"/>
+                  <a:ext cx="545403" cy="282294"/>
+                </a:xfrm>
+                <a:prstGeom prst="rect">
+                  <a:avLst/>
+                </a:prstGeom>
+                <a:blipFill>
+                  <a:blip r:embed="rId7"/>
+                  <a:stretch>
+                    <a:fillRect t="-15217" r="-5618" b="-39130"/>
+                  </a:stretch>
+                </a:blipFill>
+                <a:ln>
+                  <a:noFill/>
+                </a:ln>
+              </p:spPr>
+              <p:txBody>
+                <a:bodyPr/>
+                <a:lstStyle/>
+                <a:p>
+                  <a:r>
+                    <a:rPr lang="en-US">
+                      <a:noFill/>
+                    </a:rPr>
+                    <a:t> </a:t>
+                  </a:r>
+                </a:p>
+              </p:txBody>
+            </p:sp>
+          </mc:Fallback>
+        </mc:AlternateContent>
+      </p:grpSp>
+    </p:spTree>
+    <p:extLst>
+      <p:ext uri="{BB962C8B-B14F-4D97-AF65-F5344CB8AC3E}">
+        <p14:creationId xmlns:p14="http://schemas.microsoft.com/office/powerpoint/2010/main" val="2312560760"/>
+      </p:ext>
+    </p:extLst>
+  </p:cSld>
+  <p:clrMapOvr>
+    <a:masterClrMapping/>
+  </p:clrMapOvr>
+</p:sld>
+</file>
+
+<file path=ppt/slides/slide11.xml><?xml version="1.0" encoding="utf-8"?>
+<p:sld xmlns:a="http://schemas.openxmlformats.org/drawingml/2006/main" xmlns:r="http://schemas.openxmlformats.org/officeDocument/2006/relationships" xmlns:p="http://schemas.openxmlformats.org/presentationml/2006/main">
+  <p:cSld>
+    <p:spTree>
+      <p:nvGrpSpPr>
+        <p:cNvPr id="1" name=""/>
+        <p:cNvGrpSpPr/>
+        <p:nvPr/>
+      </p:nvGrpSpPr>
+      <p:grpSpPr>
+        <a:xfrm>
+          <a:off x="0" y="0"/>
+          <a:ext cx="0" cy="0"/>
+          <a:chOff x="0" y="0"/>
+          <a:chExt cx="0" cy="0"/>
+        </a:xfrm>
+      </p:grpSpPr>
+      <p:grpSp>
+        <p:nvGrpSpPr>
+          <p:cNvPr id="12" name="Group 11">
+            <a:extLst>
+              <a:ext uri="{FF2B5EF4-FFF2-40B4-BE49-F238E27FC236}">
+                <a16:creationId xmlns:a16="http://schemas.microsoft.com/office/drawing/2014/main" id="{AA928F58-22DB-B6B1-CE8C-6248C65CC224}"/>
+              </a:ext>
+            </a:extLst>
+          </p:cNvPr>
+          <p:cNvGrpSpPr/>
+          <p:nvPr/>
+        </p:nvGrpSpPr>
+        <p:grpSpPr>
+          <a:xfrm>
+            <a:off x="1212509" y="638826"/>
+            <a:ext cx="10010812" cy="5411246"/>
+            <a:chOff x="1212509" y="638826"/>
+            <a:chExt cx="10010812" cy="5411246"/>
+          </a:xfrm>
+        </p:grpSpPr>
+        <p:grpSp>
+          <p:nvGrpSpPr>
+            <p:cNvPr id="2" name="Group 1">
+              <a:extLst>
+                <a:ext uri="{FF2B5EF4-FFF2-40B4-BE49-F238E27FC236}">
+                  <a16:creationId xmlns:a16="http://schemas.microsoft.com/office/drawing/2014/main" id="{7182AE39-8CE2-65C8-8FFF-5BFDCC52A26A}"/>
+                </a:ext>
+              </a:extLst>
+            </p:cNvPr>
+            <p:cNvGrpSpPr/>
+            <p:nvPr/>
+          </p:nvGrpSpPr>
+          <p:grpSpPr>
+            <a:xfrm>
+              <a:off x="1212509" y="638826"/>
+              <a:ext cx="10010812" cy="5411246"/>
+              <a:chOff x="1212509" y="638826"/>
+              <a:chExt cx="10010812" cy="5411246"/>
+            </a:xfrm>
+          </p:grpSpPr>
+          <p:pic>
+            <p:nvPicPr>
+              <p:cNvPr id="3" name="Picture 2">
+                <a:extLst>
+                  <a:ext uri="{FF2B5EF4-FFF2-40B4-BE49-F238E27FC236}">
+                    <a16:creationId xmlns:a16="http://schemas.microsoft.com/office/drawing/2014/main" id="{D9F02B45-EEC5-F898-0A85-BA2A8C1BBDC2}"/>
+                  </a:ext>
+                </a:extLst>
+              </p:cNvPr>
+              <p:cNvPicPr>
+                <a:picLocks noChangeAspect="1"/>
+              </p:cNvPicPr>
+              <p:nvPr/>
+            </p:nvPicPr>
+            <p:blipFill>
+              <a:blip r:embed="rId2"/>
+              <a:srcRect l="7809" t="8086" r="22534" b="9420"/>
+              <a:stretch/>
+            </p:blipFill>
+            <p:spPr>
+              <a:xfrm>
+                <a:off x="2668044" y="638826"/>
+                <a:ext cx="8492647" cy="5226485"/>
+              </a:xfrm>
+              <a:prstGeom prst="rect">
+                <a:avLst/>
+              </a:prstGeom>
+            </p:spPr>
+          </p:pic>
+          <p:pic>
+            <p:nvPicPr>
+              <p:cNvPr id="4" name="Picture 3">
+                <a:extLst>
+                  <a:ext uri="{FF2B5EF4-FFF2-40B4-BE49-F238E27FC236}">
+                    <a16:creationId xmlns:a16="http://schemas.microsoft.com/office/drawing/2014/main" id="{DE07EF6E-FAC2-2707-F3C9-3C0C40CDA2A3}"/>
+                  </a:ext>
+                </a:extLst>
+              </p:cNvPr>
+              <p:cNvPicPr>
+                <a:picLocks noChangeAspect="1"/>
+              </p:cNvPicPr>
+              <p:nvPr/>
+            </p:nvPicPr>
+            <p:blipFill>
+              <a:blip r:embed="rId2"/>
+              <a:srcRect l="-222" t="1808" r="91798" b="62242"/>
+              <a:stretch/>
+            </p:blipFill>
+            <p:spPr>
+              <a:xfrm>
+                <a:off x="10196186" y="719202"/>
+                <a:ext cx="1027135" cy="2277648"/>
+              </a:xfrm>
+              <a:prstGeom prst="rect">
+                <a:avLst/>
+              </a:prstGeom>
+            </p:spPr>
+          </p:pic>
+          <p:pic>
+            <p:nvPicPr>
+              <p:cNvPr id="6" name="Picture 5">
+                <a:extLst>
+                  <a:ext uri="{FF2B5EF4-FFF2-40B4-BE49-F238E27FC236}">
+                    <a16:creationId xmlns:a16="http://schemas.microsoft.com/office/drawing/2014/main" id="{C695EC9F-4EA2-0861-7A2A-A33892EBFD77}"/>
+                  </a:ext>
+                </a:extLst>
+              </p:cNvPr>
+              <p:cNvPicPr>
+                <a:picLocks noChangeAspect="1"/>
+              </p:cNvPicPr>
+              <p:nvPr/>
+            </p:nvPicPr>
+            <p:blipFill>
+              <a:blip r:embed="rId3"/>
+              <a:srcRect l="4185" r="3808" b="2420"/>
+              <a:stretch/>
+            </p:blipFill>
+            <p:spPr>
+              <a:xfrm>
+                <a:off x="1212509" y="2455102"/>
+                <a:ext cx="3597486" cy="3594970"/>
+              </a:xfrm>
+              <a:prstGeom prst="rect">
+                <a:avLst/>
+              </a:prstGeom>
+            </p:spPr>
+          </p:pic>
+          <p:pic>
+            <p:nvPicPr>
+              <p:cNvPr id="7" name="Picture 6">
+                <a:extLst>
+                  <a:ext uri="{FF2B5EF4-FFF2-40B4-BE49-F238E27FC236}">
+                    <a16:creationId xmlns:a16="http://schemas.microsoft.com/office/drawing/2014/main" id="{1DFCBC87-2834-7E99-68EE-38FC694F2881}"/>
+                  </a:ext>
+                </a:extLst>
+              </p:cNvPr>
+              <p:cNvPicPr>
+                <a:picLocks noChangeAspect="1"/>
+              </p:cNvPicPr>
+              <p:nvPr/>
+            </p:nvPicPr>
+            <p:blipFill>
+              <a:blip r:embed="rId4"/>
+              <a:srcRect l="6573" t="37362" r="79201" b="58512"/>
+              <a:stretch/>
+            </p:blipFill>
+            <p:spPr>
+              <a:xfrm>
+                <a:off x="2668044" y="1632557"/>
+                <a:ext cx="2161305" cy="325678"/>
+              </a:xfrm>
+              <a:prstGeom prst="rect">
+                <a:avLst/>
+              </a:prstGeom>
+            </p:spPr>
+          </p:pic>
+        </p:grpSp>
+        <p:sp>
+          <p:nvSpPr>
+            <p:cNvPr id="5" name="Rectangle 4">
+              <a:extLst>
+                <a:ext uri="{FF2B5EF4-FFF2-40B4-BE49-F238E27FC236}">
+                  <a16:creationId xmlns:a16="http://schemas.microsoft.com/office/drawing/2014/main" id="{EB5905AC-1009-3B82-75ED-8BB19AEF0137}"/>
+                </a:ext>
+              </a:extLst>
+            </p:cNvPr>
+            <p:cNvSpPr/>
+            <p:nvPr/>
+          </p:nvSpPr>
+          <p:spPr>
+            <a:xfrm>
+              <a:off x="2771776" y="1632557"/>
+              <a:ext cx="2366982" cy="325678"/>
+            </a:xfrm>
+            <a:prstGeom prst="rect">
+              <a:avLst/>
+            </a:prstGeom>
+            <a:solidFill>
+              <a:schemeClr val="bg1"/>
+            </a:solidFill>
+            <a:ln>
+              <a:noFill/>
+            </a:ln>
+          </p:spPr>
+          <p:style>
+            <a:lnRef idx="2">
+              <a:schemeClr val="accent1">
+                <a:shade val="15000"/>
+              </a:schemeClr>
+            </a:lnRef>
+            <a:fillRef idx="1">
+              <a:schemeClr val="accent1"/>
+            </a:fillRef>
+            <a:effectRef idx="0">
+              <a:schemeClr val="accent1"/>
+            </a:effectRef>
+            <a:fontRef idx="minor">
+              <a:schemeClr val="lt1"/>
+            </a:fontRef>
+          </p:style>
+          <p:txBody>
+            <a:bodyPr rtlCol="0" anchor="ctr"/>
+            <a:lstStyle/>
+            <a:p>
+              <a:pPr algn="ctr"/>
+              <a:r>
+                <a:rPr lang="en-US" sz="1600" b="1" dirty="0">
+                  <a:solidFill>
+                    <a:schemeClr val="tx1"/>
+                  </a:solidFill>
+                </a:rPr>
+                <a:t>Relative Energy (cm</a:t>
+              </a:r>
+              <a:r>
+                <a:rPr lang="en-US" sz="1600" b="1" baseline="30000" dirty="0">
+                  <a:solidFill>
+                    <a:schemeClr val="tx1"/>
+                  </a:solidFill>
+                </a:rPr>
+                <a:t>-1</a:t>
+              </a:r>
+              <a:r>
+                <a:rPr lang="en-US" sz="1600" b="1" dirty="0">
+                  <a:solidFill>
+                    <a:schemeClr val="tx1"/>
+                  </a:solidFill>
+                </a:rPr>
+                <a:t>)</a:t>
+              </a:r>
+            </a:p>
+          </p:txBody>
+        </p:sp>
+        <mc:AlternateContent xmlns:mc="http://schemas.openxmlformats.org/markup-compatibility/2006" xmlns:a14="http://schemas.microsoft.com/office/drawing/2010/main">
+          <mc:Choice Requires="a14">
+            <p:sp>
+              <p:nvSpPr>
+                <p:cNvPr id="8" name="Rectangle 7">
+                  <a:extLst>
+                    <a:ext uri="{FF2B5EF4-FFF2-40B4-BE49-F238E27FC236}">
+                      <a16:creationId xmlns:a16="http://schemas.microsoft.com/office/drawing/2014/main" id="{0962A1BD-D606-655C-9E93-8E6016CA0AEB}"/>
+                    </a:ext>
+                  </a:extLst>
+                </p:cNvPr>
+                <p:cNvSpPr/>
+                <p:nvPr/>
+              </p:nvSpPr>
+              <p:spPr>
+                <a:xfrm>
+                  <a:off x="1951411" y="5752122"/>
+                  <a:ext cx="2008599" cy="297950"/>
+                </a:xfrm>
+                <a:prstGeom prst="rect">
+                  <a:avLst/>
+                </a:prstGeom>
+                <a:solidFill>
+                  <a:schemeClr val="bg1"/>
+                </a:solidFill>
+                <a:ln>
+                  <a:noFill/>
+                </a:ln>
+              </p:spPr>
+              <p:style>
+                <a:lnRef idx="2">
+                  <a:schemeClr val="accent1">
+                    <a:shade val="15000"/>
+                  </a:schemeClr>
+                </a:lnRef>
+                <a:fillRef idx="1">
+                  <a:schemeClr val="accent1"/>
+                </a:fillRef>
+                <a:effectRef idx="0">
+                  <a:schemeClr val="accent1"/>
+                </a:effectRef>
+                <a:fontRef idx="minor">
+                  <a:schemeClr val="lt1"/>
+                </a:fontRef>
+              </p:style>
+              <p:txBody>
+                <a:bodyPr rtlCol="0" anchor="ctr"/>
+                <a:lstStyle/>
+                <a:p>
+                  <a:pPr algn="ctr"/>
+                  <a14:m>
+                    <m:oMath xmlns:m="http://schemas.openxmlformats.org/officeDocument/2006/math">
+                      <m:sSub>
+                        <m:sSubPr>
+                          <m:ctrlPr>
+                            <a:rPr lang="en-US" sz="1600" b="1" i="1" smtClean="0">
+                              <a:solidFill>
+                                <a:schemeClr val="tx1"/>
+                              </a:solidFill>
+                              <a:latin typeface="Cambria Math" panose="02040503050406030204" pitchFamily="18" charset="0"/>
+                            </a:rPr>
+                          </m:ctrlPr>
+                        </m:sSubPr>
+                        <m:e>
+                          <m:r>
+                            <a:rPr lang="en-US" sz="1600" b="1" i="1" smtClean="0">
+                              <a:solidFill>
+                                <a:schemeClr val="tx1"/>
+                              </a:solidFill>
+                              <a:latin typeface="Cambria Math" panose="02040503050406030204" pitchFamily="18" charset="0"/>
+                            </a:rPr>
+                            <m:t>𝒓</m:t>
+                          </m:r>
+                        </m:e>
+                        <m:sub>
+                          <m:r>
+                            <a:rPr lang="en-US" sz="1600" b="1" i="1" smtClean="0">
+                              <a:solidFill>
+                                <a:schemeClr val="tx1"/>
+                              </a:solidFill>
+                              <a:latin typeface="Cambria Math" panose="02040503050406030204" pitchFamily="18" charset="0"/>
+                            </a:rPr>
+                            <m:t>𝟏</m:t>
+                          </m:r>
+                        </m:sub>
+                      </m:sSub>
+                    </m:oMath>
+                  </a14:m>
+                  <a:r>
+                    <a:rPr lang="en-US" sz="1600" b="1" dirty="0">
+                      <a:solidFill>
+                        <a:schemeClr val="tx1"/>
+                      </a:solidFill>
+                    </a:rPr>
+                    <a:t> (</a:t>
+                  </a:r>
+                  <a14:m>
+                    <m:oMath xmlns:m="http://schemas.openxmlformats.org/officeDocument/2006/math">
+                      <m:r>
+                        <a:rPr lang="en-US" sz="1600" b="1" i="1" dirty="0" smtClean="0">
+                          <a:solidFill>
+                            <a:schemeClr val="tx1"/>
+                          </a:solidFill>
+                          <a:latin typeface="Cambria Math" panose="02040503050406030204" pitchFamily="18" charset="0"/>
+                        </a:rPr>
+                        <m:t>Å</m:t>
+                      </m:r>
+                    </m:oMath>
+                  </a14:m>
+                  <a:r>
+                    <a:rPr lang="en-US" sz="1600" b="1" dirty="0">
+                      <a:solidFill>
+                        <a:schemeClr val="tx1"/>
+                      </a:solidFill>
+                    </a:rPr>
+                    <a:t>)</a:t>
+                  </a:r>
+                </a:p>
+              </p:txBody>
+            </p:sp>
+          </mc:Choice>
+          <mc:Fallback xmlns="">
+            <p:sp>
+              <p:nvSpPr>
+                <p:cNvPr id="8" name="Rectangle 7">
+                  <a:extLst>
+                    <a:ext uri="{FF2B5EF4-FFF2-40B4-BE49-F238E27FC236}">
+                      <a16:creationId xmlns:a16="http://schemas.microsoft.com/office/drawing/2014/main" id="{0962A1BD-D606-655C-9E93-8E6016CA0AEB}"/>
+                    </a:ext>
+                  </a:extLst>
+                </p:cNvPr>
+                <p:cNvSpPr>
+                  <a:spLocks noRot="1" noChangeAspect="1" noMove="1" noResize="1" noEditPoints="1" noAdjustHandles="1" noChangeArrowheads="1" noChangeShapeType="1" noTextEdit="1"/>
+                </p:cNvSpPr>
+                <p:nvPr/>
+              </p:nvSpPr>
+              <p:spPr>
+                <a:xfrm>
+                  <a:off x="1951411" y="5752122"/>
+                  <a:ext cx="2008599" cy="297950"/>
+                </a:xfrm>
+                <a:prstGeom prst="rect">
+                  <a:avLst/>
+                </a:prstGeom>
+                <a:blipFill>
+                  <a:blip r:embed="rId5"/>
+                  <a:stretch>
+                    <a:fillRect t="-10417" b="-37500"/>
+                  </a:stretch>
+                </a:blipFill>
+                <a:ln>
+                  <a:noFill/>
+                </a:ln>
+              </p:spPr>
+              <p:txBody>
+                <a:bodyPr/>
+                <a:lstStyle/>
+                <a:p>
+                  <a:r>
+                    <a:rPr lang="en-US">
+                      <a:noFill/>
+                    </a:rPr>
+                    <a:t> </a:t>
+                  </a:r>
+                </a:p>
+              </p:txBody>
+            </p:sp>
+          </mc:Fallback>
+        </mc:AlternateContent>
+        <mc:AlternateContent xmlns:mc="http://schemas.openxmlformats.org/markup-compatibility/2006" xmlns:a14="http://schemas.microsoft.com/office/drawing/2010/main">
+          <mc:Choice Requires="a14">
+            <p:sp>
+              <p:nvSpPr>
+                <p:cNvPr id="9" name="Rectangle 8">
+                  <a:extLst>
+                    <a:ext uri="{FF2B5EF4-FFF2-40B4-BE49-F238E27FC236}">
+                      <a16:creationId xmlns:a16="http://schemas.microsoft.com/office/drawing/2014/main" id="{4966767B-222F-EED6-576E-2C749AF94927}"/>
+                    </a:ext>
+                  </a:extLst>
+                </p:cNvPr>
+                <p:cNvSpPr/>
+                <p:nvPr/>
+              </p:nvSpPr>
+              <p:spPr>
+                <a:xfrm>
+                  <a:off x="6498791" y="5553517"/>
+                  <a:ext cx="2008599" cy="297950"/>
+                </a:xfrm>
+                <a:prstGeom prst="rect">
+                  <a:avLst/>
+                </a:prstGeom>
+                <a:solidFill>
+                  <a:schemeClr val="bg1"/>
+                </a:solidFill>
+                <a:ln>
+                  <a:noFill/>
+                </a:ln>
+              </p:spPr>
+              <p:style>
+                <a:lnRef idx="2">
+                  <a:schemeClr val="accent1">
+                    <a:shade val="15000"/>
+                  </a:schemeClr>
+                </a:lnRef>
+                <a:fillRef idx="1">
+                  <a:schemeClr val="accent1"/>
+                </a:fillRef>
+                <a:effectRef idx="0">
+                  <a:schemeClr val="accent1"/>
+                </a:effectRef>
+                <a:fontRef idx="minor">
+                  <a:schemeClr val="lt1"/>
+                </a:fontRef>
+              </p:style>
+              <p:txBody>
+                <a:bodyPr rtlCol="0" anchor="ctr"/>
+                <a:lstStyle/>
+                <a:p>
+                  <a:pPr algn="ctr"/>
+                  <a14:m>
+                    <m:oMath xmlns:m="http://schemas.openxmlformats.org/officeDocument/2006/math">
+                      <m:sSub>
+                        <m:sSubPr>
+                          <m:ctrlPr>
+                            <a:rPr lang="en-US" b="1" i="1" smtClean="0">
+                              <a:solidFill>
+                                <a:schemeClr val="tx1"/>
+                              </a:solidFill>
+                              <a:latin typeface="Cambria Math" panose="02040503050406030204" pitchFamily="18" charset="0"/>
+                            </a:rPr>
+                          </m:ctrlPr>
+                        </m:sSubPr>
+                        <m:e>
+                          <m:r>
+                            <a:rPr lang="en-US" b="1" i="1" smtClean="0">
+                              <a:solidFill>
+                                <a:schemeClr val="tx1"/>
+                              </a:solidFill>
+                              <a:latin typeface="Cambria Math" panose="02040503050406030204" pitchFamily="18" charset="0"/>
+                            </a:rPr>
+                            <m:t>𝒓</m:t>
+                          </m:r>
+                        </m:e>
+                        <m:sub>
+                          <m:r>
+                            <a:rPr lang="en-US" b="1" i="1" smtClean="0">
+                              <a:solidFill>
+                                <a:schemeClr val="tx1"/>
+                              </a:solidFill>
+                              <a:latin typeface="Cambria Math" panose="02040503050406030204" pitchFamily="18" charset="0"/>
+                            </a:rPr>
+                            <m:t>𝟏</m:t>
+                          </m:r>
+                        </m:sub>
+                      </m:sSub>
+                    </m:oMath>
+                  </a14:m>
+                  <a:r>
+                    <a:rPr lang="en-US" b="1" dirty="0">
+                      <a:solidFill>
+                        <a:schemeClr val="tx1"/>
+                      </a:solidFill>
+                    </a:rPr>
+                    <a:t> (</a:t>
+                  </a:r>
+                  <a14:m>
+                    <m:oMath xmlns:m="http://schemas.openxmlformats.org/officeDocument/2006/math">
+                      <m:r>
+                        <a:rPr lang="en-US" b="1" i="1" dirty="0" smtClean="0">
+                          <a:solidFill>
+                            <a:schemeClr val="tx1"/>
+                          </a:solidFill>
+                          <a:latin typeface="Cambria Math" panose="02040503050406030204" pitchFamily="18" charset="0"/>
+                        </a:rPr>
+                        <m:t>Å</m:t>
+                      </m:r>
+                    </m:oMath>
+                  </a14:m>
+                  <a:r>
+                    <a:rPr lang="en-US" b="1" dirty="0">
+                      <a:solidFill>
+                        <a:schemeClr val="tx1"/>
+                      </a:solidFill>
+                    </a:rPr>
+                    <a:t>)</a:t>
+                  </a:r>
+                </a:p>
+              </p:txBody>
+            </p:sp>
+          </mc:Choice>
+          <mc:Fallback xmlns="">
+            <p:sp>
+              <p:nvSpPr>
+                <p:cNvPr id="9" name="Rectangle 8">
+                  <a:extLst>
+                    <a:ext uri="{FF2B5EF4-FFF2-40B4-BE49-F238E27FC236}">
+                      <a16:creationId xmlns:a16="http://schemas.microsoft.com/office/drawing/2014/main" id="{4966767B-222F-EED6-576E-2C749AF94927}"/>
+                    </a:ext>
+                  </a:extLst>
+                </p:cNvPr>
+                <p:cNvSpPr>
+                  <a:spLocks noRot="1" noChangeAspect="1" noMove="1" noResize="1" noEditPoints="1" noAdjustHandles="1" noChangeArrowheads="1" noChangeShapeType="1" noTextEdit="1"/>
+                </p:cNvSpPr>
+                <p:nvPr/>
+              </p:nvSpPr>
+              <p:spPr>
+                <a:xfrm>
+                  <a:off x="6498791" y="5553517"/>
+                  <a:ext cx="2008599" cy="297950"/>
+                </a:xfrm>
+                <a:prstGeom prst="rect">
+                  <a:avLst/>
+                </a:prstGeom>
+                <a:blipFill>
+                  <a:blip r:embed="rId6"/>
+                  <a:stretch>
+                    <a:fillRect t="-18367" b="-46939"/>
+                  </a:stretch>
+                </a:blipFill>
+                <a:ln>
+                  <a:noFill/>
+                </a:ln>
+              </p:spPr>
+              <p:txBody>
+                <a:bodyPr/>
+                <a:lstStyle/>
+                <a:p>
+                  <a:r>
+                    <a:rPr lang="en-US">
+                      <a:noFill/>
+                    </a:rPr>
+                    <a:t> </a:t>
+                  </a:r>
+                </a:p>
+              </p:txBody>
+            </p:sp>
+          </mc:Fallback>
+        </mc:AlternateContent>
+        <mc:AlternateContent xmlns:mc="http://schemas.openxmlformats.org/markup-compatibility/2006" xmlns:a14="http://schemas.microsoft.com/office/drawing/2010/main">
+          <mc:Choice Requires="a14">
+            <p:sp>
+              <p:nvSpPr>
+                <p:cNvPr id="10" name="Rectangle 9">
+                  <a:extLst>
+                    <a:ext uri="{FF2B5EF4-FFF2-40B4-BE49-F238E27FC236}">
+                      <a16:creationId xmlns:a16="http://schemas.microsoft.com/office/drawing/2014/main" id="{616EF81D-5568-A126-5A73-D60EAB1DA68A}"/>
+                    </a:ext>
+                  </a:extLst>
+                </p:cNvPr>
+                <p:cNvSpPr/>
+                <p:nvPr/>
+              </p:nvSpPr>
+              <p:spPr>
+                <a:xfrm rot="5400000">
+                  <a:off x="4427461" y="3998432"/>
+                  <a:ext cx="545403" cy="282294"/>
+                </a:xfrm>
+                <a:prstGeom prst="rect">
+                  <a:avLst/>
+                </a:prstGeom>
+                <a:solidFill>
+                  <a:schemeClr val="bg1"/>
+                </a:solidFill>
+                <a:ln>
+                  <a:noFill/>
+                </a:ln>
+              </p:spPr>
+              <p:style>
+                <a:lnRef idx="2">
+                  <a:schemeClr val="accent1">
+                    <a:shade val="15000"/>
+                  </a:schemeClr>
+                </a:lnRef>
+                <a:fillRef idx="1">
+                  <a:schemeClr val="accent1"/>
+                </a:fillRef>
+                <a:effectRef idx="0">
+                  <a:schemeClr val="accent1"/>
+                </a:effectRef>
+                <a:fontRef idx="minor">
+                  <a:schemeClr val="lt1"/>
+                </a:fontRef>
+              </p:style>
+              <p:txBody>
+                <a:bodyPr rtlCol="0" anchor="ctr"/>
+                <a:lstStyle/>
+                <a:p>
+                  <a:pPr algn="ctr"/>
+                  <a14:m>
+                    <m:oMath xmlns:m="http://schemas.openxmlformats.org/officeDocument/2006/math">
+                      <m:r>
+                        <a:rPr lang="en-US" sz="1600" b="1" i="1" smtClean="0">
+                          <a:solidFill>
+                            <a:schemeClr val="tx1"/>
+                          </a:solidFill>
+                          <a:latin typeface="Cambria Math" panose="02040503050406030204" pitchFamily="18" charset="0"/>
+                        </a:rPr>
+                        <m:t>𝝉</m:t>
+                      </m:r>
+                    </m:oMath>
+                  </a14:m>
+                  <a:r>
+                    <a:rPr lang="en-US" sz="1600" b="1" dirty="0">
+                      <a:solidFill>
+                        <a:schemeClr val="tx1"/>
+                      </a:solidFill>
+                    </a:rPr>
+                    <a:t> (</a:t>
+                  </a:r>
+                  <a:r>
+                    <a:rPr lang="en-US" sz="1600" b="1" baseline="30000" dirty="0">
+                      <a:solidFill>
+                        <a:schemeClr val="tx1"/>
+                      </a:solidFill>
+                    </a:rPr>
+                    <a:t>o</a:t>
+                  </a:r>
+                  <a:r>
+                    <a:rPr lang="en-US" sz="1600" b="1" dirty="0">
+                      <a:solidFill>
+                        <a:schemeClr val="tx1"/>
+                      </a:solidFill>
+                    </a:rPr>
+                    <a:t>)</a:t>
+                  </a:r>
+                </a:p>
+              </p:txBody>
+            </p:sp>
+          </mc:Choice>
+          <mc:Fallback xmlns="">
+            <p:sp>
+              <p:nvSpPr>
+                <p:cNvPr id="10" name="Rectangle 9">
+                  <a:extLst>
+                    <a:ext uri="{FF2B5EF4-FFF2-40B4-BE49-F238E27FC236}">
+                      <a16:creationId xmlns:a16="http://schemas.microsoft.com/office/drawing/2014/main" id="{616EF81D-5568-A126-5A73-D60EAB1DA68A}"/>
+                    </a:ext>
+                  </a:extLst>
+                </p:cNvPr>
+                <p:cNvSpPr>
+                  <a:spLocks noRot="1" noChangeAspect="1" noMove="1" noResize="1" noEditPoints="1" noAdjustHandles="1" noChangeArrowheads="1" noChangeShapeType="1" noTextEdit="1"/>
+                </p:cNvSpPr>
+                <p:nvPr/>
+              </p:nvSpPr>
+              <p:spPr>
+                <a:xfrm rot="5400000">
+                  <a:off x="4427461" y="3998432"/>
+                  <a:ext cx="545403" cy="282294"/>
+                </a:xfrm>
+                <a:prstGeom prst="rect">
+                  <a:avLst/>
+                </a:prstGeom>
+                <a:blipFill>
+                  <a:blip r:embed="rId7"/>
+                  <a:stretch>
+                    <a:fillRect l="-36957" r="-17391" b="-4444"/>
+                  </a:stretch>
+                </a:blipFill>
+                <a:ln>
+                  <a:noFill/>
+                </a:ln>
+              </p:spPr>
+              <p:txBody>
+                <a:bodyPr/>
+                <a:lstStyle/>
+                <a:p>
+                  <a:r>
+                    <a:rPr lang="en-US">
+                      <a:noFill/>
+                    </a:rPr>
+                    <a:t> </a:t>
+                  </a:r>
+                </a:p>
+              </p:txBody>
+            </p:sp>
+          </mc:Fallback>
+        </mc:AlternateContent>
+        <mc:AlternateContent xmlns:mc="http://schemas.openxmlformats.org/markup-compatibility/2006" xmlns:a14="http://schemas.microsoft.com/office/drawing/2010/main">
+          <mc:Choice Requires="a14">
+            <p:sp>
+              <p:nvSpPr>
+                <p:cNvPr id="11" name="Rectangle 10">
+                  <a:extLst>
+                    <a:ext uri="{FF2B5EF4-FFF2-40B4-BE49-F238E27FC236}">
+                      <a16:creationId xmlns:a16="http://schemas.microsoft.com/office/drawing/2014/main" id="{72F43CF3-38F9-0872-7495-339E87D1C5BC}"/>
+                    </a:ext>
+                  </a:extLst>
+                </p:cNvPr>
+                <p:cNvSpPr/>
+                <p:nvPr/>
+              </p:nvSpPr>
+              <p:spPr>
+                <a:xfrm>
+                  <a:off x="10547913" y="4148786"/>
+                  <a:ext cx="608033" cy="263495"/>
+                </a:xfrm>
+                <a:prstGeom prst="rect">
+                  <a:avLst/>
+                </a:prstGeom>
+                <a:solidFill>
+                  <a:schemeClr val="bg1"/>
+                </a:solidFill>
+                <a:ln>
+                  <a:noFill/>
+                </a:ln>
+              </p:spPr>
+              <p:style>
+                <a:lnRef idx="2">
+                  <a:schemeClr val="accent1">
+                    <a:shade val="15000"/>
+                  </a:schemeClr>
+                </a:lnRef>
+                <a:fillRef idx="1">
+                  <a:schemeClr val="accent1"/>
+                </a:fillRef>
+                <a:effectRef idx="0">
+                  <a:schemeClr val="accent1"/>
+                </a:effectRef>
+                <a:fontRef idx="minor">
+                  <a:schemeClr val="lt1"/>
+                </a:fontRef>
+              </p:style>
+              <p:txBody>
+                <a:bodyPr rtlCol="0" anchor="ctr"/>
+                <a:lstStyle/>
+                <a:p>
+                  <a:pPr algn="ctr"/>
+                  <a14:m>
+                    <m:oMath xmlns:m="http://schemas.openxmlformats.org/officeDocument/2006/math">
+                      <m:r>
+                        <a:rPr lang="en-US" b="1" i="1" smtClean="0">
+                          <a:solidFill>
+                            <a:schemeClr val="tx1"/>
+                          </a:solidFill>
+                          <a:latin typeface="Cambria Math" panose="02040503050406030204" pitchFamily="18" charset="0"/>
+                        </a:rPr>
+                        <m:t>𝝉</m:t>
+                      </m:r>
+                    </m:oMath>
+                  </a14:m>
+                  <a:r>
+                    <a:rPr lang="en-US" b="1" dirty="0">
+                      <a:solidFill>
+                        <a:schemeClr val="tx1"/>
+                      </a:solidFill>
+                    </a:rPr>
+                    <a:t> (</a:t>
+                  </a:r>
+                  <a:r>
+                    <a:rPr lang="en-US" b="1" baseline="30000" dirty="0">
+                      <a:solidFill>
+                        <a:schemeClr val="tx1"/>
+                      </a:solidFill>
+                    </a:rPr>
+                    <a:t>o</a:t>
+                  </a:r>
+                  <a:r>
+                    <a:rPr lang="en-US" b="1" dirty="0">
+                      <a:solidFill>
+                        <a:schemeClr val="tx1"/>
+                      </a:solidFill>
+                    </a:rPr>
+                    <a:t>)</a:t>
+                  </a:r>
+                </a:p>
+              </p:txBody>
+            </p:sp>
+          </mc:Choice>
+          <mc:Fallback xmlns="">
+            <p:sp>
+              <p:nvSpPr>
+                <p:cNvPr id="11" name="Rectangle 10">
+                  <a:extLst>
+                    <a:ext uri="{FF2B5EF4-FFF2-40B4-BE49-F238E27FC236}">
+                      <a16:creationId xmlns:a16="http://schemas.microsoft.com/office/drawing/2014/main" id="{72F43CF3-38F9-0872-7495-339E87D1C5BC}"/>
+                    </a:ext>
+                  </a:extLst>
+                </p:cNvPr>
+                <p:cNvSpPr>
+                  <a:spLocks noRot="1" noChangeAspect="1" noMove="1" noResize="1" noEditPoints="1" noAdjustHandles="1" noChangeArrowheads="1" noChangeShapeType="1" noTextEdit="1"/>
+                </p:cNvSpPr>
+                <p:nvPr/>
+              </p:nvSpPr>
+              <p:spPr>
+                <a:xfrm>
+                  <a:off x="10547913" y="4148786"/>
+                  <a:ext cx="608033" cy="263495"/>
+                </a:xfrm>
+                <a:prstGeom prst="rect">
+                  <a:avLst/>
+                </a:prstGeom>
+                <a:blipFill>
+                  <a:blip r:embed="rId8"/>
+                  <a:stretch>
+                    <a:fillRect t="-30233" r="-5000" b="-58140"/>
+                  </a:stretch>
+                </a:blipFill>
+                <a:ln>
+                  <a:noFill/>
+                </a:ln>
+              </p:spPr>
+              <p:txBody>
+                <a:bodyPr/>
+                <a:lstStyle/>
+                <a:p>
+                  <a:r>
+                    <a:rPr lang="en-US">
+                      <a:noFill/>
+                    </a:rPr>
+                    <a:t> </a:t>
+                  </a:r>
+                </a:p>
+              </p:txBody>
+            </p:sp>
+          </mc:Fallback>
+        </mc:AlternateContent>
+      </p:grpSp>
+    </p:spTree>
+    <p:extLst>
+      <p:ext uri="{BB962C8B-B14F-4D97-AF65-F5344CB8AC3E}">
+        <p14:creationId xmlns:p14="http://schemas.microsoft.com/office/powerpoint/2010/main" val="681791012"/>
+      </p:ext>
+    </p:extLst>
+  </p:cSld>
+  <p:clrMapOvr>
+    <a:masterClrMapping/>
+  </p:clrMapOvr>
+</p:sld>
+</file>
+
+<file path=ppt/slides/slide12.xml><?xml version="1.0" encoding="utf-8"?>
+<p:sld xmlns:a="http://schemas.openxmlformats.org/drawingml/2006/main" xmlns:r="http://schemas.openxmlformats.org/officeDocument/2006/relationships" xmlns:p="http://schemas.openxmlformats.org/presentationml/2006/main">
+  <p:cSld>
+    <p:spTree>
+      <p:nvGrpSpPr>
+        <p:cNvPr id="1" name="">
+          <a:extLst>
+            <a:ext uri="{FF2B5EF4-FFF2-40B4-BE49-F238E27FC236}">
+              <a16:creationId xmlns:a16="http://schemas.microsoft.com/office/drawing/2014/main" id="{1D1D7D43-37A3-7355-7396-F0F7874CCB6A}"/>
+            </a:ext>
+          </a:extLst>
+        </p:cNvPr>
+        <p:cNvGrpSpPr/>
+        <p:nvPr/>
+      </p:nvGrpSpPr>
+      <p:grpSpPr>
+        <a:xfrm>
+          <a:off x="0" y="0"/>
+          <a:ext cx="0" cy="0"/>
+          <a:chOff x="0" y="0"/>
+          <a:chExt cx="0" cy="0"/>
+        </a:xfrm>
+      </p:grpSpPr>
+      <p:grpSp>
+        <p:nvGrpSpPr>
+          <p:cNvPr id="2" name="Group 1">
+            <a:extLst>
+              <a:ext uri="{FF2B5EF4-FFF2-40B4-BE49-F238E27FC236}">
+                <a16:creationId xmlns:a16="http://schemas.microsoft.com/office/drawing/2014/main" id="{FFAFD816-5D18-9CCE-E83F-66168716CC26}"/>
+              </a:ext>
+            </a:extLst>
+          </p:cNvPr>
+          <p:cNvGrpSpPr/>
+          <p:nvPr/>
+        </p:nvGrpSpPr>
+        <p:grpSpPr>
+          <a:xfrm>
+            <a:off x="1988559" y="1232313"/>
+            <a:ext cx="4162740" cy="3692831"/>
+            <a:chOff x="1988559" y="1232313"/>
+            <a:chExt cx="4162740" cy="3692831"/>
+          </a:xfrm>
+        </p:grpSpPr>
+        <p:sp>
+          <p:nvSpPr>
+            <p:cNvPr id="5" name="Oval 4">
+              <a:extLst>
+                <a:ext uri="{FF2B5EF4-FFF2-40B4-BE49-F238E27FC236}">
+                  <a16:creationId xmlns:a16="http://schemas.microsoft.com/office/drawing/2014/main" id="{F90E14E4-39AA-CDE4-3A1D-88923DA8EBD8}"/>
+                </a:ext>
+              </a:extLst>
+            </p:cNvPr>
+            <p:cNvSpPr/>
+            <p:nvPr/>
+          </p:nvSpPr>
+          <p:spPr>
+            <a:xfrm>
+              <a:off x="5277153" y="1232313"/>
+              <a:ext cx="874146" cy="930217"/>
+            </a:xfrm>
+            <a:prstGeom prst="ellipse">
+              <a:avLst/>
+            </a:prstGeom>
+            <a:noFill/>
+          </p:spPr>
+          <p:style>
+            <a:lnRef idx="2">
+              <a:schemeClr val="accent1">
+                <a:shade val="15000"/>
+              </a:schemeClr>
+            </a:lnRef>
+            <a:fillRef idx="1">
+              <a:schemeClr val="accent1"/>
+            </a:fillRef>
+            <a:effectRef idx="0">
+              <a:schemeClr val="accent1"/>
+            </a:effectRef>
+            <a:fontRef idx="minor">
+              <a:schemeClr val="lt1"/>
+            </a:fontRef>
+          </p:style>
+          <p:txBody>
+            <a:bodyPr rtlCol="0" anchor="ctr"/>
+            <a:lstStyle/>
+            <a:p>
+              <a:pPr algn="ctr"/>
+              <a:r>
+                <a:rPr lang="en-US" sz="3200" dirty="0">
+                  <a:solidFill>
+                    <a:schemeClr val="tx1"/>
+                  </a:solidFill>
+                  <a:latin typeface="Tahoma" panose="020B0604030504040204" pitchFamily="34" charset="0"/>
+                  <a:ea typeface="Tahoma" panose="020B0604030504040204" pitchFamily="34" charset="0"/>
+                  <a:cs typeface="Tahoma" panose="020B0604030504040204" pitchFamily="34" charset="0"/>
+                </a:rPr>
+                <a:t>H</a:t>
+              </a:r>
+            </a:p>
+          </p:txBody>
+        </p:sp>
+        <p:sp>
+          <p:nvSpPr>
+            <p:cNvPr id="6" name="Oval 5">
+              <a:extLst>
+                <a:ext uri="{FF2B5EF4-FFF2-40B4-BE49-F238E27FC236}">
+                  <a16:creationId xmlns:a16="http://schemas.microsoft.com/office/drawing/2014/main" id="{819463EE-F7C6-83F9-9069-F2D758BC7C18}"/>
+                </a:ext>
+              </a:extLst>
+            </p:cNvPr>
+            <p:cNvSpPr/>
+            <p:nvPr/>
+          </p:nvSpPr>
+          <p:spPr>
+            <a:xfrm>
+              <a:off x="3807104" y="2033674"/>
+              <a:ext cx="874146" cy="930217"/>
+            </a:xfrm>
+            <a:prstGeom prst="ellipse">
+              <a:avLst/>
+            </a:prstGeom>
+            <a:solidFill>
+              <a:srgbClr val="E06E6E"/>
+            </a:solidFill>
+          </p:spPr>
+          <p:style>
+            <a:lnRef idx="2">
+              <a:schemeClr val="accent1">
+                <a:shade val="15000"/>
+              </a:schemeClr>
+            </a:lnRef>
+            <a:fillRef idx="1">
+              <a:schemeClr val="accent1"/>
+            </a:fillRef>
+            <a:effectRef idx="0">
+              <a:schemeClr val="accent1"/>
+            </a:effectRef>
+            <a:fontRef idx="minor">
+              <a:schemeClr val="lt1"/>
+            </a:fontRef>
+          </p:style>
+          <p:txBody>
+            <a:bodyPr rtlCol="0" anchor="ctr"/>
+            <a:lstStyle/>
+            <a:p>
+              <a:pPr algn="ctr"/>
+              <a:r>
+                <a:rPr lang="en-US" sz="3200" dirty="0">
+                  <a:solidFill>
+                    <a:schemeClr val="tx1"/>
+                  </a:solidFill>
+                  <a:latin typeface="Tahoma" panose="020B0604030504040204" pitchFamily="34" charset="0"/>
+                  <a:ea typeface="Tahoma" panose="020B0604030504040204" pitchFamily="34" charset="0"/>
+                  <a:cs typeface="Tahoma" panose="020B0604030504040204" pitchFamily="34" charset="0"/>
+                </a:rPr>
+                <a:t>O</a:t>
+              </a:r>
+            </a:p>
+          </p:txBody>
+        </p:sp>
+        <p:sp>
+          <p:nvSpPr>
+            <p:cNvPr id="7" name="Oval 6">
+              <a:extLst>
+                <a:ext uri="{FF2B5EF4-FFF2-40B4-BE49-F238E27FC236}">
+                  <a16:creationId xmlns:a16="http://schemas.microsoft.com/office/drawing/2014/main" id="{7D54FC79-6E7B-17EA-3A53-06C9877EA877}"/>
+                </a:ext>
+              </a:extLst>
+            </p:cNvPr>
+            <p:cNvSpPr/>
+            <p:nvPr/>
+          </p:nvSpPr>
+          <p:spPr>
+            <a:xfrm>
+              <a:off x="3807104" y="3702725"/>
+              <a:ext cx="874146" cy="930217"/>
+            </a:xfrm>
+            <a:prstGeom prst="ellipse">
+              <a:avLst/>
+            </a:prstGeom>
+            <a:solidFill>
+              <a:schemeClr val="accent5">
+                <a:lumMod val="40000"/>
+                <a:lumOff val="60000"/>
+              </a:schemeClr>
+            </a:solidFill>
+          </p:spPr>
+          <p:style>
+            <a:lnRef idx="2">
+              <a:schemeClr val="accent1">
+                <a:shade val="15000"/>
+              </a:schemeClr>
+            </a:lnRef>
+            <a:fillRef idx="1">
+              <a:schemeClr val="accent1"/>
+            </a:fillRef>
+            <a:effectRef idx="0">
+              <a:schemeClr val="accent1"/>
+            </a:effectRef>
+            <a:fontRef idx="minor">
+              <a:schemeClr val="lt1"/>
+            </a:fontRef>
+          </p:style>
+          <p:txBody>
+            <a:bodyPr rtlCol="0" anchor="ctr"/>
+            <a:lstStyle/>
+            <a:p>
+              <a:pPr algn="ctr"/>
+              <a:r>
+                <a:rPr lang="en-US" sz="3200" dirty="0">
+                  <a:solidFill>
+                    <a:schemeClr val="tx1"/>
+                  </a:solidFill>
+                  <a:latin typeface="Tahoma" panose="020B0604030504040204" pitchFamily="34" charset="0"/>
+                  <a:ea typeface="Tahoma" panose="020B0604030504040204" pitchFamily="34" charset="0"/>
+                  <a:cs typeface="Tahoma" panose="020B0604030504040204" pitchFamily="34" charset="0"/>
+                </a:rPr>
+                <a:t>P</a:t>
+              </a:r>
+            </a:p>
+          </p:txBody>
+        </p:sp>
+        <p:sp>
+          <p:nvSpPr>
+            <p:cNvPr id="8" name="Oval 7">
+              <a:extLst>
+                <a:ext uri="{FF2B5EF4-FFF2-40B4-BE49-F238E27FC236}">
+                  <a16:creationId xmlns:a16="http://schemas.microsoft.com/office/drawing/2014/main" id="{B09C3061-9CDF-92B2-AB0A-22AECB1C86AB}"/>
+                </a:ext>
+              </a:extLst>
+            </p:cNvPr>
+            <p:cNvSpPr/>
+            <p:nvPr/>
+          </p:nvSpPr>
+          <p:spPr>
+            <a:xfrm>
+              <a:off x="1988559" y="3994927"/>
+              <a:ext cx="874146" cy="930217"/>
+            </a:xfrm>
+            <a:prstGeom prst="ellipse">
+              <a:avLst/>
+            </a:prstGeom>
+            <a:solidFill>
+              <a:srgbClr val="E06E6E"/>
+            </a:solidFill>
+          </p:spPr>
+          <p:style>
+            <a:lnRef idx="2">
+              <a:schemeClr val="accent1">
+                <a:shade val="15000"/>
+              </a:schemeClr>
+            </a:lnRef>
+            <a:fillRef idx="1">
+              <a:schemeClr val="accent1"/>
+            </a:fillRef>
+            <a:effectRef idx="0">
+              <a:schemeClr val="accent1"/>
+            </a:effectRef>
+            <a:fontRef idx="minor">
+              <a:schemeClr val="lt1"/>
+            </a:fontRef>
+          </p:style>
+          <p:txBody>
+            <a:bodyPr rtlCol="0" anchor="ctr"/>
+            <a:lstStyle/>
+            <a:p>
+              <a:pPr algn="ctr"/>
+              <a:r>
+                <a:rPr lang="en-US" sz="3200" dirty="0">
+                  <a:solidFill>
+                    <a:schemeClr val="tx1"/>
+                  </a:solidFill>
+                  <a:latin typeface="Tahoma" panose="020B0604030504040204" pitchFamily="34" charset="0"/>
+                  <a:ea typeface="Tahoma" panose="020B0604030504040204" pitchFamily="34" charset="0"/>
+                  <a:cs typeface="Tahoma" panose="020B0604030504040204" pitchFamily="34" charset="0"/>
+                </a:rPr>
+                <a:t>O</a:t>
+              </a:r>
+            </a:p>
+          </p:txBody>
+        </p:sp>
+        <p:cxnSp>
+          <p:nvCxnSpPr>
+            <p:cNvPr id="9" name="Straight Connector 8">
+              <a:extLst>
+                <a:ext uri="{FF2B5EF4-FFF2-40B4-BE49-F238E27FC236}">
+                  <a16:creationId xmlns:a16="http://schemas.microsoft.com/office/drawing/2014/main" id="{5C5B1FEB-60E6-9CCD-C93F-C89636590380}"/>
+                </a:ext>
+              </a:extLst>
+            </p:cNvPr>
+            <p:cNvCxnSpPr>
+              <a:cxnSpLocks/>
+            </p:cNvCxnSpPr>
+            <p:nvPr/>
+          </p:nvCxnSpPr>
+          <p:spPr>
+            <a:xfrm flipH="1">
+              <a:off x="4605685" y="1903228"/>
+              <a:ext cx="699962" cy="335887"/>
+            </a:xfrm>
+            <a:prstGeom prst="line">
+              <a:avLst/>
+            </a:prstGeom>
+          </p:spPr>
+          <p:style>
+            <a:lnRef idx="2">
+              <a:schemeClr val="dk1"/>
+            </a:lnRef>
+            <a:fillRef idx="0">
+              <a:schemeClr val="dk1"/>
+            </a:fillRef>
+            <a:effectRef idx="1">
+              <a:schemeClr val="dk1"/>
+            </a:effectRef>
+            <a:fontRef idx="minor">
+              <a:schemeClr val="tx1"/>
+            </a:fontRef>
+          </p:style>
+        </p:cxnSp>
+        <p:cxnSp>
+          <p:nvCxnSpPr>
+            <p:cNvPr id="10" name="Straight Connector 9">
+              <a:extLst>
+                <a:ext uri="{FF2B5EF4-FFF2-40B4-BE49-F238E27FC236}">
+                  <a16:creationId xmlns:a16="http://schemas.microsoft.com/office/drawing/2014/main" id="{1B37178B-0E91-4A67-812E-AB062E16375A}"/>
+                </a:ext>
+              </a:extLst>
+            </p:cNvPr>
+            <p:cNvCxnSpPr>
+              <a:cxnSpLocks/>
+            </p:cNvCxnSpPr>
+            <p:nvPr/>
+          </p:nvCxnSpPr>
+          <p:spPr>
+            <a:xfrm rot="10800000">
+              <a:off x="4244177" y="2963891"/>
+              <a:ext cx="0" cy="738834"/>
+            </a:xfrm>
+            <a:prstGeom prst="line">
+              <a:avLst/>
+            </a:prstGeom>
+            <a:ln w="31750" cap="flat" cmpd="sng" algn="ctr">
+              <a:solidFill>
+                <a:schemeClr val="dk1"/>
+              </a:solidFill>
+              <a:prstDash val="solid"/>
+              <a:round/>
+              <a:headEnd type="none" w="med" len="med"/>
+              <a:tailEnd type="arrow" w="med" len="med"/>
+            </a:ln>
+          </p:spPr>
+          <p:style>
+            <a:lnRef idx="0">
+              <a:scrgbClr r="0" g="0" b="0"/>
+            </a:lnRef>
+            <a:fillRef idx="0">
+              <a:scrgbClr r="0" g="0" b="0"/>
+            </a:fillRef>
+            <a:effectRef idx="0">
+              <a:scrgbClr r="0" g="0" b="0"/>
+            </a:effectRef>
+            <a:fontRef idx="minor">
+              <a:schemeClr val="tx1"/>
+            </a:fontRef>
+          </p:style>
+        </p:cxnSp>
+        <p:cxnSp>
+          <p:nvCxnSpPr>
+            <p:cNvPr id="11" name="Straight Connector 10">
+              <a:extLst>
+                <a:ext uri="{FF2B5EF4-FFF2-40B4-BE49-F238E27FC236}">
+                  <a16:creationId xmlns:a16="http://schemas.microsoft.com/office/drawing/2014/main" id="{CA65F30A-4346-1E5B-6A51-17E5D3452F97}"/>
+                </a:ext>
+              </a:extLst>
+            </p:cNvPr>
+            <p:cNvCxnSpPr>
+              <a:cxnSpLocks/>
+            </p:cNvCxnSpPr>
+            <p:nvPr/>
+          </p:nvCxnSpPr>
+          <p:spPr>
+            <a:xfrm rot="10800000" flipV="1">
+              <a:off x="2862705" y="4231753"/>
+              <a:ext cx="944399" cy="148856"/>
+            </a:xfrm>
+            <a:prstGeom prst="line">
+              <a:avLst/>
+            </a:prstGeom>
+            <a:ln w="31750" cap="flat" cmpd="sng" algn="ctr">
+              <a:solidFill>
+                <a:schemeClr val="dk1"/>
+              </a:solidFill>
+              <a:prstDash val="solid"/>
+              <a:round/>
+              <a:headEnd type="none" w="med" len="med"/>
+              <a:tailEnd type="arrow" w="med" len="med"/>
+            </a:ln>
+          </p:spPr>
+          <p:style>
+            <a:lnRef idx="0">
+              <a:scrgbClr r="0" g="0" b="0"/>
+            </a:lnRef>
+            <a:fillRef idx="0">
+              <a:scrgbClr r="0" g="0" b="0"/>
+            </a:fillRef>
+            <a:effectRef idx="0">
+              <a:scrgbClr r="0" g="0" b="0"/>
+            </a:effectRef>
+            <a:fontRef idx="minor">
+              <a:schemeClr val="tx1"/>
+            </a:fontRef>
+          </p:style>
+        </p:cxnSp>
+        <mc:AlternateContent xmlns:mc="http://schemas.openxmlformats.org/markup-compatibility/2006" xmlns:a14="http://schemas.microsoft.com/office/drawing/2010/main">
+          <mc:Choice Requires="a14">
+            <p:sp>
+              <p:nvSpPr>
+                <p:cNvPr id="50" name="TextBox 49">
+                  <a:extLst>
+                    <a:ext uri="{FF2B5EF4-FFF2-40B4-BE49-F238E27FC236}">
+                      <a16:creationId xmlns:a16="http://schemas.microsoft.com/office/drawing/2014/main" id="{3032E201-B7A7-BC28-677D-E7FBC28F5CD0}"/>
+                    </a:ext>
+                  </a:extLst>
+                </p:cNvPr>
+                <p:cNvSpPr txBox="1"/>
+                <p:nvPr/>
+              </p:nvSpPr>
+              <p:spPr>
+                <a:xfrm>
+                  <a:off x="4244177" y="3115340"/>
+                  <a:ext cx="559705" cy="461665"/>
+                </a:xfrm>
+                <a:prstGeom prst="rect">
+                  <a:avLst/>
+                </a:prstGeom>
+                <a:noFill/>
+              </p:spPr>
+              <p:txBody>
+                <a:bodyPr wrap="none" rtlCol="0">
+                  <a:spAutoFit/>
+                </a:bodyPr>
+                <a:lstStyle/>
+                <a:p>
+                  <a:pPr/>
+                  <a14:m>
+                    <m:oMathPara xmlns:m="http://schemas.openxmlformats.org/officeDocument/2006/math">
+                      <m:oMathParaPr>
+                        <m:jc m:val="centerGroup"/>
+                      </m:oMathParaPr>
+                      <m:oMath xmlns:m="http://schemas.openxmlformats.org/officeDocument/2006/math">
+                        <m:sSub>
+                          <m:sSubPr>
+                            <m:ctrlPr>
+                              <a:rPr lang="en-US" sz="2400" b="1" i="1" smtClean="0">
+                                <a:latin typeface="Cambria Math" panose="02040503050406030204" pitchFamily="18" charset="0"/>
+                              </a:rPr>
+                            </m:ctrlPr>
+                          </m:sSubPr>
+                          <m:e>
+                            <m:r>
+                              <a:rPr lang="en-US" sz="2400" b="1" i="1" smtClean="0">
+                                <a:latin typeface="Cambria Math" panose="02040503050406030204" pitchFamily="18" charset="0"/>
+                              </a:rPr>
+                              <m:t>𝒓</m:t>
+                            </m:r>
+                          </m:e>
+                          <m:sub>
+                            <m:r>
+                              <a:rPr lang="en-US" sz="2400" b="1" i="1" smtClean="0">
+                                <a:latin typeface="Cambria Math" panose="02040503050406030204" pitchFamily="18" charset="0"/>
+                              </a:rPr>
+                              <m:t>𝟏</m:t>
+                            </m:r>
+                          </m:sub>
+                        </m:sSub>
+                      </m:oMath>
+                    </m:oMathPara>
+                  </a14:m>
+                  <a:endParaRPr lang="en-US" sz="2400" b="1" dirty="0"/>
+                </a:p>
+              </p:txBody>
+            </p:sp>
+          </mc:Choice>
+          <mc:Fallback xmlns="">
+            <p:sp>
+              <p:nvSpPr>
+                <p:cNvPr id="50" name="TextBox 49">
+                  <a:extLst>
+                    <a:ext uri="{FF2B5EF4-FFF2-40B4-BE49-F238E27FC236}">
+                      <a16:creationId xmlns:a16="http://schemas.microsoft.com/office/drawing/2014/main" id="{3032E201-B7A7-BC28-677D-E7FBC28F5CD0}"/>
+                    </a:ext>
+                  </a:extLst>
+                </p:cNvPr>
+                <p:cNvSpPr txBox="1">
+                  <a:spLocks noRot="1" noChangeAspect="1" noMove="1" noResize="1" noEditPoints="1" noAdjustHandles="1" noChangeArrowheads="1" noChangeShapeType="1" noTextEdit="1"/>
+                </p:cNvSpPr>
+                <p:nvPr/>
+              </p:nvSpPr>
+              <p:spPr>
+                <a:xfrm>
+                  <a:off x="4244177" y="3115340"/>
+                  <a:ext cx="559705" cy="461665"/>
+                </a:xfrm>
+                <a:prstGeom prst="rect">
+                  <a:avLst/>
+                </a:prstGeom>
+                <a:blipFill>
+                  <a:blip r:embed="rId2"/>
+                  <a:stretch>
+                    <a:fillRect b="-1316"/>
+                  </a:stretch>
+                </a:blipFill>
+              </p:spPr>
+              <p:txBody>
+                <a:bodyPr/>
+                <a:lstStyle/>
+                <a:p>
+                  <a:r>
+                    <a:rPr lang="en-US">
+                      <a:noFill/>
+                    </a:rPr>
+                    <a:t> </a:t>
+                  </a:r>
+                </a:p>
+              </p:txBody>
+            </p:sp>
+          </mc:Fallback>
+        </mc:AlternateContent>
+        <mc:AlternateContent xmlns:mc="http://schemas.openxmlformats.org/markup-compatibility/2006" xmlns:a14="http://schemas.microsoft.com/office/drawing/2010/main">
+          <mc:Choice Requires="a14">
+            <p:sp>
+              <p:nvSpPr>
+                <p:cNvPr id="51" name="TextBox 50">
+                  <a:extLst>
+                    <a:ext uri="{FF2B5EF4-FFF2-40B4-BE49-F238E27FC236}">
+                      <a16:creationId xmlns:a16="http://schemas.microsoft.com/office/drawing/2014/main" id="{CE2DD1B8-13B0-8B4C-F230-AE9329AF7797}"/>
+                    </a:ext>
+                  </a:extLst>
+                </p:cNvPr>
+                <p:cNvSpPr txBox="1"/>
+                <p:nvPr/>
+              </p:nvSpPr>
+              <p:spPr>
+                <a:xfrm>
+                  <a:off x="3053449" y="3785714"/>
+                  <a:ext cx="559705" cy="461665"/>
+                </a:xfrm>
+                <a:prstGeom prst="rect">
+                  <a:avLst/>
+                </a:prstGeom>
+                <a:noFill/>
+              </p:spPr>
+              <p:txBody>
+                <a:bodyPr wrap="none" rtlCol="0">
+                  <a:spAutoFit/>
+                </a:bodyPr>
+                <a:lstStyle/>
+                <a:p>
+                  <a:pPr/>
+                  <a14:m>
+                    <m:oMathPara xmlns:m="http://schemas.openxmlformats.org/officeDocument/2006/math">
+                      <m:oMathParaPr>
+                        <m:jc m:val="centerGroup"/>
+                      </m:oMathParaPr>
+                      <m:oMath xmlns:m="http://schemas.openxmlformats.org/officeDocument/2006/math">
+                        <m:sSub>
+                          <m:sSubPr>
+                            <m:ctrlPr>
+                              <a:rPr lang="en-US" sz="2400" b="1" i="1" smtClean="0">
+                                <a:latin typeface="Cambria Math" panose="02040503050406030204" pitchFamily="18" charset="0"/>
+                              </a:rPr>
+                            </m:ctrlPr>
+                          </m:sSubPr>
+                          <m:e>
+                            <m:r>
+                              <a:rPr lang="en-US" sz="2400" b="1" i="1" smtClean="0">
+                                <a:latin typeface="Cambria Math" panose="02040503050406030204" pitchFamily="18" charset="0"/>
+                              </a:rPr>
+                              <m:t>𝒓</m:t>
+                            </m:r>
+                          </m:e>
+                          <m:sub>
+                            <m:r>
+                              <a:rPr lang="en-US" sz="2400" b="1" i="1" smtClean="0">
+                                <a:latin typeface="Cambria Math" panose="02040503050406030204" pitchFamily="18" charset="0"/>
+                              </a:rPr>
+                              <m:t>𝟐</m:t>
+                            </m:r>
+                          </m:sub>
+                        </m:sSub>
+                      </m:oMath>
+                    </m:oMathPara>
+                  </a14:m>
+                  <a:endParaRPr lang="en-US" sz="2400" b="1" dirty="0"/>
+                </a:p>
+              </p:txBody>
+            </p:sp>
+          </mc:Choice>
+          <mc:Fallback xmlns="">
+            <p:sp>
+              <p:nvSpPr>
+                <p:cNvPr id="51" name="TextBox 50">
+                  <a:extLst>
+                    <a:ext uri="{FF2B5EF4-FFF2-40B4-BE49-F238E27FC236}">
+                      <a16:creationId xmlns:a16="http://schemas.microsoft.com/office/drawing/2014/main" id="{CE2DD1B8-13B0-8B4C-F230-AE9329AF7797}"/>
+                    </a:ext>
+                  </a:extLst>
+                </p:cNvPr>
+                <p:cNvSpPr txBox="1">
+                  <a:spLocks noRot="1" noChangeAspect="1" noMove="1" noResize="1" noEditPoints="1" noAdjustHandles="1" noChangeArrowheads="1" noChangeShapeType="1" noTextEdit="1"/>
+                </p:cNvSpPr>
+                <p:nvPr/>
+              </p:nvSpPr>
+              <p:spPr>
+                <a:xfrm>
+                  <a:off x="3053449" y="3785714"/>
+                  <a:ext cx="559705" cy="461665"/>
+                </a:xfrm>
+                <a:prstGeom prst="rect">
+                  <a:avLst/>
+                </a:prstGeom>
+                <a:blipFill>
+                  <a:blip r:embed="rId3"/>
+                  <a:stretch>
+                    <a:fillRect b="-1316"/>
+                  </a:stretch>
+                </a:blipFill>
+              </p:spPr>
+              <p:txBody>
+                <a:bodyPr/>
+                <a:lstStyle/>
+                <a:p>
+                  <a:r>
+                    <a:rPr lang="en-US">
+                      <a:noFill/>
+                    </a:rPr>
+                    <a:t> </a:t>
+                  </a:r>
+                </a:p>
+              </p:txBody>
+            </p:sp>
+          </mc:Fallback>
+        </mc:AlternateContent>
+      </p:grpSp>
+    </p:spTree>
+    <p:extLst>
+      <p:ext uri="{BB962C8B-B14F-4D97-AF65-F5344CB8AC3E}">
+        <p14:creationId xmlns:p14="http://schemas.microsoft.com/office/powerpoint/2010/main" val="2440703012"/>
+      </p:ext>
+    </p:extLst>
+  </p:cSld>
+  <p:clrMapOvr>
+    <a:masterClrMapping/>
+  </p:clrMapOvr>
+</p:sld>
+</file>
+
+<file path=ppt/slides/slide13.xml><?xml version="1.0" encoding="utf-8"?>
+<p:sld xmlns:a="http://schemas.openxmlformats.org/drawingml/2006/main" xmlns:r="http://schemas.openxmlformats.org/officeDocument/2006/relationships" xmlns:p="http://schemas.openxmlformats.org/presentationml/2006/main">
+  <p:cSld>
+    <p:spTree>
+      <p:nvGrpSpPr>
+        <p:cNvPr id="1" name=""/>
+        <p:cNvGrpSpPr/>
+        <p:nvPr/>
+      </p:nvGrpSpPr>
+      <p:grpSpPr>
+        <a:xfrm>
+          <a:off x="0" y="0"/>
+          <a:ext cx="0" cy="0"/>
+          <a:chOff x="0" y="0"/>
+          <a:chExt cx="0" cy="0"/>
+        </a:xfrm>
+      </p:grpSpPr>
+      <p:grpSp>
+        <p:nvGrpSpPr>
           <p:cNvPr id="44" name="Group 43">
             <a:extLst>
               <a:ext uri="{FF2B5EF4-FFF2-40B4-BE49-F238E27FC236}">
@@ -6029,7 +8328,7 @@
 </p:sld>
 </file>
 
-<file path=ppt/slides/slide11.xml><?xml version="1.0" encoding="utf-8"?>
+<file path=ppt/slides/slide14.xml><?xml version="1.0" encoding="utf-8"?>
 <p:sld xmlns:a="http://schemas.openxmlformats.org/drawingml/2006/main" xmlns:r="http://schemas.openxmlformats.org/officeDocument/2006/relationships" xmlns:p="http://schemas.openxmlformats.org/presentationml/2006/main">
   <p:cSld>
     <p:spTree>
@@ -6452,7 +8751,7 @@
 </p:sld>
 </file>
 
-<file path=ppt/slides/slide12.xml><?xml version="1.0" encoding="utf-8"?>
+<file path=ppt/slides/slide15.xml><?xml version="1.0" encoding="utf-8"?>
 <p:sld xmlns:a="http://schemas.openxmlformats.org/drawingml/2006/main" xmlns:r="http://schemas.openxmlformats.org/officeDocument/2006/relationships" xmlns:p="http://schemas.openxmlformats.org/presentationml/2006/main">
   <p:cSld>
     <p:spTree>
@@ -6519,6 +8818,838 @@
 </file>
 
 <file path=ppt/slides/slide2.xml><?xml version="1.0" encoding="utf-8"?>
+<p:sld xmlns:a="http://schemas.openxmlformats.org/drawingml/2006/main" xmlns:r="http://schemas.openxmlformats.org/officeDocument/2006/relationships" xmlns:p="http://schemas.openxmlformats.org/presentationml/2006/main">
+  <p:cSld>
+    <p:spTree>
+      <p:nvGrpSpPr>
+        <p:cNvPr id="1" name="">
+          <a:extLst>
+            <a:ext uri="{FF2B5EF4-FFF2-40B4-BE49-F238E27FC236}">
+              <a16:creationId xmlns:a16="http://schemas.microsoft.com/office/drawing/2014/main" id="{7C2D2974-7786-6E78-E2F7-DB37EED1E93F}"/>
+            </a:ext>
+          </a:extLst>
+        </p:cNvPr>
+        <p:cNvGrpSpPr/>
+        <p:nvPr/>
+      </p:nvGrpSpPr>
+      <p:grpSpPr>
+        <a:xfrm>
+          <a:off x="0" y="0"/>
+          <a:ext cx="0" cy="0"/>
+          <a:chOff x="0" y="0"/>
+          <a:chExt cx="0" cy="0"/>
+        </a:xfrm>
+      </p:grpSpPr>
+      <p:grpSp>
+        <p:nvGrpSpPr>
+          <p:cNvPr id="22" name="Group 21">
+            <a:extLst>
+              <a:ext uri="{FF2B5EF4-FFF2-40B4-BE49-F238E27FC236}">
+                <a16:creationId xmlns:a16="http://schemas.microsoft.com/office/drawing/2014/main" id="{9B79F697-8D24-79E5-DF0B-FF0C258222E8}"/>
+              </a:ext>
+            </a:extLst>
+          </p:cNvPr>
+          <p:cNvGrpSpPr>
+            <a:grpSpLocks noChangeAspect="1"/>
+          </p:cNvGrpSpPr>
+          <p:nvPr/>
+        </p:nvGrpSpPr>
+        <p:grpSpPr>
+          <a:xfrm>
+            <a:off x="2265732" y="1365440"/>
+            <a:ext cx="6444878" cy="3764152"/>
+            <a:chOff x="535574" y="1330322"/>
+            <a:chExt cx="3195514" cy="1866350"/>
+          </a:xfrm>
+        </p:grpSpPr>
+        <p:sp>
+          <p:nvSpPr>
+            <p:cNvPr id="5" name="Oval 4">
+              <a:extLst>
+                <a:ext uri="{FF2B5EF4-FFF2-40B4-BE49-F238E27FC236}">
+                  <a16:creationId xmlns:a16="http://schemas.microsoft.com/office/drawing/2014/main" id="{535A92B4-7C2D-996D-EF12-4E82CCAB7222}"/>
+                </a:ext>
+              </a:extLst>
+            </p:cNvPr>
+            <p:cNvSpPr/>
+            <p:nvPr/>
+          </p:nvSpPr>
+          <p:spPr>
+            <a:xfrm>
+              <a:off x="535574" y="2525444"/>
+              <a:ext cx="433421" cy="461222"/>
+            </a:xfrm>
+            <a:prstGeom prst="ellipse">
+              <a:avLst/>
+            </a:prstGeom>
+            <a:noFill/>
+          </p:spPr>
+          <p:style>
+            <a:lnRef idx="2">
+              <a:schemeClr val="accent1">
+                <a:shade val="15000"/>
+              </a:schemeClr>
+            </a:lnRef>
+            <a:fillRef idx="1">
+              <a:schemeClr val="accent1"/>
+            </a:fillRef>
+            <a:effectRef idx="0">
+              <a:schemeClr val="accent1"/>
+            </a:effectRef>
+            <a:fontRef idx="minor">
+              <a:schemeClr val="lt1"/>
+            </a:fontRef>
+          </p:style>
+          <p:txBody>
+            <a:bodyPr rtlCol="0" anchor="ctr"/>
+            <a:lstStyle/>
+            <a:p>
+              <a:pPr algn="ctr"/>
+              <a:r>
+                <a:rPr lang="en-US" sz="3200" dirty="0">
+                  <a:solidFill>
+                    <a:schemeClr val="tx1"/>
+                  </a:solidFill>
+                  <a:latin typeface="Tahoma" panose="020B0604030504040204" pitchFamily="34" charset="0"/>
+                  <a:ea typeface="Tahoma" panose="020B0604030504040204" pitchFamily="34" charset="0"/>
+                  <a:cs typeface="Tahoma" panose="020B0604030504040204" pitchFamily="34" charset="0"/>
+                </a:rPr>
+                <a:t>H</a:t>
+              </a:r>
+            </a:p>
+          </p:txBody>
+        </p:sp>
+        <p:sp>
+          <p:nvSpPr>
+            <p:cNvPr id="6" name="Oval 5">
+              <a:extLst>
+                <a:ext uri="{FF2B5EF4-FFF2-40B4-BE49-F238E27FC236}">
+                  <a16:creationId xmlns:a16="http://schemas.microsoft.com/office/drawing/2014/main" id="{DB97AF73-7652-32C2-746A-C842EB5DD1F3}"/>
+                </a:ext>
+              </a:extLst>
+            </p:cNvPr>
+            <p:cNvSpPr/>
+            <p:nvPr/>
+          </p:nvSpPr>
+          <p:spPr>
+            <a:xfrm>
+              <a:off x="968995" y="1330322"/>
+              <a:ext cx="433421" cy="461222"/>
+            </a:xfrm>
+            <a:prstGeom prst="ellipse">
+              <a:avLst/>
+            </a:prstGeom>
+            <a:solidFill>
+              <a:srgbClr val="E06E6E"/>
+            </a:solidFill>
+          </p:spPr>
+          <p:style>
+            <a:lnRef idx="2">
+              <a:schemeClr val="accent1">
+                <a:shade val="15000"/>
+              </a:schemeClr>
+            </a:lnRef>
+            <a:fillRef idx="1">
+              <a:schemeClr val="accent1"/>
+            </a:fillRef>
+            <a:effectRef idx="0">
+              <a:schemeClr val="accent1"/>
+            </a:effectRef>
+            <a:fontRef idx="minor">
+              <a:schemeClr val="lt1"/>
+            </a:fontRef>
+          </p:style>
+          <p:txBody>
+            <a:bodyPr rtlCol="0" anchor="ctr"/>
+            <a:lstStyle/>
+            <a:p>
+              <a:pPr algn="ctr"/>
+              <a:r>
+                <a:rPr lang="en-US" sz="3200" dirty="0">
+                  <a:solidFill>
+                    <a:schemeClr val="tx1"/>
+                  </a:solidFill>
+                  <a:latin typeface="Tahoma" panose="020B0604030504040204" pitchFamily="34" charset="0"/>
+                  <a:ea typeface="Tahoma" panose="020B0604030504040204" pitchFamily="34" charset="0"/>
+                  <a:cs typeface="Tahoma" panose="020B0604030504040204" pitchFamily="34" charset="0"/>
+                </a:rPr>
+                <a:t>O</a:t>
+              </a:r>
+            </a:p>
+          </p:txBody>
+        </p:sp>
+        <p:sp>
+          <p:nvSpPr>
+            <p:cNvPr id="7" name="Oval 6">
+              <a:extLst>
+                <a:ext uri="{FF2B5EF4-FFF2-40B4-BE49-F238E27FC236}">
+                  <a16:creationId xmlns:a16="http://schemas.microsoft.com/office/drawing/2014/main" id="{5AE93FF4-FBE2-23AF-EC99-C7AA1B4FB938}"/>
+                </a:ext>
+              </a:extLst>
+            </p:cNvPr>
+            <p:cNvSpPr/>
+            <p:nvPr/>
+          </p:nvSpPr>
+          <p:spPr>
+            <a:xfrm>
+              <a:off x="2766223" y="1330322"/>
+              <a:ext cx="433421" cy="461222"/>
+            </a:xfrm>
+            <a:prstGeom prst="ellipse">
+              <a:avLst/>
+            </a:prstGeom>
+            <a:solidFill>
+              <a:schemeClr val="accent5">
+                <a:lumMod val="40000"/>
+                <a:lumOff val="60000"/>
+              </a:schemeClr>
+            </a:solidFill>
+          </p:spPr>
+          <p:style>
+            <a:lnRef idx="2">
+              <a:schemeClr val="accent1">
+                <a:shade val="15000"/>
+              </a:schemeClr>
+            </a:lnRef>
+            <a:fillRef idx="1">
+              <a:schemeClr val="accent1"/>
+            </a:fillRef>
+            <a:effectRef idx="0">
+              <a:schemeClr val="accent1"/>
+            </a:effectRef>
+            <a:fontRef idx="minor">
+              <a:schemeClr val="lt1"/>
+            </a:fontRef>
+          </p:style>
+          <p:txBody>
+            <a:bodyPr rtlCol="0" anchor="ctr"/>
+            <a:lstStyle/>
+            <a:p>
+              <a:pPr algn="ctr"/>
+              <a:r>
+                <a:rPr lang="en-US" sz="3200" dirty="0">
+                  <a:solidFill>
+                    <a:schemeClr val="tx1"/>
+                  </a:solidFill>
+                  <a:latin typeface="Tahoma" panose="020B0604030504040204" pitchFamily="34" charset="0"/>
+                  <a:ea typeface="Tahoma" panose="020B0604030504040204" pitchFamily="34" charset="0"/>
+                  <a:cs typeface="Tahoma" panose="020B0604030504040204" pitchFamily="34" charset="0"/>
+                </a:rPr>
+                <a:t>P</a:t>
+              </a:r>
+            </a:p>
+          </p:txBody>
+        </p:sp>
+        <p:sp>
+          <p:nvSpPr>
+            <p:cNvPr id="8" name="Oval 7">
+              <a:extLst>
+                <a:ext uri="{FF2B5EF4-FFF2-40B4-BE49-F238E27FC236}">
+                  <a16:creationId xmlns:a16="http://schemas.microsoft.com/office/drawing/2014/main" id="{4635EBDF-0097-9C5A-61E4-B6BECF150509}"/>
+                </a:ext>
+              </a:extLst>
+            </p:cNvPr>
+            <p:cNvSpPr/>
+            <p:nvPr/>
+          </p:nvSpPr>
+          <p:spPr>
+            <a:xfrm>
+              <a:off x="3297667" y="2735450"/>
+              <a:ext cx="433421" cy="461222"/>
+            </a:xfrm>
+            <a:prstGeom prst="ellipse">
+              <a:avLst/>
+            </a:prstGeom>
+            <a:solidFill>
+              <a:srgbClr val="E06E6E"/>
+            </a:solidFill>
+          </p:spPr>
+          <p:style>
+            <a:lnRef idx="2">
+              <a:schemeClr val="accent1">
+                <a:shade val="15000"/>
+              </a:schemeClr>
+            </a:lnRef>
+            <a:fillRef idx="1">
+              <a:schemeClr val="accent1"/>
+            </a:fillRef>
+            <a:effectRef idx="0">
+              <a:schemeClr val="accent1"/>
+            </a:effectRef>
+            <a:fontRef idx="minor">
+              <a:schemeClr val="lt1"/>
+            </a:fontRef>
+          </p:style>
+          <p:txBody>
+            <a:bodyPr rtlCol="0" anchor="ctr"/>
+            <a:lstStyle/>
+            <a:p>
+              <a:pPr algn="ctr"/>
+              <a:r>
+                <a:rPr lang="en-US" sz="3200" dirty="0">
+                  <a:solidFill>
+                    <a:schemeClr val="tx1"/>
+                  </a:solidFill>
+                  <a:latin typeface="Tahoma" panose="020B0604030504040204" pitchFamily="34" charset="0"/>
+                  <a:ea typeface="Tahoma" panose="020B0604030504040204" pitchFamily="34" charset="0"/>
+                  <a:cs typeface="Tahoma" panose="020B0604030504040204" pitchFamily="34" charset="0"/>
+                </a:rPr>
+                <a:t>O</a:t>
+              </a:r>
+            </a:p>
+          </p:txBody>
+        </p:sp>
+        <p:cxnSp>
+          <p:nvCxnSpPr>
+            <p:cNvPr id="9" name="Straight Connector 8">
+              <a:extLst>
+                <a:ext uri="{FF2B5EF4-FFF2-40B4-BE49-F238E27FC236}">
+                  <a16:creationId xmlns:a16="http://schemas.microsoft.com/office/drawing/2014/main" id="{73CA9A94-C08D-4552-1EF0-C0D3C312BC8A}"/>
+                </a:ext>
+              </a:extLst>
+            </p:cNvPr>
+            <p:cNvCxnSpPr>
+              <a:cxnSpLocks/>
+              <a:stCxn id="5" idx="0"/>
+              <a:endCxn id="6" idx="3"/>
+            </p:cNvCxnSpPr>
+            <p:nvPr/>
+          </p:nvCxnSpPr>
+          <p:spPr>
+            <a:xfrm flipV="1">
+              <a:off x="752285" y="1724000"/>
+              <a:ext cx="280183" cy="801444"/>
+            </a:xfrm>
+            <a:prstGeom prst="line">
+              <a:avLst/>
+            </a:prstGeom>
+          </p:spPr>
+          <p:style>
+            <a:lnRef idx="2">
+              <a:schemeClr val="dk1"/>
+            </a:lnRef>
+            <a:fillRef idx="0">
+              <a:schemeClr val="dk1"/>
+            </a:fillRef>
+            <a:effectRef idx="1">
+              <a:schemeClr val="dk1"/>
+            </a:effectRef>
+            <a:fontRef idx="minor">
+              <a:schemeClr val="tx1"/>
+            </a:fontRef>
+          </p:style>
+        </p:cxnSp>
+        <p:cxnSp>
+          <p:nvCxnSpPr>
+            <p:cNvPr id="10" name="Straight Connector 9">
+              <a:extLst>
+                <a:ext uri="{FF2B5EF4-FFF2-40B4-BE49-F238E27FC236}">
+                  <a16:creationId xmlns:a16="http://schemas.microsoft.com/office/drawing/2014/main" id="{34ECCDE9-F64C-7A04-8768-B68ADCC2245F}"/>
+                </a:ext>
+              </a:extLst>
+            </p:cNvPr>
+            <p:cNvCxnSpPr>
+              <a:cxnSpLocks/>
+              <a:stCxn id="6" idx="6"/>
+              <a:endCxn id="7" idx="2"/>
+            </p:cNvCxnSpPr>
+            <p:nvPr/>
+          </p:nvCxnSpPr>
+          <p:spPr>
+            <a:xfrm>
+              <a:off x="1402416" y="1560933"/>
+              <a:ext cx="1363807" cy="0"/>
+            </a:xfrm>
+            <a:prstGeom prst="line">
+              <a:avLst/>
+            </a:prstGeom>
+          </p:spPr>
+          <p:style>
+            <a:lnRef idx="2">
+              <a:schemeClr val="dk1"/>
+            </a:lnRef>
+            <a:fillRef idx="0">
+              <a:schemeClr val="dk1"/>
+            </a:fillRef>
+            <a:effectRef idx="1">
+              <a:schemeClr val="dk1"/>
+            </a:effectRef>
+            <a:fontRef idx="minor">
+              <a:schemeClr val="tx1"/>
+            </a:fontRef>
+          </p:style>
+        </p:cxnSp>
+        <p:cxnSp>
+          <p:nvCxnSpPr>
+            <p:cNvPr id="11" name="Straight Connector 10">
+              <a:extLst>
+                <a:ext uri="{FF2B5EF4-FFF2-40B4-BE49-F238E27FC236}">
+                  <a16:creationId xmlns:a16="http://schemas.microsoft.com/office/drawing/2014/main" id="{4E3FCF8C-BAF9-8399-D0B2-9F70EE9C9DBB}"/>
+                </a:ext>
+              </a:extLst>
+            </p:cNvPr>
+            <p:cNvCxnSpPr>
+              <a:cxnSpLocks/>
+              <a:stCxn id="7" idx="5"/>
+              <a:endCxn id="8" idx="0"/>
+            </p:cNvCxnSpPr>
+            <p:nvPr/>
+          </p:nvCxnSpPr>
+          <p:spPr>
+            <a:xfrm>
+              <a:off x="3136171" y="1724000"/>
+              <a:ext cx="378207" cy="1011450"/>
+            </a:xfrm>
+            <a:prstGeom prst="line">
+              <a:avLst/>
+            </a:prstGeom>
+          </p:spPr>
+          <p:style>
+            <a:lnRef idx="2">
+              <a:schemeClr val="dk1"/>
+            </a:lnRef>
+            <a:fillRef idx="0">
+              <a:schemeClr val="dk1"/>
+            </a:fillRef>
+            <a:effectRef idx="1">
+              <a:schemeClr val="dk1"/>
+            </a:effectRef>
+            <a:fontRef idx="minor">
+              <a:schemeClr val="tx1"/>
+            </a:fontRef>
+          </p:style>
+        </p:cxnSp>
+      </p:grpSp>
+    </p:spTree>
+    <p:extLst>
+      <p:ext uri="{BB962C8B-B14F-4D97-AF65-F5344CB8AC3E}">
+        <p14:creationId xmlns:p14="http://schemas.microsoft.com/office/powerpoint/2010/main" val="1199025698"/>
+      </p:ext>
+    </p:extLst>
+  </p:cSld>
+  <p:clrMapOvr>
+    <a:masterClrMapping/>
+  </p:clrMapOvr>
+</p:sld>
+</file>
+
+<file path=ppt/slides/slide3.xml><?xml version="1.0" encoding="utf-8"?>
+<p:sld xmlns:a="http://schemas.openxmlformats.org/drawingml/2006/main" xmlns:r="http://schemas.openxmlformats.org/officeDocument/2006/relationships" xmlns:p="http://schemas.openxmlformats.org/presentationml/2006/main">
+  <p:cSld>
+    <p:spTree>
+      <p:nvGrpSpPr>
+        <p:cNvPr id="1" name="">
+          <a:extLst>
+            <a:ext uri="{FF2B5EF4-FFF2-40B4-BE49-F238E27FC236}">
+              <a16:creationId xmlns:a16="http://schemas.microsoft.com/office/drawing/2014/main" id="{3868BEFF-A5AE-DFE5-BB78-EDD465BC1679}"/>
+            </a:ext>
+          </a:extLst>
+        </p:cNvPr>
+        <p:cNvGrpSpPr/>
+        <p:nvPr/>
+      </p:nvGrpSpPr>
+      <p:grpSpPr>
+        <a:xfrm>
+          <a:off x="0" y="0"/>
+          <a:ext cx="0" cy="0"/>
+          <a:chOff x="0" y="0"/>
+          <a:chExt cx="0" cy="0"/>
+        </a:xfrm>
+      </p:grpSpPr>
+      <p:grpSp>
+        <p:nvGrpSpPr>
+          <p:cNvPr id="22" name="Group 21">
+            <a:extLst>
+              <a:ext uri="{FF2B5EF4-FFF2-40B4-BE49-F238E27FC236}">
+                <a16:creationId xmlns:a16="http://schemas.microsoft.com/office/drawing/2014/main" id="{F1B52410-38CC-77C5-2B02-75E08AB54485}"/>
+              </a:ext>
+            </a:extLst>
+          </p:cNvPr>
+          <p:cNvGrpSpPr>
+            <a:grpSpLocks noChangeAspect="1"/>
+          </p:cNvGrpSpPr>
+          <p:nvPr/>
+        </p:nvGrpSpPr>
+        <p:grpSpPr>
+          <a:xfrm>
+            <a:off x="3568505" y="1206359"/>
+            <a:ext cx="5552236" cy="4599889"/>
+            <a:chOff x="880143" y="516971"/>
+            <a:chExt cx="2752922" cy="2280727"/>
+          </a:xfrm>
+        </p:grpSpPr>
+        <p:sp>
+          <p:nvSpPr>
+            <p:cNvPr id="5" name="Oval 4">
+              <a:extLst>
+                <a:ext uri="{FF2B5EF4-FFF2-40B4-BE49-F238E27FC236}">
+                  <a16:creationId xmlns:a16="http://schemas.microsoft.com/office/drawing/2014/main" id="{21A8F36E-EE86-CA3B-7BB9-1D72EC66C044}"/>
+                </a:ext>
+              </a:extLst>
+            </p:cNvPr>
+            <p:cNvSpPr/>
+            <p:nvPr/>
+          </p:nvSpPr>
+          <p:spPr>
+            <a:xfrm>
+              <a:off x="880143" y="516971"/>
+              <a:ext cx="433421" cy="461222"/>
+            </a:xfrm>
+            <a:prstGeom prst="ellipse">
+              <a:avLst/>
+            </a:prstGeom>
+            <a:noFill/>
+          </p:spPr>
+          <p:style>
+            <a:lnRef idx="2">
+              <a:schemeClr val="accent1">
+                <a:shade val="15000"/>
+              </a:schemeClr>
+            </a:lnRef>
+            <a:fillRef idx="1">
+              <a:schemeClr val="accent1"/>
+            </a:fillRef>
+            <a:effectRef idx="0">
+              <a:schemeClr val="accent1"/>
+            </a:effectRef>
+            <a:fontRef idx="minor">
+              <a:schemeClr val="lt1"/>
+            </a:fontRef>
+          </p:style>
+          <p:txBody>
+            <a:bodyPr rtlCol="0" anchor="ctr"/>
+            <a:lstStyle/>
+            <a:p>
+              <a:pPr algn="ctr"/>
+              <a:r>
+                <a:rPr lang="en-US" sz="3200" dirty="0">
+                  <a:solidFill>
+                    <a:schemeClr val="tx1"/>
+                  </a:solidFill>
+                  <a:latin typeface="Tahoma" panose="020B0604030504040204" pitchFamily="34" charset="0"/>
+                  <a:ea typeface="Tahoma" panose="020B0604030504040204" pitchFamily="34" charset="0"/>
+                  <a:cs typeface="Tahoma" panose="020B0604030504040204" pitchFamily="34" charset="0"/>
+                </a:rPr>
+                <a:t>H</a:t>
+              </a:r>
+            </a:p>
+          </p:txBody>
+        </p:sp>
+        <p:sp>
+          <p:nvSpPr>
+            <p:cNvPr id="6" name="Oval 5">
+              <a:extLst>
+                <a:ext uri="{FF2B5EF4-FFF2-40B4-BE49-F238E27FC236}">
+                  <a16:creationId xmlns:a16="http://schemas.microsoft.com/office/drawing/2014/main" id="{2F695A08-5D01-331B-C53E-95FF68F92374}"/>
+                </a:ext>
+              </a:extLst>
+            </p:cNvPr>
+            <p:cNvSpPr/>
+            <p:nvPr/>
+          </p:nvSpPr>
+          <p:spPr>
+            <a:xfrm>
+              <a:off x="1467713" y="1330322"/>
+              <a:ext cx="433421" cy="461222"/>
+            </a:xfrm>
+            <a:prstGeom prst="ellipse">
+              <a:avLst/>
+            </a:prstGeom>
+            <a:solidFill>
+              <a:srgbClr val="E06E6E"/>
+            </a:solidFill>
+          </p:spPr>
+          <p:style>
+            <a:lnRef idx="2">
+              <a:schemeClr val="accent1">
+                <a:shade val="15000"/>
+              </a:schemeClr>
+            </a:lnRef>
+            <a:fillRef idx="1">
+              <a:schemeClr val="accent1"/>
+            </a:fillRef>
+            <a:effectRef idx="0">
+              <a:schemeClr val="accent1"/>
+            </a:effectRef>
+            <a:fontRef idx="minor">
+              <a:schemeClr val="lt1"/>
+            </a:fontRef>
+          </p:style>
+          <p:txBody>
+            <a:bodyPr rtlCol="0" anchor="ctr"/>
+            <a:lstStyle/>
+            <a:p>
+              <a:pPr algn="ctr"/>
+              <a:r>
+                <a:rPr lang="en-US" sz="3200" dirty="0">
+                  <a:solidFill>
+                    <a:schemeClr val="tx1"/>
+                  </a:solidFill>
+                  <a:latin typeface="Tahoma" panose="020B0604030504040204" pitchFamily="34" charset="0"/>
+                  <a:ea typeface="Tahoma" panose="020B0604030504040204" pitchFamily="34" charset="0"/>
+                  <a:cs typeface="Tahoma" panose="020B0604030504040204" pitchFamily="34" charset="0"/>
+                </a:rPr>
+                <a:t>O</a:t>
+              </a:r>
+            </a:p>
+          </p:txBody>
+        </p:sp>
+        <p:sp>
+          <p:nvSpPr>
+            <p:cNvPr id="7" name="Oval 6">
+              <a:extLst>
+                <a:ext uri="{FF2B5EF4-FFF2-40B4-BE49-F238E27FC236}">
+                  <a16:creationId xmlns:a16="http://schemas.microsoft.com/office/drawing/2014/main" id="{A73A911D-BBBE-C257-4AF3-E4A70793CFA2}"/>
+                </a:ext>
+              </a:extLst>
+            </p:cNvPr>
+            <p:cNvSpPr/>
+            <p:nvPr/>
+          </p:nvSpPr>
+          <p:spPr>
+            <a:xfrm>
+              <a:off x="2766223" y="1330322"/>
+              <a:ext cx="433421" cy="461222"/>
+            </a:xfrm>
+            <a:prstGeom prst="ellipse">
+              <a:avLst/>
+            </a:prstGeom>
+            <a:solidFill>
+              <a:schemeClr val="accent5">
+                <a:lumMod val="40000"/>
+                <a:lumOff val="60000"/>
+              </a:schemeClr>
+            </a:solidFill>
+          </p:spPr>
+          <p:style>
+            <a:lnRef idx="2">
+              <a:schemeClr val="accent1">
+                <a:shade val="15000"/>
+              </a:schemeClr>
+            </a:lnRef>
+            <a:fillRef idx="1">
+              <a:schemeClr val="accent1"/>
+            </a:fillRef>
+            <a:effectRef idx="0">
+              <a:schemeClr val="accent1"/>
+            </a:effectRef>
+            <a:fontRef idx="minor">
+              <a:schemeClr val="lt1"/>
+            </a:fontRef>
+          </p:style>
+          <p:txBody>
+            <a:bodyPr rtlCol="0" anchor="ctr"/>
+            <a:lstStyle/>
+            <a:p>
+              <a:pPr algn="ctr"/>
+              <a:r>
+                <a:rPr lang="en-US" sz="3200" dirty="0">
+                  <a:solidFill>
+                    <a:schemeClr val="tx1"/>
+                  </a:solidFill>
+                  <a:latin typeface="Tahoma" panose="020B0604030504040204" pitchFamily="34" charset="0"/>
+                  <a:ea typeface="Tahoma" panose="020B0604030504040204" pitchFamily="34" charset="0"/>
+                  <a:cs typeface="Tahoma" panose="020B0604030504040204" pitchFamily="34" charset="0"/>
+                </a:rPr>
+                <a:t>P</a:t>
+              </a:r>
+            </a:p>
+          </p:txBody>
+        </p:sp>
+        <p:sp>
+          <p:nvSpPr>
+            <p:cNvPr id="8" name="Oval 7">
+              <a:extLst>
+                <a:ext uri="{FF2B5EF4-FFF2-40B4-BE49-F238E27FC236}">
+                  <a16:creationId xmlns:a16="http://schemas.microsoft.com/office/drawing/2014/main" id="{423E12AD-6AA7-9F66-6D22-14D3608EC80A}"/>
+                </a:ext>
+              </a:extLst>
+            </p:cNvPr>
+            <p:cNvSpPr/>
+            <p:nvPr/>
+          </p:nvSpPr>
+          <p:spPr>
+            <a:xfrm>
+              <a:off x="3199644" y="2336476"/>
+              <a:ext cx="433421" cy="461222"/>
+            </a:xfrm>
+            <a:prstGeom prst="ellipse">
+              <a:avLst/>
+            </a:prstGeom>
+            <a:solidFill>
+              <a:srgbClr val="E06E6E"/>
+            </a:solidFill>
+          </p:spPr>
+          <p:style>
+            <a:lnRef idx="2">
+              <a:schemeClr val="accent1">
+                <a:shade val="15000"/>
+              </a:schemeClr>
+            </a:lnRef>
+            <a:fillRef idx="1">
+              <a:schemeClr val="accent1"/>
+            </a:fillRef>
+            <a:effectRef idx="0">
+              <a:schemeClr val="accent1"/>
+            </a:effectRef>
+            <a:fontRef idx="minor">
+              <a:schemeClr val="lt1"/>
+            </a:fontRef>
+          </p:style>
+          <p:txBody>
+            <a:bodyPr rtlCol="0" anchor="ctr"/>
+            <a:lstStyle/>
+            <a:p>
+              <a:pPr algn="ctr"/>
+              <a:r>
+                <a:rPr lang="en-US" sz="3200" dirty="0">
+                  <a:solidFill>
+                    <a:schemeClr val="tx1"/>
+                  </a:solidFill>
+                  <a:latin typeface="Tahoma" panose="020B0604030504040204" pitchFamily="34" charset="0"/>
+                  <a:ea typeface="Tahoma" panose="020B0604030504040204" pitchFamily="34" charset="0"/>
+                  <a:cs typeface="Tahoma" panose="020B0604030504040204" pitchFamily="34" charset="0"/>
+                </a:rPr>
+                <a:t>O</a:t>
+              </a:r>
+            </a:p>
+          </p:txBody>
+        </p:sp>
+        <p:cxnSp>
+          <p:nvCxnSpPr>
+            <p:cNvPr id="9" name="Straight Connector 8">
+              <a:extLst>
+                <a:ext uri="{FF2B5EF4-FFF2-40B4-BE49-F238E27FC236}">
+                  <a16:creationId xmlns:a16="http://schemas.microsoft.com/office/drawing/2014/main" id="{E58AEC40-24CC-04B7-3B7E-B18C3E0D9247}"/>
+                </a:ext>
+              </a:extLst>
+            </p:cNvPr>
+            <p:cNvCxnSpPr>
+              <a:cxnSpLocks/>
+              <a:stCxn id="5" idx="5"/>
+              <a:endCxn id="6" idx="1"/>
+            </p:cNvCxnSpPr>
+            <p:nvPr/>
+          </p:nvCxnSpPr>
+          <p:spPr>
+            <a:xfrm>
+              <a:off x="1250091" y="910649"/>
+              <a:ext cx="281096" cy="487218"/>
+            </a:xfrm>
+            <a:prstGeom prst="line">
+              <a:avLst/>
+            </a:prstGeom>
+          </p:spPr>
+          <p:style>
+            <a:lnRef idx="2">
+              <a:schemeClr val="dk1"/>
+            </a:lnRef>
+            <a:fillRef idx="0">
+              <a:schemeClr val="dk1"/>
+            </a:fillRef>
+            <a:effectRef idx="1">
+              <a:schemeClr val="dk1"/>
+            </a:effectRef>
+            <a:fontRef idx="minor">
+              <a:schemeClr val="tx1"/>
+            </a:fontRef>
+          </p:style>
+        </p:cxnSp>
+        <p:cxnSp>
+          <p:nvCxnSpPr>
+            <p:cNvPr id="10" name="Straight Connector 9">
+              <a:extLst>
+                <a:ext uri="{FF2B5EF4-FFF2-40B4-BE49-F238E27FC236}">
+                  <a16:creationId xmlns:a16="http://schemas.microsoft.com/office/drawing/2014/main" id="{8B2C113C-27D9-85EC-3E9D-D7CEF8CD67E7}"/>
+                </a:ext>
+              </a:extLst>
+            </p:cNvPr>
+            <p:cNvCxnSpPr>
+              <a:cxnSpLocks/>
+              <a:stCxn id="6" idx="6"/>
+              <a:endCxn id="7" idx="2"/>
+            </p:cNvCxnSpPr>
+            <p:nvPr/>
+          </p:nvCxnSpPr>
+          <p:spPr>
+            <a:xfrm>
+              <a:off x="1901134" y="1560933"/>
+              <a:ext cx="865089" cy="0"/>
+            </a:xfrm>
+            <a:prstGeom prst="line">
+              <a:avLst/>
+            </a:prstGeom>
+          </p:spPr>
+          <p:style>
+            <a:lnRef idx="2">
+              <a:schemeClr val="dk1"/>
+            </a:lnRef>
+            <a:fillRef idx="0">
+              <a:schemeClr val="dk1"/>
+            </a:fillRef>
+            <a:effectRef idx="1">
+              <a:schemeClr val="dk1"/>
+            </a:effectRef>
+            <a:fontRef idx="minor">
+              <a:schemeClr val="tx1"/>
+            </a:fontRef>
+          </p:style>
+        </p:cxnSp>
+        <p:cxnSp>
+          <p:nvCxnSpPr>
+            <p:cNvPr id="11" name="Straight Connector 10">
+              <a:extLst>
+                <a:ext uri="{FF2B5EF4-FFF2-40B4-BE49-F238E27FC236}">
+                  <a16:creationId xmlns:a16="http://schemas.microsoft.com/office/drawing/2014/main" id="{456BAA73-B206-8BC5-F1E5-597E08AFC601}"/>
+                </a:ext>
+              </a:extLst>
+            </p:cNvPr>
+            <p:cNvCxnSpPr>
+              <a:cxnSpLocks/>
+              <a:stCxn id="7" idx="5"/>
+              <a:endCxn id="8" idx="0"/>
+            </p:cNvCxnSpPr>
+            <p:nvPr/>
+          </p:nvCxnSpPr>
+          <p:spPr>
+            <a:xfrm>
+              <a:off x="3136171" y="1724000"/>
+              <a:ext cx="280184" cy="612476"/>
+            </a:xfrm>
+            <a:prstGeom prst="line">
+              <a:avLst/>
+            </a:prstGeom>
+          </p:spPr>
+          <p:style>
+            <a:lnRef idx="2">
+              <a:schemeClr val="dk1"/>
+            </a:lnRef>
+            <a:fillRef idx="0">
+              <a:schemeClr val="dk1"/>
+            </a:fillRef>
+            <a:effectRef idx="1">
+              <a:schemeClr val="dk1"/>
+            </a:effectRef>
+            <a:fontRef idx="minor">
+              <a:schemeClr val="tx1"/>
+            </a:fontRef>
+          </p:style>
+        </p:cxnSp>
+      </p:grpSp>
+    </p:spTree>
+    <p:extLst>
+      <p:ext uri="{BB962C8B-B14F-4D97-AF65-F5344CB8AC3E}">
+        <p14:creationId xmlns:p14="http://schemas.microsoft.com/office/powerpoint/2010/main" val="1598095616"/>
+      </p:ext>
+    </p:extLst>
+  </p:cSld>
+  <p:clrMapOvr>
+    <a:masterClrMapping/>
+  </p:clrMapOvr>
+</p:sld>
+</file>
+
+<file path=ppt/slides/slide4.xml><?xml version="1.0" encoding="utf-8"?>
 <p:sld xmlns:a="http://schemas.openxmlformats.org/drawingml/2006/main" xmlns:r="http://schemas.openxmlformats.org/officeDocument/2006/relationships" xmlns:p="http://schemas.openxmlformats.org/presentationml/2006/main">
   <p:cSld>
     <p:spTree>
@@ -11326,7 +14457,7 @@
 </p:sld>
 </file>
 
-<file path=ppt/slides/slide3.xml><?xml version="1.0" encoding="utf-8"?>
+<file path=ppt/slides/slide5.xml><?xml version="1.0" encoding="utf-8"?>
 <p:sld xmlns:a="http://schemas.openxmlformats.org/drawingml/2006/main" xmlns:r="http://schemas.openxmlformats.org/officeDocument/2006/relationships" xmlns:p="http://schemas.openxmlformats.org/presentationml/2006/main">
   <p:cSld>
     <p:spTree>
@@ -11762,7 +14893,7 @@
               <a:avLst/>
             </a:prstGeom>
             <a:solidFill>
-              <a:srgbClr val="E06E6E"/>
+              <a:srgbClr val="D93528"/>
             </a:solidFill>
           </p:spPr>
           <p:style>
@@ -11821,7 +14952,7 @@
               <a:avLst/>
             </a:prstGeom>
             <a:solidFill>
-              <a:srgbClr val="E06E6E"/>
+              <a:srgbClr val="D93528"/>
             </a:solidFill>
           </p:spPr>
           <p:style>
@@ -11935,8 +15066,8 @@
             </a:fontRef>
           </p:style>
         </p:cxnSp>
-        <mc:AlternateContent xmlns:mc="http://schemas.openxmlformats.org/markup-compatibility/2006">
-          <mc:Choice xmlns:a14="http://schemas.microsoft.com/office/drawing/2010/main" Requires="a14">
+        <mc:AlternateContent xmlns:mc="http://schemas.openxmlformats.org/markup-compatibility/2006" xmlns:a14="http://schemas.microsoft.com/office/drawing/2010/main">
+          <mc:Choice Requires="a14">
             <p:sp>
               <p:nvSpPr>
                 <p:cNvPr id="67" name="Subtitle 2">
@@ -12182,7 +15313,7 @@
               </p:txBody>
             </p:sp>
           </mc:Choice>
-          <mc:Fallback>
+          <mc:Fallback xmlns="">
             <p:sp>
               <p:nvSpPr>
                 <p:cNvPr id="67" name="Subtitle 2">
@@ -12227,8 +15358,8 @@
             </p:sp>
           </mc:Fallback>
         </mc:AlternateContent>
-        <mc:AlternateContent xmlns:mc="http://schemas.openxmlformats.org/markup-compatibility/2006">
-          <mc:Choice xmlns:a14="http://schemas.microsoft.com/office/drawing/2010/main" Requires="a14">
+        <mc:AlternateContent xmlns:mc="http://schemas.openxmlformats.org/markup-compatibility/2006" xmlns:a14="http://schemas.microsoft.com/office/drawing/2010/main">
+          <mc:Choice Requires="a14">
             <p:sp>
               <p:nvSpPr>
                 <p:cNvPr id="68" name="Subtitle 2">
@@ -12474,7 +15605,7 @@
               </p:txBody>
             </p:sp>
           </mc:Choice>
-          <mc:Fallback>
+          <mc:Fallback xmlns="">
             <p:sp>
               <p:nvSpPr>
                 <p:cNvPr id="68" name="Subtitle 2">
@@ -12519,8 +15650,8 @@
             </p:sp>
           </mc:Fallback>
         </mc:AlternateContent>
-        <mc:AlternateContent xmlns:mc="http://schemas.openxmlformats.org/markup-compatibility/2006">
-          <mc:Choice xmlns:a14="http://schemas.microsoft.com/office/drawing/2010/main" Requires="a14">
+        <mc:AlternateContent xmlns:mc="http://schemas.openxmlformats.org/markup-compatibility/2006" xmlns:a14="http://schemas.microsoft.com/office/drawing/2010/main">
+          <mc:Choice Requires="a14">
             <p:sp>
               <p:nvSpPr>
                 <p:cNvPr id="69" name="Subtitle 2">
@@ -12766,7 +15897,7 @@
               </p:txBody>
             </p:sp>
           </mc:Choice>
-          <mc:Fallback>
+          <mc:Fallback xmlns="">
             <p:sp>
               <p:nvSpPr>
                 <p:cNvPr id="69" name="Subtitle 2">
@@ -12864,8 +15995,8 @@
             </a:p>
           </p:txBody>
         </p:sp>
-        <mc:AlternateContent xmlns:mc="http://schemas.openxmlformats.org/markup-compatibility/2006">
-          <mc:Choice xmlns:a14="http://schemas.microsoft.com/office/drawing/2010/main" Requires="a14">
+        <mc:AlternateContent xmlns:mc="http://schemas.openxmlformats.org/markup-compatibility/2006" xmlns:a14="http://schemas.microsoft.com/office/drawing/2010/main">
+          <mc:Choice Requires="a14">
             <p:sp>
               <p:nvSpPr>
                 <p:cNvPr id="71" name="Subtitle 2">
@@ -13088,7 +16219,7 @@
               </p:txBody>
             </p:sp>
           </mc:Choice>
-          <mc:Fallback>
+          <mc:Fallback xmlns="">
             <p:sp>
               <p:nvSpPr>
                 <p:cNvPr id="71" name="Subtitle 2">
@@ -13186,8 +16317,8 @@
             </a:p>
           </p:txBody>
         </p:sp>
-        <mc:AlternateContent xmlns:mc="http://schemas.openxmlformats.org/markup-compatibility/2006">
-          <mc:Choice xmlns:a14="http://schemas.microsoft.com/office/drawing/2010/main" Requires="a14">
+        <mc:AlternateContent xmlns:mc="http://schemas.openxmlformats.org/markup-compatibility/2006" xmlns:a14="http://schemas.microsoft.com/office/drawing/2010/main">
+          <mc:Choice Requires="a14">
             <p:sp>
               <p:nvSpPr>
                 <p:cNvPr id="73" name="Subtitle 2">
@@ -13410,7 +16541,7 @@
               </p:txBody>
             </p:sp>
           </mc:Choice>
-          <mc:Fallback>
+          <mc:Fallback xmlns="">
             <p:sp>
               <p:nvSpPr>
                 <p:cNvPr id="73" name="Subtitle 2">
@@ -13509,8 +16640,8 @@
             </a:p>
           </p:txBody>
         </p:sp>
-        <mc:AlternateContent xmlns:mc="http://schemas.openxmlformats.org/markup-compatibility/2006">
-          <mc:Choice xmlns:a14="http://schemas.microsoft.com/office/drawing/2010/main" Requires="a14">
+        <mc:AlternateContent xmlns:mc="http://schemas.openxmlformats.org/markup-compatibility/2006" xmlns:a14="http://schemas.microsoft.com/office/drawing/2010/main">
+          <mc:Choice Requires="a14">
             <p:sp>
               <p:nvSpPr>
                 <p:cNvPr id="76" name="Subtitle 2">
@@ -13733,7 +16864,7 @@
               </p:txBody>
             </p:sp>
           </mc:Choice>
-          <mc:Fallback>
+          <mc:Fallback xmlns="">
             <p:sp>
               <p:nvSpPr>
                 <p:cNvPr id="76" name="Subtitle 2">
@@ -13799,7 +16930,7 @@
               <a:avLst/>
             </a:prstGeom>
             <a:solidFill>
-              <a:schemeClr val="bg1"/>
+              <a:srgbClr val="F2F2F2"/>
             </a:solidFill>
             <a:ln>
               <a:solidFill>
@@ -13901,10 +17032,7 @@
               <a:avLst/>
             </a:prstGeom>
             <a:solidFill>
-              <a:schemeClr val="accent5">
-                <a:lumMod val="40000"/>
-                <a:lumOff val="60000"/>
-              </a:schemeClr>
+              <a:srgbClr val="8826C5"/>
             </a:solidFill>
           </p:spPr>
           <p:style>
@@ -13945,10 +17073,1802 @@
       </p:grpSp>
       <p:grpSp>
         <p:nvGrpSpPr>
+          <p:cNvPr id="2" name="Group 1">
+            <a:extLst>
+              <a:ext uri="{FF2B5EF4-FFF2-40B4-BE49-F238E27FC236}">
+                <a16:creationId xmlns:a16="http://schemas.microsoft.com/office/drawing/2014/main" id="{FC25798A-6BF8-2403-4C58-B62FD0B2C41E}"/>
+              </a:ext>
+            </a:extLst>
+          </p:cNvPr>
+          <p:cNvGrpSpPr/>
+          <p:nvPr/>
+        </p:nvGrpSpPr>
+        <p:grpSpPr>
+          <a:xfrm>
+            <a:off x="6046078" y="304722"/>
+            <a:ext cx="5034950" cy="5991046"/>
+            <a:chOff x="485007" y="353363"/>
+            <a:chExt cx="4585545" cy="5586218"/>
+          </a:xfrm>
+        </p:grpSpPr>
+        <mc:AlternateContent xmlns:mc="http://schemas.openxmlformats.org/markup-compatibility/2006">
+          <mc:Choice xmlns:a14="http://schemas.microsoft.com/office/drawing/2010/main" Requires="a14">
+            <p:sp>
+              <p:nvSpPr>
+                <p:cNvPr id="5" name="TextBox 4">
+                  <a:extLst>
+                    <a:ext uri="{FF2B5EF4-FFF2-40B4-BE49-F238E27FC236}">
+                      <a16:creationId xmlns:a16="http://schemas.microsoft.com/office/drawing/2014/main" id="{981E28E9-B392-3256-966D-E96DC6AB9E30}"/>
+                    </a:ext>
+                  </a:extLst>
+                </p:cNvPr>
+                <p:cNvSpPr txBox="1"/>
+                <p:nvPr/>
+              </p:nvSpPr>
+              <p:spPr>
+                <a:xfrm>
+                  <a:off x="2165479" y="379351"/>
+                  <a:ext cx="593722" cy="1384995"/>
+                </a:xfrm>
+                <a:prstGeom prst="rect">
+                  <a:avLst/>
+                </a:prstGeom>
+                <a:noFill/>
+              </p:spPr>
+              <p:txBody>
+                <a:bodyPr wrap="square">
+                  <a:spAutoFit/>
+                </a:bodyPr>
+                <a:lstStyle/>
+                <a:p>
+                  <a:pPr algn="ctr"/>
+                  <a:endParaRPr lang="en-US" sz="2800" dirty="0">
+                    <a:solidFill>
+                      <a:schemeClr val="tx1"/>
+                    </a:solidFill>
+                    <a:latin typeface="Tahoma" panose="020B0604030504040204" pitchFamily="34" charset="0"/>
+                    <a:ea typeface="Tahoma" panose="020B0604030504040204" pitchFamily="34" charset="0"/>
+                    <a:cs typeface="Tahoma" panose="020B0604030504040204" pitchFamily="34" charset="0"/>
+                  </a:endParaRPr>
+                </a:p>
+                <a:p>
+                  <a:pPr algn="ctr"/>
+                  <a14:m>
+                    <m:oMathPara xmlns:m="http://schemas.openxmlformats.org/officeDocument/2006/math">
+                      <m:oMathParaPr>
+                        <m:jc m:val="centerGroup"/>
+                      </m:oMathParaPr>
+                      <m:oMath xmlns:m="http://schemas.openxmlformats.org/officeDocument/2006/math">
+                        <m:r>
+                          <a:rPr lang="en-US" sz="2800" b="0" i="1" smtClean="0">
+                            <a:solidFill>
+                              <a:schemeClr val="tx1"/>
+                            </a:solidFill>
+                            <a:latin typeface="Cambria Math" panose="02040503050406030204" pitchFamily="18" charset="0"/>
+                            <a:ea typeface="Tahoma" panose="020B0604030504040204" pitchFamily="34" charset="0"/>
+                            <a:cs typeface="Tahoma" panose="020B0604030504040204" pitchFamily="34" charset="0"/>
+                          </a:rPr>
+                          <m:t>𝜌</m:t>
+                        </m:r>
+                      </m:oMath>
+                    </m:oMathPara>
+                  </a14:m>
+                  <a:endParaRPr lang="en-US" sz="2800" b="0" dirty="0">
+                    <a:solidFill>
+                      <a:schemeClr val="tx1"/>
+                    </a:solidFill>
+                    <a:latin typeface="Tahoma" panose="020B0604030504040204" pitchFamily="34" charset="0"/>
+                    <a:ea typeface="Tahoma" panose="020B0604030504040204" pitchFamily="34" charset="0"/>
+                    <a:cs typeface="Tahoma" panose="020B0604030504040204" pitchFamily="34" charset="0"/>
+                  </a:endParaRPr>
+                </a:p>
+                <a:p>
+                  <a:pPr algn="ctr"/>
+                  <a:endParaRPr lang="en-US" sz="2800" dirty="0">
+                    <a:solidFill>
+                      <a:schemeClr val="tx1"/>
+                    </a:solidFill>
+                    <a:latin typeface="Tahoma" panose="020B0604030504040204" pitchFamily="34" charset="0"/>
+                    <a:ea typeface="Tahoma" panose="020B0604030504040204" pitchFamily="34" charset="0"/>
+                    <a:cs typeface="Tahoma" panose="020B0604030504040204" pitchFamily="34" charset="0"/>
+                  </a:endParaRPr>
+                </a:p>
+              </p:txBody>
+            </p:sp>
+          </mc:Choice>
+          <mc:Fallback>
+            <p:sp>
+              <p:nvSpPr>
+                <p:cNvPr id="5" name="TextBox 4">
+                  <a:extLst>
+                    <a:ext uri="{FF2B5EF4-FFF2-40B4-BE49-F238E27FC236}">
+                      <a16:creationId xmlns:a16="http://schemas.microsoft.com/office/drawing/2014/main" id="{981E28E9-B392-3256-966D-E96DC6AB9E30}"/>
+                    </a:ext>
+                  </a:extLst>
+                </p:cNvPr>
+                <p:cNvSpPr txBox="1">
+                  <a:spLocks noRot="1" noChangeAspect="1" noMove="1" noResize="1" noEditPoints="1" noAdjustHandles="1" noChangeArrowheads="1" noChangeShapeType="1" noTextEdit="1"/>
+                </p:cNvSpPr>
+                <p:nvPr/>
+              </p:nvSpPr>
+              <p:spPr>
+                <a:xfrm>
+                  <a:off x="2165479" y="379351"/>
+                  <a:ext cx="593722" cy="1384995"/>
+                </a:xfrm>
+                <a:prstGeom prst="rect">
+                  <a:avLst/>
+                </a:prstGeom>
+                <a:blipFill>
+                  <a:blip r:embed="rId8"/>
+                  <a:stretch>
+                    <a:fillRect/>
+                  </a:stretch>
+                </a:blipFill>
+              </p:spPr>
+              <p:txBody>
+                <a:bodyPr/>
+                <a:lstStyle/>
+                <a:p>
+                  <a:r>
+                    <a:rPr lang="en-GB">
+                      <a:noFill/>
+                    </a:rPr>
+                    <a:t> </a:t>
+                  </a:r>
+                </a:p>
+              </p:txBody>
+            </p:sp>
+          </mc:Fallback>
+        </mc:AlternateContent>
+        <mc:AlternateContent xmlns:mc="http://schemas.openxmlformats.org/markup-compatibility/2006">
+          <mc:Choice xmlns:a14="http://schemas.microsoft.com/office/drawing/2010/main" Requires="a14">
+            <p:sp>
+              <p:nvSpPr>
+                <p:cNvPr id="7" name="TextBox 6">
+                  <a:extLst>
+                    <a:ext uri="{FF2B5EF4-FFF2-40B4-BE49-F238E27FC236}">
+                      <a16:creationId xmlns:a16="http://schemas.microsoft.com/office/drawing/2014/main" id="{A37562D4-97BD-4036-CAFC-4431D54950C6}"/>
+                    </a:ext>
+                  </a:extLst>
+                </p:cNvPr>
+                <p:cNvSpPr txBox="1"/>
+                <p:nvPr/>
+              </p:nvSpPr>
+              <p:spPr>
+                <a:xfrm>
+                  <a:off x="1615131" y="2782227"/>
+                  <a:ext cx="593722" cy="954107"/>
+                </a:xfrm>
+                <a:prstGeom prst="rect">
+                  <a:avLst/>
+                </a:prstGeom>
+                <a:noFill/>
+              </p:spPr>
+              <p:txBody>
+                <a:bodyPr wrap="square">
+                  <a:spAutoFit/>
+                </a:bodyPr>
+                <a:lstStyle/>
+                <a:p>
+                  <a:pPr algn="ctr"/>
+                  <a:endParaRPr lang="en-US" sz="2800" dirty="0">
+                    <a:solidFill>
+                      <a:schemeClr val="tx1"/>
+                    </a:solidFill>
+                    <a:latin typeface="Tahoma" panose="020B0604030504040204" pitchFamily="34" charset="0"/>
+                    <a:ea typeface="Tahoma" panose="020B0604030504040204" pitchFamily="34" charset="0"/>
+                    <a:cs typeface="Tahoma" panose="020B0604030504040204" pitchFamily="34" charset="0"/>
+                  </a:endParaRPr>
+                </a:p>
+                <a:p>
+                  <a:pPr algn="ctr"/>
+                  <a14:m>
+                    <m:oMathPara xmlns:m="http://schemas.openxmlformats.org/officeDocument/2006/math">
+                      <m:oMathParaPr>
+                        <m:jc m:val="centerGroup"/>
+                      </m:oMathParaPr>
+                      <m:oMath xmlns:m="http://schemas.openxmlformats.org/officeDocument/2006/math">
+                        <m:r>
+                          <a:rPr lang="en-US" sz="2800" b="0" i="1" smtClean="0">
+                            <a:solidFill>
+                              <a:schemeClr val="tx1"/>
+                            </a:solidFill>
+                            <a:latin typeface="Cambria Math" panose="02040503050406030204" pitchFamily="18" charset="0"/>
+                            <a:ea typeface="Tahoma" panose="020B0604030504040204" pitchFamily="34" charset="0"/>
+                            <a:cs typeface="Tahoma" panose="020B0604030504040204" pitchFamily="34" charset="0"/>
+                          </a:rPr>
+                          <m:t>𝜏</m:t>
+                        </m:r>
+                      </m:oMath>
+                    </m:oMathPara>
+                  </a14:m>
+                  <a:endParaRPr lang="en-US" sz="2800" dirty="0">
+                    <a:solidFill>
+                      <a:schemeClr val="tx1"/>
+                    </a:solidFill>
+                    <a:latin typeface="Tahoma" panose="020B0604030504040204" pitchFamily="34" charset="0"/>
+                    <a:ea typeface="Tahoma" panose="020B0604030504040204" pitchFamily="34" charset="0"/>
+                    <a:cs typeface="Tahoma" panose="020B0604030504040204" pitchFamily="34" charset="0"/>
+                  </a:endParaRPr>
+                </a:p>
+              </p:txBody>
+            </p:sp>
+          </mc:Choice>
+          <mc:Fallback>
+            <p:sp>
+              <p:nvSpPr>
+                <p:cNvPr id="7" name="TextBox 6">
+                  <a:extLst>
+                    <a:ext uri="{FF2B5EF4-FFF2-40B4-BE49-F238E27FC236}">
+                      <a16:creationId xmlns:a16="http://schemas.microsoft.com/office/drawing/2014/main" id="{A37562D4-97BD-4036-CAFC-4431D54950C6}"/>
+                    </a:ext>
+                  </a:extLst>
+                </p:cNvPr>
+                <p:cNvSpPr txBox="1">
+                  <a:spLocks noRot="1" noChangeAspect="1" noMove="1" noResize="1" noEditPoints="1" noAdjustHandles="1" noChangeArrowheads="1" noChangeShapeType="1" noTextEdit="1"/>
+                </p:cNvSpPr>
+                <p:nvPr/>
+              </p:nvSpPr>
+              <p:spPr>
+                <a:xfrm>
+                  <a:off x="1615131" y="2782227"/>
+                  <a:ext cx="593722" cy="954107"/>
+                </a:xfrm>
+                <a:prstGeom prst="rect">
+                  <a:avLst/>
+                </a:prstGeom>
+                <a:blipFill>
+                  <a:blip r:embed="rId9"/>
+                  <a:stretch>
+                    <a:fillRect/>
+                  </a:stretch>
+                </a:blipFill>
+              </p:spPr>
+              <p:txBody>
+                <a:bodyPr/>
+                <a:lstStyle/>
+                <a:p>
+                  <a:r>
+                    <a:rPr lang="en-GB">
+                      <a:noFill/>
+                    </a:rPr>
+                    <a:t> </a:t>
+                  </a:r>
+                </a:p>
+              </p:txBody>
+            </p:sp>
+          </mc:Fallback>
+        </mc:AlternateContent>
+        <p:cxnSp>
+          <p:nvCxnSpPr>
+            <p:cNvPr id="10" name="Straight Connector 9">
+              <a:extLst>
+                <a:ext uri="{FF2B5EF4-FFF2-40B4-BE49-F238E27FC236}">
+                  <a16:creationId xmlns:a16="http://schemas.microsoft.com/office/drawing/2014/main" id="{88AAB3C3-9CBF-8793-DAC0-031765137683}"/>
+                </a:ext>
+              </a:extLst>
+            </p:cNvPr>
+            <p:cNvCxnSpPr>
+              <a:cxnSpLocks/>
+            </p:cNvCxnSpPr>
+            <p:nvPr/>
+          </p:nvCxnSpPr>
+          <p:spPr>
+            <a:xfrm flipH="1" flipV="1">
+              <a:off x="1326492" y="3002483"/>
+              <a:ext cx="1469891" cy="418887"/>
+            </a:xfrm>
+            <a:prstGeom prst="line">
+              <a:avLst/>
+            </a:prstGeom>
+            <a:ln w="38100">
+              <a:solidFill>
+                <a:schemeClr val="bg2">
+                  <a:lumMod val="90000"/>
+                </a:schemeClr>
+              </a:solidFill>
+              <a:prstDash val="dash"/>
+            </a:ln>
+          </p:spPr>
+          <p:style>
+            <a:lnRef idx="2">
+              <a:schemeClr val="dk1"/>
+            </a:lnRef>
+            <a:fillRef idx="0">
+              <a:schemeClr val="dk1"/>
+            </a:fillRef>
+            <a:effectRef idx="1">
+              <a:schemeClr val="dk1"/>
+            </a:effectRef>
+            <a:fontRef idx="minor">
+              <a:schemeClr val="tx1"/>
+            </a:fontRef>
+          </p:style>
+        </p:cxnSp>
+        <p:sp>
+          <p:nvSpPr>
+            <p:cNvPr id="11" name="Oval 10">
+              <a:extLst>
+                <a:ext uri="{FF2B5EF4-FFF2-40B4-BE49-F238E27FC236}">
+                  <a16:creationId xmlns:a16="http://schemas.microsoft.com/office/drawing/2014/main" id="{78F8B4AC-BCF4-D675-B9A4-E4726940A15B}"/>
+                </a:ext>
+              </a:extLst>
+            </p:cNvPr>
+            <p:cNvSpPr/>
+            <p:nvPr/>
+          </p:nvSpPr>
+          <p:spPr>
+            <a:xfrm>
+              <a:off x="1326492" y="709637"/>
+              <a:ext cx="472531" cy="488188"/>
+            </a:xfrm>
+            <a:prstGeom prst="ellipse">
+              <a:avLst/>
+            </a:prstGeom>
+            <a:solidFill>
+              <a:schemeClr val="bg1">
+                <a:lumMod val="95000"/>
+              </a:schemeClr>
+            </a:solidFill>
+          </p:spPr>
+          <p:style>
+            <a:lnRef idx="2">
+              <a:schemeClr val="accent1">
+                <a:shade val="15000"/>
+              </a:schemeClr>
+            </a:lnRef>
+            <a:fillRef idx="1">
+              <a:schemeClr val="accent1"/>
+            </a:fillRef>
+            <a:effectRef idx="0">
+              <a:schemeClr val="accent1"/>
+            </a:effectRef>
+            <a:fontRef idx="minor">
+              <a:schemeClr val="lt1"/>
+            </a:fontRef>
+          </p:style>
+          <p:txBody>
+            <a:bodyPr rtlCol="0" anchor="ctr"/>
+            <a:lstStyle/>
+            <a:p>
+              <a:pPr algn="ctr"/>
+              <a:endParaRPr lang="en-US" sz="3200" dirty="0">
+                <a:solidFill>
+                  <a:schemeClr val="tx1"/>
+                </a:solidFill>
+                <a:latin typeface="Tahoma" panose="020B0604030504040204" pitchFamily="34" charset="0"/>
+                <a:ea typeface="Tahoma" panose="020B0604030504040204" pitchFamily="34" charset="0"/>
+                <a:cs typeface="Tahoma" panose="020B0604030504040204" pitchFamily="34" charset="0"/>
+              </a:endParaRPr>
+            </a:p>
+          </p:txBody>
+        </p:sp>
+        <p:sp>
+          <p:nvSpPr>
+            <p:cNvPr id="12" name="Oval 11">
+              <a:extLst>
+                <a:ext uri="{FF2B5EF4-FFF2-40B4-BE49-F238E27FC236}">
+                  <a16:creationId xmlns:a16="http://schemas.microsoft.com/office/drawing/2014/main" id="{C3A5F301-0274-C125-C1A5-FD68C400040C}"/>
+                </a:ext>
+              </a:extLst>
+            </p:cNvPr>
+            <p:cNvSpPr/>
+            <p:nvPr/>
+          </p:nvSpPr>
+          <p:spPr>
+            <a:xfrm>
+              <a:off x="2524380" y="1759975"/>
+              <a:ext cx="593723" cy="615950"/>
+            </a:xfrm>
+            <a:prstGeom prst="ellipse">
+              <a:avLst/>
+            </a:prstGeom>
+            <a:solidFill>
+              <a:srgbClr val="D93528"/>
+            </a:solidFill>
+          </p:spPr>
+          <p:style>
+            <a:lnRef idx="2">
+              <a:schemeClr val="accent1">
+                <a:shade val="15000"/>
+              </a:schemeClr>
+            </a:lnRef>
+            <a:fillRef idx="1">
+              <a:schemeClr val="accent1"/>
+            </a:fillRef>
+            <a:effectRef idx="0">
+              <a:schemeClr val="accent1"/>
+            </a:effectRef>
+            <a:fontRef idx="minor">
+              <a:schemeClr val="lt1"/>
+            </a:fontRef>
+          </p:style>
+          <p:txBody>
+            <a:bodyPr rtlCol="0" anchor="ctr"/>
+            <a:lstStyle/>
+            <a:p>
+              <a:pPr algn="ctr"/>
+              <a:endParaRPr lang="en-US" sz="2800" dirty="0">
+                <a:solidFill>
+                  <a:schemeClr val="tx1"/>
+                </a:solidFill>
+                <a:latin typeface="Tahoma" panose="020B0604030504040204" pitchFamily="34" charset="0"/>
+                <a:ea typeface="Tahoma" panose="020B0604030504040204" pitchFamily="34" charset="0"/>
+                <a:cs typeface="Tahoma" panose="020B0604030504040204" pitchFamily="34" charset="0"/>
+              </a:endParaRPr>
+            </a:p>
+          </p:txBody>
+        </p:sp>
+        <p:sp>
+          <p:nvSpPr>
+            <p:cNvPr id="14" name="Oval 13">
+              <a:extLst>
+                <a:ext uri="{FF2B5EF4-FFF2-40B4-BE49-F238E27FC236}">
+                  <a16:creationId xmlns:a16="http://schemas.microsoft.com/office/drawing/2014/main" id="{37807374-55FF-420A-2958-0EC33887EDED}"/>
+                </a:ext>
+              </a:extLst>
+            </p:cNvPr>
+            <p:cNvSpPr/>
+            <p:nvPr/>
+          </p:nvSpPr>
+          <p:spPr>
+            <a:xfrm>
+              <a:off x="2524380" y="4504551"/>
+              <a:ext cx="593723" cy="631807"/>
+            </a:xfrm>
+            <a:prstGeom prst="ellipse">
+              <a:avLst/>
+            </a:prstGeom>
+            <a:solidFill>
+              <a:srgbClr val="8826C5"/>
+            </a:solidFill>
+          </p:spPr>
+          <p:style>
+            <a:lnRef idx="2">
+              <a:schemeClr val="accent1">
+                <a:shade val="15000"/>
+              </a:schemeClr>
+            </a:lnRef>
+            <a:fillRef idx="1">
+              <a:schemeClr val="accent1"/>
+            </a:fillRef>
+            <a:effectRef idx="0">
+              <a:schemeClr val="accent1"/>
+            </a:effectRef>
+            <a:fontRef idx="minor">
+              <a:schemeClr val="lt1"/>
+            </a:fontRef>
+          </p:style>
+          <p:txBody>
+            <a:bodyPr rtlCol="0" anchor="ctr"/>
+            <a:lstStyle/>
+            <a:p>
+              <a:pPr algn="ctr"/>
+              <a:endParaRPr lang="en-US" sz="3200" dirty="0">
+                <a:solidFill>
+                  <a:schemeClr val="tx1"/>
+                </a:solidFill>
+                <a:latin typeface="Tahoma" panose="020B0604030504040204" pitchFamily="34" charset="0"/>
+                <a:ea typeface="Tahoma" panose="020B0604030504040204" pitchFamily="34" charset="0"/>
+                <a:cs typeface="Tahoma" panose="020B0604030504040204" pitchFamily="34" charset="0"/>
+              </a:endParaRPr>
+            </a:p>
+          </p:txBody>
+        </p:sp>
+        <p:sp>
+          <p:nvSpPr>
+            <p:cNvPr id="15" name="Oval 14">
+              <a:extLst>
+                <a:ext uri="{FF2B5EF4-FFF2-40B4-BE49-F238E27FC236}">
+                  <a16:creationId xmlns:a16="http://schemas.microsoft.com/office/drawing/2014/main" id="{139EAC81-AC8C-77E3-FF05-F54F66970CDB}"/>
+                </a:ext>
+              </a:extLst>
+            </p:cNvPr>
+            <p:cNvSpPr/>
+            <p:nvPr/>
+          </p:nvSpPr>
+          <p:spPr>
+            <a:xfrm>
+              <a:off x="1167550" y="5190028"/>
+              <a:ext cx="583335" cy="620752"/>
+            </a:xfrm>
+            <a:prstGeom prst="ellipse">
+              <a:avLst/>
+            </a:prstGeom>
+            <a:solidFill>
+              <a:srgbClr val="D93528"/>
+            </a:solidFill>
+          </p:spPr>
+          <p:style>
+            <a:lnRef idx="2">
+              <a:schemeClr val="accent1">
+                <a:shade val="15000"/>
+              </a:schemeClr>
+            </a:lnRef>
+            <a:fillRef idx="1">
+              <a:schemeClr val="accent1"/>
+            </a:fillRef>
+            <a:effectRef idx="0">
+              <a:schemeClr val="accent1"/>
+            </a:effectRef>
+            <a:fontRef idx="minor">
+              <a:schemeClr val="lt1"/>
+            </a:fontRef>
+          </p:style>
+          <p:txBody>
+            <a:bodyPr rtlCol="0" anchor="ctr"/>
+            <a:lstStyle/>
+            <a:p>
+              <a:pPr algn="ctr"/>
+              <a:endParaRPr lang="en-US" sz="3200" dirty="0">
+                <a:solidFill>
+                  <a:schemeClr val="tx1"/>
+                </a:solidFill>
+                <a:latin typeface="Tahoma" panose="020B0604030504040204" pitchFamily="34" charset="0"/>
+                <a:ea typeface="Tahoma" panose="020B0604030504040204" pitchFamily="34" charset="0"/>
+                <a:cs typeface="Tahoma" panose="020B0604030504040204" pitchFamily="34" charset="0"/>
+              </a:endParaRPr>
+            </a:p>
+          </p:txBody>
+        </p:sp>
+        <p:cxnSp>
+          <p:nvCxnSpPr>
+            <p:cNvPr id="16" name="Straight Connector 15">
+              <a:extLst>
+                <a:ext uri="{FF2B5EF4-FFF2-40B4-BE49-F238E27FC236}">
+                  <a16:creationId xmlns:a16="http://schemas.microsoft.com/office/drawing/2014/main" id="{036B2C81-5A90-5F4F-C540-CC41B0FFA5C2}"/>
+                </a:ext>
+              </a:extLst>
+            </p:cNvPr>
+            <p:cNvCxnSpPr>
+              <a:cxnSpLocks/>
+              <a:stCxn id="11" idx="5"/>
+              <a:endCxn id="12" idx="1"/>
+            </p:cNvCxnSpPr>
+            <p:nvPr/>
+          </p:nvCxnSpPr>
+          <p:spPr>
+            <a:xfrm>
+              <a:off x="1729822" y="1126332"/>
+              <a:ext cx="881507" cy="723847"/>
+            </a:xfrm>
+            <a:prstGeom prst="line">
+              <a:avLst/>
+            </a:prstGeom>
+            <a:ln w="38100"/>
+          </p:spPr>
+          <p:style>
+            <a:lnRef idx="2">
+              <a:schemeClr val="dk1"/>
+            </a:lnRef>
+            <a:fillRef idx="0">
+              <a:schemeClr val="dk1"/>
+            </a:fillRef>
+            <a:effectRef idx="1">
+              <a:schemeClr val="dk1"/>
+            </a:effectRef>
+            <a:fontRef idx="minor">
+              <a:schemeClr val="tx1"/>
+            </a:fontRef>
+          </p:style>
+        </p:cxnSp>
+        <p:cxnSp>
+          <p:nvCxnSpPr>
+            <p:cNvPr id="17" name="Straight Connector 16">
+              <a:extLst>
+                <a:ext uri="{FF2B5EF4-FFF2-40B4-BE49-F238E27FC236}">
+                  <a16:creationId xmlns:a16="http://schemas.microsoft.com/office/drawing/2014/main" id="{053A29DE-5FC6-6103-41D3-5C562185CB0E}"/>
+                </a:ext>
+              </a:extLst>
+            </p:cNvPr>
+            <p:cNvCxnSpPr>
+              <a:cxnSpLocks/>
+              <a:stCxn id="12" idx="4"/>
+              <a:endCxn id="14" idx="0"/>
+            </p:cNvCxnSpPr>
+            <p:nvPr/>
+          </p:nvCxnSpPr>
+          <p:spPr>
+            <a:xfrm>
+              <a:off x="2821242" y="2375925"/>
+              <a:ext cx="0" cy="2128626"/>
+            </a:xfrm>
+            <a:prstGeom prst="line">
+              <a:avLst/>
+            </a:prstGeom>
+            <a:ln w="38100"/>
+          </p:spPr>
+          <p:style>
+            <a:lnRef idx="2">
+              <a:schemeClr val="dk1"/>
+            </a:lnRef>
+            <a:fillRef idx="0">
+              <a:schemeClr val="dk1"/>
+            </a:fillRef>
+            <a:effectRef idx="1">
+              <a:schemeClr val="dk1"/>
+            </a:effectRef>
+            <a:fontRef idx="minor">
+              <a:schemeClr val="tx1"/>
+            </a:fontRef>
+          </p:style>
+        </p:cxnSp>
+        <p:cxnSp>
+          <p:nvCxnSpPr>
+            <p:cNvPr id="18" name="Straight Connector 17">
+              <a:extLst>
+                <a:ext uri="{FF2B5EF4-FFF2-40B4-BE49-F238E27FC236}">
+                  <a16:creationId xmlns:a16="http://schemas.microsoft.com/office/drawing/2014/main" id="{ECD01529-A09F-CF10-A840-93636E742018}"/>
+                </a:ext>
+              </a:extLst>
+            </p:cNvPr>
+            <p:cNvCxnSpPr>
+              <a:cxnSpLocks/>
+            </p:cNvCxnSpPr>
+            <p:nvPr/>
+          </p:nvCxnSpPr>
+          <p:spPr>
+            <a:xfrm flipH="1">
+              <a:off x="1717596" y="4977351"/>
+              <a:ext cx="868770" cy="417609"/>
+            </a:xfrm>
+            <a:prstGeom prst="line">
+              <a:avLst/>
+            </a:prstGeom>
+            <a:ln w="38100"/>
+          </p:spPr>
+          <p:style>
+            <a:lnRef idx="2">
+              <a:schemeClr val="dk1"/>
+            </a:lnRef>
+            <a:fillRef idx="0">
+              <a:schemeClr val="dk1"/>
+            </a:fillRef>
+            <a:effectRef idx="1">
+              <a:schemeClr val="dk1"/>
+            </a:effectRef>
+            <a:fontRef idx="minor">
+              <a:schemeClr val="tx1"/>
+            </a:fontRef>
+          </p:style>
+        </p:cxnSp>
+        <p:cxnSp>
+          <p:nvCxnSpPr>
+            <p:cNvPr id="19" name="Straight Connector 18">
+              <a:extLst>
+                <a:ext uri="{FF2B5EF4-FFF2-40B4-BE49-F238E27FC236}">
+                  <a16:creationId xmlns:a16="http://schemas.microsoft.com/office/drawing/2014/main" id="{0C9CF756-ADC2-829A-A946-DD528E6FC029}"/>
+                </a:ext>
+              </a:extLst>
+            </p:cNvPr>
+            <p:cNvCxnSpPr>
+              <a:cxnSpLocks/>
+              <a:endCxn id="12" idx="0"/>
+            </p:cNvCxnSpPr>
+            <p:nvPr/>
+          </p:nvCxnSpPr>
+          <p:spPr>
+            <a:xfrm>
+              <a:off x="2821242" y="632791"/>
+              <a:ext cx="0" cy="1127184"/>
+            </a:xfrm>
+            <a:prstGeom prst="line">
+              <a:avLst/>
+            </a:prstGeom>
+            <a:ln w="22225">
+              <a:headEnd type="triangle"/>
+            </a:ln>
+          </p:spPr>
+          <p:style>
+            <a:lnRef idx="2">
+              <a:schemeClr val="dk1"/>
+            </a:lnRef>
+            <a:fillRef idx="0">
+              <a:schemeClr val="dk1"/>
+            </a:fillRef>
+            <a:effectRef idx="1">
+              <a:schemeClr val="dk1"/>
+            </a:effectRef>
+            <a:fontRef idx="minor">
+              <a:schemeClr val="tx1"/>
+            </a:fontRef>
+          </p:style>
+        </p:cxnSp>
+        <p:cxnSp>
+          <p:nvCxnSpPr>
+            <p:cNvPr id="20" name="Straight Connector 19">
+              <a:extLst>
+                <a:ext uri="{FF2B5EF4-FFF2-40B4-BE49-F238E27FC236}">
+                  <a16:creationId xmlns:a16="http://schemas.microsoft.com/office/drawing/2014/main" id="{26D80904-88E4-A7E2-04F7-F9B94422B884}"/>
+                </a:ext>
+              </a:extLst>
+            </p:cNvPr>
+            <p:cNvCxnSpPr>
+              <a:cxnSpLocks/>
+            </p:cNvCxnSpPr>
+            <p:nvPr/>
+          </p:nvCxnSpPr>
+          <p:spPr>
+            <a:xfrm flipV="1">
+              <a:off x="658368" y="3421792"/>
+              <a:ext cx="2162873" cy="939609"/>
+            </a:xfrm>
+            <a:prstGeom prst="line">
+              <a:avLst/>
+            </a:prstGeom>
+            <a:ln w="22225">
+              <a:headEnd type="triangle"/>
+            </a:ln>
+          </p:spPr>
+          <p:style>
+            <a:lnRef idx="2">
+              <a:schemeClr val="dk1"/>
+            </a:lnRef>
+            <a:fillRef idx="0">
+              <a:schemeClr val="dk1"/>
+            </a:fillRef>
+            <a:effectRef idx="1">
+              <a:schemeClr val="dk1"/>
+            </a:effectRef>
+            <a:fontRef idx="minor">
+              <a:schemeClr val="tx1"/>
+            </a:fontRef>
+          </p:style>
+        </p:cxnSp>
+        <p:cxnSp>
+          <p:nvCxnSpPr>
+            <p:cNvPr id="21" name="Straight Connector 20">
+              <a:extLst>
+                <a:ext uri="{FF2B5EF4-FFF2-40B4-BE49-F238E27FC236}">
+                  <a16:creationId xmlns:a16="http://schemas.microsoft.com/office/drawing/2014/main" id="{BF7BEA58-7ECB-9F70-C67A-02D55FF35B28}"/>
+                </a:ext>
+              </a:extLst>
+            </p:cNvPr>
+            <p:cNvCxnSpPr>
+              <a:cxnSpLocks/>
+            </p:cNvCxnSpPr>
+            <p:nvPr/>
+          </p:nvCxnSpPr>
+          <p:spPr>
+            <a:xfrm flipH="1" flipV="1">
+              <a:off x="2821241" y="3421792"/>
+              <a:ext cx="1842199" cy="837762"/>
+            </a:xfrm>
+            <a:prstGeom prst="line">
+              <a:avLst/>
+            </a:prstGeom>
+            <a:ln w="22225">
+              <a:headEnd type="triangle"/>
+            </a:ln>
+          </p:spPr>
+          <p:style>
+            <a:lnRef idx="2">
+              <a:schemeClr val="dk1"/>
+            </a:lnRef>
+            <a:fillRef idx="0">
+              <a:schemeClr val="dk1"/>
+            </a:fillRef>
+            <a:effectRef idx="1">
+              <a:schemeClr val="dk1"/>
+            </a:effectRef>
+            <a:fontRef idx="minor">
+              <a:schemeClr val="tx1"/>
+            </a:fontRef>
+          </p:style>
+        </p:cxnSp>
+        <p:sp>
+          <p:nvSpPr>
+            <p:cNvPr id="22" name="TextBox 21">
+              <a:extLst>
+                <a:ext uri="{FF2B5EF4-FFF2-40B4-BE49-F238E27FC236}">
+                  <a16:creationId xmlns:a16="http://schemas.microsoft.com/office/drawing/2014/main" id="{AD026B67-909C-7DB7-C313-0FCB2CCE6085}"/>
+                </a:ext>
+              </a:extLst>
+            </p:cNvPr>
+            <p:cNvSpPr txBox="1"/>
+            <p:nvPr/>
+          </p:nvSpPr>
+          <p:spPr>
+            <a:xfrm>
+              <a:off x="2954186" y="1309672"/>
+              <a:ext cx="593723" cy="581410"/>
+            </a:xfrm>
+            <a:prstGeom prst="rect">
+              <a:avLst/>
+            </a:prstGeom>
+            <a:noFill/>
+          </p:spPr>
+          <p:txBody>
+            <a:bodyPr wrap="square">
+              <a:spAutoFit/>
+            </a:bodyPr>
+            <a:lstStyle/>
+            <a:p>
+              <a:pPr algn="ctr"/>
+              <a:r>
+                <a:rPr lang="en-US" sz="3200" dirty="0">
+                  <a:solidFill>
+                    <a:schemeClr val="tx1"/>
+                  </a:solidFill>
+                  <a:latin typeface="Tahoma" panose="020B0604030504040204" pitchFamily="34" charset="0"/>
+                  <a:ea typeface="Tahoma" panose="020B0604030504040204" pitchFamily="34" charset="0"/>
+                  <a:cs typeface="Tahoma" panose="020B0604030504040204" pitchFamily="34" charset="0"/>
+                </a:rPr>
+                <a:t>O</a:t>
+              </a:r>
+            </a:p>
+          </p:txBody>
+        </p:sp>
+        <p:sp>
+          <p:nvSpPr>
+            <p:cNvPr id="23" name="TextBox 22">
+              <a:extLst>
+                <a:ext uri="{FF2B5EF4-FFF2-40B4-BE49-F238E27FC236}">
+                  <a16:creationId xmlns:a16="http://schemas.microsoft.com/office/drawing/2014/main" id="{0E128999-53D6-C93F-9382-3EE1F45680DC}"/>
+                </a:ext>
+              </a:extLst>
+            </p:cNvPr>
+            <p:cNvSpPr txBox="1"/>
+            <p:nvPr/>
+          </p:nvSpPr>
+          <p:spPr>
+            <a:xfrm>
+              <a:off x="1750885" y="5358171"/>
+              <a:ext cx="593723" cy="581410"/>
+            </a:xfrm>
+            <a:prstGeom prst="rect">
+              <a:avLst/>
+            </a:prstGeom>
+            <a:noFill/>
+          </p:spPr>
+          <p:txBody>
+            <a:bodyPr wrap="square">
+              <a:spAutoFit/>
+            </a:bodyPr>
+            <a:lstStyle/>
+            <a:p>
+              <a:pPr algn="ctr"/>
+              <a:r>
+                <a:rPr lang="en-US" sz="3200" dirty="0">
+                  <a:solidFill>
+                    <a:schemeClr val="tx1"/>
+                  </a:solidFill>
+                  <a:latin typeface="Tahoma" panose="020B0604030504040204" pitchFamily="34" charset="0"/>
+                  <a:ea typeface="Tahoma" panose="020B0604030504040204" pitchFamily="34" charset="0"/>
+                  <a:cs typeface="Tahoma" panose="020B0604030504040204" pitchFamily="34" charset="0"/>
+                </a:rPr>
+                <a:t>O</a:t>
+              </a:r>
+            </a:p>
+          </p:txBody>
+        </p:sp>
+        <p:sp>
+          <p:nvSpPr>
+            <p:cNvPr id="26" name="TextBox 25">
+              <a:extLst>
+                <a:ext uri="{FF2B5EF4-FFF2-40B4-BE49-F238E27FC236}">
+                  <a16:creationId xmlns:a16="http://schemas.microsoft.com/office/drawing/2014/main" id="{ABF76A87-5427-07DF-F471-204D9AF5A31B}"/>
+                </a:ext>
+              </a:extLst>
+            </p:cNvPr>
+            <p:cNvSpPr txBox="1"/>
+            <p:nvPr/>
+          </p:nvSpPr>
+          <p:spPr>
+            <a:xfrm>
+              <a:off x="3037139" y="4554948"/>
+              <a:ext cx="593723" cy="581410"/>
+            </a:xfrm>
+            <a:prstGeom prst="rect">
+              <a:avLst/>
+            </a:prstGeom>
+            <a:noFill/>
+          </p:spPr>
+          <p:txBody>
+            <a:bodyPr wrap="square">
+              <a:spAutoFit/>
+            </a:bodyPr>
+            <a:lstStyle/>
+            <a:p>
+              <a:pPr algn="ctr"/>
+              <a:r>
+                <a:rPr lang="en-US" sz="3200" dirty="0">
+                  <a:latin typeface="Tahoma" panose="020B0604030504040204" pitchFamily="34" charset="0"/>
+                  <a:ea typeface="Tahoma" panose="020B0604030504040204" pitchFamily="34" charset="0"/>
+                  <a:cs typeface="Tahoma" panose="020B0604030504040204" pitchFamily="34" charset="0"/>
+                </a:rPr>
+                <a:t>P</a:t>
+              </a:r>
+              <a:endParaRPr lang="en-US" sz="3200" dirty="0">
+                <a:solidFill>
+                  <a:schemeClr val="tx1"/>
+                </a:solidFill>
+                <a:latin typeface="Tahoma" panose="020B0604030504040204" pitchFamily="34" charset="0"/>
+                <a:ea typeface="Tahoma" panose="020B0604030504040204" pitchFamily="34" charset="0"/>
+                <a:cs typeface="Tahoma" panose="020B0604030504040204" pitchFamily="34" charset="0"/>
+              </a:endParaRPr>
+            </a:p>
+          </p:txBody>
+        </p:sp>
+        <p:sp>
+          <p:nvSpPr>
+            <p:cNvPr id="27" name="TextBox 26">
+              <a:extLst>
+                <a:ext uri="{FF2B5EF4-FFF2-40B4-BE49-F238E27FC236}">
+                  <a16:creationId xmlns:a16="http://schemas.microsoft.com/office/drawing/2014/main" id="{052B931A-3465-C038-9AC8-1B4DF0246B27}"/>
+                </a:ext>
+              </a:extLst>
+            </p:cNvPr>
+            <p:cNvSpPr txBox="1"/>
+            <p:nvPr/>
+          </p:nvSpPr>
+          <p:spPr>
+            <a:xfrm>
+              <a:off x="798049" y="898240"/>
+              <a:ext cx="593723" cy="581410"/>
+            </a:xfrm>
+            <a:prstGeom prst="rect">
+              <a:avLst/>
+            </a:prstGeom>
+            <a:noFill/>
+          </p:spPr>
+          <p:txBody>
+            <a:bodyPr wrap="square">
+              <a:spAutoFit/>
+            </a:bodyPr>
+            <a:lstStyle/>
+            <a:p>
+              <a:pPr algn="ctr"/>
+              <a:r>
+                <a:rPr lang="en-US" sz="3200" dirty="0">
+                  <a:latin typeface="Tahoma" panose="020B0604030504040204" pitchFamily="34" charset="0"/>
+                  <a:ea typeface="Tahoma" panose="020B0604030504040204" pitchFamily="34" charset="0"/>
+                  <a:cs typeface="Tahoma" panose="020B0604030504040204" pitchFamily="34" charset="0"/>
+                </a:rPr>
+                <a:t>H</a:t>
+              </a:r>
+              <a:endParaRPr lang="en-US" sz="3200" dirty="0">
+                <a:solidFill>
+                  <a:schemeClr val="tx1"/>
+                </a:solidFill>
+                <a:latin typeface="Tahoma" panose="020B0604030504040204" pitchFamily="34" charset="0"/>
+                <a:ea typeface="Tahoma" panose="020B0604030504040204" pitchFamily="34" charset="0"/>
+                <a:cs typeface="Tahoma" panose="020B0604030504040204" pitchFamily="34" charset="0"/>
+              </a:endParaRPr>
+            </a:p>
+          </p:txBody>
+        </p:sp>
+        <mc:AlternateContent xmlns:mc="http://schemas.openxmlformats.org/markup-compatibility/2006">
+          <mc:Choice xmlns:a14="http://schemas.microsoft.com/office/drawing/2010/main" Requires="a14">
+            <p:sp>
+              <p:nvSpPr>
+                <p:cNvPr id="28" name="TextBox 27">
+                  <a:extLst>
+                    <a:ext uri="{FF2B5EF4-FFF2-40B4-BE49-F238E27FC236}">
+                      <a16:creationId xmlns:a16="http://schemas.microsoft.com/office/drawing/2014/main" id="{2AE0722B-82BC-92CF-A820-20DBF01E1F36}"/>
+                    </a:ext>
+                  </a:extLst>
+                </p:cNvPr>
+                <p:cNvSpPr txBox="1"/>
+                <p:nvPr/>
+              </p:nvSpPr>
+              <p:spPr>
+                <a:xfrm>
+                  <a:off x="2877315" y="353363"/>
+                  <a:ext cx="593723" cy="523220"/>
+                </a:xfrm>
+                <a:prstGeom prst="rect">
+                  <a:avLst/>
+                </a:prstGeom>
+                <a:noFill/>
+              </p:spPr>
+              <p:txBody>
+                <a:bodyPr wrap="square">
+                  <a:spAutoFit/>
+                </a:bodyPr>
+                <a:lstStyle/>
+                <a:p>
+                  <a:pPr algn="ctr"/>
+                  <a14:m>
+                    <m:oMathPara xmlns:m="http://schemas.openxmlformats.org/officeDocument/2006/math">
+                      <m:oMathParaPr>
+                        <m:jc m:val="centerGroup"/>
+                      </m:oMathParaPr>
+                      <m:oMath xmlns:m="http://schemas.openxmlformats.org/officeDocument/2006/math">
+                        <m:r>
+                          <a:rPr lang="en-US" sz="2800" b="0" i="1" smtClean="0">
+                            <a:solidFill>
+                              <a:schemeClr val="tx1"/>
+                            </a:solidFill>
+                            <a:latin typeface="Cambria Math" panose="02040503050406030204" pitchFamily="18" charset="0"/>
+                            <a:ea typeface="Tahoma" panose="020B0604030504040204" pitchFamily="34" charset="0"/>
+                            <a:cs typeface="Tahoma" panose="020B0604030504040204" pitchFamily="34" charset="0"/>
+                          </a:rPr>
+                          <m:t>𝑧</m:t>
+                        </m:r>
+                      </m:oMath>
+                    </m:oMathPara>
+                  </a14:m>
+                  <a:endParaRPr lang="en-US" sz="3200" dirty="0">
+                    <a:solidFill>
+                      <a:schemeClr val="tx1"/>
+                    </a:solidFill>
+                    <a:latin typeface="Tahoma" panose="020B0604030504040204" pitchFamily="34" charset="0"/>
+                    <a:ea typeface="Tahoma" panose="020B0604030504040204" pitchFamily="34" charset="0"/>
+                    <a:cs typeface="Tahoma" panose="020B0604030504040204" pitchFamily="34" charset="0"/>
+                  </a:endParaRPr>
+                </a:p>
+              </p:txBody>
+            </p:sp>
+          </mc:Choice>
+          <mc:Fallback>
+            <p:sp>
+              <p:nvSpPr>
+                <p:cNvPr id="28" name="TextBox 27">
+                  <a:extLst>
+                    <a:ext uri="{FF2B5EF4-FFF2-40B4-BE49-F238E27FC236}">
+                      <a16:creationId xmlns:a16="http://schemas.microsoft.com/office/drawing/2014/main" id="{2AE0722B-82BC-92CF-A820-20DBF01E1F36}"/>
+                    </a:ext>
+                  </a:extLst>
+                </p:cNvPr>
+                <p:cNvSpPr txBox="1">
+                  <a:spLocks noRot="1" noChangeAspect="1" noMove="1" noResize="1" noEditPoints="1" noAdjustHandles="1" noChangeArrowheads="1" noChangeShapeType="1" noTextEdit="1"/>
+                </p:cNvSpPr>
+                <p:nvPr/>
+              </p:nvSpPr>
+              <p:spPr>
+                <a:xfrm>
+                  <a:off x="2877315" y="353363"/>
+                  <a:ext cx="593723" cy="523220"/>
+                </a:xfrm>
+                <a:prstGeom prst="rect">
+                  <a:avLst/>
+                </a:prstGeom>
+                <a:blipFill>
+                  <a:blip r:embed="rId10"/>
+                  <a:stretch>
+                    <a:fillRect/>
+                  </a:stretch>
+                </a:blipFill>
+              </p:spPr>
+              <p:txBody>
+                <a:bodyPr/>
+                <a:lstStyle/>
+                <a:p>
+                  <a:r>
+                    <a:rPr lang="en-GB">
+                      <a:noFill/>
+                    </a:rPr>
+                    <a:t> </a:t>
+                  </a:r>
+                </a:p>
+              </p:txBody>
+            </p:sp>
+          </mc:Fallback>
+        </mc:AlternateContent>
+        <mc:AlternateContent xmlns:mc="http://schemas.openxmlformats.org/markup-compatibility/2006">
+          <mc:Choice xmlns:a14="http://schemas.microsoft.com/office/drawing/2010/main" Requires="a14">
+            <p:sp>
+              <p:nvSpPr>
+                <p:cNvPr id="29" name="TextBox 28">
+                  <a:extLst>
+                    <a:ext uri="{FF2B5EF4-FFF2-40B4-BE49-F238E27FC236}">
+                      <a16:creationId xmlns:a16="http://schemas.microsoft.com/office/drawing/2014/main" id="{B1CE0186-1884-98AB-F5DA-31005F069560}"/>
+                    </a:ext>
+                  </a:extLst>
+                </p:cNvPr>
+                <p:cNvSpPr txBox="1"/>
+                <p:nvPr/>
+              </p:nvSpPr>
+              <p:spPr>
+                <a:xfrm>
+                  <a:off x="485007" y="3736334"/>
+                  <a:ext cx="593723" cy="538609"/>
+                </a:xfrm>
+                <a:prstGeom prst="rect">
+                  <a:avLst/>
+                </a:prstGeom>
+                <a:noFill/>
+              </p:spPr>
+              <p:txBody>
+                <a:bodyPr wrap="square">
+                  <a:spAutoFit/>
+                </a:bodyPr>
+                <a:lstStyle/>
+                <a:p>
+                  <a:pPr algn="ctr"/>
+                  <a14:m>
+                    <m:oMathPara xmlns:m="http://schemas.openxmlformats.org/officeDocument/2006/math">
+                      <m:oMathParaPr>
+                        <m:jc m:val="centerGroup"/>
+                      </m:oMathParaPr>
+                      <m:oMath xmlns:m="http://schemas.openxmlformats.org/officeDocument/2006/math">
+                        <m:r>
+                          <a:rPr lang="en-US" sz="2900" b="0" i="1" smtClean="0">
+                            <a:solidFill>
+                              <a:schemeClr val="tx1"/>
+                            </a:solidFill>
+                            <a:latin typeface="Cambria Math" panose="02040503050406030204" pitchFamily="18" charset="0"/>
+                            <a:ea typeface="Tahoma" panose="020B0604030504040204" pitchFamily="34" charset="0"/>
+                            <a:cs typeface="Tahoma" panose="020B0604030504040204" pitchFamily="34" charset="0"/>
+                          </a:rPr>
+                          <m:t>𝑥</m:t>
+                        </m:r>
+                      </m:oMath>
+                    </m:oMathPara>
+                  </a14:m>
+                  <a:endParaRPr lang="en-US" sz="2900" dirty="0">
+                    <a:solidFill>
+                      <a:schemeClr val="tx1"/>
+                    </a:solidFill>
+                    <a:latin typeface="Tahoma" panose="020B0604030504040204" pitchFamily="34" charset="0"/>
+                    <a:ea typeface="Tahoma" panose="020B0604030504040204" pitchFamily="34" charset="0"/>
+                    <a:cs typeface="Tahoma" panose="020B0604030504040204" pitchFamily="34" charset="0"/>
+                  </a:endParaRPr>
+                </a:p>
+              </p:txBody>
+            </p:sp>
+          </mc:Choice>
+          <mc:Fallback>
+            <p:sp>
+              <p:nvSpPr>
+                <p:cNvPr id="29" name="TextBox 28">
+                  <a:extLst>
+                    <a:ext uri="{FF2B5EF4-FFF2-40B4-BE49-F238E27FC236}">
+                      <a16:creationId xmlns:a16="http://schemas.microsoft.com/office/drawing/2014/main" id="{B1CE0186-1884-98AB-F5DA-31005F069560}"/>
+                    </a:ext>
+                  </a:extLst>
+                </p:cNvPr>
+                <p:cNvSpPr txBox="1">
+                  <a:spLocks noRot="1" noChangeAspect="1" noMove="1" noResize="1" noEditPoints="1" noAdjustHandles="1" noChangeArrowheads="1" noChangeShapeType="1" noTextEdit="1"/>
+                </p:cNvSpPr>
+                <p:nvPr/>
+              </p:nvSpPr>
+              <p:spPr>
+                <a:xfrm>
+                  <a:off x="485007" y="3736334"/>
+                  <a:ext cx="593723" cy="538609"/>
+                </a:xfrm>
+                <a:prstGeom prst="rect">
+                  <a:avLst/>
+                </a:prstGeom>
+                <a:blipFill>
+                  <a:blip r:embed="rId11"/>
+                  <a:stretch>
+                    <a:fillRect/>
+                  </a:stretch>
+                </a:blipFill>
+              </p:spPr>
+              <p:txBody>
+                <a:bodyPr/>
+                <a:lstStyle/>
+                <a:p>
+                  <a:r>
+                    <a:rPr lang="en-GB">
+                      <a:noFill/>
+                    </a:rPr>
+                    <a:t> </a:t>
+                  </a:r>
+                </a:p>
+              </p:txBody>
+            </p:sp>
+          </mc:Fallback>
+        </mc:AlternateContent>
+        <mc:AlternateContent xmlns:mc="http://schemas.openxmlformats.org/markup-compatibility/2006">
+          <mc:Choice xmlns:a14="http://schemas.microsoft.com/office/drawing/2010/main" Requires="a14">
+            <p:sp>
+              <p:nvSpPr>
+                <p:cNvPr id="30" name="TextBox 29">
+                  <a:extLst>
+                    <a:ext uri="{FF2B5EF4-FFF2-40B4-BE49-F238E27FC236}">
+                      <a16:creationId xmlns:a16="http://schemas.microsoft.com/office/drawing/2014/main" id="{8EF465AF-C787-6728-6729-FC96FA4FC339}"/>
+                    </a:ext>
+                  </a:extLst>
+                </p:cNvPr>
+                <p:cNvSpPr txBox="1"/>
+                <p:nvPr/>
+              </p:nvSpPr>
+              <p:spPr>
+                <a:xfrm>
+                  <a:off x="4476829" y="3665355"/>
+                  <a:ext cx="593723" cy="523220"/>
+                </a:xfrm>
+                <a:prstGeom prst="rect">
+                  <a:avLst/>
+                </a:prstGeom>
+                <a:noFill/>
+              </p:spPr>
+              <p:txBody>
+                <a:bodyPr wrap="square">
+                  <a:spAutoFit/>
+                </a:bodyPr>
+                <a:lstStyle/>
+                <a:p>
+                  <a:pPr algn="ctr"/>
+                  <a14:m>
+                    <m:oMathPara xmlns:m="http://schemas.openxmlformats.org/officeDocument/2006/math">
+                      <m:oMathParaPr>
+                        <m:jc m:val="centerGroup"/>
+                      </m:oMathParaPr>
+                      <m:oMath xmlns:m="http://schemas.openxmlformats.org/officeDocument/2006/math">
+                        <m:r>
+                          <a:rPr lang="en-US" sz="2800" b="0" i="1" smtClean="0">
+                            <a:solidFill>
+                              <a:schemeClr val="tx1"/>
+                            </a:solidFill>
+                            <a:latin typeface="Cambria Math" panose="02040503050406030204" pitchFamily="18" charset="0"/>
+                            <a:ea typeface="Tahoma" panose="020B0604030504040204" pitchFamily="34" charset="0"/>
+                            <a:cs typeface="Tahoma" panose="020B0604030504040204" pitchFamily="34" charset="0"/>
+                          </a:rPr>
+                          <m:t>𝑦</m:t>
+                        </m:r>
+                      </m:oMath>
+                    </m:oMathPara>
+                  </a14:m>
+                  <a:endParaRPr lang="en-US" sz="2800" dirty="0">
+                    <a:solidFill>
+                      <a:schemeClr val="tx1"/>
+                    </a:solidFill>
+                    <a:latin typeface="Tahoma" panose="020B0604030504040204" pitchFamily="34" charset="0"/>
+                    <a:ea typeface="Tahoma" panose="020B0604030504040204" pitchFamily="34" charset="0"/>
+                    <a:cs typeface="Tahoma" panose="020B0604030504040204" pitchFamily="34" charset="0"/>
+                  </a:endParaRPr>
+                </a:p>
+              </p:txBody>
+            </p:sp>
+          </mc:Choice>
+          <mc:Fallback>
+            <p:sp>
+              <p:nvSpPr>
+                <p:cNvPr id="30" name="TextBox 29">
+                  <a:extLst>
+                    <a:ext uri="{FF2B5EF4-FFF2-40B4-BE49-F238E27FC236}">
+                      <a16:creationId xmlns:a16="http://schemas.microsoft.com/office/drawing/2014/main" id="{8EF465AF-C787-6728-6729-FC96FA4FC339}"/>
+                    </a:ext>
+                  </a:extLst>
+                </p:cNvPr>
+                <p:cNvSpPr txBox="1">
+                  <a:spLocks noRot="1" noChangeAspect="1" noMove="1" noResize="1" noEditPoints="1" noAdjustHandles="1" noChangeArrowheads="1" noChangeShapeType="1" noTextEdit="1"/>
+                </p:cNvSpPr>
+                <p:nvPr/>
+              </p:nvSpPr>
+              <p:spPr>
+                <a:xfrm>
+                  <a:off x="4476829" y="3665355"/>
+                  <a:ext cx="593723" cy="523220"/>
+                </a:xfrm>
+                <a:prstGeom prst="rect">
+                  <a:avLst/>
+                </a:prstGeom>
+                <a:blipFill>
+                  <a:blip r:embed="rId12"/>
+                  <a:stretch>
+                    <a:fillRect/>
+                  </a:stretch>
+                </a:blipFill>
+              </p:spPr>
+              <p:txBody>
+                <a:bodyPr/>
+                <a:lstStyle/>
+                <a:p>
+                  <a:r>
+                    <a:rPr lang="en-GB">
+                      <a:noFill/>
+                    </a:rPr>
+                    <a:t> </a:t>
+                  </a:r>
+                </a:p>
+              </p:txBody>
+            </p:sp>
+          </mc:Fallback>
+        </mc:AlternateContent>
+        <p:sp>
+          <p:nvSpPr>
+            <p:cNvPr id="32" name="Arc 31">
+              <a:extLst>
+                <a:ext uri="{FF2B5EF4-FFF2-40B4-BE49-F238E27FC236}">
+                  <a16:creationId xmlns:a16="http://schemas.microsoft.com/office/drawing/2014/main" id="{02CA6C54-B858-4EAB-1A30-53996B72A240}"/>
+                </a:ext>
+              </a:extLst>
+            </p:cNvPr>
+            <p:cNvSpPr/>
+            <p:nvPr/>
+          </p:nvSpPr>
+          <p:spPr>
+            <a:xfrm rot="12846546">
+              <a:off x="2031097" y="3201356"/>
+              <a:ext cx="748299" cy="505015"/>
+            </a:xfrm>
+            <a:prstGeom prst="arc">
+              <a:avLst/>
+            </a:prstGeom>
+            <a:ln>
+              <a:solidFill>
+                <a:schemeClr val="bg2">
+                  <a:lumMod val="50000"/>
+                </a:schemeClr>
+              </a:solidFill>
+            </a:ln>
+          </p:spPr>
+          <p:style>
+            <a:lnRef idx="2">
+              <a:schemeClr val="accent1"/>
+            </a:lnRef>
+            <a:fillRef idx="0">
+              <a:schemeClr val="accent1"/>
+            </a:fillRef>
+            <a:effectRef idx="1">
+              <a:schemeClr val="accent1"/>
+            </a:effectRef>
+            <a:fontRef idx="minor">
+              <a:schemeClr val="tx1"/>
+            </a:fontRef>
+          </p:style>
+          <p:txBody>
+            <a:bodyPr rtlCol="0" anchor="ctr"/>
+            <a:lstStyle/>
+            <a:p>
+              <a:pPr algn="ctr"/>
+              <a:endParaRPr lang="en-GB"/>
+            </a:p>
+          </p:txBody>
+        </p:sp>
+        <p:sp>
+          <p:nvSpPr>
+            <p:cNvPr id="33" name="Arc 32">
+              <a:extLst>
+                <a:ext uri="{FF2B5EF4-FFF2-40B4-BE49-F238E27FC236}">
+                  <a16:creationId xmlns:a16="http://schemas.microsoft.com/office/drawing/2014/main" id="{A5FC7AB4-7214-4A5C-FD7C-4D7D1F76B433}"/>
+                </a:ext>
+              </a:extLst>
+            </p:cNvPr>
+            <p:cNvSpPr/>
+            <p:nvPr/>
+          </p:nvSpPr>
+          <p:spPr>
+            <a:xfrm rot="12846546">
+              <a:off x="2145444" y="4204293"/>
+              <a:ext cx="838641" cy="1002747"/>
+            </a:xfrm>
+            <a:prstGeom prst="arc">
+              <a:avLst>
+                <a:gd name="adj1" fmla="val 16200000"/>
+                <a:gd name="adj2" fmla="val 4987230"/>
+              </a:avLst>
+            </a:prstGeom>
+            <a:ln>
+              <a:solidFill>
+                <a:schemeClr val="bg2">
+                  <a:lumMod val="50000"/>
+                </a:schemeClr>
+              </a:solidFill>
+            </a:ln>
+          </p:spPr>
+          <p:style>
+            <a:lnRef idx="2">
+              <a:schemeClr val="accent1"/>
+            </a:lnRef>
+            <a:fillRef idx="0">
+              <a:schemeClr val="accent1"/>
+            </a:fillRef>
+            <a:effectRef idx="1">
+              <a:schemeClr val="accent1"/>
+            </a:effectRef>
+            <a:fontRef idx="minor">
+              <a:schemeClr val="tx1"/>
+            </a:fontRef>
+          </p:style>
+          <p:txBody>
+            <a:bodyPr rtlCol="0" anchor="ctr"/>
+            <a:lstStyle/>
+            <a:p>
+              <a:pPr algn="ctr"/>
+              <a:endParaRPr lang="en-GB"/>
+            </a:p>
+          </p:txBody>
+        </p:sp>
+        <mc:AlternateContent xmlns:mc="http://schemas.openxmlformats.org/markup-compatibility/2006">
+          <mc:Choice xmlns:a14="http://schemas.microsoft.com/office/drawing/2010/main" Requires="a14">
+            <p:sp>
+              <p:nvSpPr>
+                <p:cNvPr id="34" name="TextBox 33">
+                  <a:extLst>
+                    <a:ext uri="{FF2B5EF4-FFF2-40B4-BE49-F238E27FC236}">
+                      <a16:creationId xmlns:a16="http://schemas.microsoft.com/office/drawing/2014/main" id="{53D9667A-C829-130C-5F03-0FE760C95E6A}"/>
+                    </a:ext>
+                  </a:extLst>
+                </p:cNvPr>
+                <p:cNvSpPr txBox="1"/>
+                <p:nvPr/>
+              </p:nvSpPr>
+              <p:spPr>
+                <a:xfrm>
+                  <a:off x="1717710" y="3674796"/>
+                  <a:ext cx="593722" cy="1077218"/>
+                </a:xfrm>
+                <a:prstGeom prst="rect">
+                  <a:avLst/>
+                </a:prstGeom>
+                <a:noFill/>
+              </p:spPr>
+              <p:txBody>
+                <a:bodyPr wrap="square">
+                  <a:spAutoFit/>
+                </a:bodyPr>
+                <a:lstStyle/>
+                <a:p>
+                  <a:pPr algn="ctr"/>
+                  <a:endParaRPr lang="en-US" sz="3200" dirty="0">
+                    <a:solidFill>
+                      <a:schemeClr val="tx1"/>
+                    </a:solidFill>
+                    <a:latin typeface="Tahoma" panose="020B0604030504040204" pitchFamily="34" charset="0"/>
+                    <a:ea typeface="Tahoma" panose="020B0604030504040204" pitchFamily="34" charset="0"/>
+                    <a:cs typeface="Tahoma" panose="020B0604030504040204" pitchFamily="34" charset="0"/>
+                  </a:endParaRPr>
+                </a:p>
+                <a:p>
+                  <a:pPr algn="ctr"/>
+                  <a14:m>
+                    <m:oMathPara xmlns:m="http://schemas.openxmlformats.org/officeDocument/2006/math">
+                      <m:oMathParaPr>
+                        <m:jc m:val="centerGroup"/>
+                      </m:oMathParaPr>
+                      <m:oMath xmlns:m="http://schemas.openxmlformats.org/officeDocument/2006/math">
+                        <m:r>
+                          <a:rPr lang="en-US" sz="3200" b="0" i="1" smtClean="0">
+                            <a:solidFill>
+                              <a:schemeClr val="tx1"/>
+                            </a:solidFill>
+                            <a:latin typeface="Cambria Math" panose="02040503050406030204" pitchFamily="18" charset="0"/>
+                            <a:ea typeface="Tahoma" panose="020B0604030504040204" pitchFamily="34" charset="0"/>
+                            <a:cs typeface="Tahoma" panose="020B0604030504040204" pitchFamily="34" charset="0"/>
+                          </a:rPr>
+                          <m:t>𝛼</m:t>
+                        </m:r>
+                      </m:oMath>
+                    </m:oMathPara>
+                  </a14:m>
+                  <a:endParaRPr lang="en-US" sz="3200" dirty="0">
+                    <a:solidFill>
+                      <a:schemeClr val="tx1"/>
+                    </a:solidFill>
+                    <a:latin typeface="Tahoma" panose="020B0604030504040204" pitchFamily="34" charset="0"/>
+                    <a:ea typeface="Tahoma" panose="020B0604030504040204" pitchFamily="34" charset="0"/>
+                    <a:cs typeface="Tahoma" panose="020B0604030504040204" pitchFamily="34" charset="0"/>
+                  </a:endParaRPr>
+                </a:p>
+              </p:txBody>
+            </p:sp>
+          </mc:Choice>
+          <mc:Fallback>
+            <p:sp>
+              <p:nvSpPr>
+                <p:cNvPr id="34" name="TextBox 33">
+                  <a:extLst>
+                    <a:ext uri="{FF2B5EF4-FFF2-40B4-BE49-F238E27FC236}">
+                      <a16:creationId xmlns:a16="http://schemas.microsoft.com/office/drawing/2014/main" id="{53D9667A-C829-130C-5F03-0FE760C95E6A}"/>
+                    </a:ext>
+                  </a:extLst>
+                </p:cNvPr>
+                <p:cNvSpPr txBox="1">
+                  <a:spLocks noRot="1" noChangeAspect="1" noMove="1" noResize="1" noEditPoints="1" noAdjustHandles="1" noChangeArrowheads="1" noChangeShapeType="1" noTextEdit="1"/>
+                </p:cNvSpPr>
+                <p:nvPr/>
+              </p:nvSpPr>
+              <p:spPr>
+                <a:xfrm>
+                  <a:off x="1717710" y="3674796"/>
+                  <a:ext cx="593722" cy="1077218"/>
+                </a:xfrm>
+                <a:prstGeom prst="rect">
+                  <a:avLst/>
+                </a:prstGeom>
+                <a:blipFill>
+                  <a:blip r:embed="rId13"/>
+                  <a:stretch>
+                    <a:fillRect/>
+                  </a:stretch>
+                </a:blipFill>
+              </p:spPr>
+              <p:txBody>
+                <a:bodyPr/>
+                <a:lstStyle/>
+                <a:p>
+                  <a:r>
+                    <a:rPr lang="en-GB">
+                      <a:noFill/>
+                    </a:rPr>
+                    <a:t> </a:t>
+                  </a:r>
+                </a:p>
+              </p:txBody>
+            </p:sp>
+          </mc:Fallback>
+        </mc:AlternateContent>
+        <mc:AlternateContent xmlns:mc="http://schemas.openxmlformats.org/markup-compatibility/2006">
+          <mc:Choice xmlns:a14="http://schemas.microsoft.com/office/drawing/2010/main" Requires="a14">
+            <p:sp>
+              <p:nvSpPr>
+                <p:cNvPr id="35" name="TextBox 34">
+                  <a:extLst>
+                    <a:ext uri="{FF2B5EF4-FFF2-40B4-BE49-F238E27FC236}">
+                      <a16:creationId xmlns:a16="http://schemas.microsoft.com/office/drawing/2014/main" id="{92591C60-696A-17A1-62A0-ACC301DF97A2}"/>
+                    </a:ext>
+                  </a:extLst>
+                </p:cNvPr>
+                <p:cNvSpPr txBox="1"/>
+                <p:nvPr/>
+              </p:nvSpPr>
+              <p:spPr>
+                <a:xfrm>
+                  <a:off x="1811524" y="1626382"/>
+                  <a:ext cx="593722" cy="1384995"/>
+                </a:xfrm>
+                <a:prstGeom prst="rect">
+                  <a:avLst/>
+                </a:prstGeom>
+                <a:noFill/>
+              </p:spPr>
+              <p:txBody>
+                <a:bodyPr wrap="square">
+                  <a:spAutoFit/>
+                </a:bodyPr>
+                <a:lstStyle/>
+                <a:p>
+                  <a:pPr algn="ctr"/>
+                  <a:endParaRPr lang="en-US" sz="2800" dirty="0">
+                    <a:solidFill>
+                      <a:schemeClr val="tx1"/>
+                    </a:solidFill>
+                    <a:latin typeface="Tahoma" panose="020B0604030504040204" pitchFamily="34" charset="0"/>
+                    <a:ea typeface="Tahoma" panose="020B0604030504040204" pitchFamily="34" charset="0"/>
+                    <a:cs typeface="Tahoma" panose="020B0604030504040204" pitchFamily="34" charset="0"/>
+                  </a:endParaRPr>
+                </a:p>
+                <a:p>
+                  <a:pPr algn="ctr"/>
+                  <a14:m>
+                    <m:oMathPara xmlns:m="http://schemas.openxmlformats.org/officeDocument/2006/math">
+                      <m:oMathParaPr>
+                        <m:jc m:val="centerGroup"/>
+                      </m:oMathParaPr>
+                      <m:oMath xmlns:m="http://schemas.openxmlformats.org/officeDocument/2006/math">
+                        <m:r>
+                          <m:rPr>
+                            <m:sty m:val="p"/>
+                          </m:rPr>
+                          <a:rPr lang="en-US" sz="2800" b="0" i="1" smtClean="0">
+                            <a:solidFill>
+                              <a:schemeClr val="tx1"/>
+                            </a:solidFill>
+                            <a:latin typeface="Cambria Math" panose="02040503050406030204" pitchFamily="18" charset="0"/>
+                            <a:ea typeface="Tahoma" panose="020B0604030504040204" pitchFamily="34" charset="0"/>
+                            <a:cs typeface="Tahoma" panose="020B0604030504040204" pitchFamily="34" charset="0"/>
+                          </a:rPr>
+                          <m:t>β</m:t>
+                        </m:r>
+                      </m:oMath>
+                    </m:oMathPara>
+                  </a14:m>
+                  <a:endParaRPr lang="en-US" sz="2800" b="0" dirty="0">
+                    <a:solidFill>
+                      <a:schemeClr val="tx1"/>
+                    </a:solidFill>
+                    <a:latin typeface="Tahoma" panose="020B0604030504040204" pitchFamily="34" charset="0"/>
+                    <a:ea typeface="Tahoma" panose="020B0604030504040204" pitchFamily="34" charset="0"/>
+                    <a:cs typeface="Tahoma" panose="020B0604030504040204" pitchFamily="34" charset="0"/>
+                  </a:endParaRPr>
+                </a:p>
+                <a:p>
+                  <a:pPr algn="ctr"/>
+                  <a:endParaRPr lang="en-US" sz="2800" dirty="0">
+                    <a:solidFill>
+                      <a:schemeClr val="tx1"/>
+                    </a:solidFill>
+                    <a:latin typeface="Tahoma" panose="020B0604030504040204" pitchFamily="34" charset="0"/>
+                    <a:ea typeface="Tahoma" panose="020B0604030504040204" pitchFamily="34" charset="0"/>
+                    <a:cs typeface="Tahoma" panose="020B0604030504040204" pitchFamily="34" charset="0"/>
+                  </a:endParaRPr>
+                </a:p>
+              </p:txBody>
+            </p:sp>
+          </mc:Choice>
+          <mc:Fallback>
+            <p:sp>
+              <p:nvSpPr>
+                <p:cNvPr id="35" name="TextBox 34">
+                  <a:extLst>
+                    <a:ext uri="{FF2B5EF4-FFF2-40B4-BE49-F238E27FC236}">
+                      <a16:creationId xmlns:a16="http://schemas.microsoft.com/office/drawing/2014/main" id="{92591C60-696A-17A1-62A0-ACC301DF97A2}"/>
+                    </a:ext>
+                  </a:extLst>
+                </p:cNvPr>
+                <p:cNvSpPr txBox="1">
+                  <a:spLocks noRot="1" noChangeAspect="1" noMove="1" noResize="1" noEditPoints="1" noAdjustHandles="1" noChangeArrowheads="1" noChangeShapeType="1" noTextEdit="1"/>
+                </p:cNvSpPr>
+                <p:nvPr/>
+              </p:nvSpPr>
+              <p:spPr>
+                <a:xfrm>
+                  <a:off x="1811524" y="1626382"/>
+                  <a:ext cx="593722" cy="1384995"/>
+                </a:xfrm>
+                <a:prstGeom prst="rect">
+                  <a:avLst/>
+                </a:prstGeom>
+                <a:blipFill>
+                  <a:blip r:embed="rId14"/>
+                  <a:stretch>
+                    <a:fillRect/>
+                  </a:stretch>
+                </a:blipFill>
+              </p:spPr>
+              <p:txBody>
+                <a:bodyPr/>
+                <a:lstStyle/>
+                <a:p>
+                  <a:r>
+                    <a:rPr lang="en-GB">
+                      <a:noFill/>
+                    </a:rPr>
+                    <a:t> </a:t>
+                  </a:r>
+                </a:p>
+              </p:txBody>
+            </p:sp>
+          </mc:Fallback>
+        </mc:AlternateContent>
+        <p:sp>
+          <p:nvSpPr>
+            <p:cNvPr id="36" name="Arc 35">
+              <a:extLst>
+                <a:ext uri="{FF2B5EF4-FFF2-40B4-BE49-F238E27FC236}">
+                  <a16:creationId xmlns:a16="http://schemas.microsoft.com/office/drawing/2014/main" id="{75316CAA-CFDB-498B-BFA7-CFBAF38A25F5}"/>
+                </a:ext>
+              </a:extLst>
+            </p:cNvPr>
+            <p:cNvSpPr/>
+            <p:nvPr/>
+          </p:nvSpPr>
+          <p:spPr>
+            <a:xfrm rot="10095993">
+              <a:off x="2230221" y="1554302"/>
+              <a:ext cx="914782" cy="1179369"/>
+            </a:xfrm>
+            <a:prstGeom prst="arc">
+              <a:avLst>
+                <a:gd name="adj1" fmla="val 16148513"/>
+                <a:gd name="adj2" fmla="val 4110365"/>
+              </a:avLst>
+            </a:prstGeom>
+            <a:ln>
+              <a:solidFill>
+                <a:schemeClr val="bg2">
+                  <a:lumMod val="50000"/>
+                </a:schemeClr>
+              </a:solidFill>
+            </a:ln>
+          </p:spPr>
+          <p:style>
+            <a:lnRef idx="2">
+              <a:schemeClr val="accent1"/>
+            </a:lnRef>
+            <a:fillRef idx="0">
+              <a:schemeClr val="accent1"/>
+            </a:fillRef>
+            <a:effectRef idx="1">
+              <a:schemeClr val="accent1"/>
+            </a:effectRef>
+            <a:fontRef idx="minor">
+              <a:schemeClr val="tx1"/>
+            </a:fontRef>
+          </p:style>
+          <p:txBody>
+            <a:bodyPr rtlCol="0" anchor="ctr"/>
+            <a:lstStyle/>
+            <a:p>
+              <a:pPr algn="ctr"/>
+              <a:endParaRPr lang="en-GB"/>
+            </a:p>
+          </p:txBody>
+        </p:sp>
+        <p:sp>
+          <p:nvSpPr>
+            <p:cNvPr id="37" name="Arc 36">
+              <a:extLst>
+                <a:ext uri="{FF2B5EF4-FFF2-40B4-BE49-F238E27FC236}">
+                  <a16:creationId xmlns:a16="http://schemas.microsoft.com/office/drawing/2014/main" id="{967B71AC-BC9D-DF08-6059-4107C24B77FF}"/>
+                </a:ext>
+              </a:extLst>
+            </p:cNvPr>
+            <p:cNvSpPr/>
+            <p:nvPr/>
+          </p:nvSpPr>
+          <p:spPr>
+            <a:xfrm rot="17063397">
+              <a:off x="2327279" y="1490353"/>
+              <a:ext cx="778012" cy="785280"/>
+            </a:xfrm>
+            <a:prstGeom prst="arc">
+              <a:avLst>
+                <a:gd name="adj1" fmla="val 17529598"/>
+                <a:gd name="adj2" fmla="val 0"/>
+              </a:avLst>
+            </a:prstGeom>
+            <a:ln>
+              <a:solidFill>
+                <a:srgbClr val="FF0000"/>
+              </a:solidFill>
+            </a:ln>
+          </p:spPr>
+          <p:style>
+            <a:lnRef idx="2">
+              <a:schemeClr val="accent1"/>
+            </a:lnRef>
+            <a:fillRef idx="0">
+              <a:schemeClr val="accent1"/>
+            </a:fillRef>
+            <a:effectRef idx="1">
+              <a:schemeClr val="accent1"/>
+            </a:effectRef>
+            <a:fontRef idx="minor">
+              <a:schemeClr val="tx1"/>
+            </a:fontRef>
+          </p:style>
+          <p:txBody>
+            <a:bodyPr rtlCol="0" anchor="ctr"/>
+            <a:lstStyle/>
+            <a:p>
+              <a:pPr algn="ctr"/>
+              <a:endParaRPr lang="en-GB"/>
+            </a:p>
+          </p:txBody>
+        </p:sp>
+      </p:grpSp>
+    </p:spTree>
+    <p:extLst>
+      <p:ext uri="{BB962C8B-B14F-4D97-AF65-F5344CB8AC3E}">
+        <p14:creationId xmlns:p14="http://schemas.microsoft.com/office/powerpoint/2010/main" val="432137981"/>
+      </p:ext>
+    </p:extLst>
+  </p:cSld>
+  <p:clrMapOvr>
+    <a:masterClrMapping/>
+  </p:clrMapOvr>
+</p:sld>
+</file>
+
+<file path=ppt/slides/slide6.xml><?xml version="1.0" encoding="utf-8"?>
+<p:sld xmlns:a="http://schemas.openxmlformats.org/drawingml/2006/main" xmlns:r="http://schemas.openxmlformats.org/officeDocument/2006/relationships" xmlns:p="http://schemas.openxmlformats.org/presentationml/2006/main">
+  <p:cSld>
+    <p:spTree>
+      <p:nvGrpSpPr>
+        <p:cNvPr id="1" name="">
+          <a:extLst>
+            <a:ext uri="{FF2B5EF4-FFF2-40B4-BE49-F238E27FC236}">
+              <a16:creationId xmlns:a16="http://schemas.microsoft.com/office/drawing/2014/main" id="{75210CED-4123-289E-C4A9-4DDF5D25EF30}"/>
+            </a:ext>
+          </a:extLst>
+        </p:cNvPr>
+        <p:cNvGrpSpPr/>
+        <p:nvPr/>
+      </p:nvGrpSpPr>
+      <p:grpSpPr>
+        <a:xfrm>
+          <a:off x="0" y="0"/>
+          <a:ext cx="0" cy="0"/>
+          <a:chOff x="0" y="0"/>
+          <a:chExt cx="0" cy="0"/>
+        </a:xfrm>
+      </p:grpSpPr>
+      <p:grpSp>
+        <p:nvGrpSpPr>
           <p:cNvPr id="31" name="Group 30">
             <a:extLst>
               <a:ext uri="{FF2B5EF4-FFF2-40B4-BE49-F238E27FC236}">
-                <a16:creationId xmlns:a16="http://schemas.microsoft.com/office/drawing/2014/main" id="{A38423A0-6FB4-A2A3-5F3A-A3C04638AFD2}"/>
+                <a16:creationId xmlns:a16="http://schemas.microsoft.com/office/drawing/2014/main" id="{0F5573AB-FCF1-44FD-AF24-77008C86EB42}"/>
               </a:ext>
             </a:extLst>
           </p:cNvPr>
@@ -13968,7 +18888,7 @@
             <p:cNvPr id="3" name="Picture 2" descr="A screenshot of a diagram&#10;&#10;AI-generated content may be incorrect.">
               <a:extLst>
                 <a:ext uri="{FF2B5EF4-FFF2-40B4-BE49-F238E27FC236}">
-                  <a16:creationId xmlns:a16="http://schemas.microsoft.com/office/drawing/2014/main" id="{694D96ED-D459-D7AB-67E4-2619979D90B5}"/>
+                  <a16:creationId xmlns:a16="http://schemas.microsoft.com/office/drawing/2014/main" id="{3EAD4BB8-A4B3-F63F-89D8-A27BDEAB2A02}"/>
                 </a:ext>
               </a:extLst>
             </p:cNvPr>
@@ -13978,7 +18898,7 @@
             <p:nvPr/>
           </p:nvPicPr>
           <p:blipFill>
-            <a:blip r:embed="rId8">
+            <a:blip r:embed="rId2">
               <a:extLst>
                 <a:ext uri="{28A0092B-C50C-407E-A947-70E740481C1C}">
                   <a14:useLocalDpi xmlns:a14="http://schemas.microsoft.com/office/drawing/2010/main" val="0"/>
@@ -14006,7 +18926,7 @@
                 <p:cNvPr id="4" name="Rectangle 3">
                   <a:extLst>
                     <a:ext uri="{FF2B5EF4-FFF2-40B4-BE49-F238E27FC236}">
-                      <a16:creationId xmlns:a16="http://schemas.microsoft.com/office/drawing/2014/main" id="{34CDE9CE-CE77-320A-ACDF-EC48F12FB4CD}"/>
+                      <a16:creationId xmlns:a16="http://schemas.microsoft.com/office/drawing/2014/main" id="{2E4BDEF4-3DE8-0511-E45A-4B186C0F5FC7}"/>
                     </a:ext>
                   </a:extLst>
                 </p:cNvPr>
@@ -14082,7 +19002,7 @@
                 <p:cNvPr id="4" name="Rectangle 3">
                   <a:extLst>
                     <a:ext uri="{FF2B5EF4-FFF2-40B4-BE49-F238E27FC236}">
-                      <a16:creationId xmlns:a16="http://schemas.microsoft.com/office/drawing/2014/main" id="{34CDE9CE-CE77-320A-ACDF-EC48F12FB4CD}"/>
+                      <a16:creationId xmlns:a16="http://schemas.microsoft.com/office/drawing/2014/main" id="{2E4BDEF4-3DE8-0511-E45A-4B186C0F5FC7}"/>
                     </a:ext>
                   </a:extLst>
                 </p:cNvPr>
@@ -14100,7 +19020,7 @@
                   <a:avLst/>
                 </a:prstGeom>
                 <a:blipFill>
-                  <a:blip r:embed="rId9"/>
+                  <a:blip r:embed="rId3"/>
                   <a:stretch>
                     <a:fillRect/>
                   </a:stretch>
@@ -14114,7 +19034,7 @@
                 <a:lstStyle/>
                 <a:p>
                   <a:r>
-                    <a:rPr lang="en-US">
+                    <a:rPr lang="en-GB">
                       <a:noFill/>
                     </a:rPr>
                     <a:t> </a:t>
@@ -14131,7 +19051,7 @@
                 <p:cNvPr id="8" name="Rectangle 7">
                   <a:extLst>
                     <a:ext uri="{FF2B5EF4-FFF2-40B4-BE49-F238E27FC236}">
-                      <a16:creationId xmlns:a16="http://schemas.microsoft.com/office/drawing/2014/main" id="{3ACDC73D-7FBF-A6EF-29AF-65EC097E8A40}"/>
+                      <a16:creationId xmlns:a16="http://schemas.microsoft.com/office/drawing/2014/main" id="{D38A3824-E4EB-42B0-BFBE-8FB5585F18FA}"/>
                     </a:ext>
                   </a:extLst>
                 </p:cNvPr>
@@ -14207,7 +19127,7 @@
                 <p:cNvPr id="8" name="Rectangle 7">
                   <a:extLst>
                     <a:ext uri="{FF2B5EF4-FFF2-40B4-BE49-F238E27FC236}">
-                      <a16:creationId xmlns:a16="http://schemas.microsoft.com/office/drawing/2014/main" id="{3ACDC73D-7FBF-A6EF-29AF-65EC097E8A40}"/>
+                      <a16:creationId xmlns:a16="http://schemas.microsoft.com/office/drawing/2014/main" id="{D38A3824-E4EB-42B0-BFBE-8FB5585F18FA}"/>
                     </a:ext>
                   </a:extLst>
                 </p:cNvPr>
@@ -14225,7 +19145,7 @@
                   <a:avLst/>
                 </a:prstGeom>
                 <a:blipFill>
-                  <a:blip r:embed="rId10"/>
+                  <a:blip r:embed="rId4"/>
                   <a:stretch>
                     <a:fillRect b="-6154"/>
                   </a:stretch>
@@ -14239,7 +19159,7 @@
                 <a:lstStyle/>
                 <a:p>
                   <a:r>
-                    <a:rPr lang="en-US">
+                    <a:rPr lang="en-GB">
                       <a:noFill/>
                     </a:rPr>
                     <a:t> </a:t>
@@ -14256,7 +19176,7 @@
                 <p:cNvPr id="9" name="Rectangle 8">
                   <a:extLst>
                     <a:ext uri="{FF2B5EF4-FFF2-40B4-BE49-F238E27FC236}">
-                      <a16:creationId xmlns:a16="http://schemas.microsoft.com/office/drawing/2014/main" id="{F4AAAFD5-6490-8646-68D0-1C1BEAB5D23D}"/>
+                      <a16:creationId xmlns:a16="http://schemas.microsoft.com/office/drawing/2014/main" id="{CD4398B6-67BB-17CD-A82E-06A13C2BD1F5}"/>
                     </a:ext>
                   </a:extLst>
                 </p:cNvPr>
@@ -14332,7 +19252,7 @@
                 <p:cNvPr id="9" name="Rectangle 8">
                   <a:extLst>
                     <a:ext uri="{FF2B5EF4-FFF2-40B4-BE49-F238E27FC236}">
-                      <a16:creationId xmlns:a16="http://schemas.microsoft.com/office/drawing/2014/main" id="{F4AAAFD5-6490-8646-68D0-1C1BEAB5D23D}"/>
+                      <a16:creationId xmlns:a16="http://schemas.microsoft.com/office/drawing/2014/main" id="{CD4398B6-67BB-17CD-A82E-06A13C2BD1F5}"/>
                     </a:ext>
                   </a:extLst>
                 </p:cNvPr>
@@ -14350,7 +19270,7 @@
                   <a:avLst/>
                 </a:prstGeom>
                 <a:blipFill>
-                  <a:blip r:embed="rId11"/>
+                  <a:blip r:embed="rId5"/>
                   <a:stretch>
                     <a:fillRect b="-2564"/>
                   </a:stretch>
@@ -14364,7 +19284,7 @@
                 <a:lstStyle/>
                 <a:p>
                   <a:r>
-                    <a:rPr lang="en-US">
+                    <a:rPr lang="en-GB">
                       <a:noFill/>
                     </a:rPr>
                     <a:t> </a:t>
@@ -14379,7 +19299,7 @@
             <p:cNvPr id="24" name="Arc 23">
               <a:extLst>
                 <a:ext uri="{FF2B5EF4-FFF2-40B4-BE49-F238E27FC236}">
-                  <a16:creationId xmlns:a16="http://schemas.microsoft.com/office/drawing/2014/main" id="{D426E74A-C6F1-6F7E-2962-6DAF983A22F9}"/>
+                  <a16:creationId xmlns:a16="http://schemas.microsoft.com/office/drawing/2014/main" id="{BFD497FB-8846-1FF5-51E0-EEA9366FBCF9}"/>
                 </a:ext>
               </a:extLst>
             </p:cNvPr>
@@ -14431,7 +19351,7 @@
             <p:cNvPr id="13" name="Straight Connector 12">
               <a:extLst>
                 <a:ext uri="{FF2B5EF4-FFF2-40B4-BE49-F238E27FC236}">
-                  <a16:creationId xmlns:a16="http://schemas.microsoft.com/office/drawing/2014/main" id="{D8472D4D-3327-900D-1975-B3F411F19733}"/>
+                  <a16:creationId xmlns:a16="http://schemas.microsoft.com/office/drawing/2014/main" id="{A234C21B-8222-4325-CBFA-323E9A603A8A}"/>
                 </a:ext>
               </a:extLst>
             </p:cNvPr>
@@ -14472,7 +19392,7 @@
                 <p:cNvPr id="25" name="Rectangle 24">
                   <a:extLst>
                     <a:ext uri="{FF2B5EF4-FFF2-40B4-BE49-F238E27FC236}">
-                      <a16:creationId xmlns:a16="http://schemas.microsoft.com/office/drawing/2014/main" id="{B62D2DBF-C9EE-F05A-3988-B969A3B6ECC0}"/>
+                      <a16:creationId xmlns:a16="http://schemas.microsoft.com/office/drawing/2014/main" id="{63F6D0E3-61CD-E01F-E4F4-EF42257B99E3}"/>
                     </a:ext>
                   </a:extLst>
                 </p:cNvPr>
@@ -14548,7 +19468,7 @@
                 <p:cNvPr id="25" name="Rectangle 24">
                   <a:extLst>
                     <a:ext uri="{FF2B5EF4-FFF2-40B4-BE49-F238E27FC236}">
-                      <a16:creationId xmlns:a16="http://schemas.microsoft.com/office/drawing/2014/main" id="{B62D2DBF-C9EE-F05A-3988-B969A3B6ECC0}"/>
+                      <a16:creationId xmlns:a16="http://schemas.microsoft.com/office/drawing/2014/main" id="{63F6D0E3-61CD-E01F-E4F4-EF42257B99E3}"/>
                     </a:ext>
                   </a:extLst>
                 </p:cNvPr>
@@ -14566,7 +19486,7 @@
                   <a:avLst/>
                 </a:prstGeom>
                 <a:blipFill>
-                  <a:blip r:embed="rId12"/>
+                  <a:blip r:embed="rId6"/>
                   <a:stretch>
                     <a:fillRect b="-38095"/>
                   </a:stretch>
@@ -14580,7 +19500,7 @@
                 <a:lstStyle/>
                 <a:p>
                   <a:r>
-                    <a:rPr lang="en-US">
+                    <a:rPr lang="en-GB">
                       <a:noFill/>
                     </a:rPr>
                     <a:t> </a:t>
@@ -14591,10 +19511,1766 @@
           </mc:Fallback>
         </mc:AlternateContent>
       </p:grpSp>
+      <p:grpSp>
+        <p:nvGrpSpPr>
+          <p:cNvPr id="171" name="Group 170">
+            <a:extLst>
+              <a:ext uri="{FF2B5EF4-FFF2-40B4-BE49-F238E27FC236}">
+                <a16:creationId xmlns:a16="http://schemas.microsoft.com/office/drawing/2014/main" id="{33D8A2E7-03F8-4EF9-45FE-123E1D05621C}"/>
+              </a:ext>
+            </a:extLst>
+          </p:cNvPr>
+          <p:cNvGrpSpPr/>
+          <p:nvPr/>
+        </p:nvGrpSpPr>
+        <p:grpSpPr>
+          <a:xfrm>
+            <a:off x="780454" y="473892"/>
+            <a:ext cx="4585545" cy="5586218"/>
+            <a:chOff x="485007" y="353363"/>
+            <a:chExt cx="4585545" cy="5586218"/>
+          </a:xfrm>
+        </p:grpSpPr>
+        <mc:AlternateContent xmlns:mc="http://schemas.openxmlformats.org/markup-compatibility/2006">
+          <mc:Choice xmlns:a14="http://schemas.microsoft.com/office/drawing/2010/main" Requires="a14">
+            <p:sp>
+              <p:nvSpPr>
+                <p:cNvPr id="170" name="TextBox 169">
+                  <a:extLst>
+                    <a:ext uri="{FF2B5EF4-FFF2-40B4-BE49-F238E27FC236}">
+                      <a16:creationId xmlns:a16="http://schemas.microsoft.com/office/drawing/2014/main" id="{E5086247-4DEB-DC30-E197-493BD7563E98}"/>
+                    </a:ext>
+                  </a:extLst>
+                </p:cNvPr>
+                <p:cNvSpPr txBox="1"/>
+                <p:nvPr/>
+              </p:nvSpPr>
+              <p:spPr>
+                <a:xfrm>
+                  <a:off x="2165479" y="379351"/>
+                  <a:ext cx="593722" cy="1384995"/>
+                </a:xfrm>
+                <a:prstGeom prst="rect">
+                  <a:avLst/>
+                </a:prstGeom>
+                <a:noFill/>
+              </p:spPr>
+              <p:txBody>
+                <a:bodyPr wrap="square">
+                  <a:spAutoFit/>
+                </a:bodyPr>
+                <a:lstStyle/>
+                <a:p>
+                  <a:pPr algn="ctr"/>
+                  <a:endParaRPr lang="en-US" sz="2800" dirty="0">
+                    <a:solidFill>
+                      <a:schemeClr val="tx1"/>
+                    </a:solidFill>
+                    <a:latin typeface="Tahoma" panose="020B0604030504040204" pitchFamily="34" charset="0"/>
+                    <a:ea typeface="Tahoma" panose="020B0604030504040204" pitchFamily="34" charset="0"/>
+                    <a:cs typeface="Tahoma" panose="020B0604030504040204" pitchFamily="34" charset="0"/>
+                  </a:endParaRPr>
+                </a:p>
+                <a:p>
+                  <a:pPr algn="ctr"/>
+                  <a14:m>
+                    <m:oMathPara xmlns:m="http://schemas.openxmlformats.org/officeDocument/2006/math">
+                      <m:oMathParaPr>
+                        <m:jc m:val="centerGroup"/>
+                      </m:oMathParaPr>
+                      <m:oMath xmlns:m="http://schemas.openxmlformats.org/officeDocument/2006/math">
+                        <m:r>
+                          <a:rPr lang="en-US" sz="2800" b="0" i="1" smtClean="0">
+                            <a:solidFill>
+                              <a:schemeClr val="tx1"/>
+                            </a:solidFill>
+                            <a:latin typeface="Cambria Math" panose="02040503050406030204" pitchFamily="18" charset="0"/>
+                            <a:ea typeface="Tahoma" panose="020B0604030504040204" pitchFamily="34" charset="0"/>
+                            <a:cs typeface="Tahoma" panose="020B0604030504040204" pitchFamily="34" charset="0"/>
+                          </a:rPr>
+                          <m:t>𝜌</m:t>
+                        </m:r>
+                      </m:oMath>
+                    </m:oMathPara>
+                  </a14:m>
+                  <a:endParaRPr lang="en-US" sz="2800" b="0" dirty="0">
+                    <a:solidFill>
+                      <a:schemeClr val="tx1"/>
+                    </a:solidFill>
+                    <a:latin typeface="Tahoma" panose="020B0604030504040204" pitchFamily="34" charset="0"/>
+                    <a:ea typeface="Tahoma" panose="020B0604030504040204" pitchFamily="34" charset="0"/>
+                    <a:cs typeface="Tahoma" panose="020B0604030504040204" pitchFamily="34" charset="0"/>
+                  </a:endParaRPr>
+                </a:p>
+                <a:p>
+                  <a:pPr algn="ctr"/>
+                  <a:endParaRPr lang="en-US" sz="2800" dirty="0">
+                    <a:solidFill>
+                      <a:schemeClr val="tx1"/>
+                    </a:solidFill>
+                    <a:latin typeface="Tahoma" panose="020B0604030504040204" pitchFamily="34" charset="0"/>
+                    <a:ea typeface="Tahoma" panose="020B0604030504040204" pitchFamily="34" charset="0"/>
+                    <a:cs typeface="Tahoma" panose="020B0604030504040204" pitchFamily="34" charset="0"/>
+                  </a:endParaRPr>
+                </a:p>
+              </p:txBody>
+            </p:sp>
+          </mc:Choice>
+          <mc:Fallback>
+            <p:sp>
+              <p:nvSpPr>
+                <p:cNvPr id="170" name="TextBox 169">
+                  <a:extLst>
+                    <a:ext uri="{FF2B5EF4-FFF2-40B4-BE49-F238E27FC236}">
+                      <a16:creationId xmlns:a16="http://schemas.microsoft.com/office/drawing/2014/main" id="{E5086247-4DEB-DC30-E197-493BD7563E98}"/>
+                    </a:ext>
+                  </a:extLst>
+                </p:cNvPr>
+                <p:cNvSpPr txBox="1">
+                  <a:spLocks noRot="1" noChangeAspect="1" noMove="1" noResize="1" noEditPoints="1" noAdjustHandles="1" noChangeArrowheads="1" noChangeShapeType="1" noTextEdit="1"/>
+                </p:cNvSpPr>
+                <p:nvPr/>
+              </p:nvSpPr>
+              <p:spPr>
+                <a:xfrm>
+                  <a:off x="2165479" y="379351"/>
+                  <a:ext cx="593722" cy="1384995"/>
+                </a:xfrm>
+                <a:prstGeom prst="rect">
+                  <a:avLst/>
+                </a:prstGeom>
+                <a:blipFill>
+                  <a:blip r:embed="rId7"/>
+                  <a:stretch>
+                    <a:fillRect/>
+                  </a:stretch>
+                </a:blipFill>
+              </p:spPr>
+              <p:txBody>
+                <a:bodyPr/>
+                <a:lstStyle/>
+                <a:p>
+                  <a:r>
+                    <a:rPr lang="en-GB">
+                      <a:noFill/>
+                    </a:rPr>
+                    <a:t> </a:t>
+                  </a:r>
+                </a:p>
+              </p:txBody>
+            </p:sp>
+          </mc:Fallback>
+        </mc:AlternateContent>
+        <mc:AlternateContent xmlns:mc="http://schemas.openxmlformats.org/markup-compatibility/2006">
+          <mc:Choice xmlns:a14="http://schemas.microsoft.com/office/drawing/2010/main" Requires="a14">
+            <p:sp>
+              <p:nvSpPr>
+                <p:cNvPr id="151" name="TextBox 150">
+                  <a:extLst>
+                    <a:ext uri="{FF2B5EF4-FFF2-40B4-BE49-F238E27FC236}">
+                      <a16:creationId xmlns:a16="http://schemas.microsoft.com/office/drawing/2014/main" id="{6A590D54-DB28-2594-278B-C619058327D0}"/>
+                    </a:ext>
+                  </a:extLst>
+                </p:cNvPr>
+                <p:cNvSpPr txBox="1"/>
+                <p:nvPr/>
+              </p:nvSpPr>
+              <p:spPr>
+                <a:xfrm>
+                  <a:off x="1615131" y="2782227"/>
+                  <a:ext cx="593722" cy="954107"/>
+                </a:xfrm>
+                <a:prstGeom prst="rect">
+                  <a:avLst/>
+                </a:prstGeom>
+                <a:noFill/>
+              </p:spPr>
+              <p:txBody>
+                <a:bodyPr wrap="square">
+                  <a:spAutoFit/>
+                </a:bodyPr>
+                <a:lstStyle/>
+                <a:p>
+                  <a:pPr algn="ctr"/>
+                  <a:endParaRPr lang="en-US" sz="2800" dirty="0">
+                    <a:solidFill>
+                      <a:schemeClr val="tx1"/>
+                    </a:solidFill>
+                    <a:latin typeface="Tahoma" panose="020B0604030504040204" pitchFamily="34" charset="0"/>
+                    <a:ea typeface="Tahoma" panose="020B0604030504040204" pitchFamily="34" charset="0"/>
+                    <a:cs typeface="Tahoma" panose="020B0604030504040204" pitchFamily="34" charset="0"/>
+                  </a:endParaRPr>
+                </a:p>
+                <a:p>
+                  <a:pPr algn="ctr"/>
+                  <a14:m>
+                    <m:oMathPara xmlns:m="http://schemas.openxmlformats.org/officeDocument/2006/math">
+                      <m:oMathParaPr>
+                        <m:jc m:val="centerGroup"/>
+                      </m:oMathParaPr>
+                      <m:oMath xmlns:m="http://schemas.openxmlformats.org/officeDocument/2006/math">
+                        <m:r>
+                          <a:rPr lang="en-US" sz="2800" b="0" i="1" smtClean="0">
+                            <a:solidFill>
+                              <a:schemeClr val="tx1"/>
+                            </a:solidFill>
+                            <a:latin typeface="Cambria Math" panose="02040503050406030204" pitchFamily="18" charset="0"/>
+                            <a:ea typeface="Tahoma" panose="020B0604030504040204" pitchFamily="34" charset="0"/>
+                            <a:cs typeface="Tahoma" panose="020B0604030504040204" pitchFamily="34" charset="0"/>
+                          </a:rPr>
+                          <m:t>𝜏</m:t>
+                        </m:r>
+                      </m:oMath>
+                    </m:oMathPara>
+                  </a14:m>
+                  <a:endParaRPr lang="en-US" sz="2800" dirty="0">
+                    <a:solidFill>
+                      <a:schemeClr val="tx1"/>
+                    </a:solidFill>
+                    <a:latin typeface="Tahoma" panose="020B0604030504040204" pitchFamily="34" charset="0"/>
+                    <a:ea typeface="Tahoma" panose="020B0604030504040204" pitchFamily="34" charset="0"/>
+                    <a:cs typeface="Tahoma" panose="020B0604030504040204" pitchFamily="34" charset="0"/>
+                  </a:endParaRPr>
+                </a:p>
+              </p:txBody>
+            </p:sp>
+          </mc:Choice>
+          <mc:Fallback>
+            <p:sp>
+              <p:nvSpPr>
+                <p:cNvPr id="151" name="TextBox 150">
+                  <a:extLst>
+                    <a:ext uri="{FF2B5EF4-FFF2-40B4-BE49-F238E27FC236}">
+                      <a16:creationId xmlns:a16="http://schemas.microsoft.com/office/drawing/2014/main" id="{6A590D54-DB28-2594-278B-C619058327D0}"/>
+                    </a:ext>
+                  </a:extLst>
+                </p:cNvPr>
+                <p:cNvSpPr txBox="1">
+                  <a:spLocks noRot="1" noChangeAspect="1" noMove="1" noResize="1" noEditPoints="1" noAdjustHandles="1" noChangeArrowheads="1" noChangeShapeType="1" noTextEdit="1"/>
+                </p:cNvSpPr>
+                <p:nvPr/>
+              </p:nvSpPr>
+              <p:spPr>
+                <a:xfrm>
+                  <a:off x="1615131" y="2782227"/>
+                  <a:ext cx="593722" cy="954107"/>
+                </a:xfrm>
+                <a:prstGeom prst="rect">
+                  <a:avLst/>
+                </a:prstGeom>
+                <a:blipFill>
+                  <a:blip r:embed="rId8"/>
+                  <a:stretch>
+                    <a:fillRect/>
+                  </a:stretch>
+                </a:blipFill>
+              </p:spPr>
+              <p:txBody>
+                <a:bodyPr/>
+                <a:lstStyle/>
+                <a:p>
+                  <a:r>
+                    <a:rPr lang="en-GB">
+                      <a:noFill/>
+                    </a:rPr>
+                    <a:t> </a:t>
+                  </a:r>
+                </a:p>
+              </p:txBody>
+            </p:sp>
+          </mc:Fallback>
+        </mc:AlternateContent>
+        <p:cxnSp>
+          <p:nvCxnSpPr>
+            <p:cNvPr id="140" name="Straight Connector 139">
+              <a:extLst>
+                <a:ext uri="{FF2B5EF4-FFF2-40B4-BE49-F238E27FC236}">
+                  <a16:creationId xmlns:a16="http://schemas.microsoft.com/office/drawing/2014/main" id="{BF9339D2-68F2-AD36-F4B4-CA1C9584C314}"/>
+                </a:ext>
+              </a:extLst>
+            </p:cNvPr>
+            <p:cNvCxnSpPr>
+              <a:cxnSpLocks/>
+            </p:cNvCxnSpPr>
+            <p:nvPr/>
+          </p:nvCxnSpPr>
+          <p:spPr>
+            <a:xfrm flipH="1" flipV="1">
+              <a:off x="1326492" y="3002483"/>
+              <a:ext cx="1469891" cy="418887"/>
+            </a:xfrm>
+            <a:prstGeom prst="line">
+              <a:avLst/>
+            </a:prstGeom>
+            <a:ln w="38100">
+              <a:solidFill>
+                <a:schemeClr val="bg2">
+                  <a:lumMod val="90000"/>
+                </a:schemeClr>
+              </a:solidFill>
+              <a:prstDash val="dash"/>
+            </a:ln>
+          </p:spPr>
+          <p:style>
+            <a:lnRef idx="2">
+              <a:schemeClr val="dk1"/>
+            </a:lnRef>
+            <a:fillRef idx="0">
+              <a:schemeClr val="dk1"/>
+            </a:fillRef>
+            <a:effectRef idx="1">
+              <a:schemeClr val="dk1"/>
+            </a:effectRef>
+            <a:fontRef idx="minor">
+              <a:schemeClr val="tx1"/>
+            </a:fontRef>
+          </p:style>
+        </p:cxnSp>
+        <p:sp>
+          <p:nvSpPr>
+            <p:cNvPr id="5" name="Oval 4">
+              <a:extLst>
+                <a:ext uri="{FF2B5EF4-FFF2-40B4-BE49-F238E27FC236}">
+                  <a16:creationId xmlns:a16="http://schemas.microsoft.com/office/drawing/2014/main" id="{E1F3CF06-6F3F-007A-7639-E02AEE8F8974}"/>
+                </a:ext>
+              </a:extLst>
+            </p:cNvPr>
+            <p:cNvSpPr/>
+            <p:nvPr/>
+          </p:nvSpPr>
+          <p:spPr>
+            <a:xfrm>
+              <a:off x="1326492" y="709637"/>
+              <a:ext cx="472531" cy="488188"/>
+            </a:xfrm>
+            <a:prstGeom prst="ellipse">
+              <a:avLst/>
+            </a:prstGeom>
+            <a:solidFill>
+              <a:schemeClr val="bg1">
+                <a:lumMod val="95000"/>
+              </a:schemeClr>
+            </a:solidFill>
+          </p:spPr>
+          <p:style>
+            <a:lnRef idx="2">
+              <a:schemeClr val="accent1">
+                <a:shade val="15000"/>
+              </a:schemeClr>
+            </a:lnRef>
+            <a:fillRef idx="1">
+              <a:schemeClr val="accent1"/>
+            </a:fillRef>
+            <a:effectRef idx="0">
+              <a:schemeClr val="accent1"/>
+            </a:effectRef>
+            <a:fontRef idx="minor">
+              <a:schemeClr val="lt1"/>
+            </a:fontRef>
+          </p:style>
+          <p:txBody>
+            <a:bodyPr rtlCol="0" anchor="ctr"/>
+            <a:lstStyle/>
+            <a:p>
+              <a:pPr algn="ctr"/>
+              <a:endParaRPr lang="en-US" sz="3200" dirty="0">
+                <a:solidFill>
+                  <a:schemeClr val="tx1"/>
+                </a:solidFill>
+                <a:latin typeface="Tahoma" panose="020B0604030504040204" pitchFamily="34" charset="0"/>
+                <a:ea typeface="Tahoma" panose="020B0604030504040204" pitchFamily="34" charset="0"/>
+                <a:cs typeface="Tahoma" panose="020B0604030504040204" pitchFamily="34" charset="0"/>
+              </a:endParaRPr>
+            </a:p>
+          </p:txBody>
+        </p:sp>
+        <p:sp>
+          <p:nvSpPr>
+            <p:cNvPr id="7" name="Oval 6">
+              <a:extLst>
+                <a:ext uri="{FF2B5EF4-FFF2-40B4-BE49-F238E27FC236}">
+                  <a16:creationId xmlns:a16="http://schemas.microsoft.com/office/drawing/2014/main" id="{75C4E812-B0D1-DD81-557F-DBC78104353E}"/>
+                </a:ext>
+              </a:extLst>
+            </p:cNvPr>
+            <p:cNvSpPr/>
+            <p:nvPr/>
+          </p:nvSpPr>
+          <p:spPr>
+            <a:xfrm>
+              <a:off x="2524380" y="1759975"/>
+              <a:ext cx="593723" cy="615950"/>
+            </a:xfrm>
+            <a:prstGeom prst="ellipse">
+              <a:avLst/>
+            </a:prstGeom>
+            <a:solidFill>
+              <a:srgbClr val="D93528"/>
+            </a:solidFill>
+          </p:spPr>
+          <p:style>
+            <a:lnRef idx="2">
+              <a:schemeClr val="accent1">
+                <a:shade val="15000"/>
+              </a:schemeClr>
+            </a:lnRef>
+            <a:fillRef idx="1">
+              <a:schemeClr val="accent1"/>
+            </a:fillRef>
+            <a:effectRef idx="0">
+              <a:schemeClr val="accent1"/>
+            </a:effectRef>
+            <a:fontRef idx="minor">
+              <a:schemeClr val="lt1"/>
+            </a:fontRef>
+          </p:style>
+          <p:txBody>
+            <a:bodyPr rtlCol="0" anchor="ctr"/>
+            <a:lstStyle/>
+            <a:p>
+              <a:pPr algn="ctr"/>
+              <a:endParaRPr lang="en-US" sz="2800" dirty="0">
+                <a:solidFill>
+                  <a:schemeClr val="tx1"/>
+                </a:solidFill>
+                <a:latin typeface="Tahoma" panose="020B0604030504040204" pitchFamily="34" charset="0"/>
+                <a:ea typeface="Tahoma" panose="020B0604030504040204" pitchFamily="34" charset="0"/>
+                <a:cs typeface="Tahoma" panose="020B0604030504040204" pitchFamily="34" charset="0"/>
+              </a:endParaRPr>
+            </a:p>
+          </p:txBody>
+        </p:sp>
+        <p:sp>
+          <p:nvSpPr>
+            <p:cNvPr id="10" name="Oval 9">
+              <a:extLst>
+                <a:ext uri="{FF2B5EF4-FFF2-40B4-BE49-F238E27FC236}">
+                  <a16:creationId xmlns:a16="http://schemas.microsoft.com/office/drawing/2014/main" id="{7FAFBCE2-22B4-83DF-E5DF-D4F5E67DD39E}"/>
+                </a:ext>
+              </a:extLst>
+            </p:cNvPr>
+            <p:cNvSpPr/>
+            <p:nvPr/>
+          </p:nvSpPr>
+          <p:spPr>
+            <a:xfrm>
+              <a:off x="2524380" y="4504551"/>
+              <a:ext cx="593723" cy="631807"/>
+            </a:xfrm>
+            <a:prstGeom prst="ellipse">
+              <a:avLst/>
+            </a:prstGeom>
+            <a:solidFill>
+              <a:srgbClr val="8826C5"/>
+            </a:solidFill>
+          </p:spPr>
+          <p:style>
+            <a:lnRef idx="2">
+              <a:schemeClr val="accent1">
+                <a:shade val="15000"/>
+              </a:schemeClr>
+            </a:lnRef>
+            <a:fillRef idx="1">
+              <a:schemeClr val="accent1"/>
+            </a:fillRef>
+            <a:effectRef idx="0">
+              <a:schemeClr val="accent1"/>
+            </a:effectRef>
+            <a:fontRef idx="minor">
+              <a:schemeClr val="lt1"/>
+            </a:fontRef>
+          </p:style>
+          <p:txBody>
+            <a:bodyPr rtlCol="0" anchor="ctr"/>
+            <a:lstStyle/>
+            <a:p>
+              <a:pPr algn="ctr"/>
+              <a:endParaRPr lang="en-US" sz="3200" dirty="0">
+                <a:solidFill>
+                  <a:schemeClr val="tx1"/>
+                </a:solidFill>
+                <a:latin typeface="Tahoma" panose="020B0604030504040204" pitchFamily="34" charset="0"/>
+                <a:ea typeface="Tahoma" panose="020B0604030504040204" pitchFamily="34" charset="0"/>
+                <a:cs typeface="Tahoma" panose="020B0604030504040204" pitchFamily="34" charset="0"/>
+              </a:endParaRPr>
+            </a:p>
+          </p:txBody>
+        </p:sp>
+        <p:sp>
+          <p:nvSpPr>
+            <p:cNvPr id="11" name="Oval 10">
+              <a:extLst>
+                <a:ext uri="{FF2B5EF4-FFF2-40B4-BE49-F238E27FC236}">
+                  <a16:creationId xmlns:a16="http://schemas.microsoft.com/office/drawing/2014/main" id="{986B1CB9-8B34-2152-99D1-CB6A9BBD1F29}"/>
+                </a:ext>
+              </a:extLst>
+            </p:cNvPr>
+            <p:cNvSpPr/>
+            <p:nvPr/>
+          </p:nvSpPr>
+          <p:spPr>
+            <a:xfrm>
+              <a:off x="1167550" y="5190028"/>
+              <a:ext cx="583335" cy="620752"/>
+            </a:xfrm>
+            <a:prstGeom prst="ellipse">
+              <a:avLst/>
+            </a:prstGeom>
+            <a:solidFill>
+              <a:srgbClr val="D93528"/>
+            </a:solidFill>
+          </p:spPr>
+          <p:style>
+            <a:lnRef idx="2">
+              <a:schemeClr val="accent1">
+                <a:shade val="15000"/>
+              </a:schemeClr>
+            </a:lnRef>
+            <a:fillRef idx="1">
+              <a:schemeClr val="accent1"/>
+            </a:fillRef>
+            <a:effectRef idx="0">
+              <a:schemeClr val="accent1"/>
+            </a:effectRef>
+            <a:fontRef idx="minor">
+              <a:schemeClr val="lt1"/>
+            </a:fontRef>
+          </p:style>
+          <p:txBody>
+            <a:bodyPr rtlCol="0" anchor="ctr"/>
+            <a:lstStyle/>
+            <a:p>
+              <a:pPr algn="ctr"/>
+              <a:endParaRPr lang="en-US" sz="3200" dirty="0">
+                <a:solidFill>
+                  <a:schemeClr val="tx1"/>
+                </a:solidFill>
+                <a:latin typeface="Tahoma" panose="020B0604030504040204" pitchFamily="34" charset="0"/>
+                <a:ea typeface="Tahoma" panose="020B0604030504040204" pitchFamily="34" charset="0"/>
+                <a:cs typeface="Tahoma" panose="020B0604030504040204" pitchFamily="34" charset="0"/>
+              </a:endParaRPr>
+            </a:p>
+          </p:txBody>
+        </p:sp>
+        <p:cxnSp>
+          <p:nvCxnSpPr>
+            <p:cNvPr id="12" name="Straight Connector 11">
+              <a:extLst>
+                <a:ext uri="{FF2B5EF4-FFF2-40B4-BE49-F238E27FC236}">
+                  <a16:creationId xmlns:a16="http://schemas.microsoft.com/office/drawing/2014/main" id="{5FC9920F-6826-B88C-89FF-98DE89AFFED8}"/>
+                </a:ext>
+              </a:extLst>
+            </p:cNvPr>
+            <p:cNvCxnSpPr>
+              <a:cxnSpLocks/>
+              <a:stCxn id="5" idx="5"/>
+              <a:endCxn id="7" idx="1"/>
+            </p:cNvCxnSpPr>
+            <p:nvPr/>
+          </p:nvCxnSpPr>
+          <p:spPr>
+            <a:xfrm>
+              <a:off x="1729822" y="1126332"/>
+              <a:ext cx="881507" cy="723847"/>
+            </a:xfrm>
+            <a:prstGeom prst="line">
+              <a:avLst/>
+            </a:prstGeom>
+            <a:ln w="38100"/>
+          </p:spPr>
+          <p:style>
+            <a:lnRef idx="2">
+              <a:schemeClr val="dk1"/>
+            </a:lnRef>
+            <a:fillRef idx="0">
+              <a:schemeClr val="dk1"/>
+            </a:fillRef>
+            <a:effectRef idx="1">
+              <a:schemeClr val="dk1"/>
+            </a:effectRef>
+            <a:fontRef idx="minor">
+              <a:schemeClr val="tx1"/>
+            </a:fontRef>
+          </p:style>
+        </p:cxnSp>
+        <p:cxnSp>
+          <p:nvCxnSpPr>
+            <p:cNvPr id="14" name="Straight Connector 13">
+              <a:extLst>
+                <a:ext uri="{FF2B5EF4-FFF2-40B4-BE49-F238E27FC236}">
+                  <a16:creationId xmlns:a16="http://schemas.microsoft.com/office/drawing/2014/main" id="{E2EB84F9-CA2A-261A-EC30-5C5F19E94EB4}"/>
+                </a:ext>
+              </a:extLst>
+            </p:cNvPr>
+            <p:cNvCxnSpPr>
+              <a:cxnSpLocks/>
+              <a:stCxn id="7" idx="4"/>
+              <a:endCxn id="10" idx="0"/>
+            </p:cNvCxnSpPr>
+            <p:nvPr/>
+          </p:nvCxnSpPr>
+          <p:spPr>
+            <a:xfrm>
+              <a:off x="2821242" y="2375925"/>
+              <a:ext cx="0" cy="2128626"/>
+            </a:xfrm>
+            <a:prstGeom prst="line">
+              <a:avLst/>
+            </a:prstGeom>
+            <a:ln w="38100"/>
+          </p:spPr>
+          <p:style>
+            <a:lnRef idx="2">
+              <a:schemeClr val="dk1"/>
+            </a:lnRef>
+            <a:fillRef idx="0">
+              <a:schemeClr val="dk1"/>
+            </a:fillRef>
+            <a:effectRef idx="1">
+              <a:schemeClr val="dk1"/>
+            </a:effectRef>
+            <a:fontRef idx="minor">
+              <a:schemeClr val="tx1"/>
+            </a:fontRef>
+          </p:style>
+        </p:cxnSp>
+        <p:cxnSp>
+          <p:nvCxnSpPr>
+            <p:cNvPr id="15" name="Straight Connector 14">
+              <a:extLst>
+                <a:ext uri="{FF2B5EF4-FFF2-40B4-BE49-F238E27FC236}">
+                  <a16:creationId xmlns:a16="http://schemas.microsoft.com/office/drawing/2014/main" id="{68548F7E-1444-205E-2497-3C5EBC35DFBF}"/>
+                </a:ext>
+              </a:extLst>
+            </p:cNvPr>
+            <p:cNvCxnSpPr>
+              <a:cxnSpLocks/>
+            </p:cNvCxnSpPr>
+            <p:nvPr/>
+          </p:nvCxnSpPr>
+          <p:spPr>
+            <a:xfrm flipH="1">
+              <a:off x="1717596" y="4977351"/>
+              <a:ext cx="868770" cy="417609"/>
+            </a:xfrm>
+            <a:prstGeom prst="line">
+              <a:avLst/>
+            </a:prstGeom>
+            <a:ln w="38100"/>
+          </p:spPr>
+          <p:style>
+            <a:lnRef idx="2">
+              <a:schemeClr val="dk1"/>
+            </a:lnRef>
+            <a:fillRef idx="0">
+              <a:schemeClr val="dk1"/>
+            </a:fillRef>
+            <a:effectRef idx="1">
+              <a:schemeClr val="dk1"/>
+            </a:effectRef>
+            <a:fontRef idx="minor">
+              <a:schemeClr val="tx1"/>
+            </a:fontRef>
+          </p:style>
+        </p:cxnSp>
+        <p:cxnSp>
+          <p:nvCxnSpPr>
+            <p:cNvPr id="91" name="Straight Connector 90">
+              <a:extLst>
+                <a:ext uri="{FF2B5EF4-FFF2-40B4-BE49-F238E27FC236}">
+                  <a16:creationId xmlns:a16="http://schemas.microsoft.com/office/drawing/2014/main" id="{291AB054-7116-7EF8-BE6E-6B293A968C19}"/>
+                </a:ext>
+              </a:extLst>
+            </p:cNvPr>
+            <p:cNvCxnSpPr>
+              <a:cxnSpLocks/>
+              <a:endCxn id="7" idx="0"/>
+            </p:cNvCxnSpPr>
+            <p:nvPr/>
+          </p:nvCxnSpPr>
+          <p:spPr>
+            <a:xfrm>
+              <a:off x="2821242" y="632791"/>
+              <a:ext cx="0" cy="1127184"/>
+            </a:xfrm>
+            <a:prstGeom prst="line">
+              <a:avLst/>
+            </a:prstGeom>
+            <a:ln w="22225">
+              <a:headEnd type="triangle"/>
+            </a:ln>
+          </p:spPr>
+          <p:style>
+            <a:lnRef idx="2">
+              <a:schemeClr val="dk1"/>
+            </a:lnRef>
+            <a:fillRef idx="0">
+              <a:schemeClr val="dk1"/>
+            </a:fillRef>
+            <a:effectRef idx="1">
+              <a:schemeClr val="dk1"/>
+            </a:effectRef>
+            <a:fontRef idx="minor">
+              <a:schemeClr val="tx1"/>
+            </a:fontRef>
+          </p:style>
+        </p:cxnSp>
+        <p:cxnSp>
+          <p:nvCxnSpPr>
+            <p:cNvPr id="100" name="Straight Connector 99">
+              <a:extLst>
+                <a:ext uri="{FF2B5EF4-FFF2-40B4-BE49-F238E27FC236}">
+                  <a16:creationId xmlns:a16="http://schemas.microsoft.com/office/drawing/2014/main" id="{D66B6A64-6816-4CA6-483F-8495E112B47E}"/>
+                </a:ext>
+              </a:extLst>
+            </p:cNvPr>
+            <p:cNvCxnSpPr>
+              <a:cxnSpLocks/>
+            </p:cNvCxnSpPr>
+            <p:nvPr/>
+          </p:nvCxnSpPr>
+          <p:spPr>
+            <a:xfrm flipV="1">
+              <a:off x="658368" y="3421792"/>
+              <a:ext cx="2162873" cy="939609"/>
+            </a:xfrm>
+            <a:prstGeom prst="line">
+              <a:avLst/>
+            </a:prstGeom>
+            <a:ln w="22225">
+              <a:headEnd type="triangle"/>
+            </a:ln>
+          </p:spPr>
+          <p:style>
+            <a:lnRef idx="2">
+              <a:schemeClr val="dk1"/>
+            </a:lnRef>
+            <a:fillRef idx="0">
+              <a:schemeClr val="dk1"/>
+            </a:fillRef>
+            <a:effectRef idx="1">
+              <a:schemeClr val="dk1"/>
+            </a:effectRef>
+            <a:fontRef idx="minor">
+              <a:schemeClr val="tx1"/>
+            </a:fontRef>
+          </p:style>
+        </p:cxnSp>
+        <p:cxnSp>
+          <p:nvCxnSpPr>
+            <p:cNvPr id="105" name="Straight Connector 104">
+              <a:extLst>
+                <a:ext uri="{FF2B5EF4-FFF2-40B4-BE49-F238E27FC236}">
+                  <a16:creationId xmlns:a16="http://schemas.microsoft.com/office/drawing/2014/main" id="{E9031FDF-100B-2633-3F06-EA82071EC60E}"/>
+                </a:ext>
+              </a:extLst>
+            </p:cNvPr>
+            <p:cNvCxnSpPr>
+              <a:cxnSpLocks/>
+            </p:cNvCxnSpPr>
+            <p:nvPr/>
+          </p:nvCxnSpPr>
+          <p:spPr>
+            <a:xfrm flipH="1" flipV="1">
+              <a:off x="2821241" y="3421792"/>
+              <a:ext cx="1842199" cy="837762"/>
+            </a:xfrm>
+            <a:prstGeom prst="line">
+              <a:avLst/>
+            </a:prstGeom>
+            <a:ln w="22225">
+              <a:headEnd type="triangle"/>
+            </a:ln>
+          </p:spPr>
+          <p:style>
+            <a:lnRef idx="2">
+              <a:schemeClr val="dk1"/>
+            </a:lnRef>
+            <a:fillRef idx="0">
+              <a:schemeClr val="dk1"/>
+            </a:fillRef>
+            <a:effectRef idx="1">
+              <a:schemeClr val="dk1"/>
+            </a:effectRef>
+            <a:fontRef idx="minor">
+              <a:schemeClr val="tx1"/>
+            </a:fontRef>
+          </p:style>
+        </p:cxnSp>
+        <p:sp>
+          <p:nvSpPr>
+            <p:cNvPr id="132" name="TextBox 131">
+              <a:extLst>
+                <a:ext uri="{FF2B5EF4-FFF2-40B4-BE49-F238E27FC236}">
+                  <a16:creationId xmlns:a16="http://schemas.microsoft.com/office/drawing/2014/main" id="{788BB885-5007-D4E3-3998-E1B1E78F385C}"/>
+                </a:ext>
+              </a:extLst>
+            </p:cNvPr>
+            <p:cNvSpPr txBox="1"/>
+            <p:nvPr/>
+          </p:nvSpPr>
+          <p:spPr>
+            <a:xfrm>
+              <a:off x="2954186" y="1309672"/>
+              <a:ext cx="593723" cy="581410"/>
+            </a:xfrm>
+            <a:prstGeom prst="rect">
+              <a:avLst/>
+            </a:prstGeom>
+            <a:noFill/>
+          </p:spPr>
+          <p:txBody>
+            <a:bodyPr wrap="square">
+              <a:spAutoFit/>
+            </a:bodyPr>
+            <a:lstStyle/>
+            <a:p>
+              <a:pPr algn="ctr"/>
+              <a:r>
+                <a:rPr lang="en-US" sz="3200" dirty="0">
+                  <a:solidFill>
+                    <a:schemeClr val="tx1"/>
+                  </a:solidFill>
+                  <a:latin typeface="Tahoma" panose="020B0604030504040204" pitchFamily="34" charset="0"/>
+                  <a:ea typeface="Tahoma" panose="020B0604030504040204" pitchFamily="34" charset="0"/>
+                  <a:cs typeface="Tahoma" panose="020B0604030504040204" pitchFamily="34" charset="0"/>
+                </a:rPr>
+                <a:t>O</a:t>
+              </a:r>
+            </a:p>
+          </p:txBody>
+        </p:sp>
+        <p:sp>
+          <p:nvSpPr>
+            <p:cNvPr id="133" name="TextBox 132">
+              <a:extLst>
+                <a:ext uri="{FF2B5EF4-FFF2-40B4-BE49-F238E27FC236}">
+                  <a16:creationId xmlns:a16="http://schemas.microsoft.com/office/drawing/2014/main" id="{1289BA2B-3E24-F7BD-CBE5-D1D9E1709DCC}"/>
+                </a:ext>
+              </a:extLst>
+            </p:cNvPr>
+            <p:cNvSpPr txBox="1"/>
+            <p:nvPr/>
+          </p:nvSpPr>
+          <p:spPr>
+            <a:xfrm>
+              <a:off x="1750885" y="5358171"/>
+              <a:ext cx="593723" cy="581410"/>
+            </a:xfrm>
+            <a:prstGeom prst="rect">
+              <a:avLst/>
+            </a:prstGeom>
+            <a:noFill/>
+          </p:spPr>
+          <p:txBody>
+            <a:bodyPr wrap="square">
+              <a:spAutoFit/>
+            </a:bodyPr>
+            <a:lstStyle/>
+            <a:p>
+              <a:pPr algn="ctr"/>
+              <a:r>
+                <a:rPr lang="en-US" sz="3200" dirty="0">
+                  <a:solidFill>
+                    <a:schemeClr val="tx1"/>
+                  </a:solidFill>
+                  <a:latin typeface="Tahoma" panose="020B0604030504040204" pitchFamily="34" charset="0"/>
+                  <a:ea typeface="Tahoma" panose="020B0604030504040204" pitchFamily="34" charset="0"/>
+                  <a:cs typeface="Tahoma" panose="020B0604030504040204" pitchFamily="34" charset="0"/>
+                </a:rPr>
+                <a:t>O</a:t>
+              </a:r>
+            </a:p>
+          </p:txBody>
+        </p:sp>
+        <p:sp>
+          <p:nvSpPr>
+            <p:cNvPr id="134" name="TextBox 133">
+              <a:extLst>
+                <a:ext uri="{FF2B5EF4-FFF2-40B4-BE49-F238E27FC236}">
+                  <a16:creationId xmlns:a16="http://schemas.microsoft.com/office/drawing/2014/main" id="{0CB9DA62-B651-310D-AE57-BE9490561596}"/>
+                </a:ext>
+              </a:extLst>
+            </p:cNvPr>
+            <p:cNvSpPr txBox="1"/>
+            <p:nvPr/>
+          </p:nvSpPr>
+          <p:spPr>
+            <a:xfrm>
+              <a:off x="3037139" y="4554948"/>
+              <a:ext cx="593723" cy="581410"/>
+            </a:xfrm>
+            <a:prstGeom prst="rect">
+              <a:avLst/>
+            </a:prstGeom>
+            <a:noFill/>
+          </p:spPr>
+          <p:txBody>
+            <a:bodyPr wrap="square">
+              <a:spAutoFit/>
+            </a:bodyPr>
+            <a:lstStyle/>
+            <a:p>
+              <a:pPr algn="ctr"/>
+              <a:r>
+                <a:rPr lang="en-US" sz="3200" dirty="0">
+                  <a:latin typeface="Tahoma" panose="020B0604030504040204" pitchFamily="34" charset="0"/>
+                  <a:ea typeface="Tahoma" panose="020B0604030504040204" pitchFamily="34" charset="0"/>
+                  <a:cs typeface="Tahoma" panose="020B0604030504040204" pitchFamily="34" charset="0"/>
+                </a:rPr>
+                <a:t>P</a:t>
+              </a:r>
+              <a:endParaRPr lang="en-US" sz="3200" dirty="0">
+                <a:solidFill>
+                  <a:schemeClr val="tx1"/>
+                </a:solidFill>
+                <a:latin typeface="Tahoma" panose="020B0604030504040204" pitchFamily="34" charset="0"/>
+                <a:ea typeface="Tahoma" panose="020B0604030504040204" pitchFamily="34" charset="0"/>
+                <a:cs typeface="Tahoma" panose="020B0604030504040204" pitchFamily="34" charset="0"/>
+              </a:endParaRPr>
+            </a:p>
+          </p:txBody>
+        </p:sp>
+        <p:sp>
+          <p:nvSpPr>
+            <p:cNvPr id="135" name="TextBox 134">
+              <a:extLst>
+                <a:ext uri="{FF2B5EF4-FFF2-40B4-BE49-F238E27FC236}">
+                  <a16:creationId xmlns:a16="http://schemas.microsoft.com/office/drawing/2014/main" id="{2ADED6EB-2B48-44B2-BF6A-8D33AD0C5B16}"/>
+                </a:ext>
+              </a:extLst>
+            </p:cNvPr>
+            <p:cNvSpPr txBox="1"/>
+            <p:nvPr/>
+          </p:nvSpPr>
+          <p:spPr>
+            <a:xfrm>
+              <a:off x="798049" y="898240"/>
+              <a:ext cx="593723" cy="581410"/>
+            </a:xfrm>
+            <a:prstGeom prst="rect">
+              <a:avLst/>
+            </a:prstGeom>
+            <a:noFill/>
+          </p:spPr>
+          <p:txBody>
+            <a:bodyPr wrap="square">
+              <a:spAutoFit/>
+            </a:bodyPr>
+            <a:lstStyle/>
+            <a:p>
+              <a:pPr algn="ctr"/>
+              <a:r>
+                <a:rPr lang="en-US" sz="3200" dirty="0">
+                  <a:latin typeface="Tahoma" panose="020B0604030504040204" pitchFamily="34" charset="0"/>
+                  <a:ea typeface="Tahoma" panose="020B0604030504040204" pitchFamily="34" charset="0"/>
+                  <a:cs typeface="Tahoma" panose="020B0604030504040204" pitchFamily="34" charset="0"/>
+                </a:rPr>
+                <a:t>H</a:t>
+              </a:r>
+              <a:endParaRPr lang="en-US" sz="3200" dirty="0">
+                <a:solidFill>
+                  <a:schemeClr val="tx1"/>
+                </a:solidFill>
+                <a:latin typeface="Tahoma" panose="020B0604030504040204" pitchFamily="34" charset="0"/>
+                <a:ea typeface="Tahoma" panose="020B0604030504040204" pitchFamily="34" charset="0"/>
+                <a:cs typeface="Tahoma" panose="020B0604030504040204" pitchFamily="34" charset="0"/>
+              </a:endParaRPr>
+            </a:p>
+          </p:txBody>
+        </p:sp>
+        <mc:AlternateContent xmlns:mc="http://schemas.openxmlformats.org/markup-compatibility/2006">
+          <mc:Choice xmlns:a14="http://schemas.microsoft.com/office/drawing/2010/main" Requires="a14">
+            <p:sp>
+              <p:nvSpPr>
+                <p:cNvPr id="136" name="TextBox 135">
+                  <a:extLst>
+                    <a:ext uri="{FF2B5EF4-FFF2-40B4-BE49-F238E27FC236}">
+                      <a16:creationId xmlns:a16="http://schemas.microsoft.com/office/drawing/2014/main" id="{EDA08BEB-6E0D-E8BD-30C8-1129D3853977}"/>
+                    </a:ext>
+                  </a:extLst>
+                </p:cNvPr>
+                <p:cNvSpPr txBox="1"/>
+                <p:nvPr/>
+              </p:nvSpPr>
+              <p:spPr>
+                <a:xfrm>
+                  <a:off x="2877315" y="353363"/>
+                  <a:ext cx="593723" cy="523220"/>
+                </a:xfrm>
+                <a:prstGeom prst="rect">
+                  <a:avLst/>
+                </a:prstGeom>
+                <a:noFill/>
+              </p:spPr>
+              <p:txBody>
+                <a:bodyPr wrap="square">
+                  <a:spAutoFit/>
+                </a:bodyPr>
+                <a:lstStyle/>
+                <a:p>
+                  <a:pPr algn="ctr"/>
+                  <a14:m>
+                    <m:oMathPara xmlns:m="http://schemas.openxmlformats.org/officeDocument/2006/math">
+                      <m:oMathParaPr>
+                        <m:jc m:val="centerGroup"/>
+                      </m:oMathParaPr>
+                      <m:oMath xmlns:m="http://schemas.openxmlformats.org/officeDocument/2006/math">
+                        <m:r>
+                          <a:rPr lang="en-US" sz="2800" b="0" i="1" smtClean="0">
+                            <a:solidFill>
+                              <a:schemeClr val="tx1"/>
+                            </a:solidFill>
+                            <a:latin typeface="Cambria Math" panose="02040503050406030204" pitchFamily="18" charset="0"/>
+                            <a:ea typeface="Tahoma" panose="020B0604030504040204" pitchFamily="34" charset="0"/>
+                            <a:cs typeface="Tahoma" panose="020B0604030504040204" pitchFamily="34" charset="0"/>
+                          </a:rPr>
+                          <m:t>𝑧</m:t>
+                        </m:r>
+                      </m:oMath>
+                    </m:oMathPara>
+                  </a14:m>
+                  <a:endParaRPr lang="en-US" sz="3200" dirty="0">
+                    <a:solidFill>
+                      <a:schemeClr val="tx1"/>
+                    </a:solidFill>
+                    <a:latin typeface="Tahoma" panose="020B0604030504040204" pitchFamily="34" charset="0"/>
+                    <a:ea typeface="Tahoma" panose="020B0604030504040204" pitchFamily="34" charset="0"/>
+                    <a:cs typeface="Tahoma" panose="020B0604030504040204" pitchFamily="34" charset="0"/>
+                  </a:endParaRPr>
+                </a:p>
+              </p:txBody>
+            </p:sp>
+          </mc:Choice>
+          <mc:Fallback>
+            <p:sp>
+              <p:nvSpPr>
+                <p:cNvPr id="136" name="TextBox 135">
+                  <a:extLst>
+                    <a:ext uri="{FF2B5EF4-FFF2-40B4-BE49-F238E27FC236}">
+                      <a16:creationId xmlns:a16="http://schemas.microsoft.com/office/drawing/2014/main" id="{EDA08BEB-6E0D-E8BD-30C8-1129D3853977}"/>
+                    </a:ext>
+                  </a:extLst>
+                </p:cNvPr>
+                <p:cNvSpPr txBox="1">
+                  <a:spLocks noRot="1" noChangeAspect="1" noMove="1" noResize="1" noEditPoints="1" noAdjustHandles="1" noChangeArrowheads="1" noChangeShapeType="1" noTextEdit="1"/>
+                </p:cNvSpPr>
+                <p:nvPr/>
+              </p:nvSpPr>
+              <p:spPr>
+                <a:xfrm>
+                  <a:off x="2877315" y="353363"/>
+                  <a:ext cx="593723" cy="523220"/>
+                </a:xfrm>
+                <a:prstGeom prst="rect">
+                  <a:avLst/>
+                </a:prstGeom>
+                <a:blipFill>
+                  <a:blip r:embed="rId9"/>
+                  <a:stretch>
+                    <a:fillRect/>
+                  </a:stretch>
+                </a:blipFill>
+              </p:spPr>
+              <p:txBody>
+                <a:bodyPr/>
+                <a:lstStyle/>
+                <a:p>
+                  <a:r>
+                    <a:rPr lang="en-GB">
+                      <a:noFill/>
+                    </a:rPr>
+                    <a:t> </a:t>
+                  </a:r>
+                </a:p>
+              </p:txBody>
+            </p:sp>
+          </mc:Fallback>
+        </mc:AlternateContent>
+        <mc:AlternateContent xmlns:mc="http://schemas.openxmlformats.org/markup-compatibility/2006">
+          <mc:Choice xmlns:a14="http://schemas.microsoft.com/office/drawing/2010/main" Requires="a14">
+            <p:sp>
+              <p:nvSpPr>
+                <p:cNvPr id="137" name="TextBox 136">
+                  <a:extLst>
+                    <a:ext uri="{FF2B5EF4-FFF2-40B4-BE49-F238E27FC236}">
+                      <a16:creationId xmlns:a16="http://schemas.microsoft.com/office/drawing/2014/main" id="{EBECD19A-F6B2-C22C-AF7D-8836A2F7646A}"/>
+                    </a:ext>
+                  </a:extLst>
+                </p:cNvPr>
+                <p:cNvSpPr txBox="1"/>
+                <p:nvPr/>
+              </p:nvSpPr>
+              <p:spPr>
+                <a:xfrm>
+                  <a:off x="485007" y="3736334"/>
+                  <a:ext cx="593723" cy="538609"/>
+                </a:xfrm>
+                <a:prstGeom prst="rect">
+                  <a:avLst/>
+                </a:prstGeom>
+                <a:noFill/>
+              </p:spPr>
+              <p:txBody>
+                <a:bodyPr wrap="square">
+                  <a:spAutoFit/>
+                </a:bodyPr>
+                <a:lstStyle/>
+                <a:p>
+                  <a:pPr algn="ctr"/>
+                  <a14:m>
+                    <m:oMathPara xmlns:m="http://schemas.openxmlformats.org/officeDocument/2006/math">
+                      <m:oMathParaPr>
+                        <m:jc m:val="centerGroup"/>
+                      </m:oMathParaPr>
+                      <m:oMath xmlns:m="http://schemas.openxmlformats.org/officeDocument/2006/math">
+                        <m:r>
+                          <a:rPr lang="en-US" sz="2900" b="0" i="1" smtClean="0">
+                            <a:solidFill>
+                              <a:schemeClr val="tx1"/>
+                            </a:solidFill>
+                            <a:latin typeface="Cambria Math" panose="02040503050406030204" pitchFamily="18" charset="0"/>
+                            <a:ea typeface="Tahoma" panose="020B0604030504040204" pitchFamily="34" charset="0"/>
+                            <a:cs typeface="Tahoma" panose="020B0604030504040204" pitchFamily="34" charset="0"/>
+                          </a:rPr>
+                          <m:t>𝑥</m:t>
+                        </m:r>
+                      </m:oMath>
+                    </m:oMathPara>
+                  </a14:m>
+                  <a:endParaRPr lang="en-US" sz="2900" dirty="0">
+                    <a:solidFill>
+                      <a:schemeClr val="tx1"/>
+                    </a:solidFill>
+                    <a:latin typeface="Tahoma" panose="020B0604030504040204" pitchFamily="34" charset="0"/>
+                    <a:ea typeface="Tahoma" panose="020B0604030504040204" pitchFamily="34" charset="0"/>
+                    <a:cs typeface="Tahoma" panose="020B0604030504040204" pitchFamily="34" charset="0"/>
+                  </a:endParaRPr>
+                </a:p>
+              </p:txBody>
+            </p:sp>
+          </mc:Choice>
+          <mc:Fallback>
+            <p:sp>
+              <p:nvSpPr>
+                <p:cNvPr id="137" name="TextBox 136">
+                  <a:extLst>
+                    <a:ext uri="{FF2B5EF4-FFF2-40B4-BE49-F238E27FC236}">
+                      <a16:creationId xmlns:a16="http://schemas.microsoft.com/office/drawing/2014/main" id="{EBECD19A-F6B2-C22C-AF7D-8836A2F7646A}"/>
+                    </a:ext>
+                  </a:extLst>
+                </p:cNvPr>
+                <p:cNvSpPr txBox="1">
+                  <a:spLocks noRot="1" noChangeAspect="1" noMove="1" noResize="1" noEditPoints="1" noAdjustHandles="1" noChangeArrowheads="1" noChangeShapeType="1" noTextEdit="1"/>
+                </p:cNvSpPr>
+                <p:nvPr/>
+              </p:nvSpPr>
+              <p:spPr>
+                <a:xfrm>
+                  <a:off x="485007" y="3736334"/>
+                  <a:ext cx="593723" cy="538609"/>
+                </a:xfrm>
+                <a:prstGeom prst="rect">
+                  <a:avLst/>
+                </a:prstGeom>
+                <a:blipFill>
+                  <a:blip r:embed="rId10"/>
+                  <a:stretch>
+                    <a:fillRect/>
+                  </a:stretch>
+                </a:blipFill>
+              </p:spPr>
+              <p:txBody>
+                <a:bodyPr/>
+                <a:lstStyle/>
+                <a:p>
+                  <a:r>
+                    <a:rPr lang="en-GB">
+                      <a:noFill/>
+                    </a:rPr>
+                    <a:t> </a:t>
+                  </a:r>
+                </a:p>
+              </p:txBody>
+            </p:sp>
+          </mc:Fallback>
+        </mc:AlternateContent>
+        <mc:AlternateContent xmlns:mc="http://schemas.openxmlformats.org/markup-compatibility/2006">
+          <mc:Choice xmlns:a14="http://schemas.microsoft.com/office/drawing/2010/main" Requires="a14">
+            <p:sp>
+              <p:nvSpPr>
+                <p:cNvPr id="138" name="TextBox 137">
+                  <a:extLst>
+                    <a:ext uri="{FF2B5EF4-FFF2-40B4-BE49-F238E27FC236}">
+                      <a16:creationId xmlns:a16="http://schemas.microsoft.com/office/drawing/2014/main" id="{44F9C4FD-E464-D0C1-DE55-27B534CEE3D3}"/>
+                    </a:ext>
+                  </a:extLst>
+                </p:cNvPr>
+                <p:cNvSpPr txBox="1"/>
+                <p:nvPr/>
+              </p:nvSpPr>
+              <p:spPr>
+                <a:xfrm>
+                  <a:off x="4476829" y="3665355"/>
+                  <a:ext cx="593723" cy="523220"/>
+                </a:xfrm>
+                <a:prstGeom prst="rect">
+                  <a:avLst/>
+                </a:prstGeom>
+                <a:noFill/>
+              </p:spPr>
+              <p:txBody>
+                <a:bodyPr wrap="square">
+                  <a:spAutoFit/>
+                </a:bodyPr>
+                <a:lstStyle/>
+                <a:p>
+                  <a:pPr algn="ctr"/>
+                  <a14:m>
+                    <m:oMathPara xmlns:m="http://schemas.openxmlformats.org/officeDocument/2006/math">
+                      <m:oMathParaPr>
+                        <m:jc m:val="centerGroup"/>
+                      </m:oMathParaPr>
+                      <m:oMath xmlns:m="http://schemas.openxmlformats.org/officeDocument/2006/math">
+                        <m:r>
+                          <a:rPr lang="en-US" sz="2800" b="0" i="1" smtClean="0">
+                            <a:solidFill>
+                              <a:schemeClr val="tx1"/>
+                            </a:solidFill>
+                            <a:latin typeface="Cambria Math" panose="02040503050406030204" pitchFamily="18" charset="0"/>
+                            <a:ea typeface="Tahoma" panose="020B0604030504040204" pitchFamily="34" charset="0"/>
+                            <a:cs typeface="Tahoma" panose="020B0604030504040204" pitchFamily="34" charset="0"/>
+                          </a:rPr>
+                          <m:t>𝑦</m:t>
+                        </m:r>
+                      </m:oMath>
+                    </m:oMathPara>
+                  </a14:m>
+                  <a:endParaRPr lang="en-US" sz="2800" dirty="0">
+                    <a:solidFill>
+                      <a:schemeClr val="tx1"/>
+                    </a:solidFill>
+                    <a:latin typeface="Tahoma" panose="020B0604030504040204" pitchFamily="34" charset="0"/>
+                    <a:ea typeface="Tahoma" panose="020B0604030504040204" pitchFamily="34" charset="0"/>
+                    <a:cs typeface="Tahoma" panose="020B0604030504040204" pitchFamily="34" charset="0"/>
+                  </a:endParaRPr>
+                </a:p>
+              </p:txBody>
+            </p:sp>
+          </mc:Choice>
+          <mc:Fallback>
+            <p:sp>
+              <p:nvSpPr>
+                <p:cNvPr id="138" name="TextBox 137">
+                  <a:extLst>
+                    <a:ext uri="{FF2B5EF4-FFF2-40B4-BE49-F238E27FC236}">
+                      <a16:creationId xmlns:a16="http://schemas.microsoft.com/office/drawing/2014/main" id="{44F9C4FD-E464-D0C1-DE55-27B534CEE3D3}"/>
+                    </a:ext>
+                  </a:extLst>
+                </p:cNvPr>
+                <p:cNvSpPr txBox="1">
+                  <a:spLocks noRot="1" noChangeAspect="1" noMove="1" noResize="1" noEditPoints="1" noAdjustHandles="1" noChangeArrowheads="1" noChangeShapeType="1" noTextEdit="1"/>
+                </p:cNvSpPr>
+                <p:nvPr/>
+              </p:nvSpPr>
+              <p:spPr>
+                <a:xfrm>
+                  <a:off x="4476829" y="3665355"/>
+                  <a:ext cx="593723" cy="523220"/>
+                </a:xfrm>
+                <a:prstGeom prst="rect">
+                  <a:avLst/>
+                </a:prstGeom>
+                <a:blipFill>
+                  <a:blip r:embed="rId11"/>
+                  <a:stretch>
+                    <a:fillRect/>
+                  </a:stretch>
+                </a:blipFill>
+              </p:spPr>
+              <p:txBody>
+                <a:bodyPr/>
+                <a:lstStyle/>
+                <a:p>
+                  <a:r>
+                    <a:rPr lang="en-GB">
+                      <a:noFill/>
+                    </a:rPr>
+                    <a:t> </a:t>
+                  </a:r>
+                </a:p>
+              </p:txBody>
+            </p:sp>
+          </mc:Fallback>
+        </mc:AlternateContent>
+        <p:sp>
+          <p:nvSpPr>
+            <p:cNvPr id="149" name="Arc 148">
+              <a:extLst>
+                <a:ext uri="{FF2B5EF4-FFF2-40B4-BE49-F238E27FC236}">
+                  <a16:creationId xmlns:a16="http://schemas.microsoft.com/office/drawing/2014/main" id="{7C61BC0D-744A-F6E0-13C4-49BC070A604B}"/>
+                </a:ext>
+              </a:extLst>
+            </p:cNvPr>
+            <p:cNvSpPr/>
+            <p:nvPr/>
+          </p:nvSpPr>
+          <p:spPr>
+            <a:xfrm rot="12846546">
+              <a:off x="2031097" y="3201356"/>
+              <a:ext cx="748299" cy="505015"/>
+            </a:xfrm>
+            <a:prstGeom prst="arc">
+              <a:avLst/>
+            </a:prstGeom>
+            <a:ln>
+              <a:solidFill>
+                <a:schemeClr val="bg2">
+                  <a:lumMod val="50000"/>
+                </a:schemeClr>
+              </a:solidFill>
+            </a:ln>
+          </p:spPr>
+          <p:style>
+            <a:lnRef idx="2">
+              <a:schemeClr val="accent1"/>
+            </a:lnRef>
+            <a:fillRef idx="0">
+              <a:schemeClr val="accent1"/>
+            </a:fillRef>
+            <a:effectRef idx="1">
+              <a:schemeClr val="accent1"/>
+            </a:effectRef>
+            <a:fontRef idx="minor">
+              <a:schemeClr val="tx1"/>
+            </a:fontRef>
+          </p:style>
+          <p:txBody>
+            <a:bodyPr rtlCol="0" anchor="ctr"/>
+            <a:lstStyle/>
+            <a:p>
+              <a:pPr algn="ctr"/>
+              <a:endParaRPr lang="en-GB"/>
+            </a:p>
+          </p:txBody>
+        </p:sp>
+        <p:sp>
+          <p:nvSpPr>
+            <p:cNvPr id="153" name="Arc 152">
+              <a:extLst>
+                <a:ext uri="{FF2B5EF4-FFF2-40B4-BE49-F238E27FC236}">
+                  <a16:creationId xmlns:a16="http://schemas.microsoft.com/office/drawing/2014/main" id="{8AFE443C-C54A-C34A-2648-DFD8F12F9ACA}"/>
+                </a:ext>
+              </a:extLst>
+            </p:cNvPr>
+            <p:cNvSpPr/>
+            <p:nvPr/>
+          </p:nvSpPr>
+          <p:spPr>
+            <a:xfrm rot="12846546">
+              <a:off x="2145444" y="4204293"/>
+              <a:ext cx="838641" cy="1002747"/>
+            </a:xfrm>
+            <a:prstGeom prst="arc">
+              <a:avLst>
+                <a:gd name="adj1" fmla="val 16200000"/>
+                <a:gd name="adj2" fmla="val 4987230"/>
+              </a:avLst>
+            </a:prstGeom>
+            <a:ln>
+              <a:solidFill>
+                <a:schemeClr val="bg2">
+                  <a:lumMod val="50000"/>
+                </a:schemeClr>
+              </a:solidFill>
+            </a:ln>
+          </p:spPr>
+          <p:style>
+            <a:lnRef idx="2">
+              <a:schemeClr val="accent1"/>
+            </a:lnRef>
+            <a:fillRef idx="0">
+              <a:schemeClr val="accent1"/>
+            </a:fillRef>
+            <a:effectRef idx="1">
+              <a:schemeClr val="accent1"/>
+            </a:effectRef>
+            <a:fontRef idx="minor">
+              <a:schemeClr val="tx1"/>
+            </a:fontRef>
+          </p:style>
+          <p:txBody>
+            <a:bodyPr rtlCol="0" anchor="ctr"/>
+            <a:lstStyle/>
+            <a:p>
+              <a:pPr algn="ctr"/>
+              <a:endParaRPr lang="en-GB"/>
+            </a:p>
+          </p:txBody>
+        </p:sp>
+        <mc:AlternateContent xmlns:mc="http://schemas.openxmlformats.org/markup-compatibility/2006">
+          <mc:Choice xmlns:a14="http://schemas.microsoft.com/office/drawing/2010/main" Requires="a14">
+            <p:sp>
+              <p:nvSpPr>
+                <p:cNvPr id="160" name="TextBox 159">
+                  <a:extLst>
+                    <a:ext uri="{FF2B5EF4-FFF2-40B4-BE49-F238E27FC236}">
+                      <a16:creationId xmlns:a16="http://schemas.microsoft.com/office/drawing/2014/main" id="{91DA390C-B745-50E1-3DBA-7C0E2F4D7860}"/>
+                    </a:ext>
+                  </a:extLst>
+                </p:cNvPr>
+                <p:cNvSpPr txBox="1"/>
+                <p:nvPr/>
+              </p:nvSpPr>
+              <p:spPr>
+                <a:xfrm>
+                  <a:off x="1717710" y="3674796"/>
+                  <a:ext cx="593722" cy="1077218"/>
+                </a:xfrm>
+                <a:prstGeom prst="rect">
+                  <a:avLst/>
+                </a:prstGeom>
+                <a:noFill/>
+              </p:spPr>
+              <p:txBody>
+                <a:bodyPr wrap="square">
+                  <a:spAutoFit/>
+                </a:bodyPr>
+                <a:lstStyle/>
+                <a:p>
+                  <a:pPr algn="ctr"/>
+                  <a:endParaRPr lang="en-US" sz="3200" dirty="0">
+                    <a:solidFill>
+                      <a:schemeClr val="tx1"/>
+                    </a:solidFill>
+                    <a:latin typeface="Tahoma" panose="020B0604030504040204" pitchFamily="34" charset="0"/>
+                    <a:ea typeface="Tahoma" panose="020B0604030504040204" pitchFamily="34" charset="0"/>
+                    <a:cs typeface="Tahoma" panose="020B0604030504040204" pitchFamily="34" charset="0"/>
+                  </a:endParaRPr>
+                </a:p>
+                <a:p>
+                  <a:pPr algn="ctr"/>
+                  <a14:m>
+                    <m:oMathPara xmlns:m="http://schemas.openxmlformats.org/officeDocument/2006/math">
+                      <m:oMathParaPr>
+                        <m:jc m:val="centerGroup"/>
+                      </m:oMathParaPr>
+                      <m:oMath xmlns:m="http://schemas.openxmlformats.org/officeDocument/2006/math">
+                        <m:r>
+                          <a:rPr lang="en-US" sz="3200" b="0" i="1" smtClean="0">
+                            <a:solidFill>
+                              <a:schemeClr val="tx1"/>
+                            </a:solidFill>
+                            <a:latin typeface="Cambria Math" panose="02040503050406030204" pitchFamily="18" charset="0"/>
+                            <a:ea typeface="Tahoma" panose="020B0604030504040204" pitchFamily="34" charset="0"/>
+                            <a:cs typeface="Tahoma" panose="020B0604030504040204" pitchFamily="34" charset="0"/>
+                          </a:rPr>
+                          <m:t>𝛼</m:t>
+                        </m:r>
+                      </m:oMath>
+                    </m:oMathPara>
+                  </a14:m>
+                  <a:endParaRPr lang="en-US" sz="3200" dirty="0">
+                    <a:solidFill>
+                      <a:schemeClr val="tx1"/>
+                    </a:solidFill>
+                    <a:latin typeface="Tahoma" panose="020B0604030504040204" pitchFamily="34" charset="0"/>
+                    <a:ea typeface="Tahoma" panose="020B0604030504040204" pitchFamily="34" charset="0"/>
+                    <a:cs typeface="Tahoma" panose="020B0604030504040204" pitchFamily="34" charset="0"/>
+                  </a:endParaRPr>
+                </a:p>
+              </p:txBody>
+            </p:sp>
+          </mc:Choice>
+          <mc:Fallback>
+            <p:sp>
+              <p:nvSpPr>
+                <p:cNvPr id="160" name="TextBox 159">
+                  <a:extLst>
+                    <a:ext uri="{FF2B5EF4-FFF2-40B4-BE49-F238E27FC236}">
+                      <a16:creationId xmlns:a16="http://schemas.microsoft.com/office/drawing/2014/main" id="{91DA390C-B745-50E1-3DBA-7C0E2F4D7860}"/>
+                    </a:ext>
+                  </a:extLst>
+                </p:cNvPr>
+                <p:cNvSpPr txBox="1">
+                  <a:spLocks noRot="1" noChangeAspect="1" noMove="1" noResize="1" noEditPoints="1" noAdjustHandles="1" noChangeArrowheads="1" noChangeShapeType="1" noTextEdit="1"/>
+                </p:cNvSpPr>
+                <p:nvPr/>
+              </p:nvSpPr>
+              <p:spPr>
+                <a:xfrm>
+                  <a:off x="1717710" y="3674796"/>
+                  <a:ext cx="593722" cy="1077218"/>
+                </a:xfrm>
+                <a:prstGeom prst="rect">
+                  <a:avLst/>
+                </a:prstGeom>
+                <a:blipFill>
+                  <a:blip r:embed="rId12"/>
+                  <a:stretch>
+                    <a:fillRect/>
+                  </a:stretch>
+                </a:blipFill>
+              </p:spPr>
+              <p:txBody>
+                <a:bodyPr/>
+                <a:lstStyle/>
+                <a:p>
+                  <a:r>
+                    <a:rPr lang="en-GB">
+                      <a:noFill/>
+                    </a:rPr>
+                    <a:t> </a:t>
+                  </a:r>
+                </a:p>
+              </p:txBody>
+            </p:sp>
+          </mc:Fallback>
+        </mc:AlternateContent>
+        <mc:AlternateContent xmlns:mc="http://schemas.openxmlformats.org/markup-compatibility/2006">
+          <mc:Choice xmlns:a14="http://schemas.microsoft.com/office/drawing/2010/main" Requires="a14">
+            <p:sp>
+              <p:nvSpPr>
+                <p:cNvPr id="163" name="TextBox 162">
+                  <a:extLst>
+                    <a:ext uri="{FF2B5EF4-FFF2-40B4-BE49-F238E27FC236}">
+                      <a16:creationId xmlns:a16="http://schemas.microsoft.com/office/drawing/2014/main" id="{75B3F7AE-AA24-A16C-30E6-2FCA78D688C2}"/>
+                    </a:ext>
+                  </a:extLst>
+                </p:cNvPr>
+                <p:cNvSpPr txBox="1"/>
+                <p:nvPr/>
+              </p:nvSpPr>
+              <p:spPr>
+                <a:xfrm>
+                  <a:off x="1811524" y="1626382"/>
+                  <a:ext cx="593722" cy="1384995"/>
+                </a:xfrm>
+                <a:prstGeom prst="rect">
+                  <a:avLst/>
+                </a:prstGeom>
+                <a:noFill/>
+              </p:spPr>
+              <p:txBody>
+                <a:bodyPr wrap="square">
+                  <a:spAutoFit/>
+                </a:bodyPr>
+                <a:lstStyle/>
+                <a:p>
+                  <a:pPr algn="ctr"/>
+                  <a:endParaRPr lang="en-US" sz="2800" dirty="0">
+                    <a:solidFill>
+                      <a:schemeClr val="tx1"/>
+                    </a:solidFill>
+                    <a:latin typeface="Tahoma" panose="020B0604030504040204" pitchFamily="34" charset="0"/>
+                    <a:ea typeface="Tahoma" panose="020B0604030504040204" pitchFamily="34" charset="0"/>
+                    <a:cs typeface="Tahoma" panose="020B0604030504040204" pitchFamily="34" charset="0"/>
+                  </a:endParaRPr>
+                </a:p>
+                <a:p>
+                  <a:pPr algn="ctr"/>
+                  <a14:m>
+                    <m:oMathPara xmlns:m="http://schemas.openxmlformats.org/officeDocument/2006/math">
+                      <m:oMathParaPr>
+                        <m:jc m:val="centerGroup"/>
+                      </m:oMathParaPr>
+                      <m:oMath xmlns:m="http://schemas.openxmlformats.org/officeDocument/2006/math">
+                        <m:r>
+                          <m:rPr>
+                            <m:sty m:val="p"/>
+                          </m:rPr>
+                          <a:rPr lang="en-US" sz="2800" b="0" i="1" smtClean="0">
+                            <a:solidFill>
+                              <a:schemeClr val="tx1"/>
+                            </a:solidFill>
+                            <a:latin typeface="Cambria Math" panose="02040503050406030204" pitchFamily="18" charset="0"/>
+                            <a:ea typeface="Tahoma" panose="020B0604030504040204" pitchFamily="34" charset="0"/>
+                            <a:cs typeface="Tahoma" panose="020B0604030504040204" pitchFamily="34" charset="0"/>
+                          </a:rPr>
+                          <m:t>β</m:t>
+                        </m:r>
+                      </m:oMath>
+                    </m:oMathPara>
+                  </a14:m>
+                  <a:endParaRPr lang="en-US" sz="2800" b="0" dirty="0">
+                    <a:solidFill>
+                      <a:schemeClr val="tx1"/>
+                    </a:solidFill>
+                    <a:latin typeface="Tahoma" panose="020B0604030504040204" pitchFamily="34" charset="0"/>
+                    <a:ea typeface="Tahoma" panose="020B0604030504040204" pitchFamily="34" charset="0"/>
+                    <a:cs typeface="Tahoma" panose="020B0604030504040204" pitchFamily="34" charset="0"/>
+                  </a:endParaRPr>
+                </a:p>
+                <a:p>
+                  <a:pPr algn="ctr"/>
+                  <a:endParaRPr lang="en-US" sz="2800" dirty="0">
+                    <a:solidFill>
+                      <a:schemeClr val="tx1"/>
+                    </a:solidFill>
+                    <a:latin typeface="Tahoma" panose="020B0604030504040204" pitchFamily="34" charset="0"/>
+                    <a:ea typeface="Tahoma" panose="020B0604030504040204" pitchFamily="34" charset="0"/>
+                    <a:cs typeface="Tahoma" panose="020B0604030504040204" pitchFamily="34" charset="0"/>
+                  </a:endParaRPr>
+                </a:p>
+              </p:txBody>
+            </p:sp>
+          </mc:Choice>
+          <mc:Fallback>
+            <p:sp>
+              <p:nvSpPr>
+                <p:cNvPr id="163" name="TextBox 162">
+                  <a:extLst>
+                    <a:ext uri="{FF2B5EF4-FFF2-40B4-BE49-F238E27FC236}">
+                      <a16:creationId xmlns:a16="http://schemas.microsoft.com/office/drawing/2014/main" id="{75B3F7AE-AA24-A16C-30E6-2FCA78D688C2}"/>
+                    </a:ext>
+                  </a:extLst>
+                </p:cNvPr>
+                <p:cNvSpPr txBox="1">
+                  <a:spLocks noRot="1" noChangeAspect="1" noMove="1" noResize="1" noEditPoints="1" noAdjustHandles="1" noChangeArrowheads="1" noChangeShapeType="1" noTextEdit="1"/>
+                </p:cNvSpPr>
+                <p:nvPr/>
+              </p:nvSpPr>
+              <p:spPr>
+                <a:xfrm>
+                  <a:off x="1811524" y="1626382"/>
+                  <a:ext cx="593722" cy="1384995"/>
+                </a:xfrm>
+                <a:prstGeom prst="rect">
+                  <a:avLst/>
+                </a:prstGeom>
+                <a:blipFill>
+                  <a:blip r:embed="rId13"/>
+                  <a:stretch>
+                    <a:fillRect/>
+                  </a:stretch>
+                </a:blipFill>
+              </p:spPr>
+              <p:txBody>
+                <a:bodyPr/>
+                <a:lstStyle/>
+                <a:p>
+                  <a:r>
+                    <a:rPr lang="en-GB">
+                      <a:noFill/>
+                    </a:rPr>
+                    <a:t> </a:t>
+                  </a:r>
+                </a:p>
+              </p:txBody>
+            </p:sp>
+          </mc:Fallback>
+        </mc:AlternateContent>
+        <p:sp>
+          <p:nvSpPr>
+            <p:cNvPr id="166" name="Arc 165">
+              <a:extLst>
+                <a:ext uri="{FF2B5EF4-FFF2-40B4-BE49-F238E27FC236}">
+                  <a16:creationId xmlns:a16="http://schemas.microsoft.com/office/drawing/2014/main" id="{F2DAD716-7632-D601-52E9-7E925DB9D935}"/>
+                </a:ext>
+              </a:extLst>
+            </p:cNvPr>
+            <p:cNvSpPr/>
+            <p:nvPr/>
+          </p:nvSpPr>
+          <p:spPr>
+            <a:xfrm rot="10095993">
+              <a:off x="2230221" y="1554302"/>
+              <a:ext cx="914782" cy="1179369"/>
+            </a:xfrm>
+            <a:prstGeom prst="arc">
+              <a:avLst>
+                <a:gd name="adj1" fmla="val 16148513"/>
+                <a:gd name="adj2" fmla="val 4110365"/>
+              </a:avLst>
+            </a:prstGeom>
+            <a:ln>
+              <a:solidFill>
+                <a:schemeClr val="bg2">
+                  <a:lumMod val="50000"/>
+                </a:schemeClr>
+              </a:solidFill>
+            </a:ln>
+          </p:spPr>
+          <p:style>
+            <a:lnRef idx="2">
+              <a:schemeClr val="accent1"/>
+            </a:lnRef>
+            <a:fillRef idx="0">
+              <a:schemeClr val="accent1"/>
+            </a:fillRef>
+            <a:effectRef idx="1">
+              <a:schemeClr val="accent1"/>
+            </a:effectRef>
+            <a:fontRef idx="minor">
+              <a:schemeClr val="tx1"/>
+            </a:fontRef>
+          </p:style>
+          <p:txBody>
+            <a:bodyPr rtlCol="0" anchor="ctr"/>
+            <a:lstStyle/>
+            <a:p>
+              <a:pPr algn="ctr"/>
+              <a:endParaRPr lang="en-GB"/>
+            </a:p>
+          </p:txBody>
+        </p:sp>
+        <p:sp>
+          <p:nvSpPr>
+            <p:cNvPr id="167" name="Arc 166">
+              <a:extLst>
+                <a:ext uri="{FF2B5EF4-FFF2-40B4-BE49-F238E27FC236}">
+                  <a16:creationId xmlns:a16="http://schemas.microsoft.com/office/drawing/2014/main" id="{2F7D530D-785B-45FD-FE21-632D3825EAE9}"/>
+                </a:ext>
+              </a:extLst>
+            </p:cNvPr>
+            <p:cNvSpPr/>
+            <p:nvPr/>
+          </p:nvSpPr>
+          <p:spPr>
+            <a:xfrm rot="17063397">
+              <a:off x="2327279" y="1490353"/>
+              <a:ext cx="778012" cy="785280"/>
+            </a:xfrm>
+            <a:prstGeom prst="arc">
+              <a:avLst>
+                <a:gd name="adj1" fmla="val 17529598"/>
+                <a:gd name="adj2" fmla="val 0"/>
+              </a:avLst>
+            </a:prstGeom>
+            <a:ln>
+              <a:solidFill>
+                <a:srgbClr val="FF0000"/>
+              </a:solidFill>
+            </a:ln>
+          </p:spPr>
+          <p:style>
+            <a:lnRef idx="2">
+              <a:schemeClr val="accent1"/>
+            </a:lnRef>
+            <a:fillRef idx="0">
+              <a:schemeClr val="accent1"/>
+            </a:fillRef>
+            <a:effectRef idx="1">
+              <a:schemeClr val="accent1"/>
+            </a:effectRef>
+            <a:fontRef idx="minor">
+              <a:schemeClr val="tx1"/>
+            </a:fontRef>
+          </p:style>
+          <p:txBody>
+            <a:bodyPr rtlCol="0" anchor="ctr"/>
+            <a:lstStyle/>
+            <a:p>
+              <a:pPr algn="ctr"/>
+              <a:endParaRPr lang="en-GB"/>
+            </a:p>
+          </p:txBody>
+        </p:sp>
+      </p:grpSp>
     </p:spTree>
     <p:extLst>
       <p:ext uri="{BB962C8B-B14F-4D97-AF65-F5344CB8AC3E}">
-        <p14:creationId xmlns:p14="http://schemas.microsoft.com/office/powerpoint/2010/main" val="432137981"/>
+        <p14:creationId xmlns:p14="http://schemas.microsoft.com/office/powerpoint/2010/main" val="3633757211"/>
       </p:ext>
     </p:extLst>
   </p:cSld>
@@ -14604,7 +21280,7 @@
 </p:sld>
 </file>
 
-<file path=ppt/slides/slide4.xml><?xml version="1.0" encoding="utf-8"?>
+<file path=ppt/slides/slide7.xml><?xml version="1.0" encoding="utf-8"?>
 <p:sld xmlns:a="http://schemas.openxmlformats.org/drawingml/2006/main" xmlns:r="http://schemas.openxmlformats.org/officeDocument/2006/relationships" xmlns:p="http://schemas.openxmlformats.org/presentationml/2006/main">
   <p:cSld>
     <p:spTree>
@@ -15391,7 +22067,7 @@
 </p:sld>
 </file>
 
-<file path=ppt/slides/slide5.xml><?xml version="1.0" encoding="utf-8"?>
+<file path=ppt/slides/slide8.xml><?xml version="1.0" encoding="utf-8"?>
 <p:sld xmlns:a="http://schemas.openxmlformats.org/drawingml/2006/main" xmlns:r="http://schemas.openxmlformats.org/officeDocument/2006/relationships" xmlns:p="http://schemas.openxmlformats.org/presentationml/2006/main">
   <p:cSld>
     <p:spTree>
@@ -15487,7 +22163,7 @@
 </p:sld>
 </file>
 
-<file path=ppt/slides/slide6.xml><?xml version="1.0" encoding="utf-8"?>
+<file path=ppt/slides/slide9.xml><?xml version="1.0" encoding="utf-8"?>
 <p:sld xmlns:a="http://schemas.openxmlformats.org/drawingml/2006/main" xmlns:r="http://schemas.openxmlformats.org/officeDocument/2006/relationships" xmlns:p="http://schemas.openxmlformats.org/presentationml/2006/main">
   <p:cSld>
     <p:spTree>
@@ -16543,2302 +23219,6 @@
 </p:sld>
 </file>
 
-<file path=ppt/slides/slide7.xml><?xml version="1.0" encoding="utf-8"?>
-<p:sld xmlns:a="http://schemas.openxmlformats.org/drawingml/2006/main" xmlns:r="http://schemas.openxmlformats.org/officeDocument/2006/relationships" xmlns:p="http://schemas.openxmlformats.org/presentationml/2006/main">
-  <p:cSld>
-    <p:spTree>
-      <p:nvGrpSpPr>
-        <p:cNvPr id="1" name=""/>
-        <p:cNvGrpSpPr/>
-        <p:nvPr/>
-      </p:nvGrpSpPr>
-      <p:grpSpPr>
-        <a:xfrm>
-          <a:off x="0" y="0"/>
-          <a:ext cx="0" cy="0"/>
-          <a:chOff x="0" y="0"/>
-          <a:chExt cx="0" cy="0"/>
-        </a:xfrm>
-      </p:grpSpPr>
-      <p:grpSp>
-        <p:nvGrpSpPr>
-          <p:cNvPr id="9" name="Group 8">
-            <a:extLst>
-              <a:ext uri="{FF2B5EF4-FFF2-40B4-BE49-F238E27FC236}">
-                <a16:creationId xmlns:a16="http://schemas.microsoft.com/office/drawing/2014/main" id="{08580654-EAA5-25C1-B307-FB5518EC68CC}"/>
-              </a:ext>
-            </a:extLst>
-          </p:cNvPr>
-          <p:cNvGrpSpPr/>
-          <p:nvPr/>
-        </p:nvGrpSpPr>
-        <p:grpSpPr>
-          <a:xfrm>
-            <a:off x="2243579" y="26988"/>
-            <a:ext cx="8505701" cy="6470332"/>
-            <a:chOff x="2243579" y="26988"/>
-            <a:chExt cx="8505701" cy="6470332"/>
-          </a:xfrm>
-        </p:grpSpPr>
-        <p:grpSp>
-          <p:nvGrpSpPr>
-            <p:cNvPr id="2" name="Group 1">
-              <a:extLst>
-                <a:ext uri="{FF2B5EF4-FFF2-40B4-BE49-F238E27FC236}">
-                  <a16:creationId xmlns:a16="http://schemas.microsoft.com/office/drawing/2014/main" id="{ED1CE477-4C0B-C51B-0E1A-1D013E63D9E8}"/>
-                </a:ext>
-              </a:extLst>
-            </p:cNvPr>
-            <p:cNvGrpSpPr/>
-            <p:nvPr/>
-          </p:nvGrpSpPr>
-          <p:grpSpPr>
-            <a:xfrm>
-              <a:off x="2243579" y="26988"/>
-              <a:ext cx="8505701" cy="6470332"/>
-              <a:chOff x="2243579" y="26988"/>
-              <a:chExt cx="8505701" cy="6470332"/>
-            </a:xfrm>
-          </p:grpSpPr>
-          <p:pic>
-            <p:nvPicPr>
-              <p:cNvPr id="5" name="Picture 4">
-                <a:extLst>
-                  <a:ext uri="{FF2B5EF4-FFF2-40B4-BE49-F238E27FC236}">
-                    <a16:creationId xmlns:a16="http://schemas.microsoft.com/office/drawing/2014/main" id="{1ADBE73F-251C-FAEE-1CF1-9EAFABCE1DF0}"/>
-                  </a:ext>
-                </a:extLst>
-              </p:cNvPr>
-              <p:cNvPicPr>
-                <a:picLocks noChangeAspect="1"/>
-              </p:cNvPicPr>
-              <p:nvPr/>
-            </p:nvPicPr>
-            <p:blipFill>
-              <a:blip r:embed="rId2"/>
-              <a:srcRect l="835" t="1764" r="33000" b="1376"/>
-              <a:stretch/>
-            </p:blipFill>
-            <p:spPr>
-              <a:xfrm>
-                <a:off x="2243579" y="26988"/>
-                <a:ext cx="8505701" cy="6470332"/>
-              </a:xfrm>
-              <a:prstGeom prst="rect">
-                <a:avLst/>
-              </a:prstGeom>
-            </p:spPr>
-          </p:pic>
-          <p:pic>
-            <p:nvPicPr>
-              <p:cNvPr id="11" name="Picture 10">
-                <a:extLst>
-                  <a:ext uri="{FF2B5EF4-FFF2-40B4-BE49-F238E27FC236}">
-                    <a16:creationId xmlns:a16="http://schemas.microsoft.com/office/drawing/2014/main" id="{81030C97-8FB3-F4CE-2BEA-8DC9611B571F}"/>
-                  </a:ext>
-                </a:extLst>
-              </p:cNvPr>
-              <p:cNvPicPr>
-                <a:picLocks noChangeAspect="1"/>
-              </p:cNvPicPr>
-              <p:nvPr/>
-            </p:nvPicPr>
-            <p:blipFill>
-              <a:blip r:embed="rId3"/>
-              <a:srcRect l="33000" t="15443" r="25250" b="8545"/>
-              <a:stretch/>
-            </p:blipFill>
-            <p:spPr>
-              <a:xfrm>
-                <a:off x="2243579" y="3315494"/>
-                <a:ext cx="3283357" cy="3106410"/>
-              </a:xfrm>
-              <a:prstGeom prst="rect">
-                <a:avLst/>
-              </a:prstGeom>
-            </p:spPr>
-          </p:pic>
-        </p:grpSp>
-        <p:sp>
-          <p:nvSpPr>
-            <p:cNvPr id="3" name="Rectangle 2">
-              <a:extLst>
-                <a:ext uri="{FF2B5EF4-FFF2-40B4-BE49-F238E27FC236}">
-                  <a16:creationId xmlns:a16="http://schemas.microsoft.com/office/drawing/2014/main" id="{5BD9EDA2-AC29-625D-CD46-136C5FF770ED}"/>
-                </a:ext>
-              </a:extLst>
-            </p:cNvPr>
-            <p:cNvSpPr/>
-            <p:nvPr/>
-          </p:nvSpPr>
-          <p:spPr>
-            <a:xfrm>
-              <a:off x="2880957" y="2358362"/>
-              <a:ext cx="2008599" cy="297950"/>
-            </a:xfrm>
-            <a:prstGeom prst="rect">
-              <a:avLst/>
-            </a:prstGeom>
-            <a:solidFill>
-              <a:schemeClr val="bg1"/>
-            </a:solidFill>
-            <a:ln>
-              <a:noFill/>
-            </a:ln>
-          </p:spPr>
-          <p:style>
-            <a:lnRef idx="2">
-              <a:schemeClr val="accent1">
-                <a:shade val="15000"/>
-              </a:schemeClr>
-            </a:lnRef>
-            <a:fillRef idx="1">
-              <a:schemeClr val="accent1"/>
-            </a:fillRef>
-            <a:effectRef idx="0">
-              <a:schemeClr val="accent1"/>
-            </a:effectRef>
-            <a:fontRef idx="minor">
-              <a:schemeClr val="lt1"/>
-            </a:fontRef>
-          </p:style>
-          <p:txBody>
-            <a:bodyPr rtlCol="0" anchor="ctr"/>
-            <a:lstStyle/>
-            <a:p>
-              <a:pPr algn="ctr"/>
-              <a:r>
-                <a:rPr lang="en-US" sz="1400" b="1" dirty="0">
-                  <a:solidFill>
-                    <a:schemeClr val="tx1"/>
-                  </a:solidFill>
-                </a:rPr>
-                <a:t>Relative Energy (cm</a:t>
-              </a:r>
-              <a:r>
-                <a:rPr lang="en-US" sz="1400" b="1" baseline="30000" dirty="0">
-                  <a:solidFill>
-                    <a:schemeClr val="tx1"/>
-                  </a:solidFill>
-                </a:rPr>
-                <a:t>-1</a:t>
-              </a:r>
-              <a:r>
-                <a:rPr lang="en-US" sz="1400" b="1" dirty="0">
-                  <a:solidFill>
-                    <a:schemeClr val="tx1"/>
-                  </a:solidFill>
-                </a:rPr>
-                <a:t>)</a:t>
-              </a:r>
-            </a:p>
-          </p:txBody>
-        </p:sp>
-        <mc:AlternateContent xmlns:mc="http://schemas.openxmlformats.org/markup-compatibility/2006" xmlns:a14="http://schemas.microsoft.com/office/drawing/2010/main">
-          <mc:Choice Requires="a14">
-            <p:sp>
-              <p:nvSpPr>
-                <p:cNvPr id="4" name="Rectangle 3">
-                  <a:extLst>
-                    <a:ext uri="{FF2B5EF4-FFF2-40B4-BE49-F238E27FC236}">
-                      <a16:creationId xmlns:a16="http://schemas.microsoft.com/office/drawing/2014/main" id="{9D7CDBA7-CE65-E920-913C-4B7BD915D5FF}"/>
-                    </a:ext>
-                  </a:extLst>
-                </p:cNvPr>
-                <p:cNvSpPr/>
-                <p:nvPr/>
-              </p:nvSpPr>
-              <p:spPr>
-                <a:xfrm>
-                  <a:off x="2880957" y="6161662"/>
-                  <a:ext cx="2008599" cy="297950"/>
-                </a:xfrm>
-                <a:prstGeom prst="rect">
-                  <a:avLst/>
-                </a:prstGeom>
-                <a:solidFill>
-                  <a:schemeClr val="bg1"/>
-                </a:solidFill>
-                <a:ln>
-                  <a:noFill/>
-                </a:ln>
-              </p:spPr>
-              <p:style>
-                <a:lnRef idx="2">
-                  <a:schemeClr val="accent1">
-                    <a:shade val="15000"/>
-                  </a:schemeClr>
-                </a:lnRef>
-                <a:fillRef idx="1">
-                  <a:schemeClr val="accent1"/>
-                </a:fillRef>
-                <a:effectRef idx="0">
-                  <a:schemeClr val="accent1"/>
-                </a:effectRef>
-                <a:fontRef idx="minor">
-                  <a:schemeClr val="lt1"/>
-                </a:fontRef>
-              </p:style>
-              <p:txBody>
-                <a:bodyPr rtlCol="0" anchor="ctr"/>
-                <a:lstStyle/>
-                <a:p>
-                  <a:pPr algn="ctr"/>
-                  <a14:m>
-                    <m:oMath xmlns:m="http://schemas.openxmlformats.org/officeDocument/2006/math">
-                      <m:r>
-                        <a:rPr lang="en-US" sz="1600" b="1" i="1" dirty="0" smtClean="0">
-                          <a:solidFill>
-                            <a:schemeClr val="tx1"/>
-                          </a:solidFill>
-                          <a:latin typeface="Cambria Math" panose="02040503050406030204" pitchFamily="18" charset="0"/>
-                        </a:rPr>
-                        <m:t>𝜷</m:t>
-                      </m:r>
-                    </m:oMath>
-                  </a14:m>
-                  <a:r>
-                    <a:rPr lang="en-US" sz="1600" b="1" dirty="0">
-                      <a:solidFill>
-                        <a:schemeClr val="tx1"/>
-                      </a:solidFill>
-                    </a:rPr>
-                    <a:t> (</a:t>
-                  </a:r>
-                  <a:r>
-                    <a:rPr lang="en-US" sz="1600" b="1" baseline="30000" dirty="0">
-                      <a:solidFill>
-                        <a:schemeClr val="tx1"/>
-                      </a:solidFill>
-                    </a:rPr>
-                    <a:t>o</a:t>
-                  </a:r>
-                  <a:r>
-                    <a:rPr lang="en-US" sz="1600" b="1" dirty="0">
-                      <a:solidFill>
-                        <a:schemeClr val="tx1"/>
-                      </a:solidFill>
-                    </a:rPr>
-                    <a:t>)</a:t>
-                  </a:r>
-                </a:p>
-              </p:txBody>
-            </p:sp>
-          </mc:Choice>
-          <mc:Fallback xmlns="">
-            <p:sp>
-              <p:nvSpPr>
-                <p:cNvPr id="4" name="Rectangle 3">
-                  <a:extLst>
-                    <a:ext uri="{FF2B5EF4-FFF2-40B4-BE49-F238E27FC236}">
-                      <a16:creationId xmlns:a16="http://schemas.microsoft.com/office/drawing/2014/main" id="{9D7CDBA7-CE65-E920-913C-4B7BD915D5FF}"/>
-                    </a:ext>
-                  </a:extLst>
-                </p:cNvPr>
-                <p:cNvSpPr>
-                  <a:spLocks noRot="1" noChangeAspect="1" noMove="1" noResize="1" noEditPoints="1" noAdjustHandles="1" noChangeArrowheads="1" noChangeShapeType="1" noTextEdit="1"/>
-                </p:cNvSpPr>
-                <p:nvPr/>
-              </p:nvSpPr>
-              <p:spPr>
-                <a:xfrm>
-                  <a:off x="2880957" y="6161662"/>
-                  <a:ext cx="2008599" cy="297950"/>
-                </a:xfrm>
-                <a:prstGeom prst="rect">
-                  <a:avLst/>
-                </a:prstGeom>
-                <a:blipFill>
-                  <a:blip r:embed="rId4"/>
-                  <a:stretch>
-                    <a:fillRect t="-12245" b="-32653"/>
-                  </a:stretch>
-                </a:blipFill>
-                <a:ln>
-                  <a:noFill/>
-                </a:ln>
-              </p:spPr>
-              <p:txBody>
-                <a:bodyPr/>
-                <a:lstStyle/>
-                <a:p>
-                  <a:r>
-                    <a:rPr lang="en-US">
-                      <a:noFill/>
-                    </a:rPr>
-                    <a:t> </a:t>
-                  </a:r>
-                </a:p>
-              </p:txBody>
-            </p:sp>
-          </mc:Fallback>
-        </mc:AlternateContent>
-        <mc:AlternateContent xmlns:mc="http://schemas.openxmlformats.org/markup-compatibility/2006" xmlns:a14="http://schemas.microsoft.com/office/drawing/2010/main">
-          <mc:Choice Requires="a14">
-            <p:sp>
-              <p:nvSpPr>
-                <p:cNvPr id="6" name="Rectangle 5">
-                  <a:extLst>
-                    <a:ext uri="{FF2B5EF4-FFF2-40B4-BE49-F238E27FC236}">
-                      <a16:creationId xmlns:a16="http://schemas.microsoft.com/office/drawing/2014/main" id="{48E82CB9-E83D-30FE-A358-47456CF5A9CE}"/>
-                    </a:ext>
-                  </a:extLst>
-                </p:cNvPr>
-                <p:cNvSpPr/>
-                <p:nvPr/>
-              </p:nvSpPr>
-              <p:spPr>
-                <a:xfrm rot="5400000">
-                  <a:off x="5113087" y="4585572"/>
-                  <a:ext cx="545403" cy="282294"/>
-                </a:xfrm>
-                <a:prstGeom prst="rect">
-                  <a:avLst/>
-                </a:prstGeom>
-                <a:solidFill>
-                  <a:schemeClr val="bg1"/>
-                </a:solidFill>
-                <a:ln>
-                  <a:noFill/>
-                </a:ln>
-              </p:spPr>
-              <p:style>
-                <a:lnRef idx="2">
-                  <a:schemeClr val="accent1">
-                    <a:shade val="15000"/>
-                  </a:schemeClr>
-                </a:lnRef>
-                <a:fillRef idx="1">
-                  <a:schemeClr val="accent1"/>
-                </a:fillRef>
-                <a:effectRef idx="0">
-                  <a:schemeClr val="accent1"/>
-                </a:effectRef>
-                <a:fontRef idx="minor">
-                  <a:schemeClr val="lt1"/>
-                </a:fontRef>
-              </p:style>
-              <p:txBody>
-                <a:bodyPr rtlCol="0" anchor="ctr"/>
-                <a:lstStyle/>
-                <a:p>
-                  <a:pPr algn="ctr"/>
-                  <a14:m>
-                    <m:oMath xmlns:m="http://schemas.openxmlformats.org/officeDocument/2006/math">
-                      <m:r>
-                        <a:rPr lang="en-US" sz="1600" b="1" i="1" smtClean="0">
-                          <a:solidFill>
-                            <a:schemeClr val="tx1"/>
-                          </a:solidFill>
-                          <a:latin typeface="Cambria Math" panose="02040503050406030204" pitchFamily="18" charset="0"/>
-                        </a:rPr>
-                        <m:t>𝝉</m:t>
-                      </m:r>
-                    </m:oMath>
-                  </a14:m>
-                  <a:r>
-                    <a:rPr lang="en-US" sz="1600" b="1" dirty="0">
-                      <a:solidFill>
-                        <a:schemeClr val="tx1"/>
-                      </a:solidFill>
-                    </a:rPr>
-                    <a:t> (</a:t>
-                  </a:r>
-                  <a:r>
-                    <a:rPr lang="en-US" sz="1600" b="1" baseline="30000" dirty="0">
-                      <a:solidFill>
-                        <a:schemeClr val="tx1"/>
-                      </a:solidFill>
-                    </a:rPr>
-                    <a:t>o</a:t>
-                  </a:r>
-                  <a:r>
-                    <a:rPr lang="en-US" sz="1600" b="1" dirty="0">
-                      <a:solidFill>
-                        <a:schemeClr val="tx1"/>
-                      </a:solidFill>
-                    </a:rPr>
-                    <a:t>)</a:t>
-                  </a:r>
-                </a:p>
-              </p:txBody>
-            </p:sp>
-          </mc:Choice>
-          <mc:Fallback xmlns="">
-            <p:sp>
-              <p:nvSpPr>
-                <p:cNvPr id="6" name="Rectangle 5">
-                  <a:extLst>
-                    <a:ext uri="{FF2B5EF4-FFF2-40B4-BE49-F238E27FC236}">
-                      <a16:creationId xmlns:a16="http://schemas.microsoft.com/office/drawing/2014/main" id="{48E82CB9-E83D-30FE-A358-47456CF5A9CE}"/>
-                    </a:ext>
-                  </a:extLst>
-                </p:cNvPr>
-                <p:cNvSpPr>
-                  <a:spLocks noRot="1" noChangeAspect="1" noMove="1" noResize="1" noEditPoints="1" noAdjustHandles="1" noChangeArrowheads="1" noChangeShapeType="1" noTextEdit="1"/>
-                </p:cNvSpPr>
-                <p:nvPr/>
-              </p:nvSpPr>
-              <p:spPr>
-                <a:xfrm rot="5400000">
-                  <a:off x="5113087" y="4585572"/>
-                  <a:ext cx="545403" cy="282294"/>
-                </a:xfrm>
-                <a:prstGeom prst="rect">
-                  <a:avLst/>
-                </a:prstGeom>
-                <a:blipFill>
-                  <a:blip r:embed="rId5"/>
-                  <a:stretch>
-                    <a:fillRect l="-36170" r="-14894" b="-4494"/>
-                  </a:stretch>
-                </a:blipFill>
-                <a:ln>
-                  <a:noFill/>
-                </a:ln>
-              </p:spPr>
-              <p:txBody>
-                <a:bodyPr/>
-                <a:lstStyle/>
-                <a:p>
-                  <a:r>
-                    <a:rPr lang="en-US">
-                      <a:noFill/>
-                    </a:rPr>
-                    <a:t> </a:t>
-                  </a:r>
-                </a:p>
-              </p:txBody>
-            </p:sp>
-          </mc:Fallback>
-        </mc:AlternateContent>
-        <mc:AlternateContent xmlns:mc="http://schemas.openxmlformats.org/markup-compatibility/2006" xmlns:a14="http://schemas.microsoft.com/office/drawing/2010/main">
-          <mc:Choice Requires="a14">
-            <p:sp>
-              <p:nvSpPr>
-                <p:cNvPr id="7" name="Rectangle 6">
-                  <a:extLst>
-                    <a:ext uri="{FF2B5EF4-FFF2-40B4-BE49-F238E27FC236}">
-                      <a16:creationId xmlns:a16="http://schemas.microsoft.com/office/drawing/2014/main" id="{F5CDCF7D-1C9A-7BDC-CB04-8E7DABAEC115}"/>
-                    </a:ext>
-                  </a:extLst>
-                </p:cNvPr>
-                <p:cNvSpPr/>
-                <p:nvPr/>
-              </p:nvSpPr>
-              <p:spPr>
-                <a:xfrm>
-                  <a:off x="5845382" y="5104693"/>
-                  <a:ext cx="988037" cy="371873"/>
-                </a:xfrm>
-                <a:prstGeom prst="rect">
-                  <a:avLst/>
-                </a:prstGeom>
-                <a:solidFill>
-                  <a:schemeClr val="bg1"/>
-                </a:solidFill>
-                <a:ln>
-                  <a:noFill/>
-                </a:ln>
-              </p:spPr>
-              <p:style>
-                <a:lnRef idx="2">
-                  <a:schemeClr val="accent1">
-                    <a:shade val="15000"/>
-                  </a:schemeClr>
-                </a:lnRef>
-                <a:fillRef idx="1">
-                  <a:schemeClr val="accent1"/>
-                </a:fillRef>
-                <a:effectRef idx="0">
-                  <a:schemeClr val="accent1"/>
-                </a:effectRef>
-                <a:fontRef idx="minor">
-                  <a:schemeClr val="lt1"/>
-                </a:fontRef>
-              </p:style>
-              <p:txBody>
-                <a:bodyPr rtlCol="0" anchor="ctr"/>
-                <a:lstStyle/>
-                <a:p>
-                  <a:pPr algn="ctr"/>
-                  <a14:m>
-                    <m:oMath xmlns:m="http://schemas.openxmlformats.org/officeDocument/2006/math">
-                      <m:r>
-                        <a:rPr lang="en-US" sz="1600" b="1" i="1" dirty="0" smtClean="0">
-                          <a:solidFill>
-                            <a:schemeClr val="tx1"/>
-                          </a:solidFill>
-                          <a:latin typeface="Cambria Math" panose="02040503050406030204" pitchFamily="18" charset="0"/>
-                        </a:rPr>
-                        <m:t>𝜷</m:t>
-                      </m:r>
-                    </m:oMath>
-                  </a14:m>
-                  <a:r>
-                    <a:rPr lang="en-US" sz="1600" b="1" dirty="0">
-                      <a:solidFill>
-                        <a:schemeClr val="tx1"/>
-                      </a:solidFill>
-                    </a:rPr>
-                    <a:t> (</a:t>
-                  </a:r>
-                  <a:r>
-                    <a:rPr lang="en-US" sz="1600" b="1" baseline="30000" dirty="0">
-                      <a:solidFill>
-                        <a:schemeClr val="tx1"/>
-                      </a:solidFill>
-                    </a:rPr>
-                    <a:t>o</a:t>
-                  </a:r>
-                  <a:r>
-                    <a:rPr lang="en-US" sz="1600" b="1" dirty="0">
-                      <a:solidFill>
-                        <a:schemeClr val="tx1"/>
-                      </a:solidFill>
-                    </a:rPr>
-                    <a:t>)</a:t>
-                  </a:r>
-                </a:p>
-              </p:txBody>
-            </p:sp>
-          </mc:Choice>
-          <mc:Fallback xmlns="">
-            <p:sp>
-              <p:nvSpPr>
-                <p:cNvPr id="7" name="Rectangle 6">
-                  <a:extLst>
-                    <a:ext uri="{FF2B5EF4-FFF2-40B4-BE49-F238E27FC236}">
-                      <a16:creationId xmlns:a16="http://schemas.microsoft.com/office/drawing/2014/main" id="{F5CDCF7D-1C9A-7BDC-CB04-8E7DABAEC115}"/>
-                    </a:ext>
-                  </a:extLst>
-                </p:cNvPr>
-                <p:cNvSpPr>
-                  <a:spLocks noRot="1" noChangeAspect="1" noMove="1" noResize="1" noEditPoints="1" noAdjustHandles="1" noChangeArrowheads="1" noChangeShapeType="1" noTextEdit="1"/>
-                </p:cNvSpPr>
-                <p:nvPr/>
-              </p:nvSpPr>
-              <p:spPr>
-                <a:xfrm>
-                  <a:off x="5845382" y="5104693"/>
-                  <a:ext cx="988037" cy="371873"/>
-                </a:xfrm>
-                <a:prstGeom prst="rect">
-                  <a:avLst/>
-                </a:prstGeom>
-                <a:blipFill>
-                  <a:blip r:embed="rId6"/>
-                  <a:stretch>
-                    <a:fillRect b="-16393"/>
-                  </a:stretch>
-                </a:blipFill>
-                <a:ln>
-                  <a:noFill/>
-                </a:ln>
-              </p:spPr>
-              <p:txBody>
-                <a:bodyPr/>
-                <a:lstStyle/>
-                <a:p>
-                  <a:r>
-                    <a:rPr lang="en-US">
-                      <a:noFill/>
-                    </a:rPr>
-                    <a:t> </a:t>
-                  </a:r>
-                </a:p>
-              </p:txBody>
-            </p:sp>
-          </mc:Fallback>
-        </mc:AlternateContent>
-        <mc:AlternateContent xmlns:mc="http://schemas.openxmlformats.org/markup-compatibility/2006" xmlns:a14="http://schemas.microsoft.com/office/drawing/2010/main">
-          <mc:Choice Requires="a14">
-            <p:sp>
-              <p:nvSpPr>
-                <p:cNvPr id="8" name="Rectangle 7">
-                  <a:extLst>
-                    <a:ext uri="{FF2B5EF4-FFF2-40B4-BE49-F238E27FC236}">
-                      <a16:creationId xmlns:a16="http://schemas.microsoft.com/office/drawing/2014/main" id="{08D4A9D1-969D-AFB4-1FA6-502FF50CC11E}"/>
-                    </a:ext>
-                  </a:extLst>
-                </p:cNvPr>
-                <p:cNvSpPr/>
-                <p:nvPr/>
-              </p:nvSpPr>
-              <p:spPr>
-                <a:xfrm>
-                  <a:off x="9948421" y="4999421"/>
-                  <a:ext cx="545403" cy="282294"/>
-                </a:xfrm>
-                <a:prstGeom prst="rect">
-                  <a:avLst/>
-                </a:prstGeom>
-                <a:solidFill>
-                  <a:schemeClr val="bg1"/>
-                </a:solidFill>
-                <a:ln>
-                  <a:noFill/>
-                </a:ln>
-              </p:spPr>
-              <p:style>
-                <a:lnRef idx="2">
-                  <a:schemeClr val="accent1">
-                    <a:shade val="15000"/>
-                  </a:schemeClr>
-                </a:lnRef>
-                <a:fillRef idx="1">
-                  <a:schemeClr val="accent1"/>
-                </a:fillRef>
-                <a:effectRef idx="0">
-                  <a:schemeClr val="accent1"/>
-                </a:effectRef>
-                <a:fontRef idx="minor">
-                  <a:schemeClr val="lt1"/>
-                </a:fontRef>
-              </p:style>
-              <p:txBody>
-                <a:bodyPr rtlCol="0" anchor="ctr"/>
-                <a:lstStyle/>
-                <a:p>
-                  <a:pPr algn="ctr"/>
-                  <a14:m>
-                    <m:oMath xmlns:m="http://schemas.openxmlformats.org/officeDocument/2006/math">
-                      <m:r>
-                        <a:rPr lang="en-US" sz="1600" b="1" i="1" smtClean="0">
-                          <a:solidFill>
-                            <a:schemeClr val="tx1"/>
-                          </a:solidFill>
-                          <a:latin typeface="Cambria Math" panose="02040503050406030204" pitchFamily="18" charset="0"/>
-                        </a:rPr>
-                        <m:t>𝝉</m:t>
-                      </m:r>
-                    </m:oMath>
-                  </a14:m>
-                  <a:r>
-                    <a:rPr lang="en-US" sz="1600" b="1" dirty="0">
-                      <a:solidFill>
-                        <a:schemeClr val="tx1"/>
-                      </a:solidFill>
-                    </a:rPr>
-                    <a:t> (</a:t>
-                  </a:r>
-                  <a:r>
-                    <a:rPr lang="en-US" sz="1600" b="1" baseline="30000" dirty="0">
-                      <a:solidFill>
-                        <a:schemeClr val="tx1"/>
-                      </a:solidFill>
-                    </a:rPr>
-                    <a:t>o</a:t>
-                  </a:r>
-                  <a:r>
-                    <a:rPr lang="en-US" sz="1600" b="1" dirty="0">
-                      <a:solidFill>
-                        <a:schemeClr val="tx1"/>
-                      </a:solidFill>
-                    </a:rPr>
-                    <a:t>)</a:t>
-                  </a:r>
-                </a:p>
-              </p:txBody>
-            </p:sp>
-          </mc:Choice>
-          <mc:Fallback xmlns="">
-            <p:sp>
-              <p:nvSpPr>
-                <p:cNvPr id="8" name="Rectangle 7">
-                  <a:extLst>
-                    <a:ext uri="{FF2B5EF4-FFF2-40B4-BE49-F238E27FC236}">
-                      <a16:creationId xmlns:a16="http://schemas.microsoft.com/office/drawing/2014/main" id="{08D4A9D1-969D-AFB4-1FA6-502FF50CC11E}"/>
-                    </a:ext>
-                  </a:extLst>
-                </p:cNvPr>
-                <p:cNvSpPr>
-                  <a:spLocks noRot="1" noChangeAspect="1" noMove="1" noResize="1" noEditPoints="1" noAdjustHandles="1" noChangeArrowheads="1" noChangeShapeType="1" noTextEdit="1"/>
-                </p:cNvSpPr>
-                <p:nvPr/>
-              </p:nvSpPr>
-              <p:spPr>
-                <a:xfrm>
-                  <a:off x="9948421" y="4999421"/>
-                  <a:ext cx="545403" cy="282294"/>
-                </a:xfrm>
-                <a:prstGeom prst="rect">
-                  <a:avLst/>
-                </a:prstGeom>
-                <a:blipFill>
-                  <a:blip r:embed="rId7"/>
-                  <a:stretch>
-                    <a:fillRect t="-15217" r="-5618" b="-39130"/>
-                  </a:stretch>
-                </a:blipFill>
-                <a:ln>
-                  <a:noFill/>
-                </a:ln>
-              </p:spPr>
-              <p:txBody>
-                <a:bodyPr/>
-                <a:lstStyle/>
-                <a:p>
-                  <a:r>
-                    <a:rPr lang="en-US">
-                      <a:noFill/>
-                    </a:rPr>
-                    <a:t> </a:t>
-                  </a:r>
-                </a:p>
-              </p:txBody>
-            </p:sp>
-          </mc:Fallback>
-        </mc:AlternateContent>
-      </p:grpSp>
-    </p:spTree>
-    <p:extLst>
-      <p:ext uri="{BB962C8B-B14F-4D97-AF65-F5344CB8AC3E}">
-        <p14:creationId xmlns:p14="http://schemas.microsoft.com/office/powerpoint/2010/main" val="2312560760"/>
-      </p:ext>
-    </p:extLst>
-  </p:cSld>
-  <p:clrMapOvr>
-    <a:masterClrMapping/>
-  </p:clrMapOvr>
-</p:sld>
-</file>
-
-<file path=ppt/slides/slide8.xml><?xml version="1.0" encoding="utf-8"?>
-<p:sld xmlns:a="http://schemas.openxmlformats.org/drawingml/2006/main" xmlns:r="http://schemas.openxmlformats.org/officeDocument/2006/relationships" xmlns:p="http://schemas.openxmlformats.org/presentationml/2006/main">
-  <p:cSld>
-    <p:spTree>
-      <p:nvGrpSpPr>
-        <p:cNvPr id="1" name=""/>
-        <p:cNvGrpSpPr/>
-        <p:nvPr/>
-      </p:nvGrpSpPr>
-      <p:grpSpPr>
-        <a:xfrm>
-          <a:off x="0" y="0"/>
-          <a:ext cx="0" cy="0"/>
-          <a:chOff x="0" y="0"/>
-          <a:chExt cx="0" cy="0"/>
-        </a:xfrm>
-      </p:grpSpPr>
-      <p:grpSp>
-        <p:nvGrpSpPr>
-          <p:cNvPr id="12" name="Group 11">
-            <a:extLst>
-              <a:ext uri="{FF2B5EF4-FFF2-40B4-BE49-F238E27FC236}">
-                <a16:creationId xmlns:a16="http://schemas.microsoft.com/office/drawing/2014/main" id="{AA928F58-22DB-B6B1-CE8C-6248C65CC224}"/>
-              </a:ext>
-            </a:extLst>
-          </p:cNvPr>
-          <p:cNvGrpSpPr/>
-          <p:nvPr/>
-        </p:nvGrpSpPr>
-        <p:grpSpPr>
-          <a:xfrm>
-            <a:off x="1212509" y="638826"/>
-            <a:ext cx="10010812" cy="5411246"/>
-            <a:chOff x="1212509" y="638826"/>
-            <a:chExt cx="10010812" cy="5411246"/>
-          </a:xfrm>
-        </p:grpSpPr>
-        <p:grpSp>
-          <p:nvGrpSpPr>
-            <p:cNvPr id="2" name="Group 1">
-              <a:extLst>
-                <a:ext uri="{FF2B5EF4-FFF2-40B4-BE49-F238E27FC236}">
-                  <a16:creationId xmlns:a16="http://schemas.microsoft.com/office/drawing/2014/main" id="{7182AE39-8CE2-65C8-8FFF-5BFDCC52A26A}"/>
-                </a:ext>
-              </a:extLst>
-            </p:cNvPr>
-            <p:cNvGrpSpPr/>
-            <p:nvPr/>
-          </p:nvGrpSpPr>
-          <p:grpSpPr>
-            <a:xfrm>
-              <a:off x="1212509" y="638826"/>
-              <a:ext cx="10010812" cy="5411246"/>
-              <a:chOff x="1212509" y="638826"/>
-              <a:chExt cx="10010812" cy="5411246"/>
-            </a:xfrm>
-          </p:grpSpPr>
-          <p:pic>
-            <p:nvPicPr>
-              <p:cNvPr id="3" name="Picture 2">
-                <a:extLst>
-                  <a:ext uri="{FF2B5EF4-FFF2-40B4-BE49-F238E27FC236}">
-                    <a16:creationId xmlns:a16="http://schemas.microsoft.com/office/drawing/2014/main" id="{D9F02B45-EEC5-F898-0A85-BA2A8C1BBDC2}"/>
-                  </a:ext>
-                </a:extLst>
-              </p:cNvPr>
-              <p:cNvPicPr>
-                <a:picLocks noChangeAspect="1"/>
-              </p:cNvPicPr>
-              <p:nvPr/>
-            </p:nvPicPr>
-            <p:blipFill>
-              <a:blip r:embed="rId2"/>
-              <a:srcRect l="7809" t="8086" r="22534" b="9420"/>
-              <a:stretch/>
-            </p:blipFill>
-            <p:spPr>
-              <a:xfrm>
-                <a:off x="2668044" y="638826"/>
-                <a:ext cx="8492647" cy="5226485"/>
-              </a:xfrm>
-              <a:prstGeom prst="rect">
-                <a:avLst/>
-              </a:prstGeom>
-            </p:spPr>
-          </p:pic>
-          <p:pic>
-            <p:nvPicPr>
-              <p:cNvPr id="4" name="Picture 3">
-                <a:extLst>
-                  <a:ext uri="{FF2B5EF4-FFF2-40B4-BE49-F238E27FC236}">
-                    <a16:creationId xmlns:a16="http://schemas.microsoft.com/office/drawing/2014/main" id="{DE07EF6E-FAC2-2707-F3C9-3C0C40CDA2A3}"/>
-                  </a:ext>
-                </a:extLst>
-              </p:cNvPr>
-              <p:cNvPicPr>
-                <a:picLocks noChangeAspect="1"/>
-              </p:cNvPicPr>
-              <p:nvPr/>
-            </p:nvPicPr>
-            <p:blipFill>
-              <a:blip r:embed="rId2"/>
-              <a:srcRect l="-222" t="1808" r="91798" b="62242"/>
-              <a:stretch/>
-            </p:blipFill>
-            <p:spPr>
-              <a:xfrm>
-                <a:off x="10196186" y="719202"/>
-                <a:ext cx="1027135" cy="2277648"/>
-              </a:xfrm>
-              <a:prstGeom prst="rect">
-                <a:avLst/>
-              </a:prstGeom>
-            </p:spPr>
-          </p:pic>
-          <p:pic>
-            <p:nvPicPr>
-              <p:cNvPr id="6" name="Picture 5">
-                <a:extLst>
-                  <a:ext uri="{FF2B5EF4-FFF2-40B4-BE49-F238E27FC236}">
-                    <a16:creationId xmlns:a16="http://schemas.microsoft.com/office/drawing/2014/main" id="{C695EC9F-4EA2-0861-7A2A-A33892EBFD77}"/>
-                  </a:ext>
-                </a:extLst>
-              </p:cNvPr>
-              <p:cNvPicPr>
-                <a:picLocks noChangeAspect="1"/>
-              </p:cNvPicPr>
-              <p:nvPr/>
-            </p:nvPicPr>
-            <p:blipFill>
-              <a:blip r:embed="rId3"/>
-              <a:srcRect l="4185" r="3808" b="2420"/>
-              <a:stretch/>
-            </p:blipFill>
-            <p:spPr>
-              <a:xfrm>
-                <a:off x="1212509" y="2455102"/>
-                <a:ext cx="3597486" cy="3594970"/>
-              </a:xfrm>
-              <a:prstGeom prst="rect">
-                <a:avLst/>
-              </a:prstGeom>
-            </p:spPr>
-          </p:pic>
-          <p:pic>
-            <p:nvPicPr>
-              <p:cNvPr id="7" name="Picture 6">
-                <a:extLst>
-                  <a:ext uri="{FF2B5EF4-FFF2-40B4-BE49-F238E27FC236}">
-                    <a16:creationId xmlns:a16="http://schemas.microsoft.com/office/drawing/2014/main" id="{1DFCBC87-2834-7E99-68EE-38FC694F2881}"/>
-                  </a:ext>
-                </a:extLst>
-              </p:cNvPr>
-              <p:cNvPicPr>
-                <a:picLocks noChangeAspect="1"/>
-              </p:cNvPicPr>
-              <p:nvPr/>
-            </p:nvPicPr>
-            <p:blipFill>
-              <a:blip r:embed="rId4"/>
-              <a:srcRect l="6573" t="37362" r="79201" b="58512"/>
-              <a:stretch/>
-            </p:blipFill>
-            <p:spPr>
-              <a:xfrm>
-                <a:off x="2668044" y="1632557"/>
-                <a:ext cx="2161305" cy="325678"/>
-              </a:xfrm>
-              <a:prstGeom prst="rect">
-                <a:avLst/>
-              </a:prstGeom>
-            </p:spPr>
-          </p:pic>
-        </p:grpSp>
-        <p:sp>
-          <p:nvSpPr>
-            <p:cNvPr id="5" name="Rectangle 4">
-              <a:extLst>
-                <a:ext uri="{FF2B5EF4-FFF2-40B4-BE49-F238E27FC236}">
-                  <a16:creationId xmlns:a16="http://schemas.microsoft.com/office/drawing/2014/main" id="{EB5905AC-1009-3B82-75ED-8BB19AEF0137}"/>
-                </a:ext>
-              </a:extLst>
-            </p:cNvPr>
-            <p:cNvSpPr/>
-            <p:nvPr/>
-          </p:nvSpPr>
-          <p:spPr>
-            <a:xfrm>
-              <a:off x="2771776" y="1632557"/>
-              <a:ext cx="2366982" cy="325678"/>
-            </a:xfrm>
-            <a:prstGeom prst="rect">
-              <a:avLst/>
-            </a:prstGeom>
-            <a:solidFill>
-              <a:schemeClr val="bg1"/>
-            </a:solidFill>
-            <a:ln>
-              <a:noFill/>
-            </a:ln>
-          </p:spPr>
-          <p:style>
-            <a:lnRef idx="2">
-              <a:schemeClr val="accent1">
-                <a:shade val="15000"/>
-              </a:schemeClr>
-            </a:lnRef>
-            <a:fillRef idx="1">
-              <a:schemeClr val="accent1"/>
-            </a:fillRef>
-            <a:effectRef idx="0">
-              <a:schemeClr val="accent1"/>
-            </a:effectRef>
-            <a:fontRef idx="minor">
-              <a:schemeClr val="lt1"/>
-            </a:fontRef>
-          </p:style>
-          <p:txBody>
-            <a:bodyPr rtlCol="0" anchor="ctr"/>
-            <a:lstStyle/>
-            <a:p>
-              <a:pPr algn="ctr"/>
-              <a:r>
-                <a:rPr lang="en-US" sz="1600" b="1" dirty="0">
-                  <a:solidFill>
-                    <a:schemeClr val="tx1"/>
-                  </a:solidFill>
-                </a:rPr>
-                <a:t>Relative Energy (cm</a:t>
-              </a:r>
-              <a:r>
-                <a:rPr lang="en-US" sz="1600" b="1" baseline="30000" dirty="0">
-                  <a:solidFill>
-                    <a:schemeClr val="tx1"/>
-                  </a:solidFill>
-                </a:rPr>
-                <a:t>-1</a:t>
-              </a:r>
-              <a:r>
-                <a:rPr lang="en-US" sz="1600" b="1" dirty="0">
-                  <a:solidFill>
-                    <a:schemeClr val="tx1"/>
-                  </a:solidFill>
-                </a:rPr>
-                <a:t>)</a:t>
-              </a:r>
-            </a:p>
-          </p:txBody>
-        </p:sp>
-        <mc:AlternateContent xmlns:mc="http://schemas.openxmlformats.org/markup-compatibility/2006" xmlns:a14="http://schemas.microsoft.com/office/drawing/2010/main">
-          <mc:Choice Requires="a14">
-            <p:sp>
-              <p:nvSpPr>
-                <p:cNvPr id="8" name="Rectangle 7">
-                  <a:extLst>
-                    <a:ext uri="{FF2B5EF4-FFF2-40B4-BE49-F238E27FC236}">
-                      <a16:creationId xmlns:a16="http://schemas.microsoft.com/office/drawing/2014/main" id="{0962A1BD-D606-655C-9E93-8E6016CA0AEB}"/>
-                    </a:ext>
-                  </a:extLst>
-                </p:cNvPr>
-                <p:cNvSpPr/>
-                <p:nvPr/>
-              </p:nvSpPr>
-              <p:spPr>
-                <a:xfrm>
-                  <a:off x="1951411" y="5752122"/>
-                  <a:ext cx="2008599" cy="297950"/>
-                </a:xfrm>
-                <a:prstGeom prst="rect">
-                  <a:avLst/>
-                </a:prstGeom>
-                <a:solidFill>
-                  <a:schemeClr val="bg1"/>
-                </a:solidFill>
-                <a:ln>
-                  <a:noFill/>
-                </a:ln>
-              </p:spPr>
-              <p:style>
-                <a:lnRef idx="2">
-                  <a:schemeClr val="accent1">
-                    <a:shade val="15000"/>
-                  </a:schemeClr>
-                </a:lnRef>
-                <a:fillRef idx="1">
-                  <a:schemeClr val="accent1"/>
-                </a:fillRef>
-                <a:effectRef idx="0">
-                  <a:schemeClr val="accent1"/>
-                </a:effectRef>
-                <a:fontRef idx="minor">
-                  <a:schemeClr val="lt1"/>
-                </a:fontRef>
-              </p:style>
-              <p:txBody>
-                <a:bodyPr rtlCol="0" anchor="ctr"/>
-                <a:lstStyle/>
-                <a:p>
-                  <a:pPr algn="ctr"/>
-                  <a14:m>
-                    <m:oMath xmlns:m="http://schemas.openxmlformats.org/officeDocument/2006/math">
-                      <m:sSub>
-                        <m:sSubPr>
-                          <m:ctrlPr>
-                            <a:rPr lang="en-US" sz="1600" b="1" i="1" smtClean="0">
-                              <a:solidFill>
-                                <a:schemeClr val="tx1"/>
-                              </a:solidFill>
-                              <a:latin typeface="Cambria Math" panose="02040503050406030204" pitchFamily="18" charset="0"/>
-                            </a:rPr>
-                          </m:ctrlPr>
-                        </m:sSubPr>
-                        <m:e>
-                          <m:r>
-                            <a:rPr lang="en-US" sz="1600" b="1" i="1" smtClean="0">
-                              <a:solidFill>
-                                <a:schemeClr val="tx1"/>
-                              </a:solidFill>
-                              <a:latin typeface="Cambria Math" panose="02040503050406030204" pitchFamily="18" charset="0"/>
-                            </a:rPr>
-                            <m:t>𝒓</m:t>
-                          </m:r>
-                        </m:e>
-                        <m:sub>
-                          <m:r>
-                            <a:rPr lang="en-US" sz="1600" b="1" i="1" smtClean="0">
-                              <a:solidFill>
-                                <a:schemeClr val="tx1"/>
-                              </a:solidFill>
-                              <a:latin typeface="Cambria Math" panose="02040503050406030204" pitchFamily="18" charset="0"/>
-                            </a:rPr>
-                            <m:t>𝟏</m:t>
-                          </m:r>
-                        </m:sub>
-                      </m:sSub>
-                    </m:oMath>
-                  </a14:m>
-                  <a:r>
-                    <a:rPr lang="en-US" sz="1600" b="1" dirty="0">
-                      <a:solidFill>
-                        <a:schemeClr val="tx1"/>
-                      </a:solidFill>
-                    </a:rPr>
-                    <a:t> (</a:t>
-                  </a:r>
-                  <a14:m>
-                    <m:oMath xmlns:m="http://schemas.openxmlformats.org/officeDocument/2006/math">
-                      <m:r>
-                        <a:rPr lang="en-US" sz="1600" b="1" i="1" dirty="0" smtClean="0">
-                          <a:solidFill>
-                            <a:schemeClr val="tx1"/>
-                          </a:solidFill>
-                          <a:latin typeface="Cambria Math" panose="02040503050406030204" pitchFamily="18" charset="0"/>
-                        </a:rPr>
-                        <m:t>Å</m:t>
-                      </m:r>
-                    </m:oMath>
-                  </a14:m>
-                  <a:r>
-                    <a:rPr lang="en-US" sz="1600" b="1" dirty="0">
-                      <a:solidFill>
-                        <a:schemeClr val="tx1"/>
-                      </a:solidFill>
-                    </a:rPr>
-                    <a:t>)</a:t>
-                  </a:r>
-                </a:p>
-              </p:txBody>
-            </p:sp>
-          </mc:Choice>
-          <mc:Fallback xmlns="">
-            <p:sp>
-              <p:nvSpPr>
-                <p:cNvPr id="8" name="Rectangle 7">
-                  <a:extLst>
-                    <a:ext uri="{FF2B5EF4-FFF2-40B4-BE49-F238E27FC236}">
-                      <a16:creationId xmlns:a16="http://schemas.microsoft.com/office/drawing/2014/main" id="{0962A1BD-D606-655C-9E93-8E6016CA0AEB}"/>
-                    </a:ext>
-                  </a:extLst>
-                </p:cNvPr>
-                <p:cNvSpPr>
-                  <a:spLocks noRot="1" noChangeAspect="1" noMove="1" noResize="1" noEditPoints="1" noAdjustHandles="1" noChangeArrowheads="1" noChangeShapeType="1" noTextEdit="1"/>
-                </p:cNvSpPr>
-                <p:nvPr/>
-              </p:nvSpPr>
-              <p:spPr>
-                <a:xfrm>
-                  <a:off x="1951411" y="5752122"/>
-                  <a:ext cx="2008599" cy="297950"/>
-                </a:xfrm>
-                <a:prstGeom prst="rect">
-                  <a:avLst/>
-                </a:prstGeom>
-                <a:blipFill>
-                  <a:blip r:embed="rId5"/>
-                  <a:stretch>
-                    <a:fillRect t="-10417" b="-37500"/>
-                  </a:stretch>
-                </a:blipFill>
-                <a:ln>
-                  <a:noFill/>
-                </a:ln>
-              </p:spPr>
-              <p:txBody>
-                <a:bodyPr/>
-                <a:lstStyle/>
-                <a:p>
-                  <a:r>
-                    <a:rPr lang="en-US">
-                      <a:noFill/>
-                    </a:rPr>
-                    <a:t> </a:t>
-                  </a:r>
-                </a:p>
-              </p:txBody>
-            </p:sp>
-          </mc:Fallback>
-        </mc:AlternateContent>
-        <mc:AlternateContent xmlns:mc="http://schemas.openxmlformats.org/markup-compatibility/2006" xmlns:a14="http://schemas.microsoft.com/office/drawing/2010/main">
-          <mc:Choice Requires="a14">
-            <p:sp>
-              <p:nvSpPr>
-                <p:cNvPr id="9" name="Rectangle 8">
-                  <a:extLst>
-                    <a:ext uri="{FF2B5EF4-FFF2-40B4-BE49-F238E27FC236}">
-                      <a16:creationId xmlns:a16="http://schemas.microsoft.com/office/drawing/2014/main" id="{4966767B-222F-EED6-576E-2C749AF94927}"/>
-                    </a:ext>
-                  </a:extLst>
-                </p:cNvPr>
-                <p:cNvSpPr/>
-                <p:nvPr/>
-              </p:nvSpPr>
-              <p:spPr>
-                <a:xfrm>
-                  <a:off x="6498791" y="5553517"/>
-                  <a:ext cx="2008599" cy="297950"/>
-                </a:xfrm>
-                <a:prstGeom prst="rect">
-                  <a:avLst/>
-                </a:prstGeom>
-                <a:solidFill>
-                  <a:schemeClr val="bg1"/>
-                </a:solidFill>
-                <a:ln>
-                  <a:noFill/>
-                </a:ln>
-              </p:spPr>
-              <p:style>
-                <a:lnRef idx="2">
-                  <a:schemeClr val="accent1">
-                    <a:shade val="15000"/>
-                  </a:schemeClr>
-                </a:lnRef>
-                <a:fillRef idx="1">
-                  <a:schemeClr val="accent1"/>
-                </a:fillRef>
-                <a:effectRef idx="0">
-                  <a:schemeClr val="accent1"/>
-                </a:effectRef>
-                <a:fontRef idx="minor">
-                  <a:schemeClr val="lt1"/>
-                </a:fontRef>
-              </p:style>
-              <p:txBody>
-                <a:bodyPr rtlCol="0" anchor="ctr"/>
-                <a:lstStyle/>
-                <a:p>
-                  <a:pPr algn="ctr"/>
-                  <a14:m>
-                    <m:oMath xmlns:m="http://schemas.openxmlformats.org/officeDocument/2006/math">
-                      <m:sSub>
-                        <m:sSubPr>
-                          <m:ctrlPr>
-                            <a:rPr lang="en-US" b="1" i="1" smtClean="0">
-                              <a:solidFill>
-                                <a:schemeClr val="tx1"/>
-                              </a:solidFill>
-                              <a:latin typeface="Cambria Math" panose="02040503050406030204" pitchFamily="18" charset="0"/>
-                            </a:rPr>
-                          </m:ctrlPr>
-                        </m:sSubPr>
-                        <m:e>
-                          <m:r>
-                            <a:rPr lang="en-US" b="1" i="1" smtClean="0">
-                              <a:solidFill>
-                                <a:schemeClr val="tx1"/>
-                              </a:solidFill>
-                              <a:latin typeface="Cambria Math" panose="02040503050406030204" pitchFamily="18" charset="0"/>
-                            </a:rPr>
-                            <m:t>𝒓</m:t>
-                          </m:r>
-                        </m:e>
-                        <m:sub>
-                          <m:r>
-                            <a:rPr lang="en-US" b="1" i="1" smtClean="0">
-                              <a:solidFill>
-                                <a:schemeClr val="tx1"/>
-                              </a:solidFill>
-                              <a:latin typeface="Cambria Math" panose="02040503050406030204" pitchFamily="18" charset="0"/>
-                            </a:rPr>
-                            <m:t>𝟏</m:t>
-                          </m:r>
-                        </m:sub>
-                      </m:sSub>
-                    </m:oMath>
-                  </a14:m>
-                  <a:r>
-                    <a:rPr lang="en-US" b="1" dirty="0">
-                      <a:solidFill>
-                        <a:schemeClr val="tx1"/>
-                      </a:solidFill>
-                    </a:rPr>
-                    <a:t> (</a:t>
-                  </a:r>
-                  <a14:m>
-                    <m:oMath xmlns:m="http://schemas.openxmlformats.org/officeDocument/2006/math">
-                      <m:r>
-                        <a:rPr lang="en-US" b="1" i="1" dirty="0" smtClean="0">
-                          <a:solidFill>
-                            <a:schemeClr val="tx1"/>
-                          </a:solidFill>
-                          <a:latin typeface="Cambria Math" panose="02040503050406030204" pitchFamily="18" charset="0"/>
-                        </a:rPr>
-                        <m:t>Å</m:t>
-                      </m:r>
-                    </m:oMath>
-                  </a14:m>
-                  <a:r>
-                    <a:rPr lang="en-US" b="1" dirty="0">
-                      <a:solidFill>
-                        <a:schemeClr val="tx1"/>
-                      </a:solidFill>
-                    </a:rPr>
-                    <a:t>)</a:t>
-                  </a:r>
-                </a:p>
-              </p:txBody>
-            </p:sp>
-          </mc:Choice>
-          <mc:Fallback xmlns="">
-            <p:sp>
-              <p:nvSpPr>
-                <p:cNvPr id="9" name="Rectangle 8">
-                  <a:extLst>
-                    <a:ext uri="{FF2B5EF4-FFF2-40B4-BE49-F238E27FC236}">
-                      <a16:creationId xmlns:a16="http://schemas.microsoft.com/office/drawing/2014/main" id="{4966767B-222F-EED6-576E-2C749AF94927}"/>
-                    </a:ext>
-                  </a:extLst>
-                </p:cNvPr>
-                <p:cNvSpPr>
-                  <a:spLocks noRot="1" noChangeAspect="1" noMove="1" noResize="1" noEditPoints="1" noAdjustHandles="1" noChangeArrowheads="1" noChangeShapeType="1" noTextEdit="1"/>
-                </p:cNvSpPr>
-                <p:nvPr/>
-              </p:nvSpPr>
-              <p:spPr>
-                <a:xfrm>
-                  <a:off x="6498791" y="5553517"/>
-                  <a:ext cx="2008599" cy="297950"/>
-                </a:xfrm>
-                <a:prstGeom prst="rect">
-                  <a:avLst/>
-                </a:prstGeom>
-                <a:blipFill>
-                  <a:blip r:embed="rId6"/>
-                  <a:stretch>
-                    <a:fillRect t="-18367" b="-46939"/>
-                  </a:stretch>
-                </a:blipFill>
-                <a:ln>
-                  <a:noFill/>
-                </a:ln>
-              </p:spPr>
-              <p:txBody>
-                <a:bodyPr/>
-                <a:lstStyle/>
-                <a:p>
-                  <a:r>
-                    <a:rPr lang="en-US">
-                      <a:noFill/>
-                    </a:rPr>
-                    <a:t> </a:t>
-                  </a:r>
-                </a:p>
-              </p:txBody>
-            </p:sp>
-          </mc:Fallback>
-        </mc:AlternateContent>
-        <mc:AlternateContent xmlns:mc="http://schemas.openxmlformats.org/markup-compatibility/2006" xmlns:a14="http://schemas.microsoft.com/office/drawing/2010/main">
-          <mc:Choice Requires="a14">
-            <p:sp>
-              <p:nvSpPr>
-                <p:cNvPr id="10" name="Rectangle 9">
-                  <a:extLst>
-                    <a:ext uri="{FF2B5EF4-FFF2-40B4-BE49-F238E27FC236}">
-                      <a16:creationId xmlns:a16="http://schemas.microsoft.com/office/drawing/2014/main" id="{616EF81D-5568-A126-5A73-D60EAB1DA68A}"/>
-                    </a:ext>
-                  </a:extLst>
-                </p:cNvPr>
-                <p:cNvSpPr/>
-                <p:nvPr/>
-              </p:nvSpPr>
-              <p:spPr>
-                <a:xfrm rot="5400000">
-                  <a:off x="4427461" y="3998432"/>
-                  <a:ext cx="545403" cy="282294"/>
-                </a:xfrm>
-                <a:prstGeom prst="rect">
-                  <a:avLst/>
-                </a:prstGeom>
-                <a:solidFill>
-                  <a:schemeClr val="bg1"/>
-                </a:solidFill>
-                <a:ln>
-                  <a:noFill/>
-                </a:ln>
-              </p:spPr>
-              <p:style>
-                <a:lnRef idx="2">
-                  <a:schemeClr val="accent1">
-                    <a:shade val="15000"/>
-                  </a:schemeClr>
-                </a:lnRef>
-                <a:fillRef idx="1">
-                  <a:schemeClr val="accent1"/>
-                </a:fillRef>
-                <a:effectRef idx="0">
-                  <a:schemeClr val="accent1"/>
-                </a:effectRef>
-                <a:fontRef idx="minor">
-                  <a:schemeClr val="lt1"/>
-                </a:fontRef>
-              </p:style>
-              <p:txBody>
-                <a:bodyPr rtlCol="0" anchor="ctr"/>
-                <a:lstStyle/>
-                <a:p>
-                  <a:pPr algn="ctr"/>
-                  <a14:m>
-                    <m:oMath xmlns:m="http://schemas.openxmlformats.org/officeDocument/2006/math">
-                      <m:r>
-                        <a:rPr lang="en-US" sz="1600" b="1" i="1" smtClean="0">
-                          <a:solidFill>
-                            <a:schemeClr val="tx1"/>
-                          </a:solidFill>
-                          <a:latin typeface="Cambria Math" panose="02040503050406030204" pitchFamily="18" charset="0"/>
-                        </a:rPr>
-                        <m:t>𝝉</m:t>
-                      </m:r>
-                    </m:oMath>
-                  </a14:m>
-                  <a:r>
-                    <a:rPr lang="en-US" sz="1600" b="1" dirty="0">
-                      <a:solidFill>
-                        <a:schemeClr val="tx1"/>
-                      </a:solidFill>
-                    </a:rPr>
-                    <a:t> (</a:t>
-                  </a:r>
-                  <a:r>
-                    <a:rPr lang="en-US" sz="1600" b="1" baseline="30000" dirty="0">
-                      <a:solidFill>
-                        <a:schemeClr val="tx1"/>
-                      </a:solidFill>
-                    </a:rPr>
-                    <a:t>o</a:t>
-                  </a:r>
-                  <a:r>
-                    <a:rPr lang="en-US" sz="1600" b="1" dirty="0">
-                      <a:solidFill>
-                        <a:schemeClr val="tx1"/>
-                      </a:solidFill>
-                    </a:rPr>
-                    <a:t>)</a:t>
-                  </a:r>
-                </a:p>
-              </p:txBody>
-            </p:sp>
-          </mc:Choice>
-          <mc:Fallback xmlns="">
-            <p:sp>
-              <p:nvSpPr>
-                <p:cNvPr id="10" name="Rectangle 9">
-                  <a:extLst>
-                    <a:ext uri="{FF2B5EF4-FFF2-40B4-BE49-F238E27FC236}">
-                      <a16:creationId xmlns:a16="http://schemas.microsoft.com/office/drawing/2014/main" id="{616EF81D-5568-A126-5A73-D60EAB1DA68A}"/>
-                    </a:ext>
-                  </a:extLst>
-                </p:cNvPr>
-                <p:cNvSpPr>
-                  <a:spLocks noRot="1" noChangeAspect="1" noMove="1" noResize="1" noEditPoints="1" noAdjustHandles="1" noChangeArrowheads="1" noChangeShapeType="1" noTextEdit="1"/>
-                </p:cNvSpPr>
-                <p:nvPr/>
-              </p:nvSpPr>
-              <p:spPr>
-                <a:xfrm rot="5400000">
-                  <a:off x="4427461" y="3998432"/>
-                  <a:ext cx="545403" cy="282294"/>
-                </a:xfrm>
-                <a:prstGeom prst="rect">
-                  <a:avLst/>
-                </a:prstGeom>
-                <a:blipFill>
-                  <a:blip r:embed="rId7"/>
-                  <a:stretch>
-                    <a:fillRect l="-36957" r="-17391" b="-4444"/>
-                  </a:stretch>
-                </a:blipFill>
-                <a:ln>
-                  <a:noFill/>
-                </a:ln>
-              </p:spPr>
-              <p:txBody>
-                <a:bodyPr/>
-                <a:lstStyle/>
-                <a:p>
-                  <a:r>
-                    <a:rPr lang="en-US">
-                      <a:noFill/>
-                    </a:rPr>
-                    <a:t> </a:t>
-                  </a:r>
-                </a:p>
-              </p:txBody>
-            </p:sp>
-          </mc:Fallback>
-        </mc:AlternateContent>
-        <mc:AlternateContent xmlns:mc="http://schemas.openxmlformats.org/markup-compatibility/2006" xmlns:a14="http://schemas.microsoft.com/office/drawing/2010/main">
-          <mc:Choice Requires="a14">
-            <p:sp>
-              <p:nvSpPr>
-                <p:cNvPr id="11" name="Rectangle 10">
-                  <a:extLst>
-                    <a:ext uri="{FF2B5EF4-FFF2-40B4-BE49-F238E27FC236}">
-                      <a16:creationId xmlns:a16="http://schemas.microsoft.com/office/drawing/2014/main" id="{72F43CF3-38F9-0872-7495-339E87D1C5BC}"/>
-                    </a:ext>
-                  </a:extLst>
-                </p:cNvPr>
-                <p:cNvSpPr/>
-                <p:nvPr/>
-              </p:nvSpPr>
-              <p:spPr>
-                <a:xfrm>
-                  <a:off x="10547913" y="4148786"/>
-                  <a:ext cx="608033" cy="263495"/>
-                </a:xfrm>
-                <a:prstGeom prst="rect">
-                  <a:avLst/>
-                </a:prstGeom>
-                <a:solidFill>
-                  <a:schemeClr val="bg1"/>
-                </a:solidFill>
-                <a:ln>
-                  <a:noFill/>
-                </a:ln>
-              </p:spPr>
-              <p:style>
-                <a:lnRef idx="2">
-                  <a:schemeClr val="accent1">
-                    <a:shade val="15000"/>
-                  </a:schemeClr>
-                </a:lnRef>
-                <a:fillRef idx="1">
-                  <a:schemeClr val="accent1"/>
-                </a:fillRef>
-                <a:effectRef idx="0">
-                  <a:schemeClr val="accent1"/>
-                </a:effectRef>
-                <a:fontRef idx="minor">
-                  <a:schemeClr val="lt1"/>
-                </a:fontRef>
-              </p:style>
-              <p:txBody>
-                <a:bodyPr rtlCol="0" anchor="ctr"/>
-                <a:lstStyle/>
-                <a:p>
-                  <a:pPr algn="ctr"/>
-                  <a14:m>
-                    <m:oMath xmlns:m="http://schemas.openxmlformats.org/officeDocument/2006/math">
-                      <m:r>
-                        <a:rPr lang="en-US" b="1" i="1" smtClean="0">
-                          <a:solidFill>
-                            <a:schemeClr val="tx1"/>
-                          </a:solidFill>
-                          <a:latin typeface="Cambria Math" panose="02040503050406030204" pitchFamily="18" charset="0"/>
-                        </a:rPr>
-                        <m:t>𝝉</m:t>
-                      </m:r>
-                    </m:oMath>
-                  </a14:m>
-                  <a:r>
-                    <a:rPr lang="en-US" b="1" dirty="0">
-                      <a:solidFill>
-                        <a:schemeClr val="tx1"/>
-                      </a:solidFill>
-                    </a:rPr>
-                    <a:t> (</a:t>
-                  </a:r>
-                  <a:r>
-                    <a:rPr lang="en-US" b="1" baseline="30000" dirty="0">
-                      <a:solidFill>
-                        <a:schemeClr val="tx1"/>
-                      </a:solidFill>
-                    </a:rPr>
-                    <a:t>o</a:t>
-                  </a:r>
-                  <a:r>
-                    <a:rPr lang="en-US" b="1" dirty="0">
-                      <a:solidFill>
-                        <a:schemeClr val="tx1"/>
-                      </a:solidFill>
-                    </a:rPr>
-                    <a:t>)</a:t>
-                  </a:r>
-                </a:p>
-              </p:txBody>
-            </p:sp>
-          </mc:Choice>
-          <mc:Fallback xmlns="">
-            <p:sp>
-              <p:nvSpPr>
-                <p:cNvPr id="11" name="Rectangle 10">
-                  <a:extLst>
-                    <a:ext uri="{FF2B5EF4-FFF2-40B4-BE49-F238E27FC236}">
-                      <a16:creationId xmlns:a16="http://schemas.microsoft.com/office/drawing/2014/main" id="{72F43CF3-38F9-0872-7495-339E87D1C5BC}"/>
-                    </a:ext>
-                  </a:extLst>
-                </p:cNvPr>
-                <p:cNvSpPr>
-                  <a:spLocks noRot="1" noChangeAspect="1" noMove="1" noResize="1" noEditPoints="1" noAdjustHandles="1" noChangeArrowheads="1" noChangeShapeType="1" noTextEdit="1"/>
-                </p:cNvSpPr>
-                <p:nvPr/>
-              </p:nvSpPr>
-              <p:spPr>
-                <a:xfrm>
-                  <a:off x="10547913" y="4148786"/>
-                  <a:ext cx="608033" cy="263495"/>
-                </a:xfrm>
-                <a:prstGeom prst="rect">
-                  <a:avLst/>
-                </a:prstGeom>
-                <a:blipFill>
-                  <a:blip r:embed="rId8"/>
-                  <a:stretch>
-                    <a:fillRect t="-30233" r="-5000" b="-58140"/>
-                  </a:stretch>
-                </a:blipFill>
-                <a:ln>
-                  <a:noFill/>
-                </a:ln>
-              </p:spPr>
-              <p:txBody>
-                <a:bodyPr/>
-                <a:lstStyle/>
-                <a:p>
-                  <a:r>
-                    <a:rPr lang="en-US">
-                      <a:noFill/>
-                    </a:rPr>
-                    <a:t> </a:t>
-                  </a:r>
-                </a:p>
-              </p:txBody>
-            </p:sp>
-          </mc:Fallback>
-        </mc:AlternateContent>
-      </p:grpSp>
-    </p:spTree>
-    <p:extLst>
-      <p:ext uri="{BB962C8B-B14F-4D97-AF65-F5344CB8AC3E}">
-        <p14:creationId xmlns:p14="http://schemas.microsoft.com/office/powerpoint/2010/main" val="681791012"/>
-      </p:ext>
-    </p:extLst>
-  </p:cSld>
-  <p:clrMapOvr>
-    <a:masterClrMapping/>
-  </p:clrMapOvr>
-</p:sld>
-</file>
-
-<file path=ppt/slides/slide9.xml><?xml version="1.0" encoding="utf-8"?>
-<p:sld xmlns:a="http://schemas.openxmlformats.org/drawingml/2006/main" xmlns:r="http://schemas.openxmlformats.org/officeDocument/2006/relationships" xmlns:p="http://schemas.openxmlformats.org/presentationml/2006/main">
-  <p:cSld>
-    <p:spTree>
-      <p:nvGrpSpPr>
-        <p:cNvPr id="1" name="">
-          <a:extLst>
-            <a:ext uri="{FF2B5EF4-FFF2-40B4-BE49-F238E27FC236}">
-              <a16:creationId xmlns:a16="http://schemas.microsoft.com/office/drawing/2014/main" id="{1D1D7D43-37A3-7355-7396-F0F7874CCB6A}"/>
-            </a:ext>
-          </a:extLst>
-        </p:cNvPr>
-        <p:cNvGrpSpPr/>
-        <p:nvPr/>
-      </p:nvGrpSpPr>
-      <p:grpSpPr>
-        <a:xfrm>
-          <a:off x="0" y="0"/>
-          <a:ext cx="0" cy="0"/>
-          <a:chOff x="0" y="0"/>
-          <a:chExt cx="0" cy="0"/>
-        </a:xfrm>
-      </p:grpSpPr>
-      <p:grpSp>
-        <p:nvGrpSpPr>
-          <p:cNvPr id="2" name="Group 1">
-            <a:extLst>
-              <a:ext uri="{FF2B5EF4-FFF2-40B4-BE49-F238E27FC236}">
-                <a16:creationId xmlns:a16="http://schemas.microsoft.com/office/drawing/2014/main" id="{FFAFD816-5D18-9CCE-E83F-66168716CC26}"/>
-              </a:ext>
-            </a:extLst>
-          </p:cNvPr>
-          <p:cNvGrpSpPr/>
-          <p:nvPr/>
-        </p:nvGrpSpPr>
-        <p:grpSpPr>
-          <a:xfrm>
-            <a:off x="1988559" y="1232313"/>
-            <a:ext cx="4162740" cy="3692831"/>
-            <a:chOff x="1988559" y="1232313"/>
-            <a:chExt cx="4162740" cy="3692831"/>
-          </a:xfrm>
-        </p:grpSpPr>
-        <p:sp>
-          <p:nvSpPr>
-            <p:cNvPr id="5" name="Oval 4">
-              <a:extLst>
-                <a:ext uri="{FF2B5EF4-FFF2-40B4-BE49-F238E27FC236}">
-                  <a16:creationId xmlns:a16="http://schemas.microsoft.com/office/drawing/2014/main" id="{F90E14E4-39AA-CDE4-3A1D-88923DA8EBD8}"/>
-                </a:ext>
-              </a:extLst>
-            </p:cNvPr>
-            <p:cNvSpPr/>
-            <p:nvPr/>
-          </p:nvSpPr>
-          <p:spPr>
-            <a:xfrm>
-              <a:off x="5277153" y="1232313"/>
-              <a:ext cx="874146" cy="930217"/>
-            </a:xfrm>
-            <a:prstGeom prst="ellipse">
-              <a:avLst/>
-            </a:prstGeom>
-            <a:noFill/>
-          </p:spPr>
-          <p:style>
-            <a:lnRef idx="2">
-              <a:schemeClr val="accent1">
-                <a:shade val="15000"/>
-              </a:schemeClr>
-            </a:lnRef>
-            <a:fillRef idx="1">
-              <a:schemeClr val="accent1"/>
-            </a:fillRef>
-            <a:effectRef idx="0">
-              <a:schemeClr val="accent1"/>
-            </a:effectRef>
-            <a:fontRef idx="minor">
-              <a:schemeClr val="lt1"/>
-            </a:fontRef>
-          </p:style>
-          <p:txBody>
-            <a:bodyPr rtlCol="0" anchor="ctr"/>
-            <a:lstStyle/>
-            <a:p>
-              <a:pPr algn="ctr"/>
-              <a:r>
-                <a:rPr lang="en-US" sz="3200" dirty="0">
-                  <a:solidFill>
-                    <a:schemeClr val="tx1"/>
-                  </a:solidFill>
-                  <a:latin typeface="Tahoma" panose="020B0604030504040204" pitchFamily="34" charset="0"/>
-                  <a:ea typeface="Tahoma" panose="020B0604030504040204" pitchFamily="34" charset="0"/>
-                  <a:cs typeface="Tahoma" panose="020B0604030504040204" pitchFamily="34" charset="0"/>
-                </a:rPr>
-                <a:t>H</a:t>
-              </a:r>
-            </a:p>
-          </p:txBody>
-        </p:sp>
-        <p:sp>
-          <p:nvSpPr>
-            <p:cNvPr id="6" name="Oval 5">
-              <a:extLst>
-                <a:ext uri="{FF2B5EF4-FFF2-40B4-BE49-F238E27FC236}">
-                  <a16:creationId xmlns:a16="http://schemas.microsoft.com/office/drawing/2014/main" id="{819463EE-F7C6-83F9-9069-F2D758BC7C18}"/>
-                </a:ext>
-              </a:extLst>
-            </p:cNvPr>
-            <p:cNvSpPr/>
-            <p:nvPr/>
-          </p:nvSpPr>
-          <p:spPr>
-            <a:xfrm>
-              <a:off x="3807104" y="2033674"/>
-              <a:ext cx="874146" cy="930217"/>
-            </a:xfrm>
-            <a:prstGeom prst="ellipse">
-              <a:avLst/>
-            </a:prstGeom>
-            <a:solidFill>
-              <a:srgbClr val="E06E6E"/>
-            </a:solidFill>
-          </p:spPr>
-          <p:style>
-            <a:lnRef idx="2">
-              <a:schemeClr val="accent1">
-                <a:shade val="15000"/>
-              </a:schemeClr>
-            </a:lnRef>
-            <a:fillRef idx="1">
-              <a:schemeClr val="accent1"/>
-            </a:fillRef>
-            <a:effectRef idx="0">
-              <a:schemeClr val="accent1"/>
-            </a:effectRef>
-            <a:fontRef idx="minor">
-              <a:schemeClr val="lt1"/>
-            </a:fontRef>
-          </p:style>
-          <p:txBody>
-            <a:bodyPr rtlCol="0" anchor="ctr"/>
-            <a:lstStyle/>
-            <a:p>
-              <a:pPr algn="ctr"/>
-              <a:r>
-                <a:rPr lang="en-US" sz="3200" dirty="0">
-                  <a:solidFill>
-                    <a:schemeClr val="tx1"/>
-                  </a:solidFill>
-                  <a:latin typeface="Tahoma" panose="020B0604030504040204" pitchFamily="34" charset="0"/>
-                  <a:ea typeface="Tahoma" panose="020B0604030504040204" pitchFamily="34" charset="0"/>
-                  <a:cs typeface="Tahoma" panose="020B0604030504040204" pitchFamily="34" charset="0"/>
-                </a:rPr>
-                <a:t>O</a:t>
-              </a:r>
-            </a:p>
-          </p:txBody>
-        </p:sp>
-        <p:sp>
-          <p:nvSpPr>
-            <p:cNvPr id="7" name="Oval 6">
-              <a:extLst>
-                <a:ext uri="{FF2B5EF4-FFF2-40B4-BE49-F238E27FC236}">
-                  <a16:creationId xmlns:a16="http://schemas.microsoft.com/office/drawing/2014/main" id="{7D54FC79-6E7B-17EA-3A53-06C9877EA877}"/>
-                </a:ext>
-              </a:extLst>
-            </p:cNvPr>
-            <p:cNvSpPr/>
-            <p:nvPr/>
-          </p:nvSpPr>
-          <p:spPr>
-            <a:xfrm>
-              <a:off x="3807104" y="3702725"/>
-              <a:ext cx="874146" cy="930217"/>
-            </a:xfrm>
-            <a:prstGeom prst="ellipse">
-              <a:avLst/>
-            </a:prstGeom>
-            <a:solidFill>
-              <a:schemeClr val="accent5">
-                <a:lumMod val="40000"/>
-                <a:lumOff val="60000"/>
-              </a:schemeClr>
-            </a:solidFill>
-          </p:spPr>
-          <p:style>
-            <a:lnRef idx="2">
-              <a:schemeClr val="accent1">
-                <a:shade val="15000"/>
-              </a:schemeClr>
-            </a:lnRef>
-            <a:fillRef idx="1">
-              <a:schemeClr val="accent1"/>
-            </a:fillRef>
-            <a:effectRef idx="0">
-              <a:schemeClr val="accent1"/>
-            </a:effectRef>
-            <a:fontRef idx="minor">
-              <a:schemeClr val="lt1"/>
-            </a:fontRef>
-          </p:style>
-          <p:txBody>
-            <a:bodyPr rtlCol="0" anchor="ctr"/>
-            <a:lstStyle/>
-            <a:p>
-              <a:pPr algn="ctr"/>
-              <a:r>
-                <a:rPr lang="en-US" sz="3200" dirty="0">
-                  <a:solidFill>
-                    <a:schemeClr val="tx1"/>
-                  </a:solidFill>
-                  <a:latin typeface="Tahoma" panose="020B0604030504040204" pitchFamily="34" charset="0"/>
-                  <a:ea typeface="Tahoma" panose="020B0604030504040204" pitchFamily="34" charset="0"/>
-                  <a:cs typeface="Tahoma" panose="020B0604030504040204" pitchFamily="34" charset="0"/>
-                </a:rPr>
-                <a:t>P</a:t>
-              </a:r>
-            </a:p>
-          </p:txBody>
-        </p:sp>
-        <p:sp>
-          <p:nvSpPr>
-            <p:cNvPr id="8" name="Oval 7">
-              <a:extLst>
-                <a:ext uri="{FF2B5EF4-FFF2-40B4-BE49-F238E27FC236}">
-                  <a16:creationId xmlns:a16="http://schemas.microsoft.com/office/drawing/2014/main" id="{B09C3061-9CDF-92B2-AB0A-22AECB1C86AB}"/>
-                </a:ext>
-              </a:extLst>
-            </p:cNvPr>
-            <p:cNvSpPr/>
-            <p:nvPr/>
-          </p:nvSpPr>
-          <p:spPr>
-            <a:xfrm>
-              <a:off x="1988559" y="3994927"/>
-              <a:ext cx="874146" cy="930217"/>
-            </a:xfrm>
-            <a:prstGeom prst="ellipse">
-              <a:avLst/>
-            </a:prstGeom>
-            <a:solidFill>
-              <a:srgbClr val="E06E6E"/>
-            </a:solidFill>
-          </p:spPr>
-          <p:style>
-            <a:lnRef idx="2">
-              <a:schemeClr val="accent1">
-                <a:shade val="15000"/>
-              </a:schemeClr>
-            </a:lnRef>
-            <a:fillRef idx="1">
-              <a:schemeClr val="accent1"/>
-            </a:fillRef>
-            <a:effectRef idx="0">
-              <a:schemeClr val="accent1"/>
-            </a:effectRef>
-            <a:fontRef idx="minor">
-              <a:schemeClr val="lt1"/>
-            </a:fontRef>
-          </p:style>
-          <p:txBody>
-            <a:bodyPr rtlCol="0" anchor="ctr"/>
-            <a:lstStyle/>
-            <a:p>
-              <a:pPr algn="ctr"/>
-              <a:r>
-                <a:rPr lang="en-US" sz="3200" dirty="0">
-                  <a:solidFill>
-                    <a:schemeClr val="tx1"/>
-                  </a:solidFill>
-                  <a:latin typeface="Tahoma" panose="020B0604030504040204" pitchFamily="34" charset="0"/>
-                  <a:ea typeface="Tahoma" panose="020B0604030504040204" pitchFamily="34" charset="0"/>
-                  <a:cs typeface="Tahoma" panose="020B0604030504040204" pitchFamily="34" charset="0"/>
-                </a:rPr>
-                <a:t>O</a:t>
-              </a:r>
-            </a:p>
-          </p:txBody>
-        </p:sp>
-        <p:cxnSp>
-          <p:nvCxnSpPr>
-            <p:cNvPr id="9" name="Straight Connector 8">
-              <a:extLst>
-                <a:ext uri="{FF2B5EF4-FFF2-40B4-BE49-F238E27FC236}">
-                  <a16:creationId xmlns:a16="http://schemas.microsoft.com/office/drawing/2014/main" id="{5C5B1FEB-60E6-9CCD-C93F-C89636590380}"/>
-                </a:ext>
-              </a:extLst>
-            </p:cNvPr>
-            <p:cNvCxnSpPr>
-              <a:cxnSpLocks/>
-            </p:cNvCxnSpPr>
-            <p:nvPr/>
-          </p:nvCxnSpPr>
-          <p:spPr>
-            <a:xfrm flipH="1">
-              <a:off x="4605685" y="1903228"/>
-              <a:ext cx="699962" cy="335887"/>
-            </a:xfrm>
-            <a:prstGeom prst="line">
-              <a:avLst/>
-            </a:prstGeom>
-          </p:spPr>
-          <p:style>
-            <a:lnRef idx="2">
-              <a:schemeClr val="dk1"/>
-            </a:lnRef>
-            <a:fillRef idx="0">
-              <a:schemeClr val="dk1"/>
-            </a:fillRef>
-            <a:effectRef idx="1">
-              <a:schemeClr val="dk1"/>
-            </a:effectRef>
-            <a:fontRef idx="minor">
-              <a:schemeClr val="tx1"/>
-            </a:fontRef>
-          </p:style>
-        </p:cxnSp>
-        <p:cxnSp>
-          <p:nvCxnSpPr>
-            <p:cNvPr id="10" name="Straight Connector 9">
-              <a:extLst>
-                <a:ext uri="{FF2B5EF4-FFF2-40B4-BE49-F238E27FC236}">
-                  <a16:creationId xmlns:a16="http://schemas.microsoft.com/office/drawing/2014/main" id="{1B37178B-0E91-4A67-812E-AB062E16375A}"/>
-                </a:ext>
-              </a:extLst>
-            </p:cNvPr>
-            <p:cNvCxnSpPr>
-              <a:cxnSpLocks/>
-            </p:cNvCxnSpPr>
-            <p:nvPr/>
-          </p:nvCxnSpPr>
-          <p:spPr>
-            <a:xfrm rot="10800000">
-              <a:off x="4244177" y="2963891"/>
-              <a:ext cx="0" cy="738834"/>
-            </a:xfrm>
-            <a:prstGeom prst="line">
-              <a:avLst/>
-            </a:prstGeom>
-            <a:ln w="31750" cap="flat" cmpd="sng" algn="ctr">
-              <a:solidFill>
-                <a:schemeClr val="dk1"/>
-              </a:solidFill>
-              <a:prstDash val="solid"/>
-              <a:round/>
-              <a:headEnd type="none" w="med" len="med"/>
-              <a:tailEnd type="arrow" w="med" len="med"/>
-            </a:ln>
-          </p:spPr>
-          <p:style>
-            <a:lnRef idx="0">
-              <a:scrgbClr r="0" g="0" b="0"/>
-            </a:lnRef>
-            <a:fillRef idx="0">
-              <a:scrgbClr r="0" g="0" b="0"/>
-            </a:fillRef>
-            <a:effectRef idx="0">
-              <a:scrgbClr r="0" g="0" b="0"/>
-            </a:effectRef>
-            <a:fontRef idx="minor">
-              <a:schemeClr val="tx1"/>
-            </a:fontRef>
-          </p:style>
-        </p:cxnSp>
-        <p:cxnSp>
-          <p:nvCxnSpPr>
-            <p:cNvPr id="11" name="Straight Connector 10">
-              <a:extLst>
-                <a:ext uri="{FF2B5EF4-FFF2-40B4-BE49-F238E27FC236}">
-                  <a16:creationId xmlns:a16="http://schemas.microsoft.com/office/drawing/2014/main" id="{CA65F30A-4346-1E5B-6A51-17E5D3452F97}"/>
-                </a:ext>
-              </a:extLst>
-            </p:cNvPr>
-            <p:cNvCxnSpPr>
-              <a:cxnSpLocks/>
-            </p:cNvCxnSpPr>
-            <p:nvPr/>
-          </p:nvCxnSpPr>
-          <p:spPr>
-            <a:xfrm rot="10800000" flipV="1">
-              <a:off x="2862705" y="4231753"/>
-              <a:ext cx="944399" cy="148856"/>
-            </a:xfrm>
-            <a:prstGeom prst="line">
-              <a:avLst/>
-            </a:prstGeom>
-            <a:ln w="31750" cap="flat" cmpd="sng" algn="ctr">
-              <a:solidFill>
-                <a:schemeClr val="dk1"/>
-              </a:solidFill>
-              <a:prstDash val="solid"/>
-              <a:round/>
-              <a:headEnd type="none" w="med" len="med"/>
-              <a:tailEnd type="arrow" w="med" len="med"/>
-            </a:ln>
-          </p:spPr>
-          <p:style>
-            <a:lnRef idx="0">
-              <a:scrgbClr r="0" g="0" b="0"/>
-            </a:lnRef>
-            <a:fillRef idx="0">
-              <a:scrgbClr r="0" g="0" b="0"/>
-            </a:fillRef>
-            <a:effectRef idx="0">
-              <a:scrgbClr r="0" g="0" b="0"/>
-            </a:effectRef>
-            <a:fontRef idx="minor">
-              <a:schemeClr val="tx1"/>
-            </a:fontRef>
-          </p:style>
-        </p:cxnSp>
-        <mc:AlternateContent xmlns:mc="http://schemas.openxmlformats.org/markup-compatibility/2006" xmlns:a14="http://schemas.microsoft.com/office/drawing/2010/main">
-          <mc:Choice Requires="a14">
-            <p:sp>
-              <p:nvSpPr>
-                <p:cNvPr id="50" name="TextBox 49">
-                  <a:extLst>
-                    <a:ext uri="{FF2B5EF4-FFF2-40B4-BE49-F238E27FC236}">
-                      <a16:creationId xmlns:a16="http://schemas.microsoft.com/office/drawing/2014/main" id="{3032E201-B7A7-BC28-677D-E7FBC28F5CD0}"/>
-                    </a:ext>
-                  </a:extLst>
-                </p:cNvPr>
-                <p:cNvSpPr txBox="1"/>
-                <p:nvPr/>
-              </p:nvSpPr>
-              <p:spPr>
-                <a:xfrm>
-                  <a:off x="4244177" y="3115340"/>
-                  <a:ext cx="559705" cy="461665"/>
-                </a:xfrm>
-                <a:prstGeom prst="rect">
-                  <a:avLst/>
-                </a:prstGeom>
-                <a:noFill/>
-              </p:spPr>
-              <p:txBody>
-                <a:bodyPr wrap="none" rtlCol="0">
-                  <a:spAutoFit/>
-                </a:bodyPr>
-                <a:lstStyle/>
-                <a:p>
-                  <a:pPr/>
-                  <a14:m>
-                    <m:oMathPara xmlns:m="http://schemas.openxmlformats.org/officeDocument/2006/math">
-                      <m:oMathParaPr>
-                        <m:jc m:val="centerGroup"/>
-                      </m:oMathParaPr>
-                      <m:oMath xmlns:m="http://schemas.openxmlformats.org/officeDocument/2006/math">
-                        <m:sSub>
-                          <m:sSubPr>
-                            <m:ctrlPr>
-                              <a:rPr lang="en-US" sz="2400" b="1" i="1" smtClean="0">
-                                <a:latin typeface="Cambria Math" panose="02040503050406030204" pitchFamily="18" charset="0"/>
-                              </a:rPr>
-                            </m:ctrlPr>
-                          </m:sSubPr>
-                          <m:e>
-                            <m:r>
-                              <a:rPr lang="en-US" sz="2400" b="1" i="1" smtClean="0">
-                                <a:latin typeface="Cambria Math" panose="02040503050406030204" pitchFamily="18" charset="0"/>
-                              </a:rPr>
-                              <m:t>𝒓</m:t>
-                            </m:r>
-                          </m:e>
-                          <m:sub>
-                            <m:r>
-                              <a:rPr lang="en-US" sz="2400" b="1" i="1" smtClean="0">
-                                <a:latin typeface="Cambria Math" panose="02040503050406030204" pitchFamily="18" charset="0"/>
-                              </a:rPr>
-                              <m:t>𝟏</m:t>
-                            </m:r>
-                          </m:sub>
-                        </m:sSub>
-                      </m:oMath>
-                    </m:oMathPara>
-                  </a14:m>
-                  <a:endParaRPr lang="en-US" sz="2400" b="1" dirty="0"/>
-                </a:p>
-              </p:txBody>
-            </p:sp>
-          </mc:Choice>
-          <mc:Fallback xmlns="">
-            <p:sp>
-              <p:nvSpPr>
-                <p:cNvPr id="50" name="TextBox 49">
-                  <a:extLst>
-                    <a:ext uri="{FF2B5EF4-FFF2-40B4-BE49-F238E27FC236}">
-                      <a16:creationId xmlns:a16="http://schemas.microsoft.com/office/drawing/2014/main" id="{3032E201-B7A7-BC28-677D-E7FBC28F5CD0}"/>
-                    </a:ext>
-                  </a:extLst>
-                </p:cNvPr>
-                <p:cNvSpPr txBox="1">
-                  <a:spLocks noRot="1" noChangeAspect="1" noMove="1" noResize="1" noEditPoints="1" noAdjustHandles="1" noChangeArrowheads="1" noChangeShapeType="1" noTextEdit="1"/>
-                </p:cNvSpPr>
-                <p:nvPr/>
-              </p:nvSpPr>
-              <p:spPr>
-                <a:xfrm>
-                  <a:off x="4244177" y="3115340"/>
-                  <a:ext cx="559705" cy="461665"/>
-                </a:xfrm>
-                <a:prstGeom prst="rect">
-                  <a:avLst/>
-                </a:prstGeom>
-                <a:blipFill>
-                  <a:blip r:embed="rId2"/>
-                  <a:stretch>
-                    <a:fillRect b="-1316"/>
-                  </a:stretch>
-                </a:blipFill>
-              </p:spPr>
-              <p:txBody>
-                <a:bodyPr/>
-                <a:lstStyle/>
-                <a:p>
-                  <a:r>
-                    <a:rPr lang="en-US">
-                      <a:noFill/>
-                    </a:rPr>
-                    <a:t> </a:t>
-                  </a:r>
-                </a:p>
-              </p:txBody>
-            </p:sp>
-          </mc:Fallback>
-        </mc:AlternateContent>
-        <mc:AlternateContent xmlns:mc="http://schemas.openxmlformats.org/markup-compatibility/2006" xmlns:a14="http://schemas.microsoft.com/office/drawing/2010/main">
-          <mc:Choice Requires="a14">
-            <p:sp>
-              <p:nvSpPr>
-                <p:cNvPr id="51" name="TextBox 50">
-                  <a:extLst>
-                    <a:ext uri="{FF2B5EF4-FFF2-40B4-BE49-F238E27FC236}">
-                      <a16:creationId xmlns:a16="http://schemas.microsoft.com/office/drawing/2014/main" id="{CE2DD1B8-13B0-8B4C-F230-AE9329AF7797}"/>
-                    </a:ext>
-                  </a:extLst>
-                </p:cNvPr>
-                <p:cNvSpPr txBox="1"/>
-                <p:nvPr/>
-              </p:nvSpPr>
-              <p:spPr>
-                <a:xfrm>
-                  <a:off x="3053449" y="3785714"/>
-                  <a:ext cx="559705" cy="461665"/>
-                </a:xfrm>
-                <a:prstGeom prst="rect">
-                  <a:avLst/>
-                </a:prstGeom>
-                <a:noFill/>
-              </p:spPr>
-              <p:txBody>
-                <a:bodyPr wrap="none" rtlCol="0">
-                  <a:spAutoFit/>
-                </a:bodyPr>
-                <a:lstStyle/>
-                <a:p>
-                  <a:pPr/>
-                  <a14:m>
-                    <m:oMathPara xmlns:m="http://schemas.openxmlformats.org/officeDocument/2006/math">
-                      <m:oMathParaPr>
-                        <m:jc m:val="centerGroup"/>
-                      </m:oMathParaPr>
-                      <m:oMath xmlns:m="http://schemas.openxmlformats.org/officeDocument/2006/math">
-                        <m:sSub>
-                          <m:sSubPr>
-                            <m:ctrlPr>
-                              <a:rPr lang="en-US" sz="2400" b="1" i="1" smtClean="0">
-                                <a:latin typeface="Cambria Math" panose="02040503050406030204" pitchFamily="18" charset="0"/>
-                              </a:rPr>
-                            </m:ctrlPr>
-                          </m:sSubPr>
-                          <m:e>
-                            <m:r>
-                              <a:rPr lang="en-US" sz="2400" b="1" i="1" smtClean="0">
-                                <a:latin typeface="Cambria Math" panose="02040503050406030204" pitchFamily="18" charset="0"/>
-                              </a:rPr>
-                              <m:t>𝒓</m:t>
-                            </m:r>
-                          </m:e>
-                          <m:sub>
-                            <m:r>
-                              <a:rPr lang="en-US" sz="2400" b="1" i="1" smtClean="0">
-                                <a:latin typeface="Cambria Math" panose="02040503050406030204" pitchFamily="18" charset="0"/>
-                              </a:rPr>
-                              <m:t>𝟐</m:t>
-                            </m:r>
-                          </m:sub>
-                        </m:sSub>
-                      </m:oMath>
-                    </m:oMathPara>
-                  </a14:m>
-                  <a:endParaRPr lang="en-US" sz="2400" b="1" dirty="0"/>
-                </a:p>
-              </p:txBody>
-            </p:sp>
-          </mc:Choice>
-          <mc:Fallback xmlns="">
-            <p:sp>
-              <p:nvSpPr>
-                <p:cNvPr id="51" name="TextBox 50">
-                  <a:extLst>
-                    <a:ext uri="{FF2B5EF4-FFF2-40B4-BE49-F238E27FC236}">
-                      <a16:creationId xmlns:a16="http://schemas.microsoft.com/office/drawing/2014/main" id="{CE2DD1B8-13B0-8B4C-F230-AE9329AF7797}"/>
-                    </a:ext>
-                  </a:extLst>
-                </p:cNvPr>
-                <p:cNvSpPr txBox="1">
-                  <a:spLocks noRot="1" noChangeAspect="1" noMove="1" noResize="1" noEditPoints="1" noAdjustHandles="1" noChangeArrowheads="1" noChangeShapeType="1" noTextEdit="1"/>
-                </p:cNvSpPr>
-                <p:nvPr/>
-              </p:nvSpPr>
-              <p:spPr>
-                <a:xfrm>
-                  <a:off x="3053449" y="3785714"/>
-                  <a:ext cx="559705" cy="461665"/>
-                </a:xfrm>
-                <a:prstGeom prst="rect">
-                  <a:avLst/>
-                </a:prstGeom>
-                <a:blipFill>
-                  <a:blip r:embed="rId3"/>
-                  <a:stretch>
-                    <a:fillRect b="-1316"/>
-                  </a:stretch>
-                </a:blipFill>
-              </p:spPr>
-              <p:txBody>
-                <a:bodyPr/>
-                <a:lstStyle/>
-                <a:p>
-                  <a:r>
-                    <a:rPr lang="en-US">
-                      <a:noFill/>
-                    </a:rPr>
-                    <a:t> </a:t>
-                  </a:r>
-                </a:p>
-              </p:txBody>
-            </p:sp>
-          </mc:Fallback>
-        </mc:AlternateContent>
-      </p:grpSp>
-    </p:spTree>
-    <p:extLst>
-      <p:ext uri="{BB962C8B-B14F-4D97-AF65-F5344CB8AC3E}">
-        <p14:creationId xmlns:p14="http://schemas.microsoft.com/office/powerpoint/2010/main" val="2440703012"/>
-      </p:ext>
-    </p:extLst>
-  </p:cSld>
-  <p:clrMapOvr>
-    <a:masterClrMapping/>
-  </p:clrMapOvr>
-</p:sld>
-</file>
-
 <file path=ppt/theme/theme1.xml><?xml version="1.0" encoding="utf-8"?>
 <a:theme xmlns:a="http://schemas.openxmlformats.org/drawingml/2006/main" name="Office Theme">
   <a:themeElements>

--- a/manuscript_figures.pptx
+++ b/manuscript_figures.pptx
@@ -273,7 +273,7 @@
           <a:p>
             <a:fld id="{FF24CA68-1E24-4B4A-B799-9C3DECDBF403}" type="datetimeFigureOut">
               <a:rPr lang="en-US" smtClean="0"/>
-              <a:t>5/29/2026</a:t>
+              <a:t>6/3/2026</a:t>
             </a:fld>
             <a:endParaRPr lang="en-US"/>
           </a:p>
@@ -471,7 +471,7 @@
           <a:p>
             <a:fld id="{FF24CA68-1E24-4B4A-B799-9C3DECDBF403}" type="datetimeFigureOut">
               <a:rPr lang="en-US" smtClean="0"/>
-              <a:t>5/29/2026</a:t>
+              <a:t>6/3/2026</a:t>
             </a:fld>
             <a:endParaRPr lang="en-US"/>
           </a:p>
@@ -679,7 +679,7 @@
           <a:p>
             <a:fld id="{FF24CA68-1E24-4B4A-B799-9C3DECDBF403}" type="datetimeFigureOut">
               <a:rPr lang="en-US" smtClean="0"/>
-              <a:t>5/29/2026</a:t>
+              <a:t>6/3/2026</a:t>
             </a:fld>
             <a:endParaRPr lang="en-US"/>
           </a:p>
@@ -877,7 +877,7 @@
           <a:p>
             <a:fld id="{FF24CA68-1E24-4B4A-B799-9C3DECDBF403}" type="datetimeFigureOut">
               <a:rPr lang="en-US" smtClean="0"/>
-              <a:t>5/29/2026</a:t>
+              <a:t>6/3/2026</a:t>
             </a:fld>
             <a:endParaRPr lang="en-US"/>
           </a:p>
@@ -1152,7 +1152,7 @@
           <a:p>
             <a:fld id="{FF24CA68-1E24-4B4A-B799-9C3DECDBF403}" type="datetimeFigureOut">
               <a:rPr lang="en-US" smtClean="0"/>
-              <a:t>5/29/2026</a:t>
+              <a:t>6/3/2026</a:t>
             </a:fld>
             <a:endParaRPr lang="en-US"/>
           </a:p>
@@ -1417,7 +1417,7 @@
           <a:p>
             <a:fld id="{FF24CA68-1E24-4B4A-B799-9C3DECDBF403}" type="datetimeFigureOut">
               <a:rPr lang="en-US" smtClean="0"/>
-              <a:t>5/29/2026</a:t>
+              <a:t>6/3/2026</a:t>
             </a:fld>
             <a:endParaRPr lang="en-US"/>
           </a:p>
@@ -1829,7 +1829,7 @@
           <a:p>
             <a:fld id="{FF24CA68-1E24-4B4A-B799-9C3DECDBF403}" type="datetimeFigureOut">
               <a:rPr lang="en-US" smtClean="0"/>
-              <a:t>5/29/2026</a:t>
+              <a:t>6/3/2026</a:t>
             </a:fld>
             <a:endParaRPr lang="en-US"/>
           </a:p>
@@ -1970,7 +1970,7 @@
           <a:p>
             <a:fld id="{FF24CA68-1E24-4B4A-B799-9C3DECDBF403}" type="datetimeFigureOut">
               <a:rPr lang="en-US" smtClean="0"/>
-              <a:t>5/29/2026</a:t>
+              <a:t>6/3/2026</a:t>
             </a:fld>
             <a:endParaRPr lang="en-US"/>
           </a:p>
@@ -2083,7 +2083,7 @@
           <a:p>
             <a:fld id="{FF24CA68-1E24-4B4A-B799-9C3DECDBF403}" type="datetimeFigureOut">
               <a:rPr lang="en-US" smtClean="0"/>
-              <a:t>5/29/2026</a:t>
+              <a:t>6/3/2026</a:t>
             </a:fld>
             <a:endParaRPr lang="en-US"/>
           </a:p>
@@ -2394,7 +2394,7 @@
           <a:p>
             <a:fld id="{FF24CA68-1E24-4B4A-B799-9C3DECDBF403}" type="datetimeFigureOut">
               <a:rPr lang="en-US" smtClean="0"/>
-              <a:t>5/29/2026</a:t>
+              <a:t>6/3/2026</a:t>
             </a:fld>
             <a:endParaRPr lang="en-US"/>
           </a:p>
@@ -2682,7 +2682,7 @@
           <a:p>
             <a:fld id="{FF24CA68-1E24-4B4A-B799-9C3DECDBF403}" type="datetimeFigureOut">
               <a:rPr lang="en-US" smtClean="0"/>
-              <a:t>5/29/2026</a:t>
+              <a:t>6/3/2026</a:t>
             </a:fld>
             <a:endParaRPr lang="en-US"/>
           </a:p>
@@ -2923,7 +2923,7 @@
           <a:p>
             <a:fld id="{FF24CA68-1E24-4B4A-B799-9C3DECDBF403}" type="datetimeFigureOut">
               <a:rPr lang="en-US" smtClean="0"/>
-              <a:t>5/29/2026</a:t>
+              <a:t>6/3/2026</a:t>
             </a:fld>
             <a:endParaRPr lang="en-US"/>
           </a:p>
@@ -17107,7 +17107,7 @@
               </p:nvSpPr>
               <p:spPr>
                 <a:xfrm>
-                  <a:off x="2165479" y="379351"/>
+                  <a:off x="2241328" y="592155"/>
                   <a:ext cx="593722" cy="1384995"/>
                 </a:xfrm>
                 <a:prstGeom prst="rect">
@@ -17193,7 +17193,7 @@
               </p:nvSpPr>
               <p:spPr>
                 <a:xfrm>
-                  <a:off x="2165479" y="379351"/>
+                  <a:off x="2241328" y="592155"/>
                   <a:ext cx="593722" cy="1384995"/>
                 </a:xfrm>
                 <a:prstGeom prst="rect">
@@ -17221,8 +17221,8 @@
             </p:sp>
           </mc:Fallback>
         </mc:AlternateContent>
-        <mc:AlternateContent xmlns:mc="http://schemas.openxmlformats.org/markup-compatibility/2006">
-          <mc:Choice xmlns:a14="http://schemas.microsoft.com/office/drawing/2010/main" Requires="a14">
+        <mc:AlternateContent xmlns:mc="http://schemas.openxmlformats.org/markup-compatibility/2006" xmlns:a14="http://schemas.microsoft.com/office/drawing/2010/main">
+          <mc:Choice Requires="a14">
             <p:sp>
               <p:nvSpPr>
                 <p:cNvPr id="7" name="TextBox 6">
@@ -17295,7 +17295,7 @@
               </p:txBody>
             </p:sp>
           </mc:Choice>
-          <mc:Fallback>
+          <mc:Fallback xmlns="">
             <p:sp>
               <p:nvSpPr>
                 <p:cNvPr id="7" name="TextBox 6">
@@ -18039,8 +18039,8 @@
             </a:p>
           </p:txBody>
         </p:sp>
-        <mc:AlternateContent xmlns:mc="http://schemas.openxmlformats.org/markup-compatibility/2006">
-          <mc:Choice xmlns:a14="http://schemas.microsoft.com/office/drawing/2010/main" Requires="a14">
+        <mc:AlternateContent xmlns:mc="http://schemas.openxmlformats.org/markup-compatibility/2006" xmlns:a14="http://schemas.microsoft.com/office/drawing/2010/main">
+          <mc:Choice Requires="a14">
             <p:sp>
               <p:nvSpPr>
                 <p:cNvPr id="28" name="TextBox 27">
@@ -18102,7 +18102,7 @@
               </p:txBody>
             </p:sp>
           </mc:Choice>
-          <mc:Fallback>
+          <mc:Fallback xmlns="">
             <p:sp>
               <p:nvSpPr>
                 <p:cNvPr id="28" name="TextBox 27">
@@ -18147,8 +18147,8 @@
             </p:sp>
           </mc:Fallback>
         </mc:AlternateContent>
-        <mc:AlternateContent xmlns:mc="http://schemas.openxmlformats.org/markup-compatibility/2006">
-          <mc:Choice xmlns:a14="http://schemas.microsoft.com/office/drawing/2010/main" Requires="a14">
+        <mc:AlternateContent xmlns:mc="http://schemas.openxmlformats.org/markup-compatibility/2006" xmlns:a14="http://schemas.microsoft.com/office/drawing/2010/main">
+          <mc:Choice Requires="a14">
             <p:sp>
               <p:nvSpPr>
                 <p:cNvPr id="29" name="TextBox 28">
@@ -18210,7 +18210,7 @@
               </p:txBody>
             </p:sp>
           </mc:Choice>
-          <mc:Fallback>
+          <mc:Fallback xmlns="">
             <p:sp>
               <p:nvSpPr>
                 <p:cNvPr id="29" name="TextBox 28">
@@ -18255,8 +18255,8 @@
             </p:sp>
           </mc:Fallback>
         </mc:AlternateContent>
-        <mc:AlternateContent xmlns:mc="http://schemas.openxmlformats.org/markup-compatibility/2006">
-          <mc:Choice xmlns:a14="http://schemas.microsoft.com/office/drawing/2010/main" Requires="a14">
+        <mc:AlternateContent xmlns:mc="http://schemas.openxmlformats.org/markup-compatibility/2006" xmlns:a14="http://schemas.microsoft.com/office/drawing/2010/main">
+          <mc:Choice Requires="a14">
             <p:sp>
               <p:nvSpPr>
                 <p:cNvPr id="30" name="TextBox 29">
@@ -18318,7 +18318,7 @@
               </p:txBody>
             </p:sp>
           </mc:Choice>
-          <mc:Fallback>
+          <mc:Fallback xmlns="">
             <p:sp>
               <p:nvSpPr>
                 <p:cNvPr id="30" name="TextBox 29">
@@ -18468,8 +18468,8 @@
             </a:p>
           </p:txBody>
         </p:sp>
-        <mc:AlternateContent xmlns:mc="http://schemas.openxmlformats.org/markup-compatibility/2006">
-          <mc:Choice xmlns:a14="http://schemas.microsoft.com/office/drawing/2010/main" Requires="a14">
+        <mc:AlternateContent xmlns:mc="http://schemas.openxmlformats.org/markup-compatibility/2006" xmlns:a14="http://schemas.microsoft.com/office/drawing/2010/main">
+          <mc:Choice Requires="a14">
             <p:sp>
               <p:nvSpPr>
                 <p:cNvPr id="34" name="TextBox 33">
@@ -18542,7 +18542,7 @@
               </p:txBody>
             </p:sp>
           </mc:Choice>
-          <mc:Fallback>
+          <mc:Fallback xmlns="">
             <p:sp>
               <p:nvSpPr>
                 <p:cNvPr id="34" name="TextBox 33">
@@ -18587,8 +18587,8 @@
             </p:sp>
           </mc:Fallback>
         </mc:AlternateContent>
-        <mc:AlternateContent xmlns:mc="http://schemas.openxmlformats.org/markup-compatibility/2006">
-          <mc:Choice xmlns:a14="http://schemas.microsoft.com/office/drawing/2010/main" Requires="a14">
+        <mc:AlternateContent xmlns:mc="http://schemas.openxmlformats.org/markup-compatibility/2006" xmlns:a14="http://schemas.microsoft.com/office/drawing/2010/main">
+          <mc:Choice Requires="a14">
             <p:sp>
               <p:nvSpPr>
                 <p:cNvPr id="35" name="TextBox 34">
@@ -18675,7 +18675,7 @@
               </p:txBody>
             </p:sp>
           </mc:Choice>
-          <mc:Fallback>
+          <mc:Fallback xmlns="">
             <p:sp>
               <p:nvSpPr>
                 <p:cNvPr id="35" name="TextBox 34">
@@ -18919,8 +18919,8 @@
             </a:prstGeom>
           </p:spPr>
         </p:pic>
-        <mc:AlternateContent xmlns:mc="http://schemas.openxmlformats.org/markup-compatibility/2006">
-          <mc:Choice xmlns:a14="http://schemas.microsoft.com/office/drawing/2010/main" Requires="a14">
+        <mc:AlternateContent xmlns:mc="http://schemas.openxmlformats.org/markup-compatibility/2006" xmlns:a14="http://schemas.microsoft.com/office/drawing/2010/main">
+          <mc:Choice Requires="a14">
             <p:sp>
               <p:nvSpPr>
                 <p:cNvPr id="4" name="Rectangle 3">
@@ -18996,7 +18996,7 @@
               </p:txBody>
             </p:sp>
           </mc:Choice>
-          <mc:Fallback>
+          <mc:Fallback xmlns="">
             <p:sp>
               <p:nvSpPr>
                 <p:cNvPr id="4" name="Rectangle 3">
@@ -19044,8 +19044,8 @@
             </p:sp>
           </mc:Fallback>
         </mc:AlternateContent>
-        <mc:AlternateContent xmlns:mc="http://schemas.openxmlformats.org/markup-compatibility/2006">
-          <mc:Choice xmlns:a14="http://schemas.microsoft.com/office/drawing/2010/main" Requires="a14">
+        <mc:AlternateContent xmlns:mc="http://schemas.openxmlformats.org/markup-compatibility/2006" xmlns:a14="http://schemas.microsoft.com/office/drawing/2010/main">
+          <mc:Choice Requires="a14">
             <p:sp>
               <p:nvSpPr>
                 <p:cNvPr id="8" name="Rectangle 7">
@@ -19121,7 +19121,7 @@
               </p:txBody>
             </p:sp>
           </mc:Choice>
-          <mc:Fallback>
+          <mc:Fallback xmlns="">
             <p:sp>
               <p:nvSpPr>
                 <p:cNvPr id="8" name="Rectangle 7">
@@ -19169,8 +19169,8 @@
             </p:sp>
           </mc:Fallback>
         </mc:AlternateContent>
-        <mc:AlternateContent xmlns:mc="http://schemas.openxmlformats.org/markup-compatibility/2006">
-          <mc:Choice xmlns:a14="http://schemas.microsoft.com/office/drawing/2010/main" Requires="a14">
+        <mc:AlternateContent xmlns:mc="http://schemas.openxmlformats.org/markup-compatibility/2006" xmlns:a14="http://schemas.microsoft.com/office/drawing/2010/main">
+          <mc:Choice Requires="a14">
             <p:sp>
               <p:nvSpPr>
                 <p:cNvPr id="9" name="Rectangle 8">
@@ -19246,7 +19246,7 @@
               </p:txBody>
             </p:sp>
           </mc:Choice>
-          <mc:Fallback>
+          <mc:Fallback xmlns="">
             <p:sp>
               <p:nvSpPr>
                 <p:cNvPr id="9" name="Rectangle 8">
@@ -19385,8 +19385,8 @@
             </a:fontRef>
           </p:style>
         </p:cxnSp>
-        <mc:AlternateContent xmlns:mc="http://schemas.openxmlformats.org/markup-compatibility/2006">
-          <mc:Choice xmlns:a14="http://schemas.microsoft.com/office/drawing/2010/main" Requires="a14">
+        <mc:AlternateContent xmlns:mc="http://schemas.openxmlformats.org/markup-compatibility/2006" xmlns:a14="http://schemas.microsoft.com/office/drawing/2010/main">
+          <mc:Choice Requires="a14">
             <p:sp>
               <p:nvSpPr>
                 <p:cNvPr id="25" name="Rectangle 24">
@@ -19462,7 +19462,7 @@
               </p:txBody>
             </p:sp>
           </mc:Choice>
-          <mc:Fallback>
+          <mc:Fallback xmlns="">
             <p:sp>
               <p:nvSpPr>
                 <p:cNvPr id="25" name="Rectangle 24">
@@ -19531,8 +19531,8 @@
             <a:chExt cx="4585545" cy="5586218"/>
           </a:xfrm>
         </p:grpSpPr>
-        <mc:AlternateContent xmlns:mc="http://schemas.openxmlformats.org/markup-compatibility/2006">
-          <mc:Choice xmlns:a14="http://schemas.microsoft.com/office/drawing/2010/main" Requires="a14">
+        <mc:AlternateContent xmlns:mc="http://schemas.openxmlformats.org/markup-compatibility/2006" xmlns:a14="http://schemas.microsoft.com/office/drawing/2010/main">
+          <mc:Choice Requires="a14">
             <p:sp>
               <p:nvSpPr>
                 <p:cNvPr id="170" name="TextBox 169">
@@ -19616,7 +19616,7 @@
               </p:txBody>
             </p:sp>
           </mc:Choice>
-          <mc:Fallback>
+          <mc:Fallback xmlns="">
             <p:sp>
               <p:nvSpPr>
                 <p:cNvPr id="170" name="TextBox 169">
@@ -19661,8 +19661,8 @@
             </p:sp>
           </mc:Fallback>
         </mc:AlternateContent>
-        <mc:AlternateContent xmlns:mc="http://schemas.openxmlformats.org/markup-compatibility/2006">
-          <mc:Choice xmlns:a14="http://schemas.microsoft.com/office/drawing/2010/main" Requires="a14">
+        <mc:AlternateContent xmlns:mc="http://schemas.openxmlformats.org/markup-compatibility/2006" xmlns:a14="http://schemas.microsoft.com/office/drawing/2010/main">
+          <mc:Choice Requires="a14">
             <p:sp>
               <p:nvSpPr>
                 <p:cNvPr id="151" name="TextBox 150">
@@ -19735,7 +19735,7 @@
               </p:txBody>
             </p:sp>
           </mc:Choice>
-          <mc:Fallback>
+          <mc:Fallback xmlns="">
             <p:sp>
               <p:nvSpPr>
                 <p:cNvPr id="151" name="TextBox 150">
@@ -20479,8 +20479,8 @@
             </a:p>
           </p:txBody>
         </p:sp>
-        <mc:AlternateContent xmlns:mc="http://schemas.openxmlformats.org/markup-compatibility/2006">
-          <mc:Choice xmlns:a14="http://schemas.microsoft.com/office/drawing/2010/main" Requires="a14">
+        <mc:AlternateContent xmlns:mc="http://schemas.openxmlformats.org/markup-compatibility/2006" xmlns:a14="http://schemas.microsoft.com/office/drawing/2010/main">
+          <mc:Choice Requires="a14">
             <p:sp>
               <p:nvSpPr>
                 <p:cNvPr id="136" name="TextBox 135">
@@ -20542,7 +20542,7 @@
               </p:txBody>
             </p:sp>
           </mc:Choice>
-          <mc:Fallback>
+          <mc:Fallback xmlns="">
             <p:sp>
               <p:nvSpPr>
                 <p:cNvPr id="136" name="TextBox 135">
@@ -20587,8 +20587,8 @@
             </p:sp>
           </mc:Fallback>
         </mc:AlternateContent>
-        <mc:AlternateContent xmlns:mc="http://schemas.openxmlformats.org/markup-compatibility/2006">
-          <mc:Choice xmlns:a14="http://schemas.microsoft.com/office/drawing/2010/main" Requires="a14">
+        <mc:AlternateContent xmlns:mc="http://schemas.openxmlformats.org/markup-compatibility/2006" xmlns:a14="http://schemas.microsoft.com/office/drawing/2010/main">
+          <mc:Choice Requires="a14">
             <p:sp>
               <p:nvSpPr>
                 <p:cNvPr id="137" name="TextBox 136">
@@ -20650,7 +20650,7 @@
               </p:txBody>
             </p:sp>
           </mc:Choice>
-          <mc:Fallback>
+          <mc:Fallback xmlns="">
             <p:sp>
               <p:nvSpPr>
                 <p:cNvPr id="137" name="TextBox 136">
@@ -20695,8 +20695,8 @@
             </p:sp>
           </mc:Fallback>
         </mc:AlternateContent>
-        <mc:AlternateContent xmlns:mc="http://schemas.openxmlformats.org/markup-compatibility/2006">
-          <mc:Choice xmlns:a14="http://schemas.microsoft.com/office/drawing/2010/main" Requires="a14">
+        <mc:AlternateContent xmlns:mc="http://schemas.openxmlformats.org/markup-compatibility/2006" xmlns:a14="http://schemas.microsoft.com/office/drawing/2010/main">
+          <mc:Choice Requires="a14">
             <p:sp>
               <p:nvSpPr>
                 <p:cNvPr id="138" name="TextBox 137">
@@ -20758,7 +20758,7 @@
               </p:txBody>
             </p:sp>
           </mc:Choice>
-          <mc:Fallback>
+          <mc:Fallback xmlns="">
             <p:sp>
               <p:nvSpPr>
                 <p:cNvPr id="138" name="TextBox 137">
@@ -20908,8 +20908,8 @@
             </a:p>
           </p:txBody>
         </p:sp>
-        <mc:AlternateContent xmlns:mc="http://schemas.openxmlformats.org/markup-compatibility/2006">
-          <mc:Choice xmlns:a14="http://schemas.microsoft.com/office/drawing/2010/main" Requires="a14">
+        <mc:AlternateContent xmlns:mc="http://schemas.openxmlformats.org/markup-compatibility/2006" xmlns:a14="http://schemas.microsoft.com/office/drawing/2010/main">
+          <mc:Choice Requires="a14">
             <p:sp>
               <p:nvSpPr>
                 <p:cNvPr id="160" name="TextBox 159">
@@ -20982,7 +20982,7 @@
               </p:txBody>
             </p:sp>
           </mc:Choice>
-          <mc:Fallback>
+          <mc:Fallback xmlns="">
             <p:sp>
               <p:nvSpPr>
                 <p:cNvPr id="160" name="TextBox 159">
@@ -21027,8 +21027,8 @@
             </p:sp>
           </mc:Fallback>
         </mc:AlternateContent>
-        <mc:AlternateContent xmlns:mc="http://schemas.openxmlformats.org/markup-compatibility/2006">
-          <mc:Choice xmlns:a14="http://schemas.microsoft.com/office/drawing/2010/main" Requires="a14">
+        <mc:AlternateContent xmlns:mc="http://schemas.openxmlformats.org/markup-compatibility/2006" xmlns:a14="http://schemas.microsoft.com/office/drawing/2010/main">
+          <mc:Choice Requires="a14">
             <p:sp>
               <p:nvSpPr>
                 <p:cNvPr id="163" name="TextBox 162">
@@ -21115,7 +21115,7 @@
               </p:txBody>
             </p:sp>
           </mc:Choice>
-          <mc:Fallback>
+          <mc:Fallback xmlns="">
             <p:sp>
               <p:nvSpPr>
                 <p:cNvPr id="163" name="TextBox 162">

--- a/manuscript_figures.pptx
+++ b/manuscript_figures.pptx
@@ -23,6 +23,7 @@
     <p:sldId id="264" r:id="rId17"/>
     <p:sldId id="265" r:id="rId18"/>
     <p:sldId id="267" r:id="rId19"/>
+    <p:sldId id="275" r:id="rId20"/>
   </p:sldIdLst>
   <p:sldSz cx="12192000" cy="6858000"/>
   <p:notesSz cx="6858000" cy="9144000"/>
@@ -927,7 +928,7 @@
           <a:p>
             <a:fld id="{FF24CA68-1E24-4B4A-B799-9C3DECDBF403}" type="datetimeFigureOut">
               <a:rPr lang="en-US" smtClean="0"/>
-              <a:t>7/8/2026</a:t>
+              <a:t>7/21/2026</a:t>
             </a:fld>
             <a:endParaRPr lang="en-US"/>
           </a:p>
@@ -1125,7 +1126,7 @@
           <a:p>
             <a:fld id="{FF24CA68-1E24-4B4A-B799-9C3DECDBF403}" type="datetimeFigureOut">
               <a:rPr lang="en-US" smtClean="0"/>
-              <a:t>7/8/2026</a:t>
+              <a:t>7/21/2026</a:t>
             </a:fld>
             <a:endParaRPr lang="en-US"/>
           </a:p>
@@ -1333,7 +1334,7 @@
           <a:p>
             <a:fld id="{FF24CA68-1E24-4B4A-B799-9C3DECDBF403}" type="datetimeFigureOut">
               <a:rPr lang="en-US" smtClean="0"/>
-              <a:t>7/8/2026</a:t>
+              <a:t>7/21/2026</a:t>
             </a:fld>
             <a:endParaRPr lang="en-US"/>
           </a:p>
@@ -1531,7 +1532,7 @@
           <a:p>
             <a:fld id="{FF24CA68-1E24-4B4A-B799-9C3DECDBF403}" type="datetimeFigureOut">
               <a:rPr lang="en-US" smtClean="0"/>
-              <a:t>7/8/2026</a:t>
+              <a:t>7/21/2026</a:t>
             </a:fld>
             <a:endParaRPr lang="en-US"/>
           </a:p>
@@ -1806,7 +1807,7 @@
           <a:p>
             <a:fld id="{FF24CA68-1E24-4B4A-B799-9C3DECDBF403}" type="datetimeFigureOut">
               <a:rPr lang="en-US" smtClean="0"/>
-              <a:t>7/8/2026</a:t>
+              <a:t>7/21/2026</a:t>
             </a:fld>
             <a:endParaRPr lang="en-US"/>
           </a:p>
@@ -2071,7 +2072,7 @@
           <a:p>
             <a:fld id="{FF24CA68-1E24-4B4A-B799-9C3DECDBF403}" type="datetimeFigureOut">
               <a:rPr lang="en-US" smtClean="0"/>
-              <a:t>7/8/2026</a:t>
+              <a:t>7/21/2026</a:t>
             </a:fld>
             <a:endParaRPr lang="en-US"/>
           </a:p>
@@ -2483,7 +2484,7 @@
           <a:p>
             <a:fld id="{FF24CA68-1E24-4B4A-B799-9C3DECDBF403}" type="datetimeFigureOut">
               <a:rPr lang="en-US" smtClean="0"/>
-              <a:t>7/8/2026</a:t>
+              <a:t>7/21/2026</a:t>
             </a:fld>
             <a:endParaRPr lang="en-US"/>
           </a:p>
@@ -2624,7 +2625,7 @@
           <a:p>
             <a:fld id="{FF24CA68-1E24-4B4A-B799-9C3DECDBF403}" type="datetimeFigureOut">
               <a:rPr lang="en-US" smtClean="0"/>
-              <a:t>7/8/2026</a:t>
+              <a:t>7/21/2026</a:t>
             </a:fld>
             <a:endParaRPr lang="en-US"/>
           </a:p>
@@ -2737,7 +2738,7 @@
           <a:p>
             <a:fld id="{FF24CA68-1E24-4B4A-B799-9C3DECDBF403}" type="datetimeFigureOut">
               <a:rPr lang="en-US" smtClean="0"/>
-              <a:t>7/8/2026</a:t>
+              <a:t>7/21/2026</a:t>
             </a:fld>
             <a:endParaRPr lang="en-US"/>
           </a:p>
@@ -3048,7 +3049,7 @@
           <a:p>
             <a:fld id="{FF24CA68-1E24-4B4A-B799-9C3DECDBF403}" type="datetimeFigureOut">
               <a:rPr lang="en-US" smtClean="0"/>
-              <a:t>7/8/2026</a:t>
+              <a:t>7/21/2026</a:t>
             </a:fld>
             <a:endParaRPr lang="en-US"/>
           </a:p>
@@ -3336,7 +3337,7 @@
           <a:p>
             <a:fld id="{FF24CA68-1E24-4B4A-B799-9C3DECDBF403}" type="datetimeFigureOut">
               <a:rPr lang="en-US" smtClean="0"/>
-              <a:t>7/8/2026</a:t>
+              <a:t>7/21/2026</a:t>
             </a:fld>
             <a:endParaRPr lang="en-US"/>
           </a:p>
@@ -3577,7 +3578,7 @@
           <a:p>
             <a:fld id="{FF24CA68-1E24-4B4A-B799-9C3DECDBF403}" type="datetimeFigureOut">
               <a:rPr lang="en-US" smtClean="0"/>
-              <a:t>7/8/2026</a:t>
+              <a:t>7/21/2026</a:t>
             </a:fld>
             <a:endParaRPr lang="en-US"/>
           </a:p>
@@ -11410,6 +11411,162 @@
 </p:sld>
 </file>
 
+<file path=ppt/slides/slide19.xml><?xml version="1.0" encoding="utf-8"?>
+<p:sld xmlns:a="http://schemas.openxmlformats.org/drawingml/2006/main" xmlns:r="http://schemas.openxmlformats.org/officeDocument/2006/relationships" xmlns:p="http://schemas.openxmlformats.org/presentationml/2006/main">
+  <p:cSld>
+    <p:spTree>
+      <p:nvGrpSpPr>
+        <p:cNvPr id="1" name=""/>
+        <p:cNvGrpSpPr/>
+        <p:nvPr/>
+      </p:nvGrpSpPr>
+      <p:grpSpPr>
+        <a:xfrm>
+          <a:off x="0" y="0"/>
+          <a:ext cx="0" cy="0"/>
+          <a:chOff x="0" y="0"/>
+          <a:chExt cx="0" cy="0"/>
+        </a:xfrm>
+      </p:grpSpPr>
+      <p:pic>
+        <p:nvPicPr>
+          <p:cNvPr id="26" name="Picture 25">
+            <a:extLst>
+              <a:ext uri="{FF2B5EF4-FFF2-40B4-BE49-F238E27FC236}">
+                <a16:creationId xmlns:a16="http://schemas.microsoft.com/office/drawing/2014/main" id="{23EAB303-589A-1E24-D83D-FE07D5E80DF6}"/>
+              </a:ext>
+            </a:extLst>
+          </p:cNvPr>
+          <p:cNvPicPr>
+            <a:picLocks noChangeAspect="1"/>
+          </p:cNvPicPr>
+          <p:nvPr/>
+        </p:nvPicPr>
+        <p:blipFill>
+          <a:blip r:embed="rId2"/>
+          <a:stretch>
+            <a:fillRect/>
+          </a:stretch>
+        </p:blipFill>
+        <p:spPr>
+          <a:xfrm>
+            <a:off x="5166652" y="63062"/>
+            <a:ext cx="3607191" cy="3435029"/>
+          </a:xfrm>
+          <a:prstGeom prst="rect">
+            <a:avLst/>
+          </a:prstGeom>
+        </p:spPr>
+      </p:pic>
+      <p:pic>
+        <p:nvPicPr>
+          <p:cNvPr id="30" name="Picture 29">
+            <a:extLst>
+              <a:ext uri="{FF2B5EF4-FFF2-40B4-BE49-F238E27FC236}">
+                <a16:creationId xmlns:a16="http://schemas.microsoft.com/office/drawing/2014/main" id="{65A86096-2147-BA74-8BCC-9FB9EAAC0260}"/>
+              </a:ext>
+            </a:extLst>
+          </p:cNvPr>
+          <p:cNvPicPr>
+            <a:picLocks noChangeAspect="1"/>
+          </p:cNvPicPr>
+          <p:nvPr/>
+        </p:nvPicPr>
+        <p:blipFill>
+          <a:blip r:embed="rId3"/>
+          <a:stretch>
+            <a:fillRect/>
+          </a:stretch>
+        </p:blipFill>
+        <p:spPr>
+          <a:xfrm>
+            <a:off x="1970690" y="119430"/>
+            <a:ext cx="3177901" cy="3321942"/>
+          </a:xfrm>
+          <a:prstGeom prst="rect">
+            <a:avLst/>
+          </a:prstGeom>
+        </p:spPr>
+      </p:pic>
+      <p:pic>
+        <p:nvPicPr>
+          <p:cNvPr id="38" name="Picture 37">
+            <a:extLst>
+              <a:ext uri="{FF2B5EF4-FFF2-40B4-BE49-F238E27FC236}">
+                <a16:creationId xmlns:a16="http://schemas.microsoft.com/office/drawing/2014/main" id="{56221293-EE61-834F-26D2-E735FCB5FD1E}"/>
+              </a:ext>
+            </a:extLst>
+          </p:cNvPr>
+          <p:cNvPicPr>
+            <a:picLocks noChangeAspect="1"/>
+          </p:cNvPicPr>
+          <p:nvPr/>
+        </p:nvPicPr>
+        <p:blipFill>
+          <a:blip r:embed="rId4"/>
+          <a:stretch>
+            <a:fillRect/>
+          </a:stretch>
+        </p:blipFill>
+        <p:spPr>
+          <a:xfrm>
+            <a:off x="1529255" y="3498091"/>
+            <a:ext cx="4073087" cy="2801890"/>
+          </a:xfrm>
+          <a:prstGeom prst="rect">
+            <a:avLst/>
+          </a:prstGeom>
+        </p:spPr>
+      </p:pic>
+      <p:pic>
+        <p:nvPicPr>
+          <p:cNvPr id="42" name="Picture 41">
+            <a:extLst>
+              <a:ext uri="{FF2B5EF4-FFF2-40B4-BE49-F238E27FC236}">
+                <a16:creationId xmlns:a16="http://schemas.microsoft.com/office/drawing/2014/main" id="{30C04889-1B52-E850-E670-2A24717A94A0}"/>
+              </a:ext>
+            </a:extLst>
+          </p:cNvPr>
+          <p:cNvPicPr>
+            <a:picLocks noChangeAspect="1"/>
+          </p:cNvPicPr>
+          <p:nvPr/>
+        </p:nvPicPr>
+        <p:blipFill>
+          <a:blip r:embed="rId5">
+            <a:extLst>
+              <a:ext uri="{28A0092B-C50C-407E-A947-70E740481C1C}">
+                <a14:useLocalDpi xmlns:a14="http://schemas.microsoft.com/office/drawing/2010/main" val="0"/>
+              </a:ext>
+            </a:extLst>
+          </a:blip>
+          <a:stretch>
+            <a:fillRect/>
+          </a:stretch>
+        </p:blipFill>
+        <p:spPr>
+          <a:xfrm>
+            <a:off x="5746530" y="3498091"/>
+            <a:ext cx="2971801" cy="2971801"/>
+          </a:xfrm>
+          <a:prstGeom prst="rect">
+            <a:avLst/>
+          </a:prstGeom>
+        </p:spPr>
+      </p:pic>
+    </p:spTree>
+    <p:extLst>
+      <p:ext uri="{BB962C8B-B14F-4D97-AF65-F5344CB8AC3E}">
+        <p14:creationId xmlns:p14="http://schemas.microsoft.com/office/powerpoint/2010/main" val="3858368022"/>
+      </p:ext>
+    </p:extLst>
+  </p:cSld>
+  <p:clrMapOvr>
+    <a:masterClrMapping/>
+  </p:clrMapOvr>
+</p:sld>
+</file>
+
 <file path=ppt/slides/slide2.xml><?xml version="1.0" encoding="utf-8"?>
 <p:sld xmlns:a="http://schemas.openxmlformats.org/drawingml/2006/main" xmlns:r="http://schemas.openxmlformats.org/officeDocument/2006/relationships" xmlns:p="http://schemas.openxmlformats.org/presentationml/2006/main">
   <p:cSld>
@@ -22042,8 +22199,8 @@
             </a:fontRef>
           </p:style>
         </p:cxnSp>
-        <mc:AlternateContent xmlns:mc="http://schemas.openxmlformats.org/markup-compatibility/2006">
-          <mc:Choice xmlns:a14="http://schemas.microsoft.com/office/drawing/2010/main" Requires="a14">
+        <mc:AlternateContent xmlns:mc="http://schemas.openxmlformats.org/markup-compatibility/2006" xmlns:a14="http://schemas.microsoft.com/office/drawing/2010/main">
+          <mc:Choice Requires="a14">
             <p:sp>
               <p:nvSpPr>
                 <p:cNvPr id="67" name="Subtitle 2">
@@ -22289,7 +22446,7 @@
               </p:txBody>
             </p:sp>
           </mc:Choice>
-          <mc:Fallback>
+          <mc:Fallback xmlns="">
             <p:sp>
               <p:nvSpPr>
                 <p:cNvPr id="67" name="Subtitle 2">
@@ -22334,8 +22491,8 @@
             </p:sp>
           </mc:Fallback>
         </mc:AlternateContent>
-        <mc:AlternateContent xmlns:mc="http://schemas.openxmlformats.org/markup-compatibility/2006">
-          <mc:Choice xmlns:a14="http://schemas.microsoft.com/office/drawing/2010/main" Requires="a14">
+        <mc:AlternateContent xmlns:mc="http://schemas.openxmlformats.org/markup-compatibility/2006" xmlns:a14="http://schemas.microsoft.com/office/drawing/2010/main">
+          <mc:Choice Requires="a14">
             <p:sp>
               <p:nvSpPr>
                 <p:cNvPr id="68" name="Subtitle 2">
@@ -22581,7 +22738,7 @@
               </p:txBody>
             </p:sp>
           </mc:Choice>
-          <mc:Fallback>
+          <mc:Fallback xmlns="">
             <p:sp>
               <p:nvSpPr>
                 <p:cNvPr id="68" name="Subtitle 2">
@@ -22626,8 +22783,8 @@
             </p:sp>
           </mc:Fallback>
         </mc:AlternateContent>
-        <mc:AlternateContent xmlns:mc="http://schemas.openxmlformats.org/markup-compatibility/2006">
-          <mc:Choice xmlns:a14="http://schemas.microsoft.com/office/drawing/2010/main" Requires="a14">
+        <mc:AlternateContent xmlns:mc="http://schemas.openxmlformats.org/markup-compatibility/2006" xmlns:a14="http://schemas.microsoft.com/office/drawing/2010/main">
+          <mc:Choice Requires="a14">
             <p:sp>
               <p:nvSpPr>
                 <p:cNvPr id="69" name="Subtitle 2">
@@ -22873,7 +23030,7 @@
               </p:txBody>
             </p:sp>
           </mc:Choice>
-          <mc:Fallback>
+          <mc:Fallback xmlns="">
             <p:sp>
               <p:nvSpPr>
                 <p:cNvPr id="69" name="Subtitle 2">
@@ -22971,8 +23128,8 @@
             </a:p>
           </p:txBody>
         </p:sp>
-        <mc:AlternateContent xmlns:mc="http://schemas.openxmlformats.org/markup-compatibility/2006">
-          <mc:Choice xmlns:a14="http://schemas.microsoft.com/office/drawing/2010/main" Requires="a14">
+        <mc:AlternateContent xmlns:mc="http://schemas.openxmlformats.org/markup-compatibility/2006" xmlns:a14="http://schemas.microsoft.com/office/drawing/2010/main">
+          <mc:Choice Requires="a14">
             <p:sp>
               <p:nvSpPr>
                 <p:cNvPr id="71" name="Subtitle 2">
@@ -23218,7 +23375,7 @@
               </p:txBody>
             </p:sp>
           </mc:Choice>
-          <mc:Fallback>
+          <mc:Fallback xmlns="">
             <p:sp>
               <p:nvSpPr>
                 <p:cNvPr id="71" name="Subtitle 2">
@@ -23316,8 +23473,8 @@
             </a:p>
           </p:txBody>
         </p:sp>
-        <mc:AlternateContent xmlns:mc="http://schemas.openxmlformats.org/markup-compatibility/2006">
-          <mc:Choice xmlns:a14="http://schemas.microsoft.com/office/drawing/2010/main" Requires="a14">
+        <mc:AlternateContent xmlns:mc="http://schemas.openxmlformats.org/markup-compatibility/2006" xmlns:a14="http://schemas.microsoft.com/office/drawing/2010/main">
+          <mc:Choice Requires="a14">
             <p:sp>
               <p:nvSpPr>
                 <p:cNvPr id="73" name="Subtitle 2">
@@ -23563,7 +23720,7 @@
               </p:txBody>
             </p:sp>
           </mc:Choice>
-          <mc:Fallback>
+          <mc:Fallback xmlns="">
             <p:sp>
               <p:nvSpPr>
                 <p:cNvPr id="73" name="Subtitle 2">
@@ -23662,8 +23819,8 @@
             </a:p>
           </p:txBody>
         </p:sp>
-        <mc:AlternateContent xmlns:mc="http://schemas.openxmlformats.org/markup-compatibility/2006">
-          <mc:Choice xmlns:a14="http://schemas.microsoft.com/office/drawing/2010/main" Requires="a14">
+        <mc:AlternateContent xmlns:mc="http://schemas.openxmlformats.org/markup-compatibility/2006" xmlns:a14="http://schemas.microsoft.com/office/drawing/2010/main">
+          <mc:Choice Requires="a14">
             <p:sp>
               <p:nvSpPr>
                 <p:cNvPr id="76" name="Subtitle 2">
@@ -23886,7 +24043,7 @@
               </p:txBody>
             </p:sp>
           </mc:Choice>
-          <mc:Fallback>
+          <mc:Fallback xmlns="">
             <p:sp>
               <p:nvSpPr>
                 <p:cNvPr id="76" name="Subtitle 2">
@@ -24113,8 +24270,8 @@
             <a:chExt cx="4585545" cy="5586218"/>
           </a:xfrm>
         </p:grpSpPr>
-        <mc:AlternateContent xmlns:mc="http://schemas.openxmlformats.org/markup-compatibility/2006">
-          <mc:Choice xmlns:a14="http://schemas.microsoft.com/office/drawing/2010/main" Requires="a14">
+        <mc:AlternateContent xmlns:mc="http://schemas.openxmlformats.org/markup-compatibility/2006" xmlns:a14="http://schemas.microsoft.com/office/drawing/2010/main">
+          <mc:Choice Requires="a14">
             <p:sp>
               <p:nvSpPr>
                 <p:cNvPr id="5" name="TextBox 4">
@@ -24198,7 +24355,7 @@
               </p:txBody>
             </p:sp>
           </mc:Choice>
-          <mc:Fallback>
+          <mc:Fallback xmlns="">
             <p:sp>
               <p:nvSpPr>
                 <p:cNvPr id="5" name="TextBox 4">
@@ -24243,8 +24400,8 @@
             </p:sp>
           </mc:Fallback>
         </mc:AlternateContent>
-        <mc:AlternateContent xmlns:mc="http://schemas.openxmlformats.org/markup-compatibility/2006">
-          <mc:Choice xmlns:a14="http://schemas.microsoft.com/office/drawing/2010/main" Requires="a14">
+        <mc:AlternateContent xmlns:mc="http://schemas.openxmlformats.org/markup-compatibility/2006" xmlns:a14="http://schemas.microsoft.com/office/drawing/2010/main">
+          <mc:Choice Requires="a14">
             <p:sp>
               <p:nvSpPr>
                 <p:cNvPr id="7" name="TextBox 6">
@@ -24317,7 +24474,7 @@
               </p:txBody>
             </p:sp>
           </mc:Choice>
-          <mc:Fallback>
+          <mc:Fallback xmlns="">
             <p:sp>
               <p:nvSpPr>
                 <p:cNvPr id="7" name="TextBox 6">
@@ -25061,8 +25218,8 @@
             </a:p>
           </p:txBody>
         </p:sp>
-        <mc:AlternateContent xmlns:mc="http://schemas.openxmlformats.org/markup-compatibility/2006">
-          <mc:Choice xmlns:a14="http://schemas.microsoft.com/office/drawing/2010/main" Requires="a14">
+        <mc:AlternateContent xmlns:mc="http://schemas.openxmlformats.org/markup-compatibility/2006" xmlns:a14="http://schemas.microsoft.com/office/drawing/2010/main">
+          <mc:Choice Requires="a14">
             <p:sp>
               <p:nvSpPr>
                 <p:cNvPr id="28" name="TextBox 27">
@@ -25124,7 +25281,7 @@
               </p:txBody>
             </p:sp>
           </mc:Choice>
-          <mc:Fallback>
+          <mc:Fallback xmlns="">
             <p:sp>
               <p:nvSpPr>
                 <p:cNvPr id="28" name="TextBox 27">
@@ -25169,8 +25326,8 @@
             </p:sp>
           </mc:Fallback>
         </mc:AlternateContent>
-        <mc:AlternateContent xmlns:mc="http://schemas.openxmlformats.org/markup-compatibility/2006">
-          <mc:Choice xmlns:a14="http://schemas.microsoft.com/office/drawing/2010/main" Requires="a14">
+        <mc:AlternateContent xmlns:mc="http://schemas.openxmlformats.org/markup-compatibility/2006" xmlns:a14="http://schemas.microsoft.com/office/drawing/2010/main">
+          <mc:Choice Requires="a14">
             <p:sp>
               <p:nvSpPr>
                 <p:cNvPr id="29" name="TextBox 28">
@@ -25232,7 +25389,7 @@
               </p:txBody>
             </p:sp>
           </mc:Choice>
-          <mc:Fallback>
+          <mc:Fallback xmlns="">
             <p:sp>
               <p:nvSpPr>
                 <p:cNvPr id="29" name="TextBox 28">
@@ -25277,8 +25434,8 @@
             </p:sp>
           </mc:Fallback>
         </mc:AlternateContent>
-        <mc:AlternateContent xmlns:mc="http://schemas.openxmlformats.org/markup-compatibility/2006">
-          <mc:Choice xmlns:a14="http://schemas.microsoft.com/office/drawing/2010/main" Requires="a14">
+        <mc:AlternateContent xmlns:mc="http://schemas.openxmlformats.org/markup-compatibility/2006" xmlns:a14="http://schemas.microsoft.com/office/drawing/2010/main">
+          <mc:Choice Requires="a14">
             <p:sp>
               <p:nvSpPr>
                 <p:cNvPr id="30" name="TextBox 29">
@@ -25340,7 +25497,7 @@
               </p:txBody>
             </p:sp>
           </mc:Choice>
-          <mc:Fallback>
+          <mc:Fallback xmlns="">
             <p:sp>
               <p:nvSpPr>
                 <p:cNvPr id="30" name="TextBox 29">
@@ -25490,8 +25647,8 @@
             </a:p>
           </p:txBody>
         </p:sp>
-        <mc:AlternateContent xmlns:mc="http://schemas.openxmlformats.org/markup-compatibility/2006">
-          <mc:Choice xmlns:a14="http://schemas.microsoft.com/office/drawing/2010/main" Requires="a14">
+        <mc:AlternateContent xmlns:mc="http://schemas.openxmlformats.org/markup-compatibility/2006" xmlns:a14="http://schemas.microsoft.com/office/drawing/2010/main">
+          <mc:Choice Requires="a14">
             <p:sp>
               <p:nvSpPr>
                 <p:cNvPr id="34" name="TextBox 33">
@@ -25593,7 +25750,7 @@
               </p:txBody>
             </p:sp>
           </mc:Choice>
-          <mc:Fallback>
+          <mc:Fallback xmlns="">
             <p:sp>
               <p:nvSpPr>
                 <p:cNvPr id="34" name="TextBox 33">
@@ -25638,8 +25795,8 @@
             </p:sp>
           </mc:Fallback>
         </mc:AlternateContent>
-        <mc:AlternateContent xmlns:mc="http://schemas.openxmlformats.org/markup-compatibility/2006">
-          <mc:Choice xmlns:a14="http://schemas.microsoft.com/office/drawing/2010/main" Requires="a14">
+        <mc:AlternateContent xmlns:mc="http://schemas.openxmlformats.org/markup-compatibility/2006" xmlns:a14="http://schemas.microsoft.com/office/drawing/2010/main">
+          <mc:Choice Requires="a14">
             <p:sp>
               <p:nvSpPr>
                 <p:cNvPr id="35" name="TextBox 34">
@@ -25752,7 +25909,7 @@
               </p:txBody>
             </p:sp>
           </mc:Choice>
-          <mc:Fallback>
+          <mc:Fallback xmlns="">
             <p:sp>
               <p:nvSpPr>
                 <p:cNvPr id="35" name="TextBox 34">
@@ -26526,8 +26683,8 @@
             </a:fontRef>
           </p:style>
         </p:cxnSp>
-        <mc:AlternateContent xmlns:mc="http://schemas.openxmlformats.org/markup-compatibility/2006">
-          <mc:Choice xmlns:a14="http://schemas.microsoft.com/office/drawing/2010/main" Requires="a14">
+        <mc:AlternateContent xmlns:mc="http://schemas.openxmlformats.org/markup-compatibility/2006" xmlns:a14="http://schemas.microsoft.com/office/drawing/2010/main">
+          <mc:Choice Requires="a14">
             <p:sp>
               <p:nvSpPr>
                 <p:cNvPr id="67" name="Subtitle 2">
@@ -26773,7 +26930,7 @@
               </p:txBody>
             </p:sp>
           </mc:Choice>
-          <mc:Fallback>
+          <mc:Fallback xmlns="">
             <p:sp>
               <p:nvSpPr>
                 <p:cNvPr id="67" name="Subtitle 2">
@@ -26818,8 +26975,8 @@
             </p:sp>
           </mc:Fallback>
         </mc:AlternateContent>
-        <mc:AlternateContent xmlns:mc="http://schemas.openxmlformats.org/markup-compatibility/2006">
-          <mc:Choice xmlns:a14="http://schemas.microsoft.com/office/drawing/2010/main" Requires="a14">
+        <mc:AlternateContent xmlns:mc="http://schemas.openxmlformats.org/markup-compatibility/2006" xmlns:a14="http://schemas.microsoft.com/office/drawing/2010/main">
+          <mc:Choice Requires="a14">
             <p:sp>
               <p:nvSpPr>
                 <p:cNvPr id="68" name="Subtitle 2">
@@ -27065,7 +27222,7 @@
               </p:txBody>
             </p:sp>
           </mc:Choice>
-          <mc:Fallback>
+          <mc:Fallback xmlns="">
             <p:sp>
               <p:nvSpPr>
                 <p:cNvPr id="68" name="Subtitle 2">
@@ -27110,8 +27267,8 @@
             </p:sp>
           </mc:Fallback>
         </mc:AlternateContent>
-        <mc:AlternateContent xmlns:mc="http://schemas.openxmlformats.org/markup-compatibility/2006">
-          <mc:Choice xmlns:a14="http://schemas.microsoft.com/office/drawing/2010/main" Requires="a14">
+        <mc:AlternateContent xmlns:mc="http://schemas.openxmlformats.org/markup-compatibility/2006" xmlns:a14="http://schemas.microsoft.com/office/drawing/2010/main">
+          <mc:Choice Requires="a14">
             <p:sp>
               <p:nvSpPr>
                 <p:cNvPr id="69" name="Subtitle 2">
@@ -27357,7 +27514,7 @@
               </p:txBody>
             </p:sp>
           </mc:Choice>
-          <mc:Fallback>
+          <mc:Fallback xmlns="">
             <p:sp>
               <p:nvSpPr>
                 <p:cNvPr id="69" name="Subtitle 2">
@@ -27455,8 +27612,8 @@
             </a:p>
           </p:txBody>
         </p:sp>
-        <mc:AlternateContent xmlns:mc="http://schemas.openxmlformats.org/markup-compatibility/2006">
-          <mc:Choice xmlns:a14="http://schemas.microsoft.com/office/drawing/2010/main" Requires="a14">
+        <mc:AlternateContent xmlns:mc="http://schemas.openxmlformats.org/markup-compatibility/2006" xmlns:a14="http://schemas.microsoft.com/office/drawing/2010/main">
+          <mc:Choice Requires="a14">
             <p:sp>
               <p:nvSpPr>
                 <p:cNvPr id="71" name="Subtitle 2">
@@ -27702,7 +27859,7 @@
               </p:txBody>
             </p:sp>
           </mc:Choice>
-          <mc:Fallback>
+          <mc:Fallback xmlns="">
             <p:sp>
               <p:nvSpPr>
                 <p:cNvPr id="71" name="Subtitle 2">
@@ -27800,8 +27957,8 @@
             </a:p>
           </p:txBody>
         </p:sp>
-        <mc:AlternateContent xmlns:mc="http://schemas.openxmlformats.org/markup-compatibility/2006">
-          <mc:Choice xmlns:a14="http://schemas.microsoft.com/office/drawing/2010/main" Requires="a14">
+        <mc:AlternateContent xmlns:mc="http://schemas.openxmlformats.org/markup-compatibility/2006" xmlns:a14="http://schemas.microsoft.com/office/drawing/2010/main">
+          <mc:Choice Requires="a14">
             <p:sp>
               <p:nvSpPr>
                 <p:cNvPr id="73" name="Subtitle 2">
@@ -28047,7 +28204,7 @@
               </p:txBody>
             </p:sp>
           </mc:Choice>
-          <mc:Fallback>
+          <mc:Fallback xmlns="">
             <p:sp>
               <p:nvSpPr>
                 <p:cNvPr id="73" name="Subtitle 2">
@@ -28146,8 +28303,8 @@
             </a:p>
           </p:txBody>
         </p:sp>
-        <mc:AlternateContent xmlns:mc="http://schemas.openxmlformats.org/markup-compatibility/2006">
-          <mc:Choice xmlns:a14="http://schemas.microsoft.com/office/drawing/2010/main" Requires="a14">
+        <mc:AlternateContent xmlns:mc="http://schemas.openxmlformats.org/markup-compatibility/2006" xmlns:a14="http://schemas.microsoft.com/office/drawing/2010/main">
+          <mc:Choice Requires="a14">
             <p:sp>
               <p:nvSpPr>
                 <p:cNvPr id="76" name="Subtitle 2">
@@ -28370,7 +28527,7 @@
               </p:txBody>
             </p:sp>
           </mc:Choice>
-          <mc:Fallback>
+          <mc:Fallback xmlns="">
             <p:sp>
               <p:nvSpPr>
                 <p:cNvPr id="76" name="Subtitle 2">
@@ -28577,8 +28734,8 @@
           </p:txBody>
         </p:sp>
       </p:grpSp>
-      <mc:AlternateContent xmlns:mc="http://schemas.openxmlformats.org/markup-compatibility/2006">
-        <mc:Choice xmlns:a14="http://schemas.microsoft.com/office/drawing/2010/main" Requires="a14">
+      <mc:AlternateContent xmlns:mc="http://schemas.openxmlformats.org/markup-compatibility/2006" xmlns:a14="http://schemas.microsoft.com/office/drawing/2010/main">
+        <mc:Choice Requires="a14">
           <p:sp>
             <p:nvSpPr>
               <p:cNvPr id="5" name="TextBox 4">
@@ -28662,7 +28819,7 @@
             </p:txBody>
           </p:sp>
         </mc:Choice>
-        <mc:Fallback>
+        <mc:Fallback xmlns="">
           <p:sp>
             <p:nvSpPr>
               <p:cNvPr id="5" name="TextBox 4">
@@ -28707,8 +28864,8 @@
           </p:sp>
         </mc:Fallback>
       </mc:AlternateContent>
-      <mc:AlternateContent xmlns:mc="http://schemas.openxmlformats.org/markup-compatibility/2006">
-        <mc:Choice xmlns:a14="http://schemas.microsoft.com/office/drawing/2010/main" Requires="a14">
+      <mc:AlternateContent xmlns:mc="http://schemas.openxmlformats.org/markup-compatibility/2006" xmlns:a14="http://schemas.microsoft.com/office/drawing/2010/main">
+        <mc:Choice Requires="a14">
           <p:sp>
             <p:nvSpPr>
               <p:cNvPr id="7" name="TextBox 6">
@@ -28781,7 +28938,7 @@
             </p:txBody>
           </p:sp>
         </mc:Choice>
-        <mc:Fallback>
+        <mc:Fallback xmlns="">
           <p:sp>
             <p:nvSpPr>
               <p:cNvPr id="7" name="TextBox 6">
@@ -29524,8 +29681,8 @@
           </a:p>
         </p:txBody>
       </p:sp>
-      <mc:AlternateContent xmlns:mc="http://schemas.openxmlformats.org/markup-compatibility/2006">
-        <mc:Choice xmlns:a14="http://schemas.microsoft.com/office/drawing/2010/main" Requires="a14">
+      <mc:AlternateContent xmlns:mc="http://schemas.openxmlformats.org/markup-compatibility/2006" xmlns:a14="http://schemas.microsoft.com/office/drawing/2010/main">
+        <mc:Choice Requires="a14">
           <p:sp>
             <p:nvSpPr>
               <p:cNvPr id="28" name="TextBox 27">
@@ -29587,7 +29744,7 @@
             </p:txBody>
           </p:sp>
         </mc:Choice>
-        <mc:Fallback>
+        <mc:Fallback xmlns="">
           <p:sp>
             <p:nvSpPr>
               <p:cNvPr id="28" name="TextBox 27">
@@ -29632,8 +29789,8 @@
           </p:sp>
         </mc:Fallback>
       </mc:AlternateContent>
-      <mc:AlternateContent xmlns:mc="http://schemas.openxmlformats.org/markup-compatibility/2006">
-        <mc:Choice xmlns:a14="http://schemas.microsoft.com/office/drawing/2010/main" Requires="a14">
+      <mc:AlternateContent xmlns:mc="http://schemas.openxmlformats.org/markup-compatibility/2006" xmlns:a14="http://schemas.microsoft.com/office/drawing/2010/main">
+        <mc:Choice Requires="a14">
           <p:sp>
             <p:nvSpPr>
               <p:cNvPr id="29" name="TextBox 28">
@@ -29695,7 +29852,7 @@
             </p:txBody>
           </p:sp>
         </mc:Choice>
-        <mc:Fallback>
+        <mc:Fallback xmlns="">
           <p:sp>
             <p:nvSpPr>
               <p:cNvPr id="29" name="TextBox 28">
@@ -29740,8 +29897,8 @@
           </p:sp>
         </mc:Fallback>
       </mc:AlternateContent>
-      <mc:AlternateContent xmlns:mc="http://schemas.openxmlformats.org/markup-compatibility/2006">
-        <mc:Choice xmlns:a14="http://schemas.microsoft.com/office/drawing/2010/main" Requires="a14">
+      <mc:AlternateContent xmlns:mc="http://schemas.openxmlformats.org/markup-compatibility/2006" xmlns:a14="http://schemas.microsoft.com/office/drawing/2010/main">
+        <mc:Choice Requires="a14">
           <p:sp>
             <p:nvSpPr>
               <p:cNvPr id="30" name="TextBox 29">
@@ -29803,7 +29960,7 @@
             </p:txBody>
           </p:sp>
         </mc:Choice>
-        <mc:Fallback>
+        <mc:Fallback xmlns="">
           <p:sp>
             <p:nvSpPr>
               <p:cNvPr id="30" name="TextBox 29">
@@ -29902,8 +30059,8 @@
           </a:p>
         </p:txBody>
       </p:sp>
-      <mc:AlternateContent xmlns:mc="http://schemas.openxmlformats.org/markup-compatibility/2006">
-        <mc:Choice xmlns:a14="http://schemas.microsoft.com/office/drawing/2010/main" Requires="a14">
+      <mc:AlternateContent xmlns:mc="http://schemas.openxmlformats.org/markup-compatibility/2006" xmlns:a14="http://schemas.microsoft.com/office/drawing/2010/main">
+        <mc:Choice Requires="a14">
           <p:sp>
             <p:nvSpPr>
               <p:cNvPr id="34" name="TextBox 33">
@@ -30005,7 +30162,7 @@
             </p:txBody>
           </p:sp>
         </mc:Choice>
-        <mc:Fallback>
+        <mc:Fallback xmlns="">
           <p:sp>
             <p:nvSpPr>
               <p:cNvPr id="34" name="TextBox 33">
@@ -30050,8 +30207,8 @@
           </p:sp>
         </mc:Fallback>
       </mc:AlternateContent>
-      <mc:AlternateContent xmlns:mc="http://schemas.openxmlformats.org/markup-compatibility/2006">
-        <mc:Choice xmlns:a14="http://schemas.microsoft.com/office/drawing/2010/main" Requires="a14">
+      <mc:AlternateContent xmlns:mc="http://schemas.openxmlformats.org/markup-compatibility/2006" xmlns:a14="http://schemas.microsoft.com/office/drawing/2010/main">
+        <mc:Choice Requires="a14">
           <p:sp>
             <p:nvSpPr>
               <p:cNvPr id="35" name="TextBox 34">
@@ -30164,7 +30321,7 @@
             </p:txBody>
           </p:sp>
         </mc:Choice>
-        <mc:Fallback>
+        <mc:Fallback xmlns="">
           <p:sp>
             <p:nvSpPr>
               <p:cNvPr id="35" name="TextBox 34">
@@ -30991,8 +31148,8 @@
             </a:fontRef>
           </p:style>
         </p:cxnSp>
-        <mc:AlternateContent xmlns:mc="http://schemas.openxmlformats.org/markup-compatibility/2006">
-          <mc:Choice xmlns:a14="http://schemas.microsoft.com/office/drawing/2010/main" Requires="a14">
+        <mc:AlternateContent xmlns:mc="http://schemas.openxmlformats.org/markup-compatibility/2006" xmlns:a14="http://schemas.microsoft.com/office/drawing/2010/main">
+          <mc:Choice Requires="a14">
             <p:sp>
               <p:nvSpPr>
                 <p:cNvPr id="67" name="Subtitle 2">
@@ -31238,7 +31395,7 @@
               </p:txBody>
             </p:sp>
           </mc:Choice>
-          <mc:Fallback>
+          <mc:Fallback xmlns="">
             <p:sp>
               <p:nvSpPr>
                 <p:cNvPr id="67" name="Subtitle 2">
@@ -31283,8 +31440,8 @@
             </p:sp>
           </mc:Fallback>
         </mc:AlternateContent>
-        <mc:AlternateContent xmlns:mc="http://schemas.openxmlformats.org/markup-compatibility/2006">
-          <mc:Choice xmlns:a14="http://schemas.microsoft.com/office/drawing/2010/main" Requires="a14">
+        <mc:AlternateContent xmlns:mc="http://schemas.openxmlformats.org/markup-compatibility/2006" xmlns:a14="http://schemas.microsoft.com/office/drawing/2010/main">
+          <mc:Choice Requires="a14">
             <p:sp>
               <p:nvSpPr>
                 <p:cNvPr id="68" name="Subtitle 2">
@@ -31530,7 +31687,7 @@
               </p:txBody>
             </p:sp>
           </mc:Choice>
-          <mc:Fallback>
+          <mc:Fallback xmlns="">
             <p:sp>
               <p:nvSpPr>
                 <p:cNvPr id="68" name="Subtitle 2">
@@ -31575,8 +31732,8 @@
             </p:sp>
           </mc:Fallback>
         </mc:AlternateContent>
-        <mc:AlternateContent xmlns:mc="http://schemas.openxmlformats.org/markup-compatibility/2006">
-          <mc:Choice xmlns:a14="http://schemas.microsoft.com/office/drawing/2010/main" Requires="a14">
+        <mc:AlternateContent xmlns:mc="http://schemas.openxmlformats.org/markup-compatibility/2006" xmlns:a14="http://schemas.microsoft.com/office/drawing/2010/main">
+          <mc:Choice Requires="a14">
             <p:sp>
               <p:nvSpPr>
                 <p:cNvPr id="69" name="Subtitle 2">
@@ -31822,7 +31979,7 @@
               </p:txBody>
             </p:sp>
           </mc:Choice>
-          <mc:Fallback>
+          <mc:Fallback xmlns="">
             <p:sp>
               <p:nvSpPr>
                 <p:cNvPr id="69" name="Subtitle 2">
@@ -31920,8 +32077,8 @@
             </a:p>
           </p:txBody>
         </p:sp>
-        <mc:AlternateContent xmlns:mc="http://schemas.openxmlformats.org/markup-compatibility/2006">
-          <mc:Choice xmlns:a14="http://schemas.microsoft.com/office/drawing/2010/main" Requires="a14">
+        <mc:AlternateContent xmlns:mc="http://schemas.openxmlformats.org/markup-compatibility/2006" xmlns:a14="http://schemas.microsoft.com/office/drawing/2010/main">
+          <mc:Choice Requires="a14">
             <p:sp>
               <p:nvSpPr>
                 <p:cNvPr id="71" name="Subtitle 2">
@@ -32167,7 +32324,7 @@
               </p:txBody>
             </p:sp>
           </mc:Choice>
-          <mc:Fallback>
+          <mc:Fallback xmlns="">
             <p:sp>
               <p:nvSpPr>
                 <p:cNvPr id="71" name="Subtitle 2">
@@ -32265,8 +32422,8 @@
             </a:p>
           </p:txBody>
         </p:sp>
-        <mc:AlternateContent xmlns:mc="http://schemas.openxmlformats.org/markup-compatibility/2006">
-          <mc:Choice xmlns:a14="http://schemas.microsoft.com/office/drawing/2010/main" Requires="a14">
+        <mc:AlternateContent xmlns:mc="http://schemas.openxmlformats.org/markup-compatibility/2006" xmlns:a14="http://schemas.microsoft.com/office/drawing/2010/main">
+          <mc:Choice Requires="a14">
             <p:sp>
               <p:nvSpPr>
                 <p:cNvPr id="73" name="Subtitle 2">
@@ -32512,7 +32669,7 @@
               </p:txBody>
             </p:sp>
           </mc:Choice>
-          <mc:Fallback>
+          <mc:Fallback xmlns="">
             <p:sp>
               <p:nvSpPr>
                 <p:cNvPr id="73" name="Subtitle 2">
@@ -32611,8 +32768,8 @@
             </a:p>
           </p:txBody>
         </p:sp>
-        <mc:AlternateContent xmlns:mc="http://schemas.openxmlformats.org/markup-compatibility/2006">
-          <mc:Choice xmlns:a14="http://schemas.microsoft.com/office/drawing/2010/main" Requires="a14">
+        <mc:AlternateContent xmlns:mc="http://schemas.openxmlformats.org/markup-compatibility/2006" xmlns:a14="http://schemas.microsoft.com/office/drawing/2010/main">
+          <mc:Choice Requires="a14">
             <p:sp>
               <p:nvSpPr>
                 <p:cNvPr id="76" name="Subtitle 2">
@@ -32835,7 +32992,7 @@
               </p:txBody>
             </p:sp>
           </mc:Choice>
-          <mc:Fallback>
+          <mc:Fallback xmlns="">
             <p:sp>
               <p:nvSpPr>
                 <p:cNvPr id="76" name="Subtitle 2">
@@ -33116,8 +33273,8 @@
             </a:p>
           </p:txBody>
         </p:sp>
-        <mc:AlternateContent xmlns:mc="http://schemas.openxmlformats.org/markup-compatibility/2006">
-          <mc:Choice xmlns:a14="http://schemas.microsoft.com/office/drawing/2010/main" Requires="a14">
+        <mc:AlternateContent xmlns:mc="http://schemas.openxmlformats.org/markup-compatibility/2006" xmlns:a14="http://schemas.microsoft.com/office/drawing/2010/main">
+          <mc:Choice Requires="a14">
             <p:sp>
               <p:nvSpPr>
                 <p:cNvPr id="5" name="TextBox 4">
@@ -33201,7 +33358,7 @@
               </p:txBody>
             </p:sp>
           </mc:Choice>
-          <mc:Fallback>
+          <mc:Fallback xmlns="">
             <p:sp>
               <p:nvSpPr>
                 <p:cNvPr id="5" name="TextBox 4">
@@ -33246,8 +33403,8 @@
             </p:sp>
           </mc:Fallback>
         </mc:AlternateContent>
-        <mc:AlternateContent xmlns:mc="http://schemas.openxmlformats.org/markup-compatibility/2006">
-          <mc:Choice xmlns:a14="http://schemas.microsoft.com/office/drawing/2010/main" Requires="a14">
+        <mc:AlternateContent xmlns:mc="http://schemas.openxmlformats.org/markup-compatibility/2006" xmlns:a14="http://schemas.microsoft.com/office/drawing/2010/main">
+          <mc:Choice Requires="a14">
             <p:sp>
               <p:nvSpPr>
                 <p:cNvPr id="7" name="TextBox 6">
@@ -33320,7 +33477,7 @@
               </p:txBody>
             </p:sp>
           </mc:Choice>
-          <mc:Fallback>
+          <mc:Fallback xmlns="">
             <p:sp>
               <p:nvSpPr>
                 <p:cNvPr id="7" name="TextBox 6">
@@ -33814,8 +33971,8 @@
             </a:p>
           </p:txBody>
         </p:sp>
-        <mc:AlternateContent xmlns:mc="http://schemas.openxmlformats.org/markup-compatibility/2006">
-          <mc:Choice xmlns:a14="http://schemas.microsoft.com/office/drawing/2010/main" Requires="a14">
+        <mc:AlternateContent xmlns:mc="http://schemas.openxmlformats.org/markup-compatibility/2006" xmlns:a14="http://schemas.microsoft.com/office/drawing/2010/main">
+          <mc:Choice Requires="a14">
             <p:sp>
               <p:nvSpPr>
                 <p:cNvPr id="28" name="TextBox 27">
@@ -33877,7 +34034,7 @@
               </p:txBody>
             </p:sp>
           </mc:Choice>
-          <mc:Fallback>
+          <mc:Fallback xmlns="">
             <p:sp>
               <p:nvSpPr>
                 <p:cNvPr id="28" name="TextBox 27">
@@ -33922,8 +34079,8 @@
             </p:sp>
           </mc:Fallback>
         </mc:AlternateContent>
-        <mc:AlternateContent xmlns:mc="http://schemas.openxmlformats.org/markup-compatibility/2006">
-          <mc:Choice xmlns:a14="http://schemas.microsoft.com/office/drawing/2010/main" Requires="a14">
+        <mc:AlternateContent xmlns:mc="http://schemas.openxmlformats.org/markup-compatibility/2006" xmlns:a14="http://schemas.microsoft.com/office/drawing/2010/main">
+          <mc:Choice Requires="a14">
             <p:sp>
               <p:nvSpPr>
                 <p:cNvPr id="29" name="TextBox 28">
@@ -33985,7 +34142,7 @@
               </p:txBody>
             </p:sp>
           </mc:Choice>
-          <mc:Fallback>
+          <mc:Fallback xmlns="">
             <p:sp>
               <p:nvSpPr>
                 <p:cNvPr id="29" name="TextBox 28">
@@ -34030,8 +34187,8 @@
             </p:sp>
           </mc:Fallback>
         </mc:AlternateContent>
-        <mc:AlternateContent xmlns:mc="http://schemas.openxmlformats.org/markup-compatibility/2006">
-          <mc:Choice xmlns:a14="http://schemas.microsoft.com/office/drawing/2010/main" Requires="a14">
+        <mc:AlternateContent xmlns:mc="http://schemas.openxmlformats.org/markup-compatibility/2006" xmlns:a14="http://schemas.microsoft.com/office/drawing/2010/main">
+          <mc:Choice Requires="a14">
             <p:sp>
               <p:nvSpPr>
                 <p:cNvPr id="30" name="TextBox 29">
@@ -34093,7 +34250,7 @@
               </p:txBody>
             </p:sp>
           </mc:Choice>
-          <mc:Fallback>
+          <mc:Fallback xmlns="">
             <p:sp>
               <p:nvSpPr>
                 <p:cNvPr id="30" name="TextBox 29">
@@ -34138,8 +34295,8 @@
             </p:sp>
           </mc:Fallback>
         </mc:AlternateContent>
-        <mc:AlternateContent xmlns:mc="http://schemas.openxmlformats.org/markup-compatibility/2006">
-          <mc:Choice xmlns:a14="http://schemas.microsoft.com/office/drawing/2010/main" Requires="a14">
+        <mc:AlternateContent xmlns:mc="http://schemas.openxmlformats.org/markup-compatibility/2006" xmlns:a14="http://schemas.microsoft.com/office/drawing/2010/main">
+          <mc:Choice Requires="a14">
             <p:sp>
               <p:nvSpPr>
                 <p:cNvPr id="34" name="TextBox 33">
@@ -34241,7 +34398,7 @@
               </p:txBody>
             </p:sp>
           </mc:Choice>
-          <mc:Fallback>
+          <mc:Fallback xmlns="">
             <p:sp>
               <p:nvSpPr>
                 <p:cNvPr id="34" name="TextBox 33">
@@ -34286,8 +34443,8 @@
             </p:sp>
           </mc:Fallback>
         </mc:AlternateContent>
-        <mc:AlternateContent xmlns:mc="http://schemas.openxmlformats.org/markup-compatibility/2006">
-          <mc:Choice xmlns:a14="http://schemas.microsoft.com/office/drawing/2010/main" Requires="a14">
+        <mc:AlternateContent xmlns:mc="http://schemas.openxmlformats.org/markup-compatibility/2006" xmlns:a14="http://schemas.microsoft.com/office/drawing/2010/main">
+          <mc:Choice Requires="a14">
             <p:sp>
               <p:nvSpPr>
                 <p:cNvPr id="35" name="TextBox 34">
@@ -34400,7 +34557,7 @@
               </p:txBody>
             </p:sp>
           </mc:Choice>
-          <mc:Fallback>
+          <mc:Fallback xmlns="">
             <p:sp>
               <p:nvSpPr>
                 <p:cNvPr id="35" name="TextBox 34">
